--- a/Server/results/PresenceAI_Presentation.pptx
+++ b/Server/results/PresenceAI_Presentation.pptx
@@ -11,6 +11,11 @@
     <p:sldId id="259" r:id="rId10"/>
     <p:sldId id="260" r:id="rId11"/>
     <p:sldId id="261" r:id="rId12"/>
+    <p:sldId id="262" r:id="rId13"/>
+    <p:sldId id="263" r:id="rId14"/>
+    <p:sldId id="264" r:id="rId15"/>
+    <p:sldId id="265" r:id="rId16"/>
+    <p:sldId id="266" r:id="rId17"/>
   </p:sldIdLst>
   <p:sldSz cx="12191695" cy="6858000" type="screen4x3"/>
   <p:notesSz cx="6858000" cy="9144000"/>
@@ -3101,8 +3106,8 @@
         </p:nvSpPr>
         <p:spPr>
           <a:xfrm>
-            <a:off x="731520" y="822960"/>
-            <a:ext cx="10698480" cy="1371600"/>
+            <a:off x="731520" y="731520"/>
+            <a:ext cx="10698480" cy="1463040"/>
           </a:xfrm>
           <a:prstGeom prst="rect">
             <a:avLst/>
@@ -3133,7 +3138,7 @@
                   <a:srgbClr val="555F6D"/>
                 </a:solidFill>
               </a:rPr>
-              <a:t>Spoof-Resistant Multi-Face Attendance: Recognition Alone Is Not Enough</a:t>
+              <a:t>Spoof-Resistant Multi-Face Attendance — Recognition Alone Is Not Enough</a:t>
             </a:r>
           </a:p>
         </p:txBody>
@@ -3146,8 +3151,8 @@
         </p:nvSpPr>
         <p:spPr>
           <a:xfrm>
-            <a:off x="2377440" y="2468880"/>
-            <a:ext cx="7772400" cy="2926080"/>
+            <a:off x="2743200" y="2743200"/>
+            <a:ext cx="7315200" cy="2377440"/>
           </a:xfrm>
           <a:prstGeom prst="rect">
             <a:avLst/>
@@ -3166,44 +3171,22 @@
               </a:spcAft>
             </a:pPr>
             <a:r>
-              <a:rPr sz="1300" b="1">
-                <a:solidFill>
-                  <a:srgbClr val="1A1A1A"/>
-                </a:solidFill>
-              </a:rPr>
-              <a:t>Problem Statement Title — Automating classroom attendance with multi-face recognition, without it being defeated by a photograph</a:t>
-            </a:r>
-          </a:p>
-          <a:p>
-            <a:pPr>
-              <a:spcAft>
-                <a:spcPts val="500"/>
-              </a:spcAft>
-            </a:pPr>
-          </a:p>
-          <a:p>
-            <a:pPr>
-              <a:spcAft>
-                <a:spcPts val="500"/>
-              </a:spcAft>
-            </a:pPr>
-            <a:r>
-              <a:rPr sz="1300" b="1">
-                <a:solidFill>
-                  <a:srgbClr val="1F3A6E"/>
-                </a:solidFill>
-              </a:rPr>
-              <a:t>Team Members</a:t>
-            </a:r>
-          </a:p>
-          <a:p>
-            <a:pPr>
-              <a:spcAft>
-                <a:spcPts val="500"/>
-              </a:spcAft>
-            </a:pPr>
-            <a:r>
-              <a:rPr sz="1300" b="0">
+              <a:rPr sz="1400" b="1">
+                <a:solidFill>
+                  <a:srgbClr val="1A1A1A"/>
+                </a:solidFill>
+              </a:rPr>
+              <a:t>Team Members' Name and Roll Number</a:t>
+            </a:r>
+          </a:p>
+          <a:p>
+            <a:pPr>
+              <a:spcAft>
+                <a:spcPts val="500"/>
+              </a:spcAft>
+            </a:pPr>
+            <a:r>
+              <a:rPr sz="1400" b="0">
                 <a:solidFill>
                   <a:srgbClr val="1A1A1A"/>
                 </a:solidFill>
@@ -3218,7 +3201,7 @@
               </a:spcAft>
             </a:pPr>
             <a:r>
-              <a:rPr sz="1300" b="0">
+              <a:rPr sz="1400" b="0">
                 <a:solidFill>
                   <a:srgbClr val="1A1A1A"/>
                 </a:solidFill>
@@ -3240,7 +3223,7 @@
               </a:spcAft>
             </a:pPr>
             <a:r>
-              <a:rPr sz="1300" b="1">
+              <a:rPr sz="1400" b="1">
                 <a:solidFill>
                   <a:srgbClr val="1A1A1A"/>
                 </a:solidFill>
@@ -3255,27 +3238,12 @@
               </a:spcAft>
             </a:pPr>
             <a:r>
-              <a:rPr sz="1300" b="1">
-                <a:solidFill>
-                  <a:srgbClr val="1A1A1A"/>
-                </a:solidFill>
-              </a:rPr>
-              <a:t>Mentor — Mr Prodipta Bhowmik</a:t>
-            </a:r>
-          </a:p>
-          <a:p>
-            <a:pPr>
-              <a:spcAft>
-                <a:spcPts val="500"/>
-              </a:spcAft>
-            </a:pPr>
-            <a:r>
-              <a:rPr sz="1300" b="0">
-                <a:solidFill>
-                  <a:srgbClr val="1A1A1A"/>
-                </a:solidFill>
-              </a:rPr>
-              <a:t>PROJICB-781</a:t>
+              <a:rPr sz="1400" b="1">
+                <a:solidFill>
+                  <a:srgbClr val="1A1A1A"/>
+                </a:solidFill>
+              </a:rPr>
+              <a:t>Mentor Name — Mr Prodipta Bhowmik</a:t>
             </a:r>
           </a:p>
         </p:txBody>
@@ -3288,8 +3256,8 @@
         </p:nvSpPr>
         <p:spPr>
           <a:xfrm>
-            <a:off x="731520" y="5943600"/>
-            <a:ext cx="10698480" cy="822960"/>
+            <a:off x="731520" y="5760720"/>
+            <a:ext cx="10698480" cy="914400"/>
           </a:xfrm>
           <a:prstGeom prst="rect">
             <a:avLst/>
@@ -3304,15 +3272,380 @@
           <a:p>
             <a:pPr algn="ctr"/>
             <a:r>
-              <a:rPr sz="1200" b="1"/>
-              <a:t>Department of Computer Science &amp; Engineering (Cyber Security)</a:t>
+              <a:rPr sz="1300" b="1"/>
+              <a:t>Department of Information Technology</a:t>
             </a:r>
           </a:p>
           <a:p>
             <a:pPr algn="ctr"/>
             <a:r>
-              <a:rPr sz="1200" b="0"/>
-              <a:t>Techno Main Salt Lake, Kolkata - 700091</a:t>
+              <a:rPr sz="1300" b="1"/>
+              <a:t>Techno Main Salt Lake</a:t>
+            </a:r>
+          </a:p>
+          <a:p>
+            <a:pPr algn="ctr"/>
+            <a:r>
+              <a:rPr sz="1300" b="1"/>
+              <a:t>Kolkata - 700091</a:t>
+            </a:r>
+          </a:p>
+        </p:txBody>
+      </p:sp>
+    </p:spTree>
+  </p:cSld>
+  <p:clrMapOvr>
+    <a:masterClrMapping/>
+  </p:clrMapOvr>
+</p:sld>
+</file>
+
+<file path=ppt/slides/slide10.xml><?xml version="1.0" encoding="utf-8"?>
+<p:sld xmlns:a="http://schemas.openxmlformats.org/drawingml/2006/main" xmlns:p="http://schemas.openxmlformats.org/presentationml/2006/main" xmlns:r="http://schemas.openxmlformats.org/officeDocument/2006/relationships">
+  <p:cSld>
+    <p:spTree>
+      <p:nvGrpSpPr>
+        <p:cNvPr id="1" name=""/>
+        <p:cNvGrpSpPr/>
+        <p:nvPr/>
+      </p:nvGrpSpPr>
+      <p:grpSpPr/>
+      <p:sp>
+        <p:nvSpPr>
+          <p:cNvPr id="2" name="TextBox 1"/>
+          <p:cNvSpPr txBox="1"/>
+          <p:nvPr/>
+        </p:nvSpPr>
+        <p:spPr>
+          <a:xfrm>
+            <a:off x="365760" y="182880"/>
+            <a:ext cx="11430000" cy="640080"/>
+          </a:xfrm>
+          <a:prstGeom prst="rect">
+            <a:avLst/>
+          </a:prstGeom>
+          <a:noFill/>
+        </p:spPr>
+        <p:txBody>
+          <a:bodyPr wrap="none">
+            <a:spAutoFit/>
+          </a:bodyPr>
+          <a:lstStyle/>
+          <a:p>
+            <a:pPr algn="ctr"/>
+            <a:r>
+              <a:rPr sz="2800" b="1">
+                <a:solidFill>
+                  <a:srgbClr val="1F3A6E"/>
+                </a:solidFill>
+              </a:rPr>
+              <a:t>REFERENCES</a:t>
+            </a:r>
+          </a:p>
+        </p:txBody>
+      </p:sp>
+      <p:sp>
+        <p:nvSpPr>
+          <p:cNvPr id="3" name="TextBox 2"/>
+          <p:cNvSpPr txBox="1"/>
+          <p:nvPr/>
+        </p:nvSpPr>
+        <p:spPr>
+          <a:xfrm>
+            <a:off x="548640" y="960120"/>
+            <a:ext cx="11155680" cy="5577840"/>
+          </a:xfrm>
+          <a:prstGeom prst="rect">
+            <a:avLst/>
+          </a:prstGeom>
+          <a:noFill/>
+        </p:spPr>
+        <p:txBody>
+          <a:bodyPr wrap="square">
+            <a:spAutoFit/>
+          </a:bodyPr>
+          <a:lstStyle/>
+          <a:p>
+            <a:pPr>
+              <a:spcAft>
+                <a:spcPts val="500"/>
+              </a:spcAft>
+            </a:pPr>
+            <a:r>
+              <a:rPr sz="950" b="0">
+                <a:solidFill>
+                  <a:srgbClr val="1A1A1A"/>
+                </a:solidFill>
+              </a:rPr>
+              <a:t>[1]  D'Souza, J. W. S., et al. (2019). Automated Attendance Marking and Management System by Facial Recognition Using Histogram. Array, 3–4: 100014. DOI: 10.1016/j.array.2019.100014</a:t>
+            </a:r>
+          </a:p>
+          <a:p>
+            <a:pPr>
+              <a:spcAft>
+                <a:spcPts val="500"/>
+              </a:spcAft>
+            </a:pPr>
+          </a:p>
+          <a:p>
+            <a:pPr>
+              <a:spcAft>
+                <a:spcPts val="500"/>
+              </a:spcAft>
+            </a:pPr>
+            <a:r>
+              <a:rPr sz="950" b="0">
+                <a:solidFill>
+                  <a:srgbClr val="1A1A1A"/>
+                </a:solidFill>
+              </a:rPr>
+              <a:t>[2]  Arsenovic, M., Sladojevic, S., Anderla, A., Stefanovic, D. (2017). FaceTime — Deep Learning Based Face Recognition Attendance System. IEEE SISY 2017, pp. 53–58. DOI: 10.1109/SISY.2017.8080587</a:t>
+            </a:r>
+          </a:p>
+          <a:p>
+            <a:pPr>
+              <a:spcAft>
+                <a:spcPts val="500"/>
+              </a:spcAft>
+            </a:pPr>
+          </a:p>
+          <a:p>
+            <a:pPr>
+              <a:spcAft>
+                <a:spcPts val="500"/>
+              </a:spcAft>
+            </a:pPr>
+            <a:r>
+              <a:rPr sz="950" b="0">
+                <a:solidFill>
+                  <a:srgbClr val="1A1A1A"/>
+                </a:solidFill>
+              </a:rPr>
+              <a:t>[3]  Kakarla, S., Gangula, P., Rahul, M. S., Singh, C. S. C., Sarma, T. H. (2020). Smart Attendance Management System Based on Face Recognition Using CNN. IEEE-HYDCON 2020, pp. 1–5. DOI: 10.1109/HYDCON48903.2020.9242847</a:t>
+            </a:r>
+          </a:p>
+          <a:p>
+            <a:pPr>
+              <a:spcAft>
+                <a:spcPts val="500"/>
+              </a:spcAft>
+            </a:pPr>
+          </a:p>
+          <a:p>
+            <a:pPr>
+              <a:spcAft>
+                <a:spcPts val="500"/>
+              </a:spcAft>
+            </a:pPr>
+            <a:r>
+              <a:rPr sz="950" b="0">
+                <a:solidFill>
+                  <a:srgbClr val="1A1A1A"/>
+                </a:solidFill>
+              </a:rPr>
+              <a:t>[4]  Varadharajan, E., Dharani, R., Jeevitha, S., Kavinmathi, B., Hemalatha, S. (2016). Automatic Attendance Management System Using Face Detection. IC-GET 2016, pp. 1–3. DOI: 10.1109/GET.2016.7916753</a:t>
+            </a:r>
+          </a:p>
+          <a:p>
+            <a:pPr>
+              <a:spcAft>
+                <a:spcPts val="500"/>
+              </a:spcAft>
+            </a:pPr>
+          </a:p>
+          <a:p>
+            <a:pPr>
+              <a:spcAft>
+                <a:spcPts val="500"/>
+              </a:spcAft>
+            </a:pPr>
+            <a:r>
+              <a:rPr sz="950" b="0">
+                <a:solidFill>
+                  <a:srgbClr val="1A1A1A"/>
+                </a:solidFill>
+              </a:rPr>
+              <a:t>[5]  Siswanto, A. R. S., Nugroho, A. S., Galinium, M. (2014). Implementation of Face Recognition Algorithm for Biometrics Based Time Attendance System. ICISS 2014, pp. 149–154. DOI: 10.1109/ICTSS.2014.7013165</a:t>
+            </a:r>
+          </a:p>
+          <a:p>
+            <a:pPr>
+              <a:spcAft>
+                <a:spcPts val="500"/>
+              </a:spcAft>
+            </a:pPr>
+          </a:p>
+          <a:p>
+            <a:pPr>
+              <a:spcAft>
+                <a:spcPts val="500"/>
+              </a:spcAft>
+            </a:pPr>
+            <a:r>
+              <a:rPr sz="950" b="0">
+                <a:solidFill>
+                  <a:srgbClr val="1A1A1A"/>
+                </a:solidFill>
+              </a:rPr>
+              <a:t>[6]  Deng, J., Guo, J., Xue, N., Zafeiriou, S. (2019). ArcFace: Additive Angular Margin Loss for Deep Face Recognition. CVPR 2019, pp. 4690–4699. DOI: 10.1109/CVPR.2019.00482</a:t>
+            </a:r>
+          </a:p>
+          <a:p>
+            <a:pPr>
+              <a:spcAft>
+                <a:spcPts val="500"/>
+              </a:spcAft>
+            </a:pPr>
+          </a:p>
+          <a:p>
+            <a:pPr>
+              <a:spcAft>
+                <a:spcPts val="500"/>
+              </a:spcAft>
+            </a:pPr>
+            <a:r>
+              <a:rPr sz="950" b="0">
+                <a:solidFill>
+                  <a:srgbClr val="1A1A1A"/>
+                </a:solidFill>
+              </a:rPr>
+              <a:t>[7]  Deng, J., Guo, J., Ververas, E., Kotsia, I., Zafeiriou, S. (2020). RetinaFace: Single-Shot Multi-Level Face Localisation in the Wild. CVPR 2020. DOI: 10.1109/CVPR42600.2020.00525</a:t>
+            </a:r>
+          </a:p>
+          <a:p>
+            <a:pPr>
+              <a:spcAft>
+                <a:spcPts val="500"/>
+              </a:spcAft>
+            </a:pPr>
+          </a:p>
+          <a:p>
+            <a:pPr>
+              <a:spcAft>
+                <a:spcPts val="500"/>
+              </a:spcAft>
+            </a:pPr>
+            <a:r>
+              <a:rPr sz="950" b="0">
+                <a:solidFill>
+                  <a:srgbClr val="1A1A1A"/>
+                </a:solidFill>
+              </a:rPr>
+              <a:t>[8]  Pan, G., Sun, L., Wu, Z., Lao, S. (2007). Eyeblink-based Anti-Spoofing in Face Recognition from a Generic Webcamera. ICCV 2007, pp. 1–8. DOI: 10.1109/ICCV.2007.4409068</a:t>
+            </a:r>
+          </a:p>
+          <a:p>
+            <a:pPr>
+              <a:spcAft>
+                <a:spcPts val="500"/>
+              </a:spcAft>
+            </a:pPr>
+          </a:p>
+          <a:p>
+            <a:pPr>
+              <a:spcAft>
+                <a:spcPts val="500"/>
+              </a:spcAft>
+            </a:pPr>
+            <a:r>
+              <a:rPr sz="950" b="0">
+                <a:solidFill>
+                  <a:srgbClr val="1A1A1A"/>
+                </a:solidFill>
+              </a:rPr>
+              <a:t>[9]  ISO/IEC 30107-3:2023 — Information technology — Biometric presentation attack detection — Part 3: Testing and reporting.</a:t>
+            </a:r>
+          </a:p>
+          <a:p>
+            <a:pPr>
+              <a:spcAft>
+                <a:spcPts val="500"/>
+              </a:spcAft>
+            </a:pPr>
+          </a:p>
+          <a:p>
+            <a:pPr>
+              <a:spcAft>
+                <a:spcPts val="500"/>
+              </a:spcAft>
+            </a:pPr>
+            <a:r>
+              <a:rPr sz="950" b="0">
+                <a:solidFill>
+                  <a:srgbClr val="1A1A1A"/>
+                </a:solidFill>
+              </a:rPr>
+              <a:t>[10] Cao, Q., Shen, L., Xie, W., Parkhi, O. M., Zisserman, A. (2018). VGGFace2: A Dataset for Recognising Faces across Pose and Age. IEEE FG 2018, pp. 67–74.</a:t>
+            </a:r>
+          </a:p>
+          <a:p>
+            <a:pPr>
+              <a:spcAft>
+                <a:spcPts val="500"/>
+              </a:spcAft>
+            </a:pPr>
+          </a:p>
+          <a:p>
+            <a:pPr>
+              <a:spcAft>
+                <a:spcPts val="500"/>
+              </a:spcAft>
+            </a:pPr>
+            <a:r>
+              <a:rPr sz="950" b="1">
+                <a:solidFill>
+                  <a:srgbClr val="1F3A6E"/>
+                </a:solidFill>
+              </a:rPr>
+              <a:t>Source code and all measurement scripts: github.com/SohamBhattacharjee2003/MutiFace-Attendance-System</a:t>
+            </a:r>
+          </a:p>
+        </p:txBody>
+      </p:sp>
+    </p:spTree>
+  </p:cSld>
+  <p:clrMapOvr>
+    <a:masterClrMapping/>
+  </p:clrMapOvr>
+</p:sld>
+</file>
+
+<file path=ppt/slides/slide11.xml><?xml version="1.0" encoding="utf-8"?>
+<p:sld xmlns:a="http://schemas.openxmlformats.org/drawingml/2006/main" xmlns:p="http://schemas.openxmlformats.org/presentationml/2006/main" xmlns:r="http://schemas.openxmlformats.org/officeDocument/2006/relationships">
+  <p:cSld>
+    <p:spTree>
+      <p:nvGrpSpPr>
+        <p:cNvPr id="1" name=""/>
+        <p:cNvGrpSpPr/>
+        <p:nvPr/>
+      </p:nvGrpSpPr>
+      <p:grpSpPr/>
+      <p:sp>
+        <p:nvSpPr>
+          <p:cNvPr id="2" name="TextBox 1"/>
+          <p:cNvSpPr txBox="1"/>
+          <p:nvPr/>
+        </p:nvSpPr>
+        <p:spPr>
+          <a:xfrm>
+            <a:off x="731520" y="2743200"/>
+            <a:ext cx="10698480" cy="1280160"/>
+          </a:xfrm>
+          <a:prstGeom prst="rect">
+            <a:avLst/>
+          </a:prstGeom>
+          <a:noFill/>
+        </p:spPr>
+        <p:txBody>
+          <a:bodyPr wrap="none">
+            <a:spAutoFit/>
+          </a:bodyPr>
+          <a:lstStyle/>
+          <a:p>
+            <a:pPr algn="ctr"/>
+            <a:r>
+              <a:rPr sz="4800" b="1" i="1"/>
+              <a:t>THANK YOU</a:t>
             </a:r>
           </a:p>
         </p:txBody>
@@ -3343,8 +3676,8 @@
         </p:nvSpPr>
         <p:spPr>
           <a:xfrm>
-            <a:off x="411480" y="201168"/>
-            <a:ext cx="11338560" cy="685800"/>
+            <a:off x="365760" y="182880"/>
+            <a:ext cx="11430000" cy="640080"/>
           </a:xfrm>
           <a:prstGeom prst="rect">
             <a:avLst/>
@@ -3359,12 +3692,12 @@
           <a:p>
             <a:pPr algn="ctr"/>
             <a:r>
-              <a:rPr sz="3000" b="1">
+              <a:rPr sz="2800" b="1">
                 <a:solidFill>
                   <a:srgbClr val="1F3A6E"/>
                 </a:solidFill>
               </a:rPr>
-              <a:t>IDEA / PROPOSED SOLUTION</a:t>
+              <a:t>PROJECT TITLE</a:t>
             </a:r>
           </a:p>
         </p:txBody>
@@ -3377,8 +3710,8 @@
         </p:nvSpPr>
         <p:spPr>
           <a:xfrm>
-            <a:off x="502920" y="1051560"/>
-            <a:ext cx="6035040" cy="5120640"/>
+            <a:off x="2011680" y="2194560"/>
+            <a:ext cx="8229600" cy="3291840"/>
           </a:xfrm>
           <a:prstGeom prst="rect">
             <a:avLst/>
@@ -3397,445 +3730,101 @@
               </a:spcAft>
             </a:pPr>
             <a:r>
-              <a:rPr sz="1250" b="1">
+              <a:rPr sz="1600" b="1">
                 <a:solidFill>
                   <a:srgbClr val="1F3A6E"/>
                 </a:solidFill>
               </a:rPr>
-              <a:t>The problem nobody in the literature measures</a:t>
-            </a:r>
-          </a:p>
-          <a:p>
-            <a:pPr>
-              <a:spcAft>
-                <a:spcPts val="500"/>
-              </a:spcAft>
-            </a:pPr>
-            <a:r>
-              <a:rPr sz="1250" b="0">
-                <a:solidFill>
-                  <a:srgbClr val="1A1A1A"/>
-                </a:solidFill>
-              </a:rPr>
-              <a:t>Face recognition is BUILT to give a photo of you the same embedding as you.</a:t>
-            </a:r>
-          </a:p>
-          <a:p>
-            <a:pPr>
-              <a:spcAft>
-                <a:spcPts val="500"/>
-              </a:spcAft>
-            </a:pPr>
-            <a:r>
-              <a:rPr sz="1250" b="0">
-                <a:solidFill>
-                  <a:srgbClr val="1A1A1A"/>
-                </a:solidFill>
-              </a:rPr>
-              <a:t>So recognition alone cannot stop proxy attendance. We tested it:</a:t>
-            </a:r>
-          </a:p>
-          <a:p>
-            <a:pPr>
-              <a:spcAft>
-                <a:spcPts val="500"/>
-              </a:spcAft>
-            </a:pPr>
-            <a:r>
-              <a:rPr sz="1250" b="1">
+              <a:t>Automatic Attendance System using Multiple Face Recognition</a:t>
+            </a:r>
+          </a:p>
+          <a:p>
+            <a:pPr>
+              <a:spcAft>
+                <a:spcPts val="500"/>
+              </a:spcAft>
+            </a:pPr>
+          </a:p>
+          <a:p>
+            <a:pPr>
+              <a:spcAft>
+                <a:spcPts val="500"/>
+              </a:spcAft>
+            </a:pPr>
+            <a:r>
+              <a:rPr sz="1600" b="1">
+                <a:solidFill>
+                  <a:srgbClr val="1A1A1A"/>
+                </a:solidFill>
+              </a:rPr>
+              <a:t>Research focus</a:t>
+            </a:r>
+          </a:p>
+          <a:p>
+            <a:pPr>
+              <a:spcAft>
+                <a:spcPts val="500"/>
+              </a:spcAft>
+            </a:pPr>
+            <a:r>
+              <a:rPr sz="1600" b="0">
+                <a:solidFill>
+                  <a:srgbClr val="1A1A1A"/>
+                </a:solidFill>
+              </a:rPr>
+              <a:t>A state-of-the-art face model still marks a printed photograph present</a:t>
+            </a:r>
+          </a:p>
+          <a:p>
+            <a:pPr>
+              <a:spcAft>
+                <a:spcPts val="500"/>
+              </a:spcAft>
+            </a:pPr>
+            <a:r>
+              <a:rPr sz="1600" b="1">
                 <a:solidFill>
                   <a:srgbClr val="C0392B"/>
                 </a:solidFill>
               </a:rPr>
-              <a:t>a printed photo was marked present 100% of the time.</a:t>
-            </a:r>
-          </a:p>
-          <a:p>
-            <a:pPr>
-              <a:spcAft>
-                <a:spcPts val="500"/>
-              </a:spcAft>
-            </a:pPr>
-          </a:p>
-          <a:p>
-            <a:pPr>
-              <a:spcAft>
-                <a:spcPts val="500"/>
-              </a:spcAft>
-            </a:pPr>
-            <a:r>
-              <a:rPr sz="1250" b="1">
-                <a:solidFill>
-                  <a:srgbClr val="1F3A6E"/>
-                </a:solidFill>
-              </a:rPr>
-              <a:t>Our solution — separate RECOGNISING from MARKING PRESENT</a:t>
-            </a:r>
-          </a:p>
-          <a:p>
-            <a:pPr>
-              <a:spcAft>
-                <a:spcPts val="500"/>
-              </a:spcAft>
-            </a:pPr>
-            <a:r>
-              <a:rPr sz="1250" b="0">
-                <a:solidFill>
-                  <a:srgbClr val="1A1A1A"/>
-                </a:solidFill>
-              </a:rPr>
-              <a:t>Attendance is written once a day and is irreversible: one bad frame marks the</a:t>
-            </a:r>
-          </a:p>
-          <a:p>
-            <a:pPr>
-              <a:spcAft>
-                <a:spcPts val="500"/>
-              </a:spcAft>
-            </a:pPr>
-            <a:r>
-              <a:rPr sz="1250" b="0">
-                <a:solidFill>
-                  <a:srgbClr val="1A1A1A"/>
-                </a:solidFill>
-              </a:rPr>
-              <a:t>wrong student present until tomorrow. So committing is its own decision, taken</a:t>
-            </a:r>
-          </a:p>
-          <a:p>
-            <a:pPr>
-              <a:spcAft>
-                <a:spcPts val="500"/>
-              </a:spcAft>
-            </a:pPr>
-            <a:r>
-              <a:rPr sz="1250" b="0">
-                <a:solidFill>
-                  <a:srgbClr val="1A1A1A"/>
-                </a:solidFill>
-              </a:rPr>
-              <a:t>only after four gates pass and several frames agree:</a:t>
-            </a:r>
-          </a:p>
-          <a:p>
-            <a:pPr lvl="1">
-              <a:spcAft>
-                <a:spcPts val="500"/>
-              </a:spcAft>
-            </a:pPr>
-            <a:r>
-              <a:rPr sz="1250" b="0">
-                <a:solidFill>
-                  <a:srgbClr val="1A1A1A"/>
-                </a:solidFill>
-              </a:rPr>
-              <a:t>1.  Size — a face under 40px is refused, not guessed at</a:t>
-            </a:r>
-          </a:p>
-          <a:p>
-            <a:pPr lvl="1">
-              <a:spcAft>
-                <a:spcPts val="500"/>
-              </a:spcAft>
-            </a:pPr>
-            <a:r>
-              <a:rPr sz="1250" b="0">
-                <a:solidFill>
-                  <a:srgbClr val="1A1A1A"/>
-                </a:solidFill>
-              </a:rPr>
-              <a:t>2.  Threshold — calibrated on 2,880 impostor faces, not hand-picked</a:t>
-            </a:r>
-          </a:p>
-          <a:p>
-            <a:pPr lvl="1">
-              <a:spcAft>
-                <a:spcPts val="500"/>
-              </a:spcAft>
-            </a:pPr>
-            <a:r>
-              <a:rPr sz="1250" b="0">
-                <a:solidFill>
-                  <a:srgbClr val="1A1A1A"/>
-                </a:solidFill>
-              </a:rPr>
-              <a:t>3.  Margin — the runner-up identity must be clearly beaten</a:t>
-            </a:r>
-          </a:p>
-          <a:p>
-            <a:pPr lvl="1">
-              <a:spcAft>
-                <a:spcPts val="500"/>
-              </a:spcAft>
-            </a:pPr>
-            <a:r>
-              <a:rPr sz="1250" b="1">
-                <a:solidFill>
-                  <a:srgbClr val="C0392B"/>
-                </a:solidFill>
-              </a:rPr>
-              <a:t>4.  LIVENESS — is this a person, or a photograph of one?</a:t>
-            </a:r>
-          </a:p>
-        </p:txBody>
-      </p:sp>
-      <p:sp>
-        <p:nvSpPr>
-          <p:cNvPr id="4" name="TextBox 3"/>
-          <p:cNvSpPr txBox="1"/>
-          <p:nvPr/>
-        </p:nvSpPr>
-        <p:spPr>
-          <a:xfrm>
-            <a:off x="6766560" y="1051560"/>
-            <a:ext cx="5029200" cy="5120640"/>
-          </a:xfrm>
-          <a:prstGeom prst="rect">
-            <a:avLst/>
-          </a:prstGeom>
-          <a:noFill/>
-        </p:spPr>
-        <p:txBody>
-          <a:bodyPr wrap="square">
-            <a:spAutoFit/>
-          </a:bodyPr>
-          <a:lstStyle/>
-          <a:p>
-            <a:pPr>
-              <a:spcAft>
-                <a:spcPts val="500"/>
-              </a:spcAft>
-            </a:pPr>
-            <a:r>
-              <a:rPr sz="1150" b="1">
-                <a:solidFill>
-                  <a:srgbClr val="1F3A6E"/>
-                </a:solidFill>
-              </a:rPr>
-              <a:t>Innovation and uniqueness</a:t>
-            </a:r>
-          </a:p>
-          <a:p>
-            <a:pPr>
-              <a:spcAft>
-                <a:spcPts val="500"/>
-              </a:spcAft>
-            </a:pPr>
-          </a:p>
-          <a:p>
-            <a:pPr>
-              <a:spcAft>
-                <a:spcPts val="500"/>
-              </a:spcAft>
-            </a:pPr>
-            <a:r>
-              <a:rPr sz="1150" b="1">
-                <a:solidFill>
-                  <a:srgbClr val="1A1A1A"/>
-                </a:solidFill>
-              </a:rPr>
-              <a:t>• We do NOT claim a new face model.</a:t>
-            </a:r>
-          </a:p>
-          <a:p>
-            <a:pPr>
-              <a:spcAft>
-                <a:spcPts val="500"/>
-              </a:spcAft>
-            </a:pPr>
-            <a:r>
-              <a:rPr sz="1150" b="0">
-                <a:solidFill>
-                  <a:srgbClr val="1A1A1A"/>
-                </a:solidFill>
-              </a:rPr>
-              <a:t>ArcFace is pretrained and frozen. Claiming otherwise would be dishonest, and</a:t>
-            </a:r>
-          </a:p>
-          <a:p>
-            <a:pPr>
-              <a:spcAft>
-                <a:spcPts val="500"/>
-              </a:spcAft>
-            </a:pPr>
-            <a:r>
-              <a:rPr sz="1150" b="0">
-                <a:solidFill>
-                  <a:srgbClr val="1A1A1A"/>
-                </a:solidFill>
-              </a:rPr>
-              <a:t>training our own on 30 students would be worse in every measurable way.</a:t>
-            </a:r>
-          </a:p>
-          <a:p>
-            <a:pPr>
-              <a:spcAft>
-                <a:spcPts val="500"/>
-              </a:spcAft>
-            </a:pPr>
-          </a:p>
-          <a:p>
-            <a:pPr>
-              <a:spcAft>
-                <a:spcPts val="500"/>
-              </a:spcAft>
-            </a:pPr>
-            <a:r>
-              <a:rPr sz="1150" b="1">
-                <a:solidFill>
-                  <a:srgbClr val="1A1A1A"/>
-                </a:solidFill>
-              </a:rPr>
-              <a:t>• Liveness that works on classroom hardware.</a:t>
-            </a:r>
-          </a:p>
-          <a:p>
-            <a:pPr>
-              <a:spcAft>
-                <a:spcPts val="500"/>
-              </a:spcAft>
-            </a:pPr>
-            <a:r>
-              <a:rPr sz="1150" b="0">
-                <a:solidFill>
-                  <a:srgbClr val="1A1A1A"/>
-                </a:solidFill>
-              </a:rPr>
-              <a:t>Blink detection is the standard trick, but a blink lasts ~0.3s and our system</a:t>
-            </a:r>
-          </a:p>
-          <a:p>
-            <a:pPr>
-              <a:spcAft>
-                <a:spcPts val="500"/>
-              </a:spcAft>
-            </a:pPr>
-            <a:r>
-              <a:rPr sz="1150" b="0">
-                <a:solidFill>
-                  <a:srgbClr val="1A1A1A"/>
-                </a:solidFill>
-              </a:rPr>
-              <a:t>samples ~1.4 frames/sec — we measured it failing. Instead we measure facial</a:t>
-            </a:r>
-          </a:p>
-          <a:p>
-            <a:pPr>
-              <a:spcAft>
-                <a:spcPts val="500"/>
-              </a:spcAft>
-            </a:pPr>
-            <a:r>
-              <a:rPr sz="1150" b="0">
-                <a:solidFill>
-                  <a:srgbClr val="1A1A1A"/>
-                </a:solidFill>
-              </a:rPr>
-              <a:t>motion from landmarks the detector already produces: a live face keeps</a:t>
-            </a:r>
-          </a:p>
-          <a:p>
-            <a:pPr>
-              <a:spcAft>
-                <a:spcPts val="500"/>
-              </a:spcAft>
-            </a:pPr>
-            <a:r>
-              <a:rPr sz="1150" b="0">
-                <a:solidFill>
-                  <a:srgbClr val="1A1A1A"/>
-                </a:solidFill>
-              </a:rPr>
-              <a:t>deforming, a photo is rigid. Rotation and scale are normalised away, so waving</a:t>
-            </a:r>
-          </a:p>
-          <a:p>
-            <a:pPr>
-              <a:spcAft>
-                <a:spcPts val="500"/>
-              </a:spcAft>
-            </a:pPr>
-            <a:r>
-              <a:rPr sz="1150" b="0">
-                <a:solidFill>
-                  <a:srgbClr val="1A1A1A"/>
-                </a:solidFill>
-              </a:rPr>
-              <a:t>the photo about does not help the attacker. No extra model, no GPU.</a:t>
-            </a:r>
-          </a:p>
-          <a:p>
-            <a:pPr>
-              <a:spcAft>
-                <a:spcPts val="500"/>
-              </a:spcAft>
-            </a:pPr>
-          </a:p>
-          <a:p>
-            <a:pPr>
-              <a:spcAft>
-                <a:spcPts val="500"/>
-              </a:spcAft>
-            </a:pPr>
-            <a:r>
-              <a:rPr sz="1150" b="1">
-                <a:solidFill>
-                  <a:srgbClr val="1A1A1A"/>
-                </a:solidFill>
-              </a:rPr>
-              <a:t>• Enrolment in 1.4s, not 10 minutes.</a:t>
-            </a:r>
-          </a:p>
-          <a:p>
-            <a:pPr>
-              <a:spcAft>
-                <a:spcPts val="500"/>
-              </a:spcAft>
-            </a:pPr>
-            <a:r>
-              <a:rPr sz="1150" b="0">
-                <a:solidFill>
-                  <a:srgbClr val="1A1A1A"/>
-                </a:solidFill>
-              </a:rPr>
-              <a:t>Embeddings are cached, so a new student costs only their own photos.</a:t>
-            </a:r>
-          </a:p>
-          <a:p>
-            <a:pPr>
-              <a:spcAft>
-                <a:spcPts val="500"/>
-              </a:spcAft>
-            </a:pPr>
-          </a:p>
-          <a:p>
-            <a:pPr>
-              <a:spcAft>
-                <a:spcPts val="500"/>
-              </a:spcAft>
-            </a:pPr>
-            <a:r>
-              <a:rPr sz="1150" b="1">
-                <a:solidFill>
-                  <a:srgbClr val="1E8E5A"/>
-                </a:solidFill>
-              </a:rPr>
-              <a:t>• We report a fix that did NOT work.</a:t>
-            </a:r>
-          </a:p>
-          <a:p>
-            <a:pPr>
-              <a:spcAft>
-                <a:spcPts val="500"/>
-              </a:spcAft>
-            </a:pPr>
-            <a:r>
-              <a:rPr sz="1150" b="0">
-                <a:solidFill>
-                  <a:srgbClr val="1A1A1A"/>
-                </a:solidFill>
-              </a:rPr>
-              <a:t>The top-2 margin guard changed nothing on our cohort. We say so.</a:t>
+              <a:t>100% of the time. We measured it, and we fixed it.</a:t>
+            </a:r>
+          </a:p>
+          <a:p>
+            <a:pPr>
+              <a:spcAft>
+                <a:spcPts val="500"/>
+              </a:spcAft>
+            </a:pPr>
+          </a:p>
+          <a:p>
+            <a:pPr>
+              <a:spcAft>
+                <a:spcPts val="500"/>
+              </a:spcAft>
+            </a:pPr>
+            <a:r>
+              <a:rPr sz="1600" b="0">
+                <a:solidFill>
+                  <a:srgbClr val="1A1A1A"/>
+                </a:solidFill>
+              </a:rPr>
+              <a:t>Detecting and recognising every face in one frame — and then deciding,</a:t>
+            </a:r>
+          </a:p>
+          <a:p>
+            <a:pPr>
+              <a:spcAft>
+                <a:spcPts val="500"/>
+              </a:spcAft>
+            </a:pPr>
+            <a:r>
+              <a:rPr sz="1600" b="0">
+                <a:solidFill>
+                  <a:srgbClr val="1A1A1A"/>
+                </a:solidFill>
+              </a:rPr>
+              <a:t>separately and carefully, who is actually PRESENT.</a:t>
             </a:r>
           </a:p>
         </p:txBody>
@@ -3866,8 +3855,8 @@
         </p:nvSpPr>
         <p:spPr>
           <a:xfrm>
-            <a:off x="411480" y="201168"/>
-            <a:ext cx="11338560" cy="685800"/>
+            <a:off x="365760" y="182880"/>
+            <a:ext cx="11430000" cy="640080"/>
           </a:xfrm>
           <a:prstGeom prst="rect">
             <a:avLst/>
@@ -3882,50 +3871,26 @@
           <a:p>
             <a:pPr algn="ctr"/>
             <a:r>
-              <a:rPr sz="3000" b="1">
+              <a:rPr sz="2800" b="1">
                 <a:solidFill>
                   <a:srgbClr val="1F3A6E"/>
                 </a:solidFill>
               </a:rPr>
-              <a:t>TECHNICAL APPROACH &amp; WORKFLOW</a:t>
-            </a:r>
-          </a:p>
-        </p:txBody>
-      </p:sp>
-      <p:pic>
-        <p:nvPicPr>
-          <p:cNvPr id="3" name="Picture 2" descr="workflow.png"/>
-          <p:cNvPicPr>
-            <a:picLocks noChangeAspect="1"/>
-          </p:cNvPicPr>
+              <a:t>OBJECTIVE OF THE PROJECT</a:t>
+            </a:r>
+          </a:p>
+        </p:txBody>
+      </p:sp>
+      <p:sp>
+        <p:nvSpPr>
+          <p:cNvPr id="3" name="TextBox 2"/>
+          <p:cNvSpPr txBox="1"/>
           <p:nvPr/>
-        </p:nvPicPr>
-        <p:blipFill>
-          <a:blip r:embed="rId2"/>
-          <a:stretch>
-            <a:fillRect/>
-          </a:stretch>
-        </p:blipFill>
+        </p:nvSpPr>
         <p:spPr>
           <a:xfrm>
-            <a:off x="457200" y="1005840"/>
-            <a:ext cx="11247120" cy="2346558"/>
-          </a:xfrm>
-          <a:prstGeom prst="rect">
-            <a:avLst/>
-          </a:prstGeom>
-        </p:spPr>
-      </p:pic>
-      <p:sp>
-        <p:nvSpPr>
-          <p:cNvPr id="4" name="TextBox 3"/>
-          <p:cNvSpPr txBox="1"/>
-          <p:nvPr/>
-        </p:nvSpPr>
-        <p:spPr>
-          <a:xfrm>
-            <a:off x="502920" y="3200400"/>
-            <a:ext cx="5669280" cy="3108960"/>
+            <a:off x="1097280" y="1188720"/>
+            <a:ext cx="10058400" cy="5029200"/>
           </a:xfrm>
           <a:prstGeom prst="rect">
             <a:avLst/>
@@ -3944,282 +3909,175 @@
               </a:spcAft>
             </a:pPr>
             <a:r>
-              <a:rPr sz="1200" b="1">
-                <a:solidFill>
-                  <a:srgbClr val="1F3A6E"/>
-                </a:solidFill>
-              </a:rPr>
-              <a:t>Technologies</a:t>
-            </a:r>
-          </a:p>
-          <a:p>
-            <a:pPr>
-              <a:spcAft>
-                <a:spcPts val="500"/>
-              </a:spcAft>
-            </a:pPr>
-            <a:r>
-              <a:rPr sz="1200" b="0">
-                <a:solidFill>
-                  <a:srgbClr val="1A1A1A"/>
-                </a:solidFill>
-              </a:rPr>
-              <a:t>Detection: RetinaFace / SCRFD (det_10g)</a:t>
-            </a:r>
-          </a:p>
-          <a:p>
-            <a:pPr>
-              <a:spcAft>
-                <a:spcPts val="500"/>
-              </a:spcAft>
-            </a:pPr>
-            <a:r>
-              <a:rPr sz="1200" b="0">
-                <a:solidFill>
-                  <a:srgbClr val="1A1A1A"/>
-                </a:solidFill>
-              </a:rPr>
-              <a:t>Recognition: ArcFace ResNet-50 (buffalo_l, w600k_r50) → 512-d embeddings</a:t>
-            </a:r>
-          </a:p>
-          <a:p>
-            <a:pPr>
-              <a:spcAft>
-                <a:spcPts val="500"/>
-              </a:spcAft>
-            </a:pPr>
-            <a:r>
-              <a:rPr sz="1200" b="0">
-                <a:solidFill>
-                  <a:srgbClr val="1A1A1A"/>
-                </a:solidFill>
-              </a:rPr>
-              <a:t>Runtime: ONNX Runtime, CPU only — no GPU required</a:t>
-            </a:r>
-          </a:p>
-          <a:p>
-            <a:pPr>
-              <a:spcAft>
-                <a:spcPts val="500"/>
-              </a:spcAft>
-            </a:pPr>
-            <a:r>
-              <a:rPr sz="1200" b="0">
-                <a:solidFill>
-                  <a:srgbClr val="1A1A1A"/>
-                </a:solidFill>
-              </a:rPr>
-              <a:t>Classifier: linear SVM + cosine-to-centroid over scikit-learn</a:t>
-            </a:r>
-          </a:p>
-          <a:p>
-            <a:pPr>
-              <a:spcAft>
-                <a:spcPts val="500"/>
-              </a:spcAft>
-            </a:pPr>
-            <a:r>
-              <a:rPr sz="1200" b="0">
-                <a:solidFill>
-                  <a:srgbClr val="1A1A1A"/>
-                </a:solidFill>
-              </a:rPr>
-              <a:t>Backend: Python 3.13 · Flask REST API · token auth</a:t>
-            </a:r>
-          </a:p>
-          <a:p>
-            <a:pPr>
-              <a:spcAft>
-                <a:spcPts val="500"/>
-              </a:spcAft>
-            </a:pPr>
-            <a:r>
-              <a:rPr sz="1200" b="0">
-                <a:solidFill>
-                  <a:srgbClr val="1A1A1A"/>
-                </a:solidFill>
-              </a:rPr>
-              <a:t>Frontend: React · Vite · TailwindCSS</a:t>
-            </a:r>
-          </a:p>
-          <a:p>
-            <a:pPr>
-              <a:spcAft>
-                <a:spcPts val="500"/>
-              </a:spcAft>
-            </a:pPr>
-            <a:r>
-              <a:rPr sz="1200" b="0">
-                <a:solidFill>
-                  <a:srgbClr val="1A1A1A"/>
-                </a:solidFill>
-              </a:rPr>
-              <a:t>Storage: CSV + JSON on disk — no cloud, no database server</a:t>
-            </a:r>
-          </a:p>
-        </p:txBody>
-      </p:sp>
-      <p:sp>
-        <p:nvSpPr>
-          <p:cNvPr id="5" name="TextBox 4"/>
-          <p:cNvSpPr txBox="1"/>
-          <p:nvPr/>
-        </p:nvSpPr>
-        <p:spPr>
-          <a:xfrm>
-            <a:off x="6400800" y="3200400"/>
-            <a:ext cx="5394960" cy="3108960"/>
-          </a:xfrm>
-          <a:prstGeom prst="rect">
-            <a:avLst/>
-          </a:prstGeom>
-          <a:noFill/>
-        </p:spPr>
-        <p:txBody>
-          <a:bodyPr wrap="square">
-            <a:spAutoFit/>
-          </a:bodyPr>
-          <a:lstStyle/>
-          <a:p>
-            <a:pPr>
-              <a:spcAft>
-                <a:spcPts val="500"/>
-              </a:spcAft>
-            </a:pPr>
-            <a:r>
-              <a:rPr sz="1150" b="1">
-                <a:solidFill>
-                  <a:srgbClr val="1F3A6E"/>
-                </a:solidFill>
-              </a:rPr>
-              <a:t>Method — why it is built this way</a:t>
-            </a:r>
-          </a:p>
-          <a:p>
-            <a:pPr>
-              <a:spcAft>
-                <a:spcPts val="500"/>
-              </a:spcAft>
-            </a:pPr>
-            <a:r>
-              <a:rPr sz="1150" b="1">
-                <a:solidFill>
-                  <a:srgbClr val="1A1A1A"/>
-                </a:solidFill>
-              </a:rPr>
-              <a:t>The deep model is frozen and never retrained.</a:t>
-            </a:r>
-          </a:p>
-          <a:p>
-            <a:pPr>
-              <a:spcAft>
-                <a:spcPts val="500"/>
-              </a:spcAft>
-            </a:pPr>
-            <a:r>
-              <a:rPr sz="1150" b="0">
-                <a:solidFill>
-                  <a:srgbClr val="1A1A1A"/>
-                </a:solidFill>
-              </a:rPr>
-              <a:t>It was trained on ~600k identities; what it learned is not 'who is Soham' but</a:t>
-            </a:r>
-          </a:p>
-          <a:p>
-            <a:pPr>
-              <a:spcAft>
-                <a:spcPts val="500"/>
-              </a:spcAft>
-            </a:pPr>
-            <a:r>
-              <a:rPr sz="1150" b="0">
-                <a:solidFill>
-                  <a:srgbClr val="1A1A1A"/>
-                </a:solidFill>
-              </a:rPr>
-              <a:t>'what makes any two faces different'. Enrolling a student = embed their photos</a:t>
-            </a:r>
-          </a:p>
-          <a:p>
-            <a:pPr>
-              <a:spcAft>
-                <a:spcPts val="500"/>
-              </a:spcAft>
-            </a:pPr>
-            <a:r>
-              <a:rPr sz="1150" b="0">
-                <a:solidFill>
-                  <a:srgbClr val="1A1A1A"/>
-                </a:solidFill>
-              </a:rPr>
-              <a:t>and store the average (their centroid). That is a table insert, not a training run.</a:t>
-            </a:r>
-          </a:p>
-          <a:p>
-            <a:pPr>
-              <a:spcAft>
-                <a:spcPts val="500"/>
-              </a:spcAft>
-            </a:pPr>
-          </a:p>
-          <a:p>
-            <a:pPr>
-              <a:spcAft>
-                <a:spcPts val="500"/>
-              </a:spcAft>
-            </a:pPr>
-            <a:r>
-              <a:rPr sz="1150" b="1">
-                <a:solidFill>
-                  <a:srgbClr val="1A1A1A"/>
-                </a:solidFill>
-              </a:rPr>
-              <a:t>Closed-set vs open-set — the key difference</a:t>
-            </a:r>
-          </a:p>
-          <a:p>
-            <a:pPr>
-              <a:spcAft>
-                <a:spcPts val="500"/>
-              </a:spcAft>
-            </a:pPr>
-            <a:r>
-              <a:rPr sz="1150" b="0">
-                <a:solidFill>
-                  <a:srgbClr val="1A1A1A"/>
-                </a:solidFill>
-              </a:rPr>
-              <a:t>Prior work asks 'WHICH of my N students is this?' — a softmax must always name</a:t>
-            </a:r>
-          </a:p>
-          <a:p>
-            <a:pPr>
-              <a:spcAft>
-                <a:spcPts val="500"/>
-              </a:spcAft>
-            </a:pPr>
-            <a:r>
-              <a:rPr sz="1150" b="0">
-                <a:solidFill>
-                  <a:srgbClr val="1A1A1A"/>
-                </a:solidFill>
-              </a:rPr>
-              <a:t>someone. We ask 'is this ANY of my students at all?' The system is allowed to</a:t>
-            </a:r>
-          </a:p>
-          <a:p>
-            <a:pPr>
-              <a:spcAft>
-                <a:spcPts val="500"/>
-              </a:spcAft>
-            </a:pPr>
-            <a:r>
-              <a:rPr sz="1150" b="0">
-                <a:solidFill>
-                  <a:srgbClr val="1A1A1A"/>
-                </a:solidFill>
-              </a:rPr>
-              <a:t>answer 'nobody', which is the only honest answer when a stranger walks past.</a:t>
+              <a:rPr sz="1350" b="1">
+                <a:solidFill>
+                  <a:srgbClr val="1A1A1A"/>
+                </a:solidFill>
+              </a:rPr>
+              <a:t>1.  Automate attendance using multi-face recognition</a:t>
+            </a:r>
+          </a:p>
+          <a:p>
+            <a:pPr>
+              <a:spcAft>
+                <a:spcPts val="500"/>
+              </a:spcAft>
+            </a:pPr>
+            <a:r>
+              <a:rPr sz="1350" b="0">
+                <a:solidFill>
+                  <a:srgbClr val="1A1A1A"/>
+                </a:solidFill>
+              </a:rPr>
+              <a:t>Detect and identify every face in a single frame, not one person at a time.</a:t>
+            </a:r>
+          </a:p>
+          <a:p>
+            <a:pPr>
+              <a:spcAft>
+                <a:spcPts val="500"/>
+              </a:spcAft>
+            </a:pPr>
+          </a:p>
+          <a:p>
+            <a:pPr>
+              <a:spcAft>
+                <a:spcPts val="500"/>
+              </a:spcAft>
+            </a:pPr>
+            <a:r>
+              <a:rPr sz="1350" b="1">
+                <a:solidFill>
+                  <a:srgbClr val="1A1A1A"/>
+                </a:solidFill>
+              </a:rPr>
+              <a:t>2.  Reject strangers — an open-set system</a:t>
+            </a:r>
+          </a:p>
+          <a:p>
+            <a:pPr>
+              <a:spcAft>
+                <a:spcPts val="500"/>
+              </a:spcAft>
+            </a:pPr>
+            <a:r>
+              <a:rPr sz="1350" b="0">
+                <a:solidFill>
+                  <a:srgbClr val="1A1A1A"/>
+                </a:solidFill>
+              </a:rPr>
+              <a:t>A classifier must always name someone. Ours is allowed to answer 'nobody'.</a:t>
+            </a:r>
+          </a:p>
+          <a:p>
+            <a:pPr>
+              <a:spcAft>
+                <a:spcPts val="500"/>
+              </a:spcAft>
+            </a:pPr>
+          </a:p>
+          <a:p>
+            <a:pPr>
+              <a:spcAft>
+                <a:spcPts val="500"/>
+              </a:spcAft>
+            </a:pPr>
+            <a:r>
+              <a:rPr sz="1350" b="1">
+                <a:solidFill>
+                  <a:srgbClr val="C0392B"/>
+                </a:solidFill>
+              </a:rPr>
+              <a:t>3.  Resist presentation attacks (photo / screen spoofing)</a:t>
+            </a:r>
+          </a:p>
+          <a:p>
+            <a:pPr>
+              <a:spcAft>
+                <a:spcPts val="500"/>
+              </a:spcAft>
+            </a:pPr>
+            <a:r>
+              <a:rPr sz="1350" b="0">
+                <a:solidFill>
+                  <a:srgbClr val="1A1A1A"/>
+                </a:solidFill>
+              </a:rPr>
+              <a:t>Recognition alone cannot tell a person from a photo of that person.</a:t>
+            </a:r>
+          </a:p>
+          <a:p>
+            <a:pPr>
+              <a:spcAft>
+                <a:spcPts val="500"/>
+              </a:spcAft>
+            </a:pPr>
+          </a:p>
+          <a:p>
+            <a:pPr>
+              <a:spcAft>
+                <a:spcPts val="500"/>
+              </a:spcAft>
+            </a:pPr>
+            <a:r>
+              <a:rPr sz="1350" b="1">
+                <a:solidFill>
+                  <a:srgbClr val="1A1A1A"/>
+                </a:solidFill>
+              </a:rPr>
+              <a:t>4.  Make the attendance commit reliable, not just the recognition</a:t>
+            </a:r>
+          </a:p>
+          <a:p>
+            <a:pPr>
+              <a:spcAft>
+                <a:spcPts val="500"/>
+              </a:spcAft>
+            </a:pPr>
+            <a:r>
+              <a:rPr sz="1350" b="0">
+                <a:solidFill>
+                  <a:srgbClr val="1A1A1A"/>
+                </a:solidFill>
+              </a:rPr>
+              <a:t>Attendance is irreversible — one bad frame must not mark the wrong student.</a:t>
+            </a:r>
+          </a:p>
+          <a:p>
+            <a:pPr>
+              <a:spcAft>
+                <a:spcPts val="500"/>
+              </a:spcAft>
+            </a:pPr>
+          </a:p>
+          <a:p>
+            <a:pPr>
+              <a:spcAft>
+                <a:spcPts val="500"/>
+              </a:spcAft>
+            </a:pPr>
+            <a:r>
+              <a:rPr sz="1350" b="1">
+                <a:solidFill>
+                  <a:srgbClr val="1A1A1A"/>
+                </a:solidFill>
+              </a:rPr>
+              <a:t>5.  Run on ordinary hardware, offline</a:t>
+            </a:r>
+          </a:p>
+          <a:p>
+            <a:pPr>
+              <a:spcAft>
+                <a:spcPts val="500"/>
+              </a:spcAft>
+            </a:pPr>
+            <a:r>
+              <a:rPr sz="1350" b="0">
+                <a:solidFill>
+                  <a:srgbClr val="1A1A1A"/>
+                </a:solidFill>
+              </a:rPr>
+              <a:t>One laptop, one webcam, no GPU, no cloud, no student data leaving campus.</a:t>
             </a:r>
           </a:p>
         </p:txBody>
@@ -4250,8 +4108,8 @@
         </p:nvSpPr>
         <p:spPr>
           <a:xfrm>
-            <a:off x="411480" y="201168"/>
-            <a:ext cx="11338560" cy="685800"/>
+            <a:off x="365760" y="182880"/>
+            <a:ext cx="11430000" cy="640080"/>
           </a:xfrm>
           <a:prstGeom prst="rect">
             <a:avLst/>
@@ -4266,12 +4124,12 @@
           <a:p>
             <a:pPr algn="ctr"/>
             <a:r>
-              <a:rPr sz="3000" b="1">
+              <a:rPr sz="2800" b="1">
                 <a:solidFill>
                   <a:srgbClr val="1F3A6E"/>
                 </a:solidFill>
               </a:rPr>
-              <a:t>RESULTS</a:t>
+              <a:t>PROBLEM DEFINITION</a:t>
             </a:r>
           </a:p>
         </p:txBody>
@@ -4284,8 +4142,8 @@
         </p:nvSpPr>
         <p:spPr>
           <a:xfrm>
-            <a:off x="457200" y="868680"/>
-            <a:ext cx="11338560" cy="365760"/>
+            <a:off x="640080" y="1097280"/>
+            <a:ext cx="10972800" cy="1463040"/>
           </a:xfrm>
           <a:prstGeom prst="rect">
             <a:avLst/>
@@ -4293,25 +4151,957 @@
           <a:noFill/>
         </p:spPr>
         <p:txBody>
+          <a:bodyPr wrap="square">
+            <a:spAutoFit/>
+          </a:bodyPr>
+          <a:lstStyle/>
+          <a:p>
+            <a:pPr>
+              <a:spcAft>
+                <a:spcPts val="500"/>
+              </a:spcAft>
+            </a:pPr>
+            <a:r>
+              <a:rPr sz="1400" b="1">
+                <a:solidFill>
+                  <a:srgbClr val="1A1A1A"/>
+                </a:solidFill>
+              </a:rPr>
+              <a:t>Traditional manual attendance is slow, error-prone and open to proxy marking.</a:t>
+            </a:r>
+          </a:p>
+          <a:p>
+            <a:pPr>
+              <a:spcAft>
+                <a:spcPts val="500"/>
+              </a:spcAft>
+            </a:pPr>
+            <a:r>
+              <a:rPr sz="1400" b="0">
+                <a:solidFill>
+                  <a:srgbClr val="1A1A1A"/>
+                </a:solidFill>
+              </a:rPr>
+              <a:t>A 60-student roll-call costs ~5 minutes of every lecture — roughly 80 hours a year.</a:t>
+            </a:r>
+          </a:p>
+          <a:p>
+            <a:pPr>
+              <a:spcAft>
+                <a:spcPts val="500"/>
+              </a:spcAft>
+            </a:pPr>
+          </a:p>
+          <a:p>
+            <a:pPr>
+              <a:spcAft>
+                <a:spcPts val="500"/>
+              </a:spcAft>
+            </a:pPr>
+            <a:r>
+              <a:rPr sz="1400" b="1">
+                <a:solidFill>
+                  <a:srgbClr val="1F3A6E"/>
+                </a:solidFill>
+              </a:rPr>
+              <a:t>But automating it with face recognition introduces a NEW problem, and this is the</a:t>
+            </a:r>
+          </a:p>
+          <a:p>
+            <a:pPr>
+              <a:spcAft>
+                <a:spcPts val="500"/>
+              </a:spcAft>
+            </a:pPr>
+            <a:r>
+              <a:rPr sz="1400" b="1">
+                <a:solidFill>
+                  <a:srgbClr val="1F3A6E"/>
+                </a:solidFill>
+              </a:rPr>
+              <a:t>gap our project addresses:</a:t>
+            </a:r>
+          </a:p>
+        </p:txBody>
+      </p:sp>
+      <p:sp>
+        <p:nvSpPr>
+          <p:cNvPr id="4" name="TextBox 3"/>
+          <p:cNvSpPr txBox="1"/>
+          <p:nvPr/>
+        </p:nvSpPr>
+        <p:spPr>
+          <a:xfrm>
+            <a:off x="822960" y="2834640"/>
+            <a:ext cx="10607040" cy="1280160"/>
+          </a:xfrm>
+          <a:prstGeom prst="rect">
+            <a:avLst/>
+          </a:prstGeom>
+          <a:noFill/>
+        </p:spPr>
+        <p:txBody>
+          <a:bodyPr wrap="square">
+            <a:spAutoFit/>
+          </a:bodyPr>
+          <a:lstStyle/>
+          <a:p>
+            <a:pPr>
+              <a:spcAft>
+                <a:spcPts val="500"/>
+              </a:spcAft>
+            </a:pPr>
+            <a:r>
+              <a:rPr sz="1500" b="1">
+                <a:solidFill>
+                  <a:srgbClr val="C0392B"/>
+                </a:solidFill>
+              </a:rPr>
+              <a:t>Face recognition is DESIGNED to give a photo of you the same embedding as you.</a:t>
+            </a:r>
+          </a:p>
+          <a:p>
+            <a:pPr>
+              <a:spcAft>
+                <a:spcPts val="500"/>
+              </a:spcAft>
+            </a:pPr>
+            <a:r>
+              <a:rPr sz="1500" b="1">
+                <a:solidFill>
+                  <a:srgbClr val="C0392B"/>
+                </a:solidFill>
+              </a:rPr>
+              <a:t>That is what makes it a good face model — and it is why recognition alone</a:t>
+            </a:r>
+          </a:p>
+          <a:p>
+            <a:pPr>
+              <a:spcAft>
+                <a:spcPts val="500"/>
+              </a:spcAft>
+            </a:pPr>
+            <a:r>
+              <a:rPr sz="1500" b="1">
+                <a:solidFill>
+                  <a:srgbClr val="C0392B"/>
+                </a:solidFill>
+              </a:rPr>
+              <a:t>cannot prevent proxy attendance. We tested it: a printed photo was marked</a:t>
+            </a:r>
+          </a:p>
+          <a:p>
+            <a:pPr>
+              <a:spcAft>
+                <a:spcPts val="500"/>
+              </a:spcAft>
+            </a:pPr>
+            <a:r>
+              <a:rPr sz="1500" b="1">
+                <a:solidFill>
+                  <a:srgbClr val="C0392B"/>
+                </a:solidFill>
+              </a:rPr>
+              <a:t>present 100% of the time.</a:t>
+            </a:r>
+          </a:p>
+        </p:txBody>
+      </p:sp>
+      <p:sp>
+        <p:nvSpPr>
+          <p:cNvPr id="5" name="TextBox 4"/>
+          <p:cNvSpPr txBox="1"/>
+          <p:nvPr/>
+        </p:nvSpPr>
+        <p:spPr>
+          <a:xfrm>
+            <a:off x="822960" y="4480560"/>
+            <a:ext cx="10607040" cy="1828800"/>
+          </a:xfrm>
+          <a:prstGeom prst="rect">
+            <a:avLst/>
+          </a:prstGeom>
+          <a:noFill/>
+        </p:spPr>
+        <p:txBody>
+          <a:bodyPr wrap="square">
+            <a:spAutoFit/>
+          </a:bodyPr>
+          <a:lstStyle/>
+          <a:p>
+            <a:pPr>
+              <a:spcAft>
+                <a:spcPts val="500"/>
+              </a:spcAft>
+            </a:pPr>
+            <a:r>
+              <a:rPr sz="1300" b="1">
+                <a:solidFill>
+                  <a:srgbClr val="1F3A6E"/>
+                </a:solidFill>
+              </a:rPr>
+              <a:t>Four failures a real deployment must survive</a:t>
+            </a:r>
+          </a:p>
+          <a:p>
+            <a:pPr>
+              <a:spcAft>
+                <a:spcPts val="500"/>
+              </a:spcAft>
+            </a:pPr>
+            <a:r>
+              <a:rPr sz="1300" b="0">
+                <a:solidFill>
+                  <a:srgbClr val="1A1A1A"/>
+                </a:solidFill>
+              </a:rPr>
+              <a:t>•  A photograph or phone screen held up to the camera  →  marked present</a:t>
+            </a:r>
+          </a:p>
+          <a:p>
+            <a:pPr>
+              <a:spcAft>
+                <a:spcPts val="500"/>
+              </a:spcAft>
+            </a:pPr>
+            <a:r>
+              <a:rPr sz="1300" b="0">
+                <a:solidFill>
+                  <a:srgbClr val="1A1A1A"/>
+                </a:solidFill>
+              </a:rPr>
+              <a:t>•  A stranger walking past  →  a softmax has no way to say 'nobody'</a:t>
+            </a:r>
+          </a:p>
+          <a:p>
+            <a:pPr>
+              <a:spcAft>
+                <a:spcPts val="500"/>
+              </a:spcAft>
+            </a:pPr>
+            <a:r>
+              <a:rPr sz="1300" b="0">
+                <a:solidFill>
+                  <a:srgbClr val="1A1A1A"/>
+                </a:solidFill>
+              </a:rPr>
+              <a:t>•  A student at the back of the room  →  too few pixels to identify, but still named</a:t>
+            </a:r>
+          </a:p>
+          <a:p>
+            <a:pPr>
+              <a:spcAft>
+                <a:spcPts val="500"/>
+              </a:spcAft>
+            </a:pPr>
+            <a:r>
+              <a:rPr sz="1300" b="0">
+                <a:solidFill>
+                  <a:srgbClr val="1A1A1A"/>
+                </a:solidFill>
+              </a:rPr>
+              <a:t>•  One misread frame  →  wrong student marked present for the entire day</a:t>
+            </a:r>
+          </a:p>
+        </p:txBody>
+      </p:sp>
+    </p:spTree>
+  </p:cSld>
+  <p:clrMapOvr>
+    <a:masterClrMapping/>
+  </p:clrMapOvr>
+</p:sld>
+</file>
+
+<file path=ppt/slides/slide5.xml><?xml version="1.0" encoding="utf-8"?>
+<p:sld xmlns:a="http://schemas.openxmlformats.org/drawingml/2006/main" xmlns:p="http://schemas.openxmlformats.org/presentationml/2006/main" xmlns:r="http://schemas.openxmlformats.org/officeDocument/2006/relationships">
+  <p:cSld>
+    <p:spTree>
+      <p:nvGrpSpPr>
+        <p:cNvPr id="1" name=""/>
+        <p:cNvGrpSpPr/>
+        <p:nvPr/>
+      </p:nvGrpSpPr>
+      <p:grpSpPr/>
+      <p:sp>
+        <p:nvSpPr>
+          <p:cNvPr id="2" name="TextBox 1"/>
+          <p:cNvSpPr txBox="1"/>
+          <p:nvPr/>
+        </p:nvSpPr>
+        <p:spPr>
+          <a:xfrm>
+            <a:off x="365760" y="182880"/>
+            <a:ext cx="11430000" cy="640080"/>
+          </a:xfrm>
+          <a:prstGeom prst="rect">
+            <a:avLst/>
+          </a:prstGeom>
+          <a:noFill/>
+        </p:spPr>
+        <p:txBody>
           <a:bodyPr wrap="none">
             <a:spAutoFit/>
           </a:bodyPr>
           <a:lstStyle/>
           <a:p>
-            <a:r>
-              <a:rPr sz="1050" i="1">
-                <a:solidFill>
-                  <a:srgbClr val="555F6D"/>
-                </a:solidFill>
-              </a:rPr>
-              <a:t>Protocol: 30 simulated students + 66 strangers (VGGFace2). Test images never used for enrolment; the threshold is calibrated on one half of the strangers and measured on the other.</a:t>
+            <a:pPr algn="ctr"/>
+            <a:r>
+              <a:rPr sz="2800" b="1">
+                <a:solidFill>
+                  <a:srgbClr val="1F3A6E"/>
+                </a:solidFill>
+              </a:rPr>
+              <a:t>LITERATURE REVIEW</a:t>
+            </a:r>
+          </a:p>
+        </p:txBody>
+      </p:sp>
+      <p:sp>
+        <p:nvSpPr>
+          <p:cNvPr id="3" name="TextBox 2"/>
+          <p:cNvSpPr txBox="1"/>
+          <p:nvPr/>
+        </p:nvSpPr>
+        <p:spPr>
+          <a:xfrm>
+            <a:off x="640080" y="1097280"/>
+            <a:ext cx="10972800" cy="4023360"/>
+          </a:xfrm>
+          <a:prstGeom prst="rect">
+            <a:avLst/>
+          </a:prstGeom>
+          <a:noFill/>
+        </p:spPr>
+        <p:txBody>
+          <a:bodyPr wrap="square">
+            <a:spAutoFit/>
+          </a:bodyPr>
+          <a:lstStyle/>
+          <a:p>
+            <a:pPr>
+              <a:spcAft>
+                <a:spcPts val="500"/>
+              </a:spcAft>
+            </a:pPr>
+            <a:r>
+              <a:rPr sz="1250" b="0">
+                <a:solidFill>
+                  <a:srgbClr val="1A1A1A"/>
+                </a:solidFill>
+              </a:rPr>
+              <a:t>D'Souza et al. (2019) [1] — automated attendance via histogram-based features; improves efficiency but is sensitive to lighting and pose.</a:t>
+            </a:r>
+          </a:p>
+          <a:p>
+            <a:pPr>
+              <a:spcAft>
+                <a:spcPts val="500"/>
+              </a:spcAft>
+            </a:pPr>
+          </a:p>
+          <a:p>
+            <a:pPr>
+              <a:spcAft>
+                <a:spcPts val="500"/>
+              </a:spcAft>
+            </a:pPr>
+            <a:r>
+              <a:rPr sz="1250" b="0">
+                <a:solidFill>
+                  <a:srgbClr val="1A1A1A"/>
+                </a:solidFill>
+              </a:rPr>
+              <a:t>Arsenovic et al. (2017) [2] — CNN-based deep learning for attendance; higher accuracy and real-time performance.</a:t>
+            </a:r>
+          </a:p>
+          <a:p>
+            <a:pPr>
+              <a:spcAft>
+                <a:spcPts val="500"/>
+              </a:spcAft>
+            </a:pPr>
+          </a:p>
+          <a:p>
+            <a:pPr>
+              <a:spcAft>
+                <a:spcPts val="500"/>
+              </a:spcAft>
+            </a:pPr>
+            <a:r>
+              <a:rPr sz="1250" b="0">
+                <a:solidFill>
+                  <a:srgbClr val="1A1A1A"/>
+                </a:solidFill>
+              </a:rPr>
+              <a:t>Kakarla et al. (2020) [3] — CNN smart attendance recognising multiple students under moderate pose and expression change.</a:t>
+            </a:r>
+          </a:p>
+          <a:p>
+            <a:pPr>
+              <a:spcAft>
+                <a:spcPts val="500"/>
+              </a:spcAft>
+            </a:pPr>
+          </a:p>
+          <a:p>
+            <a:pPr>
+              <a:spcAft>
+                <a:spcPts val="500"/>
+              </a:spcAft>
+            </a:pPr>
+            <a:r>
+              <a:rPr sz="1250" b="0">
+                <a:solidFill>
+                  <a:srgbClr val="1A1A1A"/>
+                </a:solidFill>
+              </a:rPr>
+              <a:t>Varadharajan et al. (2016) [4] — face-detection classroom attendance; accuracy drops under occlusion and poor lighting.</a:t>
+            </a:r>
+          </a:p>
+          <a:p>
+            <a:pPr>
+              <a:spcAft>
+                <a:spcPts val="500"/>
+              </a:spcAft>
+            </a:pPr>
+          </a:p>
+          <a:p>
+            <a:pPr>
+              <a:spcAft>
+                <a:spcPts val="500"/>
+              </a:spcAft>
+            </a:pPr>
+            <a:r>
+              <a:rPr sz="1250" b="0">
+                <a:solidFill>
+                  <a:srgbClr val="1A1A1A"/>
+                </a:solidFill>
+              </a:rPr>
+              <a:t>Siswanto et al. (2014) [5] — face biometrics as a hygienic alternative to fingerprint attendance.</a:t>
+            </a:r>
+          </a:p>
+          <a:p>
+            <a:pPr>
+              <a:spcAft>
+                <a:spcPts val="500"/>
+              </a:spcAft>
+            </a:pPr>
+          </a:p>
+          <a:p>
+            <a:pPr>
+              <a:spcAft>
+                <a:spcPts val="500"/>
+              </a:spcAft>
+            </a:pPr>
+            <a:r>
+              <a:rPr sz="1250" b="0">
+                <a:solidFill>
+                  <a:srgbClr val="1A1A1A"/>
+                </a:solidFill>
+              </a:rPr>
+              <a:t>Deng et al. (2019) [6] — ArcFace: additive angular margin loss. The 512-d embedding our system uses (pretrained and frozen — we do not claim it).</a:t>
+            </a:r>
+          </a:p>
+        </p:txBody>
+      </p:sp>
+      <p:sp>
+        <p:nvSpPr>
+          <p:cNvPr id="4" name="TextBox 3"/>
+          <p:cNvSpPr txBox="1"/>
+          <p:nvPr/>
+        </p:nvSpPr>
+        <p:spPr>
+          <a:xfrm>
+            <a:off x="640080" y="5394960"/>
+            <a:ext cx="10972800" cy="1005840"/>
+          </a:xfrm>
+          <a:prstGeom prst="rect">
+            <a:avLst/>
+          </a:prstGeom>
+          <a:noFill/>
+        </p:spPr>
+        <p:txBody>
+          <a:bodyPr wrap="square">
+            <a:spAutoFit/>
+          </a:bodyPr>
+          <a:lstStyle/>
+          <a:p>
+            <a:pPr>
+              <a:spcAft>
+                <a:spcPts val="500"/>
+              </a:spcAft>
+            </a:pPr>
+            <a:r>
+              <a:rPr sz="1250" b="1">
+                <a:solidFill>
+                  <a:srgbClr val="C0392B"/>
+                </a:solidFill>
+              </a:rPr>
+              <a:t>RESEARCH GAP</a:t>
+            </a:r>
+          </a:p>
+          <a:p>
+            <a:pPr>
+              <a:spcAft>
+                <a:spcPts val="500"/>
+              </a:spcAft>
+            </a:pPr>
+            <a:r>
+              <a:rPr sz="1250" b="1">
+                <a:solidFill>
+                  <a:srgbClr val="C0392B"/>
+                </a:solidFill>
+              </a:rPr>
+              <a:t>Every attendance paper above reports one accuracy number on clean data. None of them test a presentation attack, none report a stranger-rejection rate, and none treat 'recognised' and 'marked present' as different decisions. That gap is our project.</a:t>
+            </a:r>
+          </a:p>
+        </p:txBody>
+      </p:sp>
+    </p:spTree>
+  </p:cSld>
+  <p:clrMapOvr>
+    <a:masterClrMapping/>
+  </p:clrMapOvr>
+</p:sld>
+</file>
+
+<file path=ppt/slides/slide6.xml><?xml version="1.0" encoding="utf-8"?>
+<p:sld xmlns:a="http://schemas.openxmlformats.org/drawingml/2006/main" xmlns:p="http://schemas.openxmlformats.org/presentationml/2006/main" xmlns:r="http://schemas.openxmlformats.org/officeDocument/2006/relationships">
+  <p:cSld>
+    <p:spTree>
+      <p:nvGrpSpPr>
+        <p:cNvPr id="1" name=""/>
+        <p:cNvGrpSpPr/>
+        <p:nvPr/>
+      </p:nvGrpSpPr>
+      <p:grpSpPr/>
+      <p:sp>
+        <p:nvSpPr>
+          <p:cNvPr id="2" name="TextBox 1"/>
+          <p:cNvSpPr txBox="1"/>
+          <p:nvPr/>
+        </p:nvSpPr>
+        <p:spPr>
+          <a:xfrm>
+            <a:off x="365760" y="182880"/>
+            <a:ext cx="11430000" cy="640080"/>
+          </a:xfrm>
+          <a:prstGeom prst="rect">
+            <a:avLst/>
+          </a:prstGeom>
+          <a:noFill/>
+        </p:spPr>
+        <p:txBody>
+          <a:bodyPr wrap="none">
+            <a:spAutoFit/>
+          </a:bodyPr>
+          <a:lstStyle/>
+          <a:p>
+            <a:pPr algn="ctr"/>
+            <a:r>
+              <a:rPr sz="2800" b="1">
+                <a:solidFill>
+                  <a:srgbClr val="1F3A6E"/>
+                </a:solidFill>
+              </a:rPr>
+              <a:t>PROPOSED METHODOLOGY</a:t>
+            </a:r>
+          </a:p>
+        </p:txBody>
+      </p:sp>
+      <p:sp>
+        <p:nvSpPr>
+          <p:cNvPr id="3" name="TextBox 2"/>
+          <p:cNvSpPr txBox="1"/>
+          <p:nvPr/>
+        </p:nvSpPr>
+        <p:spPr>
+          <a:xfrm>
+            <a:off x="640080" y="1097280"/>
+            <a:ext cx="5760720" cy="2743200"/>
+          </a:xfrm>
+          <a:prstGeom prst="rect">
+            <a:avLst/>
+          </a:prstGeom>
+          <a:noFill/>
+        </p:spPr>
+        <p:txBody>
+          <a:bodyPr wrap="square">
+            <a:spAutoFit/>
+          </a:bodyPr>
+          <a:lstStyle/>
+          <a:p>
+            <a:pPr>
+              <a:spcAft>
+                <a:spcPts val="500"/>
+              </a:spcAft>
+            </a:pPr>
+            <a:r>
+              <a:rPr sz="1250" b="1">
+                <a:solidFill>
+                  <a:srgbClr val="1F3A6E"/>
+                </a:solidFill>
+              </a:rPr>
+              <a:t>How it works</a:t>
+            </a:r>
+          </a:p>
+          <a:p>
+            <a:pPr>
+              <a:spcAft>
+                <a:spcPts val="500"/>
+              </a:spcAft>
+            </a:pPr>
+            <a:r>
+              <a:rPr sz="1250" b="0">
+                <a:solidFill>
+                  <a:srgbClr val="1A1A1A"/>
+                </a:solidFill>
+              </a:rPr>
+              <a:t>Every face in the frame is detected, embedded (512-d) and matched against each</a:t>
+            </a:r>
+          </a:p>
+          <a:p>
+            <a:pPr>
+              <a:spcAft>
+                <a:spcPts val="500"/>
+              </a:spcAft>
+            </a:pPr>
+            <a:r>
+              <a:rPr sz="1250" b="0">
+                <a:solidFill>
+                  <a:srgbClr val="1A1A1A"/>
+                </a:solidFill>
+              </a:rPr>
+              <a:t>enrolled student's centroid. A face must then pass FOUR gates before the system is</a:t>
+            </a:r>
+          </a:p>
+          <a:p>
+            <a:pPr>
+              <a:spcAft>
+                <a:spcPts val="500"/>
+              </a:spcAft>
+            </a:pPr>
+            <a:r>
+              <a:rPr sz="1250" b="0">
+                <a:solidFill>
+                  <a:srgbClr val="1A1A1A"/>
+                </a:solidFill>
+              </a:rPr>
+              <a:t>willing to put a name on it — and several frames must agree before attendance is</a:t>
+            </a:r>
+          </a:p>
+          <a:p>
+            <a:pPr>
+              <a:spcAft>
+                <a:spcPts val="500"/>
+              </a:spcAft>
+            </a:pPr>
+            <a:r>
+              <a:rPr sz="1250" b="0">
+                <a:solidFill>
+                  <a:srgbClr val="1A1A1A"/>
+                </a:solidFill>
+              </a:rPr>
+              <a:t>written. Records go to CSV; nothing leaves the machine.</a:t>
+            </a:r>
+          </a:p>
+          <a:p>
+            <a:pPr>
+              <a:spcAft>
+                <a:spcPts val="500"/>
+              </a:spcAft>
+            </a:pPr>
+          </a:p>
+          <a:p>
+            <a:pPr>
+              <a:spcAft>
+                <a:spcPts val="500"/>
+              </a:spcAft>
+            </a:pPr>
+            <a:r>
+              <a:rPr sz="1250" b="1">
+                <a:solidFill>
+                  <a:srgbClr val="1F3A6E"/>
+                </a:solidFill>
+              </a:rPr>
+              <a:t>Problem addressed</a:t>
+            </a:r>
+          </a:p>
+          <a:p>
+            <a:pPr>
+              <a:spcAft>
+                <a:spcPts val="500"/>
+              </a:spcAft>
+            </a:pPr>
+            <a:r>
+              <a:rPr sz="1250" b="0">
+                <a:solidFill>
+                  <a:srgbClr val="1A1A1A"/>
+                </a:solidFill>
+              </a:rPr>
+              <a:t>Replaces manual roll-call, eliminates the signed-register proxy, rejects strangers,</a:t>
+            </a:r>
+          </a:p>
+          <a:p>
+            <a:pPr>
+              <a:spcAft>
+                <a:spcPts val="500"/>
+              </a:spcAft>
+            </a:pPr>
+            <a:r>
+              <a:rPr sz="1250" b="0">
+                <a:solidFill>
+                  <a:srgbClr val="1A1A1A"/>
+                </a:solidFill>
+              </a:rPr>
+              <a:t>and blocks the photo/screen proxy that defeats ordinary face recognition.</a:t>
+            </a:r>
+          </a:p>
+        </p:txBody>
+      </p:sp>
+      <p:sp>
+        <p:nvSpPr>
+          <p:cNvPr id="4" name="TextBox 3"/>
+          <p:cNvSpPr txBox="1"/>
+          <p:nvPr/>
+        </p:nvSpPr>
+        <p:spPr>
+          <a:xfrm>
+            <a:off x="6583680" y="1097280"/>
+            <a:ext cx="5120640" cy="5120640"/>
+          </a:xfrm>
+          <a:prstGeom prst="rect">
+            <a:avLst/>
+          </a:prstGeom>
+          <a:noFill/>
+        </p:spPr>
+        <p:txBody>
+          <a:bodyPr wrap="square">
+            <a:spAutoFit/>
+          </a:bodyPr>
+          <a:lstStyle/>
+          <a:p>
+            <a:pPr>
+              <a:spcAft>
+                <a:spcPts val="500"/>
+              </a:spcAft>
+            </a:pPr>
+            <a:r>
+              <a:rPr sz="1100" b="1">
+                <a:solidFill>
+                  <a:srgbClr val="1F3A6E"/>
+                </a:solidFill>
+              </a:rPr>
+              <a:t>Innovation and uniqueness — stated honestly</a:t>
+            </a:r>
+          </a:p>
+          <a:p>
+            <a:pPr>
+              <a:spcAft>
+                <a:spcPts val="500"/>
+              </a:spcAft>
+            </a:pPr>
+          </a:p>
+          <a:p>
+            <a:pPr>
+              <a:spcAft>
+                <a:spcPts val="500"/>
+              </a:spcAft>
+            </a:pPr>
+            <a:r>
+              <a:rPr sz="1100" b="1">
+                <a:solidFill>
+                  <a:srgbClr val="C0392B"/>
+                </a:solidFill>
+              </a:rPr>
+              <a:t>We do NOT claim a new face-recognition model.</a:t>
+            </a:r>
+          </a:p>
+          <a:p>
+            <a:pPr>
+              <a:spcAft>
+                <a:spcPts val="500"/>
+              </a:spcAft>
+            </a:pPr>
+            <a:r>
+              <a:rPr sz="1100" b="0">
+                <a:solidFill>
+                  <a:srgbClr val="1A1A1A"/>
+                </a:solidFill>
+              </a:rPr>
+              <a:t>ArcFace is pretrained and frozen. Training our own on 30 students would need a GPU,</a:t>
+            </a:r>
+          </a:p>
+          <a:p>
+            <a:pPr>
+              <a:spcAft>
+                <a:spcPts val="500"/>
+              </a:spcAft>
+            </a:pPr>
+            <a:r>
+              <a:rPr sz="1100" b="0">
+                <a:solidFill>
+                  <a:srgbClr val="1A1A1A"/>
+                </a:solidFill>
+              </a:rPr>
+              <a:t>thousands of images per person, and would still name a stranger every time.</a:t>
+            </a:r>
+          </a:p>
+          <a:p>
+            <a:pPr>
+              <a:spcAft>
+                <a:spcPts val="500"/>
+              </a:spcAft>
+            </a:pPr>
+          </a:p>
+          <a:p>
+            <a:pPr>
+              <a:spcAft>
+                <a:spcPts val="500"/>
+              </a:spcAft>
+            </a:pPr>
+            <a:r>
+              <a:rPr sz="1100" b="1">
+                <a:solidFill>
+                  <a:srgbClr val="1E8E5A"/>
+                </a:solidFill>
+              </a:rPr>
+              <a:t>What IS ours:</a:t>
+            </a:r>
+          </a:p>
+          <a:p>
+            <a:pPr>
+              <a:spcAft>
+                <a:spcPts val="500"/>
+              </a:spcAft>
+            </a:pPr>
+            <a:r>
+              <a:rPr sz="1100" b="0">
+                <a:solidFill>
+                  <a:srgbClr val="1A1A1A"/>
+                </a:solidFill>
+              </a:rPr>
+              <a:t>•  Liveness that works on classroom hardware. Blink detection is the standard trick, but a blink lasts ~0.3 s and our system samples ~1.4 frames/s — we measured it failing. So we measure facial motion from landmarks the detector already produces: a live face keeps deforming, a photo is rigid. Rotation and scale are normalised away, so waving the photo does not help the attacker. No extra model. No GPU.</a:t>
+            </a:r>
+          </a:p>
+          <a:p>
+            <a:pPr>
+              <a:spcAft>
+                <a:spcPts val="500"/>
+              </a:spcAft>
+            </a:pPr>
+            <a:r>
+              <a:rPr sz="1100" b="0">
+                <a:solidFill>
+                  <a:srgbClr val="1A1A1A"/>
+                </a:solidFill>
+              </a:rPr>
+              <a:t>•  A threshold calibrated on 2,880 impostor faces, not hand-picked.</a:t>
+            </a:r>
+          </a:p>
+          <a:p>
+            <a:pPr>
+              <a:spcAft>
+                <a:spcPts val="500"/>
+              </a:spcAft>
+            </a:pPr>
+            <a:r>
+              <a:rPr sz="1100" b="0">
+                <a:solidFill>
+                  <a:srgbClr val="1A1A1A"/>
+                </a:solidFill>
+              </a:rPr>
+              <a:t>•  Attendance treated as an irreversible commit needing agreement across frames.</a:t>
+            </a:r>
+          </a:p>
+          <a:p>
+            <a:pPr>
+              <a:spcAft>
+                <a:spcPts val="500"/>
+              </a:spcAft>
+            </a:pPr>
+            <a:r>
+              <a:rPr sz="1100" b="0">
+                <a:solidFill>
+                  <a:srgbClr val="1A1A1A"/>
+                </a:solidFill>
+              </a:rPr>
+              <a:t>•  Enrolment in 1.4 s (was 607 s) by caching embeddings.</a:t>
+            </a:r>
+          </a:p>
+          <a:p>
+            <a:pPr>
+              <a:spcAft>
+                <a:spcPts val="500"/>
+              </a:spcAft>
+            </a:pPr>
+            <a:r>
+              <a:rPr sz="1100" b="0">
+                <a:solidFill>
+                  <a:srgbClr val="1A1A1A"/>
+                </a:solidFill>
+              </a:rPr>
+              <a:t>•  A guard that did NOT work (top-2 margin) — reported, not hidden.</a:t>
+            </a:r>
+          </a:p>
+        </p:txBody>
+      </p:sp>
+    </p:spTree>
+  </p:cSld>
+  <p:clrMapOvr>
+    <a:masterClrMapping/>
+  </p:clrMapOvr>
+</p:sld>
+</file>
+
+<file path=ppt/slides/slide7.xml><?xml version="1.0" encoding="utf-8"?>
+<p:sld xmlns:a="http://schemas.openxmlformats.org/drawingml/2006/main" xmlns:p="http://schemas.openxmlformats.org/presentationml/2006/main" xmlns:r="http://schemas.openxmlformats.org/officeDocument/2006/relationships">
+  <p:cSld>
+    <p:spTree>
+      <p:nvGrpSpPr>
+        <p:cNvPr id="1" name=""/>
+        <p:cNvGrpSpPr/>
+        <p:nvPr/>
+      </p:nvGrpSpPr>
+      <p:grpSpPr/>
+      <p:sp>
+        <p:nvSpPr>
+          <p:cNvPr id="2" name="TextBox 1"/>
+          <p:cNvSpPr txBox="1"/>
+          <p:nvPr/>
+        </p:nvSpPr>
+        <p:spPr>
+          <a:xfrm>
+            <a:off x="365760" y="182880"/>
+            <a:ext cx="11430000" cy="640080"/>
+          </a:xfrm>
+          <a:prstGeom prst="rect">
+            <a:avLst/>
+          </a:prstGeom>
+          <a:noFill/>
+        </p:spPr>
+        <p:txBody>
+          <a:bodyPr wrap="none">
+            <a:spAutoFit/>
+          </a:bodyPr>
+          <a:lstStyle/>
+          <a:p>
+            <a:pPr algn="ctr"/>
+            <a:r>
+              <a:rPr sz="2800" b="1">
+                <a:solidFill>
+                  <a:srgbClr val="1F3A6E"/>
+                </a:solidFill>
+              </a:rPr>
+              <a:t>EXPERIMENTAL DETAILS</a:t>
             </a:r>
           </a:p>
         </p:txBody>
       </p:sp>
       <p:pic>
         <p:nvPicPr>
-          <p:cNvPr id="4" name="Picture 3" descr="spoof.png"/>
+          <p:cNvPr id="3" name="Picture 2" descr="workflow.png"/>
           <p:cNvPicPr>
             <a:picLocks noChangeAspect="1"/>
           </p:cNvPicPr>
@@ -4325,8 +5115,444 @@
         </p:blipFill>
         <p:spPr>
           <a:xfrm>
-            <a:off x="457200" y="1371600"/>
-            <a:ext cx="3200400" cy="2286000"/>
+            <a:off x="365760" y="868680"/>
+            <a:ext cx="11430000" cy="2286000"/>
+          </a:xfrm>
+          <a:prstGeom prst="rect">
+            <a:avLst/>
+          </a:prstGeom>
+        </p:spPr>
+      </p:pic>
+      <p:sp>
+        <p:nvSpPr>
+          <p:cNvPr id="4" name="TextBox 3"/>
+          <p:cNvSpPr txBox="1"/>
+          <p:nvPr/>
+        </p:nvSpPr>
+        <p:spPr>
+          <a:xfrm>
+            <a:off x="640080" y="3017520"/>
+            <a:ext cx="5303520" cy="3291840"/>
+          </a:xfrm>
+          <a:prstGeom prst="rect">
+            <a:avLst/>
+          </a:prstGeom>
+          <a:noFill/>
+        </p:spPr>
+        <p:txBody>
+          <a:bodyPr wrap="square">
+            <a:spAutoFit/>
+          </a:bodyPr>
+          <a:lstStyle/>
+          <a:p>
+            <a:pPr>
+              <a:spcAft>
+                <a:spcPts val="500"/>
+              </a:spcAft>
+            </a:pPr>
+            <a:r>
+              <a:rPr sz="1200" b="1">
+                <a:solidFill>
+                  <a:srgbClr val="1F3A6E"/>
+                </a:solidFill>
+              </a:rPr>
+              <a:t>Technologies</a:t>
+            </a:r>
+          </a:p>
+          <a:p>
+            <a:pPr>
+              <a:spcAft>
+                <a:spcPts val="500"/>
+              </a:spcAft>
+            </a:pPr>
+            <a:r>
+              <a:rPr sz="1200" b="0">
+                <a:solidFill>
+                  <a:srgbClr val="1A1A1A"/>
+                </a:solidFill>
+              </a:rPr>
+              <a:t>Language:  Python 3.13</a:t>
+            </a:r>
+          </a:p>
+          <a:p>
+            <a:pPr>
+              <a:spcAft>
+                <a:spcPts val="500"/>
+              </a:spcAft>
+            </a:pPr>
+            <a:r>
+              <a:rPr sz="1200" b="0">
+                <a:solidFill>
+                  <a:srgbClr val="1A1A1A"/>
+                </a:solidFill>
+              </a:rPr>
+              <a:t>Detection:  RetinaFace / SCRFD (det_10g)</a:t>
+            </a:r>
+          </a:p>
+          <a:p>
+            <a:pPr>
+              <a:spcAft>
+                <a:spcPts val="500"/>
+              </a:spcAft>
+            </a:pPr>
+            <a:r>
+              <a:rPr sz="1200" b="0">
+                <a:solidFill>
+                  <a:srgbClr val="1A1A1A"/>
+                </a:solidFill>
+              </a:rPr>
+              <a:t>Recognition:  ArcFace ResNet-50 (buffalo_l) → 512-d</a:t>
+            </a:r>
+          </a:p>
+          <a:p>
+            <a:pPr>
+              <a:spcAft>
+                <a:spcPts val="500"/>
+              </a:spcAft>
+            </a:pPr>
+            <a:r>
+              <a:rPr sz="1200" b="0">
+                <a:solidFill>
+                  <a:srgbClr val="1A1A1A"/>
+                </a:solidFill>
+              </a:rPr>
+              <a:t>Runtime:  ONNX Runtime — CPU only, no GPU</a:t>
+            </a:r>
+          </a:p>
+          <a:p>
+            <a:pPr>
+              <a:spcAft>
+                <a:spcPts val="500"/>
+              </a:spcAft>
+            </a:pPr>
+            <a:r>
+              <a:rPr sz="1200" b="0">
+                <a:solidFill>
+                  <a:srgbClr val="1A1A1A"/>
+                </a:solidFill>
+              </a:rPr>
+              <a:t>Classifier:  linear SVM + cosine-to-centroid (scikit-learn)</a:t>
+            </a:r>
+          </a:p>
+          <a:p>
+            <a:pPr>
+              <a:spcAft>
+                <a:spcPts val="500"/>
+              </a:spcAft>
+            </a:pPr>
+            <a:r>
+              <a:rPr sz="1200" b="0">
+                <a:solidFill>
+                  <a:srgbClr val="1A1A1A"/>
+                </a:solidFill>
+              </a:rPr>
+              <a:t>Backend:  Flask REST API, token authentication</a:t>
+            </a:r>
+          </a:p>
+          <a:p>
+            <a:pPr>
+              <a:spcAft>
+                <a:spcPts val="500"/>
+              </a:spcAft>
+            </a:pPr>
+            <a:r>
+              <a:rPr sz="1200" b="0">
+                <a:solidFill>
+                  <a:srgbClr val="1A1A1A"/>
+                </a:solidFill>
+              </a:rPr>
+              <a:t>Frontend:  React · Vite · TailwindCSS</a:t>
+            </a:r>
+          </a:p>
+          <a:p>
+            <a:pPr>
+              <a:spcAft>
+                <a:spcPts val="500"/>
+              </a:spcAft>
+            </a:pPr>
+            <a:r>
+              <a:rPr sz="1200" b="0">
+                <a:solidFill>
+                  <a:srgbClr val="1A1A1A"/>
+                </a:solidFill>
+              </a:rPr>
+              <a:t>Storage:  CSV + JSON on disk — no cloud, no DB server</a:t>
+            </a:r>
+          </a:p>
+        </p:txBody>
+      </p:sp>
+      <p:sp>
+        <p:nvSpPr>
+          <p:cNvPr id="5" name="TextBox 4"/>
+          <p:cNvSpPr txBox="1"/>
+          <p:nvPr/>
+        </p:nvSpPr>
+        <p:spPr>
+          <a:xfrm>
+            <a:off x="6309360" y="3017520"/>
+            <a:ext cx="5394960" cy="3291840"/>
+          </a:xfrm>
+          <a:prstGeom prst="rect">
+            <a:avLst/>
+          </a:prstGeom>
+          <a:noFill/>
+        </p:spPr>
+        <p:txBody>
+          <a:bodyPr wrap="square">
+            <a:spAutoFit/>
+          </a:bodyPr>
+          <a:lstStyle/>
+          <a:p>
+            <a:pPr>
+              <a:spcAft>
+                <a:spcPts val="500"/>
+              </a:spcAft>
+            </a:pPr>
+            <a:r>
+              <a:rPr sz="1150" b="1">
+                <a:solidFill>
+                  <a:srgbClr val="1F3A6E"/>
+                </a:solidFill>
+              </a:rPr>
+              <a:t>Experimental protocol</a:t>
+            </a:r>
+          </a:p>
+          <a:p>
+            <a:pPr>
+              <a:spcAft>
+                <a:spcPts val="500"/>
+              </a:spcAft>
+            </a:pPr>
+            <a:r>
+              <a:rPr sz="1150" b="0">
+                <a:solidFill>
+                  <a:srgbClr val="1A1A1A"/>
+                </a:solidFill>
+              </a:rPr>
+              <a:t>96 VGGFace2 identities → 30 simulated 'students' + 66 'strangers'.</a:t>
+            </a:r>
+          </a:p>
+          <a:p>
+            <a:pPr>
+              <a:spcAft>
+                <a:spcPts val="500"/>
+              </a:spcAft>
+            </a:pPr>
+            <a:r>
+              <a:rPr sz="1150" b="0">
+                <a:solidFill>
+                  <a:srgbClr val="1A1A1A"/>
+                </a:solidFill>
+              </a:rPr>
+              <a:t>Student images split 70/30: enrolment vs held-out test images.</a:t>
+            </a:r>
+          </a:p>
+          <a:p>
+            <a:pPr>
+              <a:spcAft>
+                <a:spcPts val="500"/>
+              </a:spcAft>
+            </a:pPr>
+            <a:r>
+              <a:rPr sz="1150" b="0">
+                <a:solidFill>
+                  <a:srgbClr val="1A1A1A"/>
+                </a:solidFill>
+              </a:rPr>
+              <a:t>Strangers split in half: one half calibrates the threshold,</a:t>
+            </a:r>
+          </a:p>
+          <a:p>
+            <a:pPr>
+              <a:spcAft>
+                <a:spcPts val="500"/>
+              </a:spcAft>
+            </a:pPr>
+            <a:r>
+              <a:rPr sz="1150" b="0">
+                <a:solidFill>
+                  <a:srgbClr val="1A1A1A"/>
+                </a:solidFill>
+              </a:rPr>
+              <a:t>the other half measures it.</a:t>
+            </a:r>
+          </a:p>
+          <a:p>
+            <a:pPr>
+              <a:spcAft>
+                <a:spcPts val="500"/>
+              </a:spcAft>
+            </a:pPr>
+          </a:p>
+          <a:p>
+            <a:pPr>
+              <a:spcAft>
+                <a:spcPts val="500"/>
+              </a:spcAft>
+            </a:pPr>
+            <a:r>
+              <a:rPr sz="1150" b="1">
+                <a:solidFill>
+                  <a:srgbClr val="C0392B"/>
+                </a:solidFill>
+              </a:rPr>
+              <a:t>Both splits are essential.</a:t>
+            </a:r>
+          </a:p>
+          <a:p>
+            <a:pPr>
+              <a:spcAft>
+                <a:spcPts val="500"/>
+              </a:spcAft>
+            </a:pPr>
+            <a:r>
+              <a:rPr sz="1150" b="0">
+                <a:solidFill>
+                  <a:srgbClr val="1A1A1A"/>
+                </a:solidFill>
+              </a:rPr>
+              <a:t>Scoring a face against a centroid built from that same face gives</a:t>
+            </a:r>
+          </a:p>
+          <a:p>
+            <a:pPr>
+              <a:spcAft>
+                <a:spcPts val="500"/>
+              </a:spcAft>
+            </a:pPr>
+            <a:r>
+              <a:rPr sz="1150" b="0">
+                <a:solidFill>
+                  <a:srgbClr val="1A1A1A"/>
+                </a:solidFill>
+              </a:rPr>
+              <a:t>100% and proves nothing. A threshold tuned on the same strangers</a:t>
+            </a:r>
+          </a:p>
+          <a:p>
+            <a:pPr>
+              <a:spcAft>
+                <a:spcPts val="500"/>
+              </a:spcAft>
+            </a:pPr>
+            <a:r>
+              <a:rPr sz="1150" b="0">
+                <a:solidFill>
+                  <a:srgbClr val="1A1A1A"/>
+                </a:solidFill>
+              </a:rPr>
+              <a:t>you then report a false-accept rate against is not a measurement.</a:t>
+            </a:r>
+          </a:p>
+          <a:p>
+            <a:pPr>
+              <a:spcAft>
+                <a:spcPts val="500"/>
+              </a:spcAft>
+            </a:pPr>
+          </a:p>
+          <a:p>
+            <a:pPr>
+              <a:spcAft>
+                <a:spcPts val="500"/>
+              </a:spcAft>
+            </a:pPr>
+            <a:r>
+              <a:rPr sz="1150" b="0">
+                <a:solidFill>
+                  <a:srgbClr val="1A1A1A"/>
+                </a:solidFill>
+              </a:rPr>
+              <a:t>Hardware: MacBook Air, CPU only. 2 real users enrolled for the</a:t>
+            </a:r>
+          </a:p>
+          <a:p>
+            <a:pPr>
+              <a:spcAft>
+                <a:spcPts val="500"/>
+              </a:spcAft>
+            </a:pPr>
+            <a:r>
+              <a:rPr sz="1150" b="0">
+                <a:solidFill>
+                  <a:srgbClr val="1A1A1A"/>
+                </a:solidFill>
+              </a:rPr>
+              <a:t>live deployment demo.</a:t>
+            </a:r>
+          </a:p>
+        </p:txBody>
+      </p:sp>
+    </p:spTree>
+  </p:cSld>
+  <p:clrMapOvr>
+    <a:masterClrMapping/>
+  </p:clrMapOvr>
+</p:sld>
+</file>
+
+<file path=ppt/slides/slide8.xml><?xml version="1.0" encoding="utf-8"?>
+<p:sld xmlns:a="http://schemas.openxmlformats.org/drawingml/2006/main" xmlns:p="http://schemas.openxmlformats.org/presentationml/2006/main" xmlns:r="http://schemas.openxmlformats.org/officeDocument/2006/relationships">
+  <p:cSld>
+    <p:spTree>
+      <p:nvGrpSpPr>
+        <p:cNvPr id="1" name=""/>
+        <p:cNvGrpSpPr/>
+        <p:nvPr/>
+      </p:nvGrpSpPr>
+      <p:grpSpPr/>
+      <p:sp>
+        <p:nvSpPr>
+          <p:cNvPr id="2" name="TextBox 1"/>
+          <p:cNvSpPr txBox="1"/>
+          <p:nvPr/>
+        </p:nvSpPr>
+        <p:spPr>
+          <a:xfrm>
+            <a:off x="365760" y="182880"/>
+            <a:ext cx="11430000" cy="640080"/>
+          </a:xfrm>
+          <a:prstGeom prst="rect">
+            <a:avLst/>
+          </a:prstGeom>
+          <a:noFill/>
+        </p:spPr>
+        <p:txBody>
+          <a:bodyPr wrap="none">
+            <a:spAutoFit/>
+          </a:bodyPr>
+          <a:lstStyle/>
+          <a:p>
+            <a:pPr algn="ctr"/>
+            <a:r>
+              <a:rPr sz="2800" b="1">
+                <a:solidFill>
+                  <a:srgbClr val="1F3A6E"/>
+                </a:solidFill>
+              </a:rPr>
+              <a:t>RESULTS AND ANALYSIS</a:t>
+            </a:r>
+          </a:p>
+        </p:txBody>
+      </p:sp>
+      <p:pic>
+        <p:nvPicPr>
+          <p:cNvPr id="3" name="Picture 2" descr="spoof.png"/>
+          <p:cNvPicPr>
+            <a:picLocks noChangeAspect="1"/>
+          </p:cNvPicPr>
+          <p:nvPr/>
+        </p:nvPicPr>
+        <p:blipFill>
+          <a:blip r:embed="rId2"/>
+          <a:stretch>
+            <a:fillRect/>
+          </a:stretch>
+        </p:blipFill>
+        <p:spPr>
+          <a:xfrm>
+            <a:off x="365760" y="914400"/>
+            <a:ext cx="3072384" cy="2194560"/>
           </a:xfrm>
           <a:prstGeom prst="rect">
             <a:avLst/>
@@ -4335,7 +5561,7 @@
       </p:pic>
       <p:pic>
         <p:nvPicPr>
-          <p:cNvPr id="5" name="Picture 4" descr="ablation.png"/>
+          <p:cNvPr id="4" name="Picture 3" descr="ablation.png"/>
           <p:cNvPicPr>
             <a:picLocks noChangeAspect="1"/>
           </p:cNvPicPr>
@@ -4349,8 +5575,8 @@
         </p:blipFill>
         <p:spPr>
           <a:xfrm>
-            <a:off x="4023360" y="1371600"/>
-            <a:ext cx="4876800" cy="2286000"/>
+            <a:off x="3749039" y="914400"/>
+            <a:ext cx="4535424" cy="2194560"/>
           </a:xfrm>
           <a:prstGeom prst="rect">
             <a:avLst/>
@@ -4359,7 +5585,7 @@
       </p:pic>
       <p:pic>
         <p:nvPicPr>
-          <p:cNvPr id="6" name="Picture 5" descr="degradation.png"/>
+          <p:cNvPr id="5" name="Picture 4" descr="degradation.png"/>
           <p:cNvPicPr>
             <a:picLocks noChangeAspect="1"/>
           </p:cNvPicPr>
@@ -4373,8 +5599,8 @@
         </p:blipFill>
         <p:spPr>
           <a:xfrm>
-            <a:off x="8686800" y="1371600"/>
-            <a:ext cx="3501390" cy="2286000"/>
+            <a:off x="8412480" y="914400"/>
+            <a:ext cx="3218688" cy="2194560"/>
           </a:xfrm>
           <a:prstGeom prst="rect">
             <a:avLst/>
@@ -4383,15 +5609,15 @@
       </p:pic>
       <p:graphicFrame>
         <p:nvGraphicFramePr>
-          <p:cNvPr id="7" name="Table 6"/>
+          <p:cNvPr id="6" name="Table 5"/>
           <p:cNvGraphicFramePr>
             <a:graphicFrameLocks noGrp="1"/>
           </p:cNvGraphicFramePr>
           <p:nvPr/>
         </p:nvGraphicFramePr>
         <p:xfrm>
-          <a:off x="457200" y="3931920"/>
-          <a:ext cx="6766560" cy="2194560"/>
+          <a:off x="457200" y="3383280"/>
+          <a:ext cx="6400800" cy="2194560"/>
         </p:xfrm>
         <a:graphic>
           <a:graphicData uri="http://schemas.openxmlformats.org/drawingml/2006/table">
@@ -4400,9 +5626,9 @@
                 <a:tableStyleId>{5C22544A-7EE6-4342-B048-85BDC9FD1C3A}</a:tableStyleId>
               </a:tblPr>
               <a:tblGrid>
-                <a:gridCol w="3657600"/>
-                <a:gridCol w="1554480"/>
-                <a:gridCol w="1554480"/>
+                <a:gridCol w="3474720"/>
+                <a:gridCol w="1463040"/>
+                <a:gridCol w="1463040"/>
               </a:tblGrid>
               <a:tr h="365760">
                 <a:tc>
@@ -4633,7 +5859,7 @@
                     <a:p>
                       <a:r>
                         <a:rPr sz="1100" b="0"/>
-                        <a:t>Time to mark a student present</a:t>
+                        <a:t>Time to mark present</a:t>
                       </a:r>
                     </a:p>
                   </a:txBody>
@@ -4676,14 +5902,14 @@
       </p:graphicFrame>
       <p:sp>
         <p:nvSpPr>
-          <p:cNvPr id="8" name="TextBox 7"/>
+          <p:cNvPr id="7" name="TextBox 6"/>
           <p:cNvSpPr txBox="1"/>
           <p:nvPr/>
         </p:nvSpPr>
         <p:spPr>
           <a:xfrm>
-            <a:off x="7498079" y="3931920"/>
-            <a:ext cx="4297680" cy="2468880"/>
+            <a:off x="7132320" y="3383280"/>
+            <a:ext cx="4663440" cy="2926080"/>
           </a:xfrm>
           <a:prstGeom prst="rect">
             <a:avLst/>
@@ -4702,67 +5928,67 @@
               </a:spcAft>
             </a:pPr>
             <a:r>
-              <a:rPr sz="1050" b="1">
+              <a:rPr sz="1100" b="1">
                 <a:solidFill>
                   <a:srgbClr val="1F3A6E"/>
                 </a:solidFill>
               </a:rPr>
-              <a:t>Capacity (measured, laptop CPU, no GPU)</a:t>
-            </a:r>
-          </a:p>
-          <a:p>
-            <a:pPr>
-              <a:spcAft>
-                <a:spcPts val="500"/>
-              </a:spcAft>
-            </a:pPr>
-            <a:r>
-              <a:rPr sz="1050" b="0">
-                <a:solidFill>
-                  <a:srgbClr val="1A1A1A"/>
-                </a:solidFill>
-              </a:rPr>
-              <a:t>16 faces recognised in one frame in 1.271s</a:t>
-            </a:r>
-          </a:p>
-          <a:p>
-            <a:pPr>
-              <a:spcAft>
-                <a:spcPts val="500"/>
-              </a:spcAft>
-            </a:pPr>
-            <a:r>
-              <a:rPr sz="1050" b="0">
-                <a:solidFill>
-                  <a:srgbClr val="1A1A1A"/>
-                </a:solidFill>
-              </a:rPr>
-              <a:t>10,000 enrolled students add only 1.2 ms to a match</a:t>
-            </a:r>
-          </a:p>
-          <a:p>
-            <a:pPr>
-              <a:spcAft>
-                <a:spcPts val="500"/>
-              </a:spcAft>
-            </a:pPr>
-            <a:r>
-              <a:rPr sz="1050" b="0">
-                <a:solidFill>
-                  <a:srgbClr val="1A1A1A"/>
-                </a:solidFill>
-              </a:rPr>
-              <a:t>One 1080p camera covers ~7 m — a whole classroom</a:t>
-            </a:r>
-          </a:p>
-          <a:p>
-            <a:pPr>
-              <a:spcAft>
-                <a:spcPts val="500"/>
-              </a:spcAft>
-            </a:pPr>
-            <a:r>
-              <a:rPr sz="1050" b="0">
+              <a:t>Capacity (laptop CPU, no GPU)</a:t>
+            </a:r>
+          </a:p>
+          <a:p>
+            <a:pPr>
+              <a:spcAft>
+                <a:spcPts val="500"/>
+              </a:spcAft>
+            </a:pPr>
+            <a:r>
+              <a:rPr sz="1100" b="0">
+                <a:solidFill>
+                  <a:srgbClr val="1A1A1A"/>
+                </a:solidFill>
+              </a:rPr>
+              <a:t>16 faces in one frame: 1.271 s</a:t>
+            </a:r>
+          </a:p>
+          <a:p>
+            <a:pPr>
+              <a:spcAft>
+                <a:spcPts val="500"/>
+              </a:spcAft>
+            </a:pPr>
+            <a:r>
+              <a:rPr sz="1100" b="0">
+                <a:solidFill>
+                  <a:srgbClr val="1A1A1A"/>
+                </a:solidFill>
+              </a:rPr>
+              <a:t>10,000 enrolled students: +1.2 ms per match</a:t>
+            </a:r>
+          </a:p>
+          <a:p>
+            <a:pPr>
+              <a:spcAft>
+                <a:spcPts val="500"/>
+              </a:spcAft>
+            </a:pPr>
+            <a:r>
+              <a:rPr sz="1100" b="0">
+                <a:solidFill>
+                  <a:srgbClr val="1A1A1A"/>
+                </a:solidFill>
+              </a:rPr>
+              <a:t>One 1080p camera covers ~7 m — a classroom</a:t>
+            </a:r>
+          </a:p>
+          <a:p>
+            <a:pPr>
+              <a:spcAft>
+                <a:spcPts val="500"/>
+              </a:spcAft>
+            </a:pPr>
+            <a:r>
+              <a:rPr sz="1100" b="0">
                 <a:solidFill>
                   <a:srgbClr val="1A1A1A"/>
                 </a:solidFill>
@@ -4784,72 +6010,57 @@
               </a:spcAft>
             </a:pPr>
             <a:r>
-              <a:rPr sz="1050" b="1">
+              <a:rPr sz="1100" b="1">
+                <a:solidFill>
+                  <a:srgbClr val="1F3A6E"/>
+                </a:solidFill>
+              </a:rPr>
+              <a:t>Key findings</a:t>
+            </a:r>
+          </a:p>
+          <a:p>
+            <a:pPr>
+              <a:spcAft>
+                <a:spcPts val="500"/>
+              </a:spcAft>
+            </a:pPr>
+            <a:r>
+              <a:rPr sz="1100" b="0">
+                <a:solidFill>
+                  <a:srgbClr val="1A1A1A"/>
+                </a:solidFill>
+              </a:rPr>
+              <a:t>Calibrating the threshold cut strangers admitted 4×.</a:t>
+            </a:r>
+          </a:p>
+          <a:p>
+            <a:pPr>
+              <a:spcAft>
+                <a:spcPts val="500"/>
+              </a:spcAft>
+            </a:pPr>
+            <a:r>
+              <a:rPr sz="1100" b="0">
+                <a:solidFill>
+                  <a:srgbClr val="1A1A1A"/>
+                </a:solidFill>
+              </a:rPr>
+              <a:t>Temporal voting drove wrong records to zero.</a:t>
+            </a:r>
+          </a:p>
+          <a:p>
+            <a:pPr>
+              <a:spcAft>
+                <a:spcPts val="500"/>
+              </a:spcAft>
+            </a:pPr>
+            <a:r>
+              <a:rPr sz="1100" b="1">
                 <a:solidFill>
                   <a:srgbClr val="C0392B"/>
                 </a:solidFill>
               </a:rPr>
-              <a:t>Honest limitations</a:t>
-            </a:r>
-          </a:p>
-          <a:p>
-            <a:pPr>
-              <a:spcAft>
-                <a:spcPts val="500"/>
-              </a:spcAft>
-            </a:pPr>
-            <a:r>
-              <a:rPr sz="1050" b="0">
-                <a:solidFill>
-                  <a:srgbClr val="1A1A1A"/>
-                </a:solidFill>
-              </a:rPr>
-              <a:t>A VIDEO replay would still pass — we raise the attack cost from</a:t>
-            </a:r>
-          </a:p>
-          <a:p>
-            <a:pPr>
-              <a:spcAft>
-                <a:spcPts val="500"/>
-              </a:spcAft>
-            </a:pPr>
-            <a:r>
-              <a:rPr sz="1050" b="0">
-                <a:solidFill>
-                  <a:srgbClr val="1A1A1A"/>
-                </a:solidFill>
-              </a:rPr>
-              <a:t>'print a photo' to 'record and replay a video', not to zero.</a:t>
-            </a:r>
-          </a:p>
-          <a:p>
-            <a:pPr>
-              <a:spcAft>
-                <a:spcPts val="500"/>
-              </a:spcAft>
-            </a:pPr>
-            <a:r>
-              <a:rPr sz="1050" b="0">
-                <a:solidFill>
-                  <a:srgbClr val="1A1A1A"/>
-                </a:solidFill>
-              </a:rPr>
-              <a:t>The top-2 margin guard did not help; the cohort has no look-alikes.</a:t>
-            </a:r>
-          </a:p>
-          <a:p>
-            <a:pPr>
-              <a:spcAft>
-                <a:spcPts val="500"/>
-              </a:spcAft>
-            </a:pPr>
-            <a:r>
-              <a:rPr sz="1050" b="0">
-                <a:solidFill>
-                  <a:srgbClr val="1A1A1A"/>
-                </a:solidFill>
-              </a:rPr>
-              <a:t>Only 2 real users enrolled — the numbers above come from the 30-identity cohort.</a:t>
+              <a:t>The top-2 margin guard did NOT help — we report it.</a:t>
             </a:r>
           </a:p>
         </p:txBody>
@@ -4862,7 +6073,7 @@
 </p:sld>
 </file>
 
-<file path=ppt/slides/slide5.xml><?xml version="1.0" encoding="utf-8"?>
+<file path=ppt/slides/slide9.xml><?xml version="1.0" encoding="utf-8"?>
 <p:sld xmlns:a="http://schemas.openxmlformats.org/drawingml/2006/main" xmlns:p="http://schemas.openxmlformats.org/presentationml/2006/main" xmlns:r="http://schemas.openxmlformats.org/officeDocument/2006/relationships">
   <p:cSld>
     <p:spTree>
@@ -4880,8 +6091,8 @@
         </p:nvSpPr>
         <p:spPr>
           <a:xfrm>
-            <a:off x="411480" y="201168"/>
-            <a:ext cx="11338560" cy="685800"/>
+            <a:off x="365760" y="182880"/>
+            <a:ext cx="11430000" cy="640080"/>
           </a:xfrm>
           <a:prstGeom prst="rect">
             <a:avLst/>
@@ -4896,12 +6107,12 @@
           <a:p>
             <a:pPr algn="ctr"/>
             <a:r>
-              <a:rPr sz="3000" b="1">
+              <a:rPr sz="2800" b="1">
                 <a:solidFill>
                   <a:srgbClr val="1F3A6E"/>
                 </a:solidFill>
               </a:rPr>
-              <a:t>IMPACT AND BENEFITS</a:t>
+              <a:t>CONCLUSION</a:t>
             </a:r>
           </a:p>
         </p:txBody>
@@ -4914,8 +6125,8 @@
         </p:nvSpPr>
         <p:spPr>
           <a:xfrm>
-            <a:off x="502920" y="1097280"/>
-            <a:ext cx="5852160" cy="5120640"/>
+            <a:off x="640080" y="1097280"/>
+            <a:ext cx="6583680" cy="5120640"/>
           </a:xfrm>
           <a:prstGeom prst="rect">
             <a:avLst/>
@@ -4934,206 +6145,205 @@
               </a:spcAft>
             </a:pPr>
             <a:r>
-              <a:rPr sz="1200" b="1">
+              <a:rPr sz="1250" b="1">
                 <a:solidFill>
                   <a:srgbClr val="1F3A6E"/>
                 </a:solidFill>
               </a:rPr>
-              <a:t>Impact on the target audience</a:t>
-            </a:r>
-          </a:p>
-          <a:p>
-            <a:pPr>
-              <a:spcAft>
-                <a:spcPts val="500"/>
-              </a:spcAft>
-            </a:pPr>
-            <a:r>
-              <a:rPr sz="1200" b="0">
-                <a:solidFill>
-                  <a:srgbClr val="1A1A1A"/>
-                </a:solidFill>
-              </a:rPr>
-              <a:t>A 60-student roll-call takes ~5 minutes of every lecture. Over a 200-day year</a:t>
-            </a:r>
-          </a:p>
-          <a:p>
-            <a:pPr>
-              <a:spcAft>
-                <a:spcPts val="500"/>
-              </a:spcAft>
-            </a:pPr>
-            <a:r>
-              <a:rPr sz="1200" b="0">
-                <a:solidFill>
-                  <a:srgbClr val="1A1A1A"/>
-                </a:solidFill>
-              </a:rPr>
-              <a:t>that is roughly 80 hours of teaching time returned to teaching.</a:t>
-            </a:r>
-          </a:p>
-          <a:p>
-            <a:pPr>
-              <a:spcAft>
-                <a:spcPts val="500"/>
-              </a:spcAft>
-            </a:pPr>
-            <a:r>
-              <a:rPr sz="1200" b="0">
-                <a:solidFill>
-                  <a:srgbClr val="1A1A1A"/>
-                </a:solidFill>
-              </a:rPr>
-              <a:t>Attendance is marked without contact, without a queue, and without a register</a:t>
-            </a:r>
-          </a:p>
-          <a:p>
-            <a:pPr>
-              <a:spcAft>
-                <a:spcPts val="500"/>
-              </a:spcAft>
-            </a:pPr>
-            <a:r>
-              <a:rPr sz="1200" b="0">
-                <a:solidFill>
-                  <a:srgbClr val="1A1A1A"/>
-                </a:solidFill>
-              </a:rPr>
-              <a:t>that can be signed by a friend.</a:t>
-            </a:r>
-          </a:p>
-          <a:p>
-            <a:pPr>
-              <a:spcAft>
-                <a:spcPts val="500"/>
-              </a:spcAft>
-            </a:pPr>
-          </a:p>
-          <a:p>
-            <a:pPr>
-              <a:spcAft>
-                <a:spcPts val="500"/>
-              </a:spcAft>
-            </a:pPr>
-            <a:r>
-              <a:rPr sz="1200" b="1">
-                <a:solidFill>
-                  <a:srgbClr val="1F3A6E"/>
-                </a:solidFill>
-              </a:rPr>
-              <a:t>Social — the proxy problem, honestly</a:t>
-            </a:r>
-          </a:p>
-          <a:p>
-            <a:pPr>
-              <a:spcAft>
-                <a:spcPts val="500"/>
-              </a:spcAft>
-            </a:pPr>
-            <a:r>
-              <a:rPr sz="1200" b="0">
-                <a:solidFill>
-                  <a:srgbClr val="1A1A1A"/>
-                </a:solidFill>
-              </a:rPr>
-              <a:t>Manual proxy (a friend signing for you) is eliminated.</a:t>
-            </a:r>
-          </a:p>
-          <a:p>
-            <a:pPr>
-              <a:spcAft>
-                <a:spcPts val="500"/>
-              </a:spcAft>
-            </a:pPr>
-            <a:r>
-              <a:rPr sz="1200" b="0">
-                <a:solidFill>
-                  <a:srgbClr val="1A1A1A"/>
-                </a:solidFill>
-              </a:rPr>
-              <a:t>Photo/screen proxy is blocked by liveness — measured 100% → 0%.</a:t>
-            </a:r>
-          </a:p>
-          <a:p>
-            <a:pPr>
-              <a:spcAft>
-                <a:spcPts val="500"/>
-              </a:spcAft>
-            </a:pPr>
-            <a:r>
-              <a:rPr sz="1200" b="0">
-                <a:solidFill>
-                  <a:srgbClr val="C0392B"/>
-                </a:solidFill>
-              </a:rPr>
-              <a:t>Video-replay proxy is NOT yet blocked. We state this rather than hide it.</a:t>
-            </a:r>
-          </a:p>
-          <a:p>
-            <a:pPr>
-              <a:spcAft>
-                <a:spcPts val="500"/>
-              </a:spcAft>
-            </a:pPr>
-          </a:p>
-          <a:p>
-            <a:pPr>
-              <a:spcAft>
-                <a:spcPts val="500"/>
-              </a:spcAft>
-            </a:pPr>
-            <a:r>
-              <a:rPr sz="1200" b="1">
-                <a:solidFill>
-                  <a:srgbClr val="1F3A6E"/>
-                </a:solidFill>
-              </a:rPr>
-              <a:t>Privacy — why this beats a cloud face API</a:t>
-            </a:r>
-          </a:p>
-          <a:p>
-            <a:pPr>
-              <a:spcAft>
-                <a:spcPts val="500"/>
-              </a:spcAft>
-            </a:pPr>
-            <a:r>
-              <a:rPr sz="1200" b="0">
-                <a:solidFill>
-                  <a:srgbClr val="1A1A1A"/>
-                </a:solidFill>
-              </a:rPr>
-              <a:t>The system runs fully offline. Students' faces never leave the campus.</a:t>
-            </a:r>
-          </a:p>
-          <a:p>
-            <a:pPr>
-              <a:spcAft>
-                <a:spcPts val="500"/>
-              </a:spcAft>
-            </a:pPr>
-            <a:r>
-              <a:rPr sz="1200" b="0">
-                <a:solidFill>
-                  <a:srgbClr val="1A1A1A"/>
-                </a:solidFill>
-              </a:rPr>
-              <a:t>Under India's DPDP Act 2023, biometric data is sensitive personal data —</a:t>
-            </a:r>
-          </a:p>
-          <a:p>
-            <a:pPr>
-              <a:spcAft>
-                <a:spcPts val="500"/>
-              </a:spcAft>
-            </a:pPr>
-            <a:r>
-              <a:rPr sz="1200" b="0">
-                <a:solidFill>
-                  <a:srgbClr val="1A1A1A"/>
-                </a:solidFill>
-              </a:rPr>
-              <a:t>uploading children's faces to a third-party cloud is a liability, not a feature.</a:t>
+              <a:t>A pretrained face model is not an attendance system.</a:t>
+            </a:r>
+          </a:p>
+          <a:p>
+            <a:pPr>
+              <a:spcAft>
+                <a:spcPts val="500"/>
+              </a:spcAft>
+            </a:pPr>
+            <a:r>
+              <a:rPr sz="1250" b="0">
+                <a:solidFill>
+                  <a:srgbClr val="1A1A1A"/>
+                </a:solidFill>
+              </a:rPr>
+              <a:t>It fails in three measurable ways, and each one is fixable in the decision layer.</a:t>
+            </a:r>
+          </a:p>
+          <a:p>
+            <a:pPr>
+              <a:spcAft>
+                <a:spcPts val="500"/>
+              </a:spcAft>
+            </a:pPr>
+          </a:p>
+          <a:p>
+            <a:pPr>
+              <a:spcAft>
+                <a:spcPts val="500"/>
+              </a:spcAft>
+            </a:pPr>
+            <a:r>
+              <a:rPr sz="1250" b="1">
+                <a:solidFill>
+                  <a:srgbClr val="1A1A1A"/>
+                </a:solidFill>
+              </a:rPr>
+              <a:t>Automation</a:t>
+            </a:r>
+          </a:p>
+          <a:p>
+            <a:pPr>
+              <a:spcAft>
+                <a:spcPts val="500"/>
+              </a:spcAft>
+            </a:pPr>
+            <a:r>
+              <a:rPr sz="1250" b="0">
+                <a:solidFill>
+                  <a:srgbClr val="1A1A1A"/>
+                </a:solidFill>
+              </a:rPr>
+              <a:t>Every face in the frame detected and identified in one pass; enrolment takes 1.4 s.</a:t>
+            </a:r>
+          </a:p>
+          <a:p>
+            <a:pPr>
+              <a:spcAft>
+                <a:spcPts val="500"/>
+              </a:spcAft>
+            </a:pPr>
+          </a:p>
+          <a:p>
+            <a:pPr>
+              <a:spcAft>
+                <a:spcPts val="500"/>
+              </a:spcAft>
+            </a:pPr>
+            <a:r>
+              <a:rPr sz="1250" b="1">
+                <a:solidFill>
+                  <a:srgbClr val="1A1A1A"/>
+                </a:solidFill>
+              </a:rPr>
+              <a:t>Integrity</a:t>
+            </a:r>
+          </a:p>
+          <a:p>
+            <a:pPr>
+              <a:spcAft>
+                <a:spcPts val="500"/>
+              </a:spcAft>
+            </a:pPr>
+            <a:r>
+              <a:rPr sz="1250" b="0">
+                <a:solidFill>
+                  <a:srgbClr val="1A1A1A"/>
+                </a:solidFill>
+              </a:rPr>
+              <a:t>Manual proxy (a friend signing the register) is eliminated. Photo and screen proxy</a:t>
+            </a:r>
+          </a:p>
+          <a:p>
+            <a:pPr>
+              <a:spcAft>
+                <a:spcPts val="500"/>
+              </a:spcAft>
+            </a:pPr>
+            <a:r>
+              <a:rPr sz="1250" b="0">
+                <a:solidFill>
+                  <a:srgbClr val="1A1A1A"/>
+                </a:solidFill>
+              </a:rPr>
+              <a:t>is blocked by liveness — attack success 100% → 0%. Strangers admitted: 0.20%.</a:t>
+            </a:r>
+          </a:p>
+          <a:p>
+            <a:pPr>
+              <a:spcAft>
+                <a:spcPts val="500"/>
+              </a:spcAft>
+            </a:pPr>
+          </a:p>
+          <a:p>
+            <a:pPr>
+              <a:spcAft>
+                <a:spcPts val="500"/>
+              </a:spcAft>
+            </a:pPr>
+            <a:r>
+              <a:rPr sz="1250" b="1">
+                <a:solidFill>
+                  <a:srgbClr val="1A1A1A"/>
+                </a:solidFill>
+              </a:rPr>
+              <a:t>Precision</a:t>
+            </a:r>
+          </a:p>
+          <a:p>
+            <a:pPr>
+              <a:spcAft>
+                <a:spcPts val="500"/>
+              </a:spcAft>
+            </a:pPr>
+            <a:r>
+              <a:rPr sz="1250" b="0">
+                <a:solidFill>
+                  <a:srgbClr val="1A1A1A"/>
+                </a:solidFill>
+              </a:rPr>
+              <a:t>Open-set rejection with a threshold calibrated on 2,880 impostor faces. Faces below</a:t>
+            </a:r>
+          </a:p>
+          <a:p>
+            <a:pPr>
+              <a:spcAft>
+                <a:spcPts val="500"/>
+              </a:spcAft>
+            </a:pPr>
+            <a:r>
+              <a:rPr sz="1250" b="0">
+                <a:solidFill>
+                  <a:srgbClr val="1A1A1A"/>
+                </a:solidFill>
+              </a:rPr>
+              <a:t>40 px are refused rather than guessed at. Wrong attendance records: 0%.</a:t>
+            </a:r>
+          </a:p>
+          <a:p>
+            <a:pPr>
+              <a:spcAft>
+                <a:spcPts val="500"/>
+              </a:spcAft>
+            </a:pPr>
+          </a:p>
+          <a:p>
+            <a:pPr>
+              <a:spcAft>
+                <a:spcPts val="500"/>
+              </a:spcAft>
+            </a:pPr>
+            <a:r>
+              <a:rPr sz="1250" b="1">
+                <a:solidFill>
+                  <a:srgbClr val="1A1A1A"/>
+                </a:solidFill>
+              </a:rPr>
+              <a:t>Efficiency</a:t>
+            </a:r>
+          </a:p>
+          <a:p>
+            <a:pPr>
+              <a:spcAft>
+                <a:spcPts val="500"/>
+              </a:spcAft>
+            </a:pPr>
+            <a:r>
+              <a:rPr sz="1250" b="0">
+                <a:solidFill>
+                  <a:srgbClr val="1A1A1A"/>
+                </a:solidFill>
+              </a:rPr>
+              <a:t>16 faces per frame in 1.3 s on a laptop CPU. Fully offline: no cloud, no GPU, ₹0/year.</a:t>
             </a:r>
           </a:p>
         </p:txBody>
@@ -5146,8 +6356,8 @@
         </p:nvSpPr>
         <p:spPr>
           <a:xfrm>
-            <a:off x="6492240" y="1097280"/>
-            <a:ext cx="5212080" cy="5120640"/>
+            <a:off x="7406640" y="1097280"/>
+            <a:ext cx="4389120" cy="5120640"/>
           </a:xfrm>
           <a:prstGeom prst="rect">
             <a:avLst/>
@@ -5166,549 +6376,235 @@
               </a:spcAft>
             </a:pPr>
             <a:r>
-              <a:rPr sz="1200" b="1">
-                <a:solidFill>
-                  <a:srgbClr val="1F3A6E"/>
-                </a:solidFill>
-              </a:rPr>
-              <a:t>Economic</a:t>
-            </a:r>
-          </a:p>
-          <a:p>
-            <a:pPr>
-              <a:spcAft>
-                <a:spcPts val="500"/>
-              </a:spcAft>
-            </a:pPr>
-            <a:r>
-              <a:rPr sz="1200" b="0">
-                <a:solidFill>
-                  <a:srgbClr val="1A1A1A"/>
-                </a:solidFill>
-              </a:rPr>
-              <a:t>Our system: one laptop + one webcam. No GPU. No servers. No per-scan fee.</a:t>
-            </a:r>
-          </a:p>
-          <a:p>
-            <a:pPr>
-              <a:spcAft>
-                <a:spcPts val="500"/>
-              </a:spcAft>
-            </a:pPr>
-            <a:r>
-              <a:rPr sz="1200" b="0">
-                <a:solidFill>
-                  <a:srgbClr val="1A1A1A"/>
-                </a:solidFill>
-              </a:rPr>
-              <a:t>Recurring cost ≈ ₹0.</a:t>
-            </a:r>
-          </a:p>
-          <a:p>
-            <a:pPr>
-              <a:spcAft>
-                <a:spcPts val="500"/>
-              </a:spcAft>
-            </a:pPr>
-          </a:p>
-          <a:p>
-            <a:pPr>
-              <a:spcAft>
-                <a:spcPts val="500"/>
-              </a:spcAft>
-            </a:pPr>
-            <a:r>
-              <a:rPr sz="1200" b="0">
-                <a:solidFill>
-                  <a:srgbClr val="1A1A1A"/>
-                </a:solidFill>
-              </a:rPr>
-              <a:t>A cloud face API (≈ $0.001 per image) for continuous classroom scanning:</a:t>
-            </a:r>
-          </a:p>
-          <a:p>
-            <a:pPr>
-              <a:spcAft>
-                <a:spcPts val="500"/>
-              </a:spcAft>
-            </a:pPr>
-            <a:r>
-              <a:rPr sz="1200" b="1">
+              <a:rPr sz="1050" b="1">
                 <a:solidFill>
                   <a:srgbClr val="C0392B"/>
                 </a:solidFill>
               </a:rPr>
-              <a:t>≈ ₹1,50,000 per year, per school — and it uploads every student's face.</a:t>
-            </a:r>
-          </a:p>
-          <a:p>
-            <a:pPr>
-              <a:spcAft>
-                <a:spcPts val="500"/>
-              </a:spcAft>
-            </a:pPr>
-          </a:p>
-          <a:p>
-            <a:pPr>
-              <a:spcAft>
-                <a:spcPts val="500"/>
-              </a:spcAft>
-            </a:pPr>
-            <a:r>
-              <a:rPr sz="1200" b="1">
-                <a:solidFill>
-                  <a:srgbClr val="1F3A6E"/>
-                </a:solidFill>
-              </a:rPr>
-              <a:t>Scalability</a:t>
-            </a:r>
-          </a:p>
-          <a:p>
-            <a:pPr>
-              <a:spcAft>
-                <a:spcPts val="500"/>
-              </a:spcAft>
-            </a:pPr>
-            <a:r>
-              <a:rPr sz="1200" b="0">
-                <a:solidFill>
-                  <a:srgbClr val="1A1A1A"/>
-                </a:solidFill>
-              </a:rPr>
-              <a:t>Enrolling 10,000 students costs 1.2 ms per match, because the deep model is</a:t>
-            </a:r>
-          </a:p>
-          <a:p>
-            <a:pPr>
-              <a:spcAft>
-                <a:spcPts val="500"/>
-              </a:spcAft>
-            </a:pPr>
-            <a:r>
-              <a:rPr sz="1200" b="0">
-                <a:solidFill>
-                  <a:srgbClr val="1A1A1A"/>
-                </a:solidFill>
-              </a:rPr>
-              <a:t>frozen and matching is a matrix multiply. A trained-CNN approach would need</a:t>
-            </a:r>
-          </a:p>
-          <a:p>
-            <a:pPr>
-              <a:spcAft>
-                <a:spcPts val="500"/>
-              </a:spcAft>
-            </a:pPr>
-            <a:r>
-              <a:rPr sz="1200" b="0">
-                <a:solidFill>
-                  <a:srgbClr val="1A1A1A"/>
-                </a:solidFill>
-              </a:rPr>
-              <a:t>retraining every time a student joins.</a:t>
-            </a:r>
-          </a:p>
-          <a:p>
-            <a:pPr>
-              <a:spcAft>
-                <a:spcPts val="500"/>
-              </a:spcAft>
-            </a:pPr>
-          </a:p>
-          <a:p>
-            <a:pPr>
-              <a:spcAft>
-                <a:spcPts val="500"/>
-              </a:spcAft>
-            </a:pPr>
-            <a:r>
-              <a:rPr sz="1200" b="1">
-                <a:solidFill>
-                  <a:srgbClr val="1F3A6E"/>
-                </a:solidFill>
-              </a:rPr>
-              <a:t>Auditability</a:t>
-            </a:r>
-          </a:p>
-          <a:p>
-            <a:pPr>
-              <a:spcAft>
-                <a:spcPts val="500"/>
-              </a:spcAft>
-            </a:pPr>
-            <a:r>
-              <a:rPr sz="1200" b="0">
-                <a:solidFill>
-                  <a:srgbClr val="1A1A1A"/>
-                </a:solidFill>
-              </a:rPr>
-              <a:t>Every decision exposes its evidence — the similarity score, the runner-up</a:t>
-            </a:r>
-          </a:p>
-          <a:p>
-            <a:pPr>
-              <a:spcAft>
-                <a:spcPts val="500"/>
-              </a:spcAft>
-            </a:pPr>
-            <a:r>
-              <a:rPr sz="1200" b="0">
-                <a:solidFill>
-                  <a:srgbClr val="1A1A1A"/>
-                </a:solidFill>
-              </a:rPr>
-              <a:t>margin, the face size, the liveness verdict. A disputed attendance record can</a:t>
-            </a:r>
-          </a:p>
-          <a:p>
-            <a:pPr>
-              <a:spcAft>
-                <a:spcPts val="500"/>
-              </a:spcAft>
-            </a:pPr>
-            <a:r>
-              <a:rPr sz="1200" b="0">
-                <a:solidFill>
-                  <a:srgbClr val="1A1A1A"/>
-                </a:solidFill>
-              </a:rPr>
-              <a:t>be explained. Commercial systems are black boxes.</a:t>
-            </a:r>
-          </a:p>
-        </p:txBody>
-      </p:sp>
-    </p:spTree>
-  </p:cSld>
-  <p:clrMapOvr>
-    <a:masterClrMapping/>
-  </p:clrMapOvr>
-</p:sld>
-</file>
-
-<file path=ppt/slides/slide6.xml><?xml version="1.0" encoding="utf-8"?>
-<p:sld xmlns:a="http://schemas.openxmlformats.org/drawingml/2006/main" xmlns:p="http://schemas.openxmlformats.org/presentationml/2006/main" xmlns:r="http://schemas.openxmlformats.org/officeDocument/2006/relationships">
-  <p:cSld>
-    <p:spTree>
-      <p:nvGrpSpPr>
-        <p:cNvPr id="1" name=""/>
-        <p:cNvGrpSpPr/>
-        <p:nvPr/>
-      </p:nvGrpSpPr>
-      <p:grpSpPr/>
-      <p:sp>
-        <p:nvSpPr>
-          <p:cNvPr id="2" name="TextBox 1"/>
-          <p:cNvSpPr txBox="1"/>
-          <p:nvPr/>
-        </p:nvSpPr>
-        <p:spPr>
-          <a:xfrm>
-            <a:off x="411480" y="201168"/>
-            <a:ext cx="11338560" cy="685800"/>
-          </a:xfrm>
-          <a:prstGeom prst="rect">
-            <a:avLst/>
-          </a:prstGeom>
-          <a:noFill/>
-        </p:spPr>
-        <p:txBody>
-          <a:bodyPr wrap="none">
-            <a:spAutoFit/>
-          </a:bodyPr>
-          <a:lstStyle/>
-          <a:p>
-            <a:pPr algn="ctr"/>
-            <a:r>
-              <a:rPr sz="3000" b="1">
-                <a:solidFill>
-                  <a:srgbClr val="1F3A6E"/>
-                </a:solidFill>
-              </a:rPr>
-              <a:t>RESEARCH AND REFERENCES</a:t>
-            </a:r>
-          </a:p>
-        </p:txBody>
-      </p:sp>
-      <p:sp>
-        <p:nvSpPr>
-          <p:cNvPr id="3" name="TextBox 2"/>
-          <p:cNvSpPr txBox="1"/>
-          <p:nvPr/>
-        </p:nvSpPr>
-        <p:spPr>
-          <a:xfrm>
-            <a:off x="502920" y="1005840"/>
-            <a:ext cx="11247120" cy="5394960"/>
-          </a:xfrm>
-          <a:prstGeom prst="rect">
-            <a:avLst/>
-          </a:prstGeom>
-          <a:noFill/>
-        </p:spPr>
-        <p:txBody>
-          <a:bodyPr wrap="square">
-            <a:spAutoFit/>
-          </a:bodyPr>
-          <a:lstStyle/>
-          <a:p>
-            <a:pPr>
-              <a:spcAft>
-                <a:spcPts val="500"/>
-              </a:spcAft>
-            </a:pPr>
-            <a:r>
-              <a:rPr sz="1000" b="1">
-                <a:solidFill>
-                  <a:srgbClr val="1F3A6E"/>
-                </a:solidFill>
-              </a:rPr>
-              <a:t>Core models used (pretrained, frozen — not our contribution)</a:t>
-            </a:r>
-          </a:p>
-          <a:p>
-            <a:pPr>
-              <a:spcAft>
-                <a:spcPts val="500"/>
-              </a:spcAft>
-            </a:pPr>
-            <a:r>
-              <a:rPr sz="1000" b="0">
-                <a:solidFill>
-                  <a:srgbClr val="1A1A1A"/>
-                </a:solidFill>
-              </a:rPr>
-              <a:t>[1]  Deng, J., Guo, J., Xue, N., Zafeiriou, S. (2019). ArcFace: Additive Angular Margin Loss for Deep Face Recognition. CVPR 2019, pp. 4690–4699.  DOI: 10.1109/CVPR.2019.00482</a:t>
-            </a:r>
-          </a:p>
-          <a:p>
-            <a:pPr>
-              <a:spcAft>
-                <a:spcPts val="500"/>
-              </a:spcAft>
-            </a:pPr>
-            <a:r>
-              <a:rPr sz="1000" b="0">
-                <a:solidFill>
-                  <a:srgbClr val="1A1A1A"/>
-                </a:solidFill>
-              </a:rPr>
-              <a:t>[2]  Deng, J., Guo, J., Ververas, E., Kotsia, I., Zafeiriou, S. (2020). RetinaFace: Single-Shot Multi-Level Face Localisation in the Wild. CVPR 2020.  DOI: 10.1109/CVPR42600.2020.00525</a:t>
-            </a:r>
-          </a:p>
-          <a:p>
-            <a:pPr>
-              <a:spcAft>
-                <a:spcPts val="500"/>
-              </a:spcAft>
-            </a:pPr>
-            <a:r>
-              <a:rPr sz="1000" b="0">
-                <a:solidFill>
-                  <a:srgbClr val="1A1A1A"/>
-                </a:solidFill>
-              </a:rPr>
-              <a:t>[3]  Schroff, F., Kalenichenko, D., Philbin, J. (2015). FaceNet: A Unified Embedding for Face Recognition and Clustering. CVPR 2015, pp. 815–823.  DOI: 10.1109/CVPR.2015.7298682</a:t>
-            </a:r>
-          </a:p>
-          <a:p>
-            <a:pPr>
-              <a:spcAft>
-                <a:spcPts val="500"/>
-              </a:spcAft>
-            </a:pPr>
-          </a:p>
-          <a:p>
-            <a:pPr>
-              <a:spcAft>
-                <a:spcPts val="500"/>
-              </a:spcAft>
-            </a:pPr>
-            <a:r>
-              <a:rPr sz="1000" b="1">
-                <a:solidFill>
-                  <a:srgbClr val="1F3A6E"/>
-                </a:solidFill>
-              </a:rPr>
-              <a:t>Attendance systems — prior work (none of which addresses spoofing)</a:t>
-            </a:r>
-          </a:p>
-          <a:p>
-            <a:pPr>
-              <a:spcAft>
-                <a:spcPts val="500"/>
-              </a:spcAft>
-            </a:pPr>
-            <a:r>
-              <a:rPr sz="1000" b="0">
-                <a:solidFill>
-                  <a:srgbClr val="1A1A1A"/>
-                </a:solidFill>
-              </a:rPr>
-              <a:t>[4]  D'Souza, J. W. S., et al. (2019). Automated Attendance Marking and Management System by Facial Recognition Using Histogram. Array, 3–4: 100014.</a:t>
-            </a:r>
-          </a:p>
-          <a:p>
-            <a:pPr>
-              <a:spcAft>
-                <a:spcPts val="500"/>
-              </a:spcAft>
-            </a:pPr>
-            <a:r>
-              <a:rPr sz="1000" b="0">
-                <a:solidFill>
-                  <a:srgbClr val="1A1A1A"/>
-                </a:solidFill>
-              </a:rPr>
-              <a:t>[5]  Arsenovic, M., Sladojevic, S., Anderla, A., Stefanovic, D. (2017). FaceTime — Deep Learning Based Face Recognition Attendance System. IEEE SISY 2017, pp. 53–58.</a:t>
-            </a:r>
-          </a:p>
-          <a:p>
-            <a:pPr>
-              <a:spcAft>
-                <a:spcPts val="500"/>
-              </a:spcAft>
-            </a:pPr>
-            <a:r>
-              <a:rPr sz="1000" b="0">
-                <a:solidFill>
-                  <a:srgbClr val="1A1A1A"/>
-                </a:solidFill>
-              </a:rPr>
-              <a:t>[6]  Kakarla, S., et al. (2020). Smart Attendance Management System Based on Face Recognition Using CNN. IEEE-HYDCON 2020, pp. 1–5.  DOI: 10.1109/HYDCON48903.2020.9242847</a:t>
-            </a:r>
-          </a:p>
-          <a:p>
-            <a:pPr>
-              <a:spcAft>
-                <a:spcPts val="500"/>
-              </a:spcAft>
-            </a:pPr>
-            <a:r>
-              <a:rPr sz="1000" b="0">
-                <a:solidFill>
-                  <a:srgbClr val="1A1A1A"/>
-                </a:solidFill>
-              </a:rPr>
-              <a:t>[7]  Varadharajan, E., et al. (2016). Automatic Attendance Management System Using Face Detection. IC-GET 2016, pp. 1–3.  DOI: 10.1109/GET.2016.7916753</a:t>
-            </a:r>
-          </a:p>
-          <a:p>
-            <a:pPr>
-              <a:spcAft>
-                <a:spcPts val="500"/>
-              </a:spcAft>
-            </a:pPr>
-            <a:r>
-              <a:rPr sz="1000" b="0">
-                <a:solidFill>
-                  <a:srgbClr val="1A1A1A"/>
-                </a:solidFill>
-              </a:rPr>
-              <a:t>[8]  Siswanto, A. R. S., Nugroho, A. S., Galinium, M. (2014). Implementation of Face Recognition Algorithm for Biometrics Based Time Attendance System. ICISS 2014, pp. 149–154.</a:t>
-            </a:r>
-          </a:p>
-          <a:p>
-            <a:pPr>
-              <a:spcAft>
-                <a:spcPts val="500"/>
-              </a:spcAft>
-            </a:pPr>
-          </a:p>
-          <a:p>
-            <a:pPr>
-              <a:spcAft>
-                <a:spcPts val="500"/>
-              </a:spcAft>
-            </a:pPr>
-            <a:r>
-              <a:rPr sz="1000" b="1">
-                <a:solidFill>
-                  <a:srgbClr val="1F3A6E"/>
-                </a:solidFill>
-              </a:rPr>
-              <a:t>Anti-spoofing / presentation attacks — the gap we address</a:t>
-            </a:r>
-          </a:p>
-          <a:p>
-            <a:pPr>
-              <a:spcAft>
-                <a:spcPts val="500"/>
-              </a:spcAft>
-            </a:pPr>
-            <a:r>
-              <a:rPr sz="1000" b="0">
-                <a:solidFill>
-                  <a:srgbClr val="1A1A1A"/>
-                </a:solidFill>
-              </a:rPr>
-              <a:t>[9]  Pan, G., Sun, L., Wu, Z., Lao, S. (2007). Eyeblink-based Anti-Spoofing in Face Recognition from a Generic Webcamera. ICCV 2007, pp. 1–8.</a:t>
-            </a:r>
-          </a:p>
-          <a:p>
-            <a:pPr>
-              <a:spcAft>
-                <a:spcPts val="500"/>
-              </a:spcAft>
-            </a:pPr>
-            <a:r>
-              <a:rPr sz="1000" b="0">
-                <a:solidFill>
-                  <a:srgbClr val="1A1A1A"/>
-                </a:solidFill>
-              </a:rPr>
-              <a:t>[10] ISO/IEC 30107-3:2023 — Biometric Presentation Attack Detection, Part 3: Testing and Reporting.</a:t>
-            </a:r>
-          </a:p>
-          <a:p>
-            <a:pPr>
-              <a:spcAft>
-                <a:spcPts val="500"/>
-              </a:spcAft>
-            </a:pPr>
-          </a:p>
-          <a:p>
-            <a:pPr>
-              <a:spcAft>
-                <a:spcPts val="500"/>
-              </a:spcAft>
-            </a:pPr>
-            <a:r>
-              <a:rPr sz="1000" b="1">
-                <a:solidFill>
-                  <a:srgbClr val="1F3A6E"/>
-                </a:solidFill>
-              </a:rPr>
-              <a:t>Data, code and reproducibility</a:t>
-            </a:r>
-          </a:p>
-          <a:p>
-            <a:pPr>
-              <a:spcAft>
-                <a:spcPts val="500"/>
-              </a:spcAft>
-            </a:pPr>
-            <a:r>
-              <a:rPr sz="1000" b="0">
-                <a:solidFill>
-                  <a:srgbClr val="1A1A1A"/>
-                </a:solidFill>
-              </a:rPr>
-              <a:t>Dataset: VGGFace2 (Cao et al., 2018) — 96 identities used as an impostor cohort.</a:t>
-            </a:r>
-          </a:p>
-          <a:p>
-            <a:pPr>
-              <a:spcAft>
-                <a:spcPts val="500"/>
-              </a:spcAft>
-            </a:pPr>
-            <a:r>
-              <a:rPr sz="1000" b="0">
-                <a:solidFill>
-                  <a:srgbClr val="1A1A1A"/>
-                </a:solidFill>
-              </a:rPr>
-              <a:t>Source code and all measurement scripts: github.com/SohamBhattacharjee2003/MutiFace-Attendance-System</a:t>
+              <a:t>LIMITATIONS &amp; FUTURE WORK</a:t>
+            </a:r>
+          </a:p>
+          <a:p>
+            <a:pPr>
+              <a:spcAft>
+                <a:spcPts val="500"/>
+              </a:spcAft>
+            </a:pPr>
+          </a:p>
+          <a:p>
+            <a:pPr>
+              <a:spcAft>
+                <a:spcPts val="500"/>
+              </a:spcAft>
+            </a:pPr>
+            <a:r>
+              <a:rPr sz="1050" b="1">
+                <a:solidFill>
+                  <a:srgbClr val="1A1A1A"/>
+                </a:solidFill>
+              </a:rPr>
+              <a:t>Video replay still defeats liveness.</a:t>
+            </a:r>
+          </a:p>
+          <a:p>
+            <a:pPr>
+              <a:spcAft>
+                <a:spcPts val="500"/>
+              </a:spcAft>
+            </a:pPr>
+            <a:r>
+              <a:rPr sz="1050" b="0">
+                <a:solidFill>
+                  <a:srgbClr val="1A1A1A"/>
+                </a:solidFill>
+              </a:rPr>
+              <a:t>A recorded face genuinely moves. We raise the attack cost from 'print a photo' to</a:t>
+            </a:r>
+          </a:p>
+          <a:p>
+            <a:pPr>
+              <a:spcAft>
+                <a:spcPts val="500"/>
+              </a:spcAft>
+            </a:pPr>
+            <a:r>
+              <a:rPr sz="1050" b="0">
+                <a:solidFill>
+                  <a:srgbClr val="1A1A1A"/>
+                </a:solidFill>
+              </a:rPr>
+              <a:t>'record and replay a video' — a real gain, not a complete defence. A depth or</a:t>
+            </a:r>
+          </a:p>
+          <a:p>
+            <a:pPr>
+              <a:spcAft>
+                <a:spcPts val="500"/>
+              </a:spcAft>
+            </a:pPr>
+            <a:r>
+              <a:rPr sz="1050" b="0">
+                <a:solidFill>
+                  <a:srgbClr val="1A1A1A"/>
+                </a:solidFill>
+              </a:rPr>
+              <a:t>texture-based anti-spoof model is the next step.</a:t>
+            </a:r>
+          </a:p>
+          <a:p>
+            <a:pPr>
+              <a:spcAft>
+                <a:spcPts val="500"/>
+              </a:spcAft>
+            </a:pPr>
+          </a:p>
+          <a:p>
+            <a:pPr>
+              <a:spcAft>
+                <a:spcPts val="500"/>
+              </a:spcAft>
+            </a:pPr>
+            <a:r>
+              <a:rPr sz="1050" b="1">
+                <a:solidFill>
+                  <a:srgbClr val="1A1A1A"/>
+                </a:solidFill>
+              </a:rPr>
+              <a:t>The look-alike guard is unproven.</a:t>
+            </a:r>
+          </a:p>
+          <a:p>
+            <a:pPr>
+              <a:spcAft>
+                <a:spcPts val="500"/>
+              </a:spcAft>
+            </a:pPr>
+            <a:r>
+              <a:rPr sz="1050" b="0">
+                <a:solidFill>
+                  <a:srgbClr val="1A1A1A"/>
+                </a:solidFill>
+              </a:rPr>
+              <a:t>Our cohort contains no look-alike pairs, so the top-2 margin had nothing to catch.</a:t>
+            </a:r>
+          </a:p>
+          <a:p>
+            <a:pPr>
+              <a:spcAft>
+                <a:spcPts val="500"/>
+              </a:spcAft>
+            </a:pPr>
+            <a:r>
+              <a:rPr sz="1050" b="0">
+                <a:solidFill>
+                  <a:srgbClr val="1A1A1A"/>
+                </a:solidFill>
+              </a:rPr>
+              <a:t>We cannot claim it works.</a:t>
+            </a:r>
+          </a:p>
+          <a:p>
+            <a:pPr>
+              <a:spcAft>
+                <a:spcPts val="500"/>
+              </a:spcAft>
+            </a:pPr>
+          </a:p>
+          <a:p>
+            <a:pPr>
+              <a:spcAft>
+                <a:spcPts val="500"/>
+              </a:spcAft>
+            </a:pPr>
+            <a:r>
+              <a:rPr sz="1050" b="1">
+                <a:solidFill>
+                  <a:srgbClr val="1A1A1A"/>
+                </a:solidFill>
+              </a:rPr>
+              <a:t>Only 2 real users enrolled.</a:t>
+            </a:r>
+          </a:p>
+          <a:p>
+            <a:pPr>
+              <a:spcAft>
+                <a:spcPts val="500"/>
+              </a:spcAft>
+            </a:pPr>
+            <a:r>
+              <a:rPr sz="1050" b="0">
+                <a:solidFill>
+                  <a:srgbClr val="1A1A1A"/>
+                </a:solidFill>
+              </a:rPr>
+              <a:t>All quantitative claims come from the 30-identity cohort. The live system is a</a:t>
+            </a:r>
+          </a:p>
+          <a:p>
+            <a:pPr>
+              <a:spcAft>
+                <a:spcPts val="500"/>
+              </a:spcAft>
+            </a:pPr>
+            <a:r>
+              <a:rPr sz="1050" b="0">
+                <a:solidFill>
+                  <a:srgbClr val="1A1A1A"/>
+                </a:solidFill>
+              </a:rPr>
+              <a:t>feasibility demonstration.</a:t>
+            </a:r>
+          </a:p>
+          <a:p>
+            <a:pPr>
+              <a:spcAft>
+                <a:spcPts val="500"/>
+              </a:spcAft>
+            </a:pPr>
+          </a:p>
+          <a:p>
+            <a:pPr>
+              <a:spcAft>
+                <a:spcPts val="500"/>
+              </a:spcAft>
+            </a:pPr>
+            <a:r>
+              <a:rPr sz="1050" b="1">
+                <a:solidFill>
+                  <a:srgbClr val="1A1A1A"/>
+                </a:solidFill>
+              </a:rPr>
+              <a:t>The cohort is photographic.</a:t>
+            </a:r>
+          </a:p>
+          <a:p>
+            <a:pPr>
+              <a:spcAft>
+                <a:spcPts val="500"/>
+              </a:spcAft>
+            </a:pPr>
+            <a:r>
+              <a:rPr sz="1050" b="0">
+                <a:solidFill>
+                  <a:srgbClr val="1A1A1A"/>
+                </a:solidFill>
+              </a:rPr>
+              <a:t>VGGFace2 images are cleaner than a classroom webcam, so real-world numbers will</a:t>
+            </a:r>
+          </a:p>
+          <a:p>
+            <a:pPr>
+              <a:spcAft>
+                <a:spcPts val="500"/>
+              </a:spcAft>
+            </a:pPr>
+            <a:r>
+              <a:rPr sz="1050" b="0">
+                <a:solidFill>
+                  <a:srgbClr val="1A1A1A"/>
+                </a:solidFill>
+              </a:rPr>
+              <a:t>be worse than these.</a:t>
             </a:r>
           </a:p>
         </p:txBody>

--- a/Server/results/PresenceAI_Presentation.pptx
+++ b/Server/results/PresenceAI_Presentation.pptx
@@ -3346,7 +3346,51 @@
       </p:sp>
       <p:sp>
         <p:nvSpPr>
-          <p:cNvPr id="3" name="TextBox 2"/>
+          <p:cNvPr id="3" name="Rectangle 2"/>
+          <p:cNvSpPr/>
+          <p:nvPr/>
+        </p:nvSpPr>
+        <p:spPr>
+          <a:xfrm>
+            <a:off x="4937760" y="841248"/>
+            <a:ext cx="2286000" cy="41148"/>
+          </a:xfrm>
+          <a:prstGeom prst="rect">
+            <a:avLst/>
+          </a:prstGeom>
+          <a:solidFill>
+            <a:srgbClr val="1F77C2"/>
+          </a:solidFill>
+          <a:ln>
+            <a:noFill/>
+          </a:ln>
+          <a:effectLst/>
+        </p:spPr>
+        <p:style>
+          <a:lnRef idx="1">
+            <a:schemeClr val="accent1"/>
+          </a:lnRef>
+          <a:fillRef idx="3">
+            <a:schemeClr val="accent1"/>
+          </a:fillRef>
+          <a:effectRef idx="2">
+            <a:schemeClr val="accent1"/>
+          </a:effectRef>
+          <a:fontRef idx="minor">
+            <a:schemeClr val="lt1"/>
+          </a:fontRef>
+        </p:style>
+        <p:txBody>
+          <a:bodyPr rtlCol="0" anchor="ctr"/>
+          <a:lstStyle/>
+          <a:p>
+            <a:pPr algn="ctr"/>
+          </a:p>
+        </p:txBody>
+      </p:sp>
+      <p:sp>
+        <p:nvSpPr>
+          <p:cNvPr id="4" name="TextBox 3"/>
           <p:cNvSpPr txBox="1"/>
           <p:nvPr/>
         </p:nvSpPr>
@@ -3598,6 +3642,84 @@
                 </a:solidFill>
               </a:rPr>
               <a:t>Source code and all measurement scripts: github.com/SohamBhattacharjee2003/MutiFace-Attendance-System</a:t>
+            </a:r>
+          </a:p>
+        </p:txBody>
+      </p:sp>
+      <p:sp>
+        <p:nvSpPr>
+          <p:cNvPr id="5" name="Rectangle 4"/>
+          <p:cNvSpPr/>
+          <p:nvPr/>
+        </p:nvSpPr>
+        <p:spPr>
+          <a:xfrm>
+            <a:off x="0" y="6446520"/>
+            <a:ext cx="12191695" cy="411480"/>
+          </a:xfrm>
+          <a:prstGeom prst="rect">
+            <a:avLst/>
+          </a:prstGeom>
+          <a:solidFill>
+            <a:srgbClr val="1F77C2"/>
+          </a:solidFill>
+          <a:ln>
+            <a:noFill/>
+          </a:ln>
+          <a:effectLst/>
+        </p:spPr>
+        <p:style>
+          <a:lnRef idx="1">
+            <a:schemeClr val="accent1"/>
+          </a:lnRef>
+          <a:fillRef idx="3">
+            <a:schemeClr val="accent1"/>
+          </a:fillRef>
+          <a:effectRef idx="2">
+            <a:schemeClr val="accent1"/>
+          </a:effectRef>
+          <a:fontRef idx="minor">
+            <a:schemeClr val="lt1"/>
+          </a:fontRef>
+        </p:style>
+        <p:txBody>
+          <a:bodyPr rtlCol="0" anchor="ctr"/>
+          <a:lstStyle/>
+          <a:p>
+            <a:pPr algn="ctr"/>
+          </a:p>
+        </p:txBody>
+      </p:sp>
+      <p:sp>
+        <p:nvSpPr>
+          <p:cNvPr id="6" name="TextBox 5"/>
+          <p:cNvSpPr txBox="1"/>
+          <p:nvPr/>
+        </p:nvSpPr>
+        <p:spPr>
+          <a:xfrm>
+            <a:off x="11430000" y="6473952"/>
+            <a:ext cx="640080" cy="365760"/>
+          </a:xfrm>
+          <a:prstGeom prst="rect">
+            <a:avLst/>
+          </a:prstGeom>
+          <a:noFill/>
+        </p:spPr>
+        <p:txBody>
+          <a:bodyPr wrap="none">
+            <a:spAutoFit/>
+          </a:bodyPr>
+          <a:lstStyle/>
+          <a:p>
+            <a:pPr algn="r"/>
+            <a:r>
+              <a:rPr sz="1200" b="1">
+                <a:solidFill>
+                  <a:srgbClr val="FFFFFF"/>
+                </a:solidFill>
+              </a:rPr>
+              <a:t>9</a:t>
             </a:r>
           </a:p>
         </p:txBody>
@@ -3650,6 +3772,84 @@
           </a:p>
         </p:txBody>
       </p:sp>
+      <p:sp>
+        <p:nvSpPr>
+          <p:cNvPr id="3" name="Rectangle 2"/>
+          <p:cNvSpPr/>
+          <p:nvPr/>
+        </p:nvSpPr>
+        <p:spPr>
+          <a:xfrm>
+            <a:off x="0" y="6446520"/>
+            <a:ext cx="12191695" cy="411480"/>
+          </a:xfrm>
+          <a:prstGeom prst="rect">
+            <a:avLst/>
+          </a:prstGeom>
+          <a:solidFill>
+            <a:srgbClr val="1F77C2"/>
+          </a:solidFill>
+          <a:ln>
+            <a:noFill/>
+          </a:ln>
+          <a:effectLst/>
+        </p:spPr>
+        <p:style>
+          <a:lnRef idx="1">
+            <a:schemeClr val="accent1"/>
+          </a:lnRef>
+          <a:fillRef idx="3">
+            <a:schemeClr val="accent1"/>
+          </a:fillRef>
+          <a:effectRef idx="2">
+            <a:schemeClr val="accent1"/>
+          </a:effectRef>
+          <a:fontRef idx="minor">
+            <a:schemeClr val="lt1"/>
+          </a:fontRef>
+        </p:style>
+        <p:txBody>
+          <a:bodyPr rtlCol="0" anchor="ctr"/>
+          <a:lstStyle/>
+          <a:p>
+            <a:pPr algn="ctr"/>
+          </a:p>
+        </p:txBody>
+      </p:sp>
+      <p:sp>
+        <p:nvSpPr>
+          <p:cNvPr id="4" name="TextBox 3"/>
+          <p:cNvSpPr txBox="1"/>
+          <p:nvPr/>
+        </p:nvSpPr>
+        <p:spPr>
+          <a:xfrm>
+            <a:off x="11430000" y="6473952"/>
+            <a:ext cx="640080" cy="365760"/>
+          </a:xfrm>
+          <a:prstGeom prst="rect">
+            <a:avLst/>
+          </a:prstGeom>
+          <a:noFill/>
+        </p:spPr>
+        <p:txBody>
+          <a:bodyPr wrap="none">
+            <a:spAutoFit/>
+          </a:bodyPr>
+          <a:lstStyle/>
+          <a:p>
+            <a:pPr algn="r"/>
+            <a:r>
+              <a:rPr sz="1200" b="1">
+                <a:solidFill>
+                  <a:srgbClr val="FFFFFF"/>
+                </a:solidFill>
+              </a:rPr>
+              <a:t>10</a:t>
+            </a:r>
+          </a:p>
+        </p:txBody>
+      </p:sp>
     </p:spTree>
   </p:cSld>
   <p:clrMapOvr>
@@ -3704,7 +3904,51 @@
       </p:sp>
       <p:sp>
         <p:nvSpPr>
-          <p:cNvPr id="3" name="TextBox 2"/>
+          <p:cNvPr id="3" name="Rectangle 2"/>
+          <p:cNvSpPr/>
+          <p:nvPr/>
+        </p:nvSpPr>
+        <p:spPr>
+          <a:xfrm>
+            <a:off x="4937760" y="841248"/>
+            <a:ext cx="2286000" cy="41148"/>
+          </a:xfrm>
+          <a:prstGeom prst="rect">
+            <a:avLst/>
+          </a:prstGeom>
+          <a:solidFill>
+            <a:srgbClr val="1F77C2"/>
+          </a:solidFill>
+          <a:ln>
+            <a:noFill/>
+          </a:ln>
+          <a:effectLst/>
+        </p:spPr>
+        <p:style>
+          <a:lnRef idx="1">
+            <a:schemeClr val="accent1"/>
+          </a:lnRef>
+          <a:fillRef idx="3">
+            <a:schemeClr val="accent1"/>
+          </a:fillRef>
+          <a:effectRef idx="2">
+            <a:schemeClr val="accent1"/>
+          </a:effectRef>
+          <a:fontRef idx="minor">
+            <a:schemeClr val="lt1"/>
+          </a:fontRef>
+        </p:style>
+        <p:txBody>
+          <a:bodyPr rtlCol="0" anchor="ctr"/>
+          <a:lstStyle/>
+          <a:p>
+            <a:pPr algn="ctr"/>
+          </a:p>
+        </p:txBody>
+      </p:sp>
+      <p:sp>
+        <p:nvSpPr>
+          <p:cNvPr id="4" name="TextBox 3"/>
           <p:cNvSpPr txBox="1"/>
           <p:nvPr/>
         </p:nvSpPr>
@@ -3825,6 +4069,84 @@
                 </a:solidFill>
               </a:rPr>
               <a:t>separately and carefully, who is actually PRESENT.</a:t>
+            </a:r>
+          </a:p>
+        </p:txBody>
+      </p:sp>
+      <p:sp>
+        <p:nvSpPr>
+          <p:cNvPr id="5" name="Rectangle 4"/>
+          <p:cNvSpPr/>
+          <p:nvPr/>
+        </p:nvSpPr>
+        <p:spPr>
+          <a:xfrm>
+            <a:off x="0" y="6446520"/>
+            <a:ext cx="12191695" cy="411480"/>
+          </a:xfrm>
+          <a:prstGeom prst="rect">
+            <a:avLst/>
+          </a:prstGeom>
+          <a:solidFill>
+            <a:srgbClr val="1F77C2"/>
+          </a:solidFill>
+          <a:ln>
+            <a:noFill/>
+          </a:ln>
+          <a:effectLst/>
+        </p:spPr>
+        <p:style>
+          <a:lnRef idx="1">
+            <a:schemeClr val="accent1"/>
+          </a:lnRef>
+          <a:fillRef idx="3">
+            <a:schemeClr val="accent1"/>
+          </a:fillRef>
+          <a:effectRef idx="2">
+            <a:schemeClr val="accent1"/>
+          </a:effectRef>
+          <a:fontRef idx="minor">
+            <a:schemeClr val="lt1"/>
+          </a:fontRef>
+        </p:style>
+        <p:txBody>
+          <a:bodyPr rtlCol="0" anchor="ctr"/>
+          <a:lstStyle/>
+          <a:p>
+            <a:pPr algn="ctr"/>
+          </a:p>
+        </p:txBody>
+      </p:sp>
+      <p:sp>
+        <p:nvSpPr>
+          <p:cNvPr id="6" name="TextBox 5"/>
+          <p:cNvSpPr txBox="1"/>
+          <p:nvPr/>
+        </p:nvSpPr>
+        <p:spPr>
+          <a:xfrm>
+            <a:off x="11430000" y="6473952"/>
+            <a:ext cx="640080" cy="365760"/>
+          </a:xfrm>
+          <a:prstGeom prst="rect">
+            <a:avLst/>
+          </a:prstGeom>
+          <a:noFill/>
+        </p:spPr>
+        <p:txBody>
+          <a:bodyPr wrap="none">
+            <a:spAutoFit/>
+          </a:bodyPr>
+          <a:lstStyle/>
+          <a:p>
+            <a:pPr algn="r"/>
+            <a:r>
+              <a:rPr sz="1200" b="1">
+                <a:solidFill>
+                  <a:srgbClr val="FFFFFF"/>
+                </a:solidFill>
+              </a:rPr>
+              <a:t>1</a:t>
             </a:r>
           </a:p>
         </p:txBody>
@@ -3883,7 +4205,51 @@
       </p:sp>
       <p:sp>
         <p:nvSpPr>
-          <p:cNvPr id="3" name="TextBox 2"/>
+          <p:cNvPr id="3" name="Rectangle 2"/>
+          <p:cNvSpPr/>
+          <p:nvPr/>
+        </p:nvSpPr>
+        <p:spPr>
+          <a:xfrm>
+            <a:off x="4937760" y="841248"/>
+            <a:ext cx="2286000" cy="41148"/>
+          </a:xfrm>
+          <a:prstGeom prst="rect">
+            <a:avLst/>
+          </a:prstGeom>
+          <a:solidFill>
+            <a:srgbClr val="1F77C2"/>
+          </a:solidFill>
+          <a:ln>
+            <a:noFill/>
+          </a:ln>
+          <a:effectLst/>
+        </p:spPr>
+        <p:style>
+          <a:lnRef idx="1">
+            <a:schemeClr val="accent1"/>
+          </a:lnRef>
+          <a:fillRef idx="3">
+            <a:schemeClr val="accent1"/>
+          </a:fillRef>
+          <a:effectRef idx="2">
+            <a:schemeClr val="accent1"/>
+          </a:effectRef>
+          <a:fontRef idx="minor">
+            <a:schemeClr val="lt1"/>
+          </a:fontRef>
+        </p:style>
+        <p:txBody>
+          <a:bodyPr rtlCol="0" anchor="ctr"/>
+          <a:lstStyle/>
+          <a:p>
+            <a:pPr algn="ctr"/>
+          </a:p>
+        </p:txBody>
+      </p:sp>
+      <p:sp>
+        <p:nvSpPr>
+          <p:cNvPr id="4" name="TextBox 3"/>
           <p:cNvSpPr txBox="1"/>
           <p:nvPr/>
         </p:nvSpPr>
@@ -4078,6 +4444,84 @@
                 </a:solidFill>
               </a:rPr>
               <a:t>One laptop, one webcam, no GPU, no cloud, no student data leaving campus.</a:t>
+            </a:r>
+          </a:p>
+        </p:txBody>
+      </p:sp>
+      <p:sp>
+        <p:nvSpPr>
+          <p:cNvPr id="5" name="Rectangle 4"/>
+          <p:cNvSpPr/>
+          <p:nvPr/>
+        </p:nvSpPr>
+        <p:spPr>
+          <a:xfrm>
+            <a:off x="0" y="6446520"/>
+            <a:ext cx="12191695" cy="411480"/>
+          </a:xfrm>
+          <a:prstGeom prst="rect">
+            <a:avLst/>
+          </a:prstGeom>
+          <a:solidFill>
+            <a:srgbClr val="1F77C2"/>
+          </a:solidFill>
+          <a:ln>
+            <a:noFill/>
+          </a:ln>
+          <a:effectLst/>
+        </p:spPr>
+        <p:style>
+          <a:lnRef idx="1">
+            <a:schemeClr val="accent1"/>
+          </a:lnRef>
+          <a:fillRef idx="3">
+            <a:schemeClr val="accent1"/>
+          </a:fillRef>
+          <a:effectRef idx="2">
+            <a:schemeClr val="accent1"/>
+          </a:effectRef>
+          <a:fontRef idx="minor">
+            <a:schemeClr val="lt1"/>
+          </a:fontRef>
+        </p:style>
+        <p:txBody>
+          <a:bodyPr rtlCol="0" anchor="ctr"/>
+          <a:lstStyle/>
+          <a:p>
+            <a:pPr algn="ctr"/>
+          </a:p>
+        </p:txBody>
+      </p:sp>
+      <p:sp>
+        <p:nvSpPr>
+          <p:cNvPr id="6" name="TextBox 5"/>
+          <p:cNvSpPr txBox="1"/>
+          <p:nvPr/>
+        </p:nvSpPr>
+        <p:spPr>
+          <a:xfrm>
+            <a:off x="11430000" y="6473952"/>
+            <a:ext cx="640080" cy="365760"/>
+          </a:xfrm>
+          <a:prstGeom prst="rect">
+            <a:avLst/>
+          </a:prstGeom>
+          <a:noFill/>
+        </p:spPr>
+        <p:txBody>
+          <a:bodyPr wrap="none">
+            <a:spAutoFit/>
+          </a:bodyPr>
+          <a:lstStyle/>
+          <a:p>
+            <a:pPr algn="r"/>
+            <a:r>
+              <a:rPr sz="1200" b="1">
+                <a:solidFill>
+                  <a:srgbClr val="FFFFFF"/>
+                </a:solidFill>
+              </a:rPr>
+              <a:t>2</a:t>
             </a:r>
           </a:p>
         </p:txBody>
@@ -4136,7 +4580,51 @@
       </p:sp>
       <p:sp>
         <p:nvSpPr>
-          <p:cNvPr id="3" name="TextBox 2"/>
+          <p:cNvPr id="3" name="Rectangle 2"/>
+          <p:cNvSpPr/>
+          <p:nvPr/>
+        </p:nvSpPr>
+        <p:spPr>
+          <a:xfrm>
+            <a:off x="4937760" y="841248"/>
+            <a:ext cx="2286000" cy="41148"/>
+          </a:xfrm>
+          <a:prstGeom prst="rect">
+            <a:avLst/>
+          </a:prstGeom>
+          <a:solidFill>
+            <a:srgbClr val="1F77C2"/>
+          </a:solidFill>
+          <a:ln>
+            <a:noFill/>
+          </a:ln>
+          <a:effectLst/>
+        </p:spPr>
+        <p:style>
+          <a:lnRef idx="1">
+            <a:schemeClr val="accent1"/>
+          </a:lnRef>
+          <a:fillRef idx="3">
+            <a:schemeClr val="accent1"/>
+          </a:fillRef>
+          <a:effectRef idx="2">
+            <a:schemeClr val="accent1"/>
+          </a:effectRef>
+          <a:fontRef idx="minor">
+            <a:schemeClr val="lt1"/>
+          </a:fontRef>
+        </p:style>
+        <p:txBody>
+          <a:bodyPr rtlCol="0" anchor="ctr"/>
+          <a:lstStyle/>
+          <a:p>
+            <a:pPr algn="ctr"/>
+          </a:p>
+        </p:txBody>
+      </p:sp>
+      <p:sp>
+        <p:nvSpPr>
+          <p:cNvPr id="4" name="TextBox 3"/>
           <p:cNvSpPr txBox="1"/>
           <p:nvPr/>
         </p:nvSpPr>
@@ -4226,14 +4714,58 @@
       </p:sp>
       <p:sp>
         <p:nvSpPr>
-          <p:cNvPr id="4" name="TextBox 3"/>
+          <p:cNvPr id="5" name="Rounded Rectangle 4"/>
+          <p:cNvSpPr/>
+          <p:nvPr/>
+        </p:nvSpPr>
+        <p:spPr>
+          <a:xfrm>
+            <a:off x="640080" y="2697480"/>
+            <a:ext cx="10881360" cy="1600200"/>
+          </a:xfrm>
+          <a:prstGeom prst="roundRect">
+            <a:avLst/>
+          </a:prstGeom>
+          <a:solidFill>
+            <a:srgbClr val="FDECEA"/>
+          </a:solidFill>
+          <a:ln w="15875">
+            <a:solidFill>
+              <a:srgbClr val="C0392B"/>
+            </a:solidFill>
+          </a:ln>
+          <a:effectLst/>
+        </p:spPr>
+        <p:style>
+          <a:lnRef idx="1">
+            <a:schemeClr val="accent1"/>
+          </a:lnRef>
+          <a:fillRef idx="3">
+            <a:schemeClr val="accent1"/>
+          </a:fillRef>
+          <a:effectRef idx="2">
+            <a:schemeClr val="accent1"/>
+          </a:effectRef>
+          <a:fontRef idx="minor">
+            <a:schemeClr val="lt1"/>
+          </a:fontRef>
+        </p:style>
+        <p:txBody>
+          <a:bodyPr rtlCol="0" anchor="ctr"/>
+          <a:lstStyle/>
+          <a:p/>
+        </p:txBody>
+      </p:sp>
+      <p:sp>
+        <p:nvSpPr>
+          <p:cNvPr id="6" name="TextBox 5"/>
           <p:cNvSpPr txBox="1"/>
           <p:nvPr/>
         </p:nvSpPr>
         <p:spPr>
           <a:xfrm>
-            <a:off x="822960" y="2834640"/>
-            <a:ext cx="10607040" cy="1280160"/>
+            <a:off x="868680" y="2880360"/>
+            <a:ext cx="10424160" cy="1280160"/>
           </a:xfrm>
           <a:prstGeom prst="rect">
             <a:avLst/>
@@ -4252,7 +4784,7 @@
               </a:spcAft>
             </a:pPr>
             <a:r>
-              <a:rPr sz="1500" b="1">
+              <a:rPr sz="1450" b="1">
                 <a:solidFill>
                   <a:srgbClr val="C0392B"/>
                 </a:solidFill>
@@ -4267,7 +4799,7 @@
               </a:spcAft>
             </a:pPr>
             <a:r>
-              <a:rPr sz="1500" b="1">
+              <a:rPr sz="1450" b="1">
                 <a:solidFill>
                   <a:srgbClr val="C0392B"/>
                 </a:solidFill>
@@ -4282,7 +4814,7 @@
               </a:spcAft>
             </a:pPr>
             <a:r>
-              <a:rPr sz="1500" b="1">
+              <a:rPr sz="1450" b="1">
                 <a:solidFill>
                   <a:srgbClr val="C0392B"/>
                 </a:solidFill>
@@ -4297,7 +4829,7 @@
               </a:spcAft>
             </a:pPr>
             <a:r>
-              <a:rPr sz="1500" b="1">
+              <a:rPr sz="1450" b="1">
                 <a:solidFill>
                   <a:srgbClr val="C0392B"/>
                 </a:solidFill>
@@ -4309,14 +4841,58 @@
       </p:sp>
       <p:sp>
         <p:nvSpPr>
-          <p:cNvPr id="5" name="TextBox 4"/>
+          <p:cNvPr id="7" name="Rounded Rectangle 6"/>
+          <p:cNvSpPr/>
+          <p:nvPr/>
+        </p:nvSpPr>
+        <p:spPr>
+          <a:xfrm>
+            <a:off x="640080" y="4389120"/>
+            <a:ext cx="10881360" cy="1783080"/>
+          </a:xfrm>
+          <a:prstGeom prst="roundRect">
+            <a:avLst/>
+          </a:prstGeom>
+          <a:solidFill>
+            <a:srgbClr val="F4F6F9"/>
+          </a:solidFill>
+          <a:ln w="15875">
+            <a:solidFill>
+              <a:srgbClr val="1F3A6E"/>
+            </a:solidFill>
+          </a:ln>
+          <a:effectLst/>
+        </p:spPr>
+        <p:style>
+          <a:lnRef idx="1">
+            <a:schemeClr val="accent1"/>
+          </a:lnRef>
+          <a:fillRef idx="3">
+            <a:schemeClr val="accent1"/>
+          </a:fillRef>
+          <a:effectRef idx="2">
+            <a:schemeClr val="accent1"/>
+          </a:effectRef>
+          <a:fontRef idx="minor">
+            <a:schemeClr val="lt1"/>
+          </a:fontRef>
+        </p:style>
+        <p:txBody>
+          <a:bodyPr rtlCol="0" anchor="ctr"/>
+          <a:lstStyle/>
+          <a:p/>
+        </p:txBody>
+      </p:sp>
+      <p:sp>
+        <p:nvSpPr>
+          <p:cNvPr id="8" name="TextBox 7"/>
           <p:cNvSpPr txBox="1"/>
           <p:nvPr/>
         </p:nvSpPr>
         <p:spPr>
           <a:xfrm>
-            <a:off x="822960" y="4480560"/>
-            <a:ext cx="10607040" cy="1828800"/>
+            <a:off x="868680" y="4526280"/>
+            <a:ext cx="10424160" cy="1645920"/>
           </a:xfrm>
           <a:prstGeom prst="rect">
             <a:avLst/>
@@ -4335,7 +4911,7 @@
               </a:spcAft>
             </a:pPr>
             <a:r>
-              <a:rPr sz="1300" b="1">
+              <a:rPr sz="1250" b="1">
                 <a:solidFill>
                   <a:srgbClr val="1F3A6E"/>
                 </a:solidFill>
@@ -4350,7 +4926,7 @@
               </a:spcAft>
             </a:pPr>
             <a:r>
-              <a:rPr sz="1300" b="0">
+              <a:rPr sz="1250" b="0">
                 <a:solidFill>
                   <a:srgbClr val="1A1A1A"/>
                 </a:solidFill>
@@ -4365,7 +4941,7 @@
               </a:spcAft>
             </a:pPr>
             <a:r>
-              <a:rPr sz="1300" b="0">
+              <a:rPr sz="1250" b="0">
                 <a:solidFill>
                   <a:srgbClr val="1A1A1A"/>
                 </a:solidFill>
@@ -4380,7 +4956,7 @@
               </a:spcAft>
             </a:pPr>
             <a:r>
-              <a:rPr sz="1300" b="0">
+              <a:rPr sz="1250" b="0">
                 <a:solidFill>
                   <a:srgbClr val="1A1A1A"/>
                 </a:solidFill>
@@ -4395,12 +4971,90 @@
               </a:spcAft>
             </a:pPr>
             <a:r>
-              <a:rPr sz="1300" b="0">
+              <a:rPr sz="1250" b="0">
                 <a:solidFill>
                   <a:srgbClr val="1A1A1A"/>
                 </a:solidFill>
               </a:rPr>
               <a:t>•  One misread frame  →  wrong student marked present for the entire day</a:t>
+            </a:r>
+          </a:p>
+        </p:txBody>
+      </p:sp>
+      <p:sp>
+        <p:nvSpPr>
+          <p:cNvPr id="9" name="Rectangle 8"/>
+          <p:cNvSpPr/>
+          <p:nvPr/>
+        </p:nvSpPr>
+        <p:spPr>
+          <a:xfrm>
+            <a:off x="0" y="6446520"/>
+            <a:ext cx="12191695" cy="411480"/>
+          </a:xfrm>
+          <a:prstGeom prst="rect">
+            <a:avLst/>
+          </a:prstGeom>
+          <a:solidFill>
+            <a:srgbClr val="1F77C2"/>
+          </a:solidFill>
+          <a:ln>
+            <a:noFill/>
+          </a:ln>
+          <a:effectLst/>
+        </p:spPr>
+        <p:style>
+          <a:lnRef idx="1">
+            <a:schemeClr val="accent1"/>
+          </a:lnRef>
+          <a:fillRef idx="3">
+            <a:schemeClr val="accent1"/>
+          </a:fillRef>
+          <a:effectRef idx="2">
+            <a:schemeClr val="accent1"/>
+          </a:effectRef>
+          <a:fontRef idx="minor">
+            <a:schemeClr val="lt1"/>
+          </a:fontRef>
+        </p:style>
+        <p:txBody>
+          <a:bodyPr rtlCol="0" anchor="ctr"/>
+          <a:lstStyle/>
+          <a:p>
+            <a:pPr algn="ctr"/>
+          </a:p>
+        </p:txBody>
+      </p:sp>
+      <p:sp>
+        <p:nvSpPr>
+          <p:cNvPr id="10" name="TextBox 9"/>
+          <p:cNvSpPr txBox="1"/>
+          <p:nvPr/>
+        </p:nvSpPr>
+        <p:spPr>
+          <a:xfrm>
+            <a:off x="11430000" y="6473952"/>
+            <a:ext cx="640080" cy="365760"/>
+          </a:xfrm>
+          <a:prstGeom prst="rect">
+            <a:avLst/>
+          </a:prstGeom>
+          <a:noFill/>
+        </p:spPr>
+        <p:txBody>
+          <a:bodyPr wrap="none">
+            <a:spAutoFit/>
+          </a:bodyPr>
+          <a:lstStyle/>
+          <a:p>
+            <a:pPr algn="r"/>
+            <a:r>
+              <a:rPr sz="1200" b="1">
+                <a:solidFill>
+                  <a:srgbClr val="FFFFFF"/>
+                </a:solidFill>
+              </a:rPr>
+              <a:t>3</a:t>
             </a:r>
           </a:p>
         </p:txBody>
@@ -4459,7 +5113,51 @@
       </p:sp>
       <p:sp>
         <p:nvSpPr>
-          <p:cNvPr id="3" name="TextBox 2"/>
+          <p:cNvPr id="3" name="Rectangle 2"/>
+          <p:cNvSpPr/>
+          <p:nvPr/>
+        </p:nvSpPr>
+        <p:spPr>
+          <a:xfrm>
+            <a:off x="4937760" y="841248"/>
+            <a:ext cx="2286000" cy="41148"/>
+          </a:xfrm>
+          <a:prstGeom prst="rect">
+            <a:avLst/>
+          </a:prstGeom>
+          <a:solidFill>
+            <a:srgbClr val="1F77C2"/>
+          </a:solidFill>
+          <a:ln>
+            <a:noFill/>
+          </a:ln>
+          <a:effectLst/>
+        </p:spPr>
+        <p:style>
+          <a:lnRef idx="1">
+            <a:schemeClr val="accent1"/>
+          </a:lnRef>
+          <a:fillRef idx="3">
+            <a:schemeClr val="accent1"/>
+          </a:fillRef>
+          <a:effectRef idx="2">
+            <a:schemeClr val="accent1"/>
+          </a:effectRef>
+          <a:fontRef idx="minor">
+            <a:schemeClr val="lt1"/>
+          </a:fontRef>
+        </p:style>
+        <p:txBody>
+          <a:bodyPr rtlCol="0" anchor="ctr"/>
+          <a:lstStyle/>
+          <a:p>
+            <a:pPr algn="ctr"/>
+          </a:p>
+        </p:txBody>
+      </p:sp>
+      <p:sp>
+        <p:nvSpPr>
+          <p:cNvPr id="4" name="TextBox 3"/>
           <p:cNvSpPr txBox="1"/>
           <p:nvPr/>
         </p:nvSpPr>
@@ -4607,14 +5305,58 @@
       </p:sp>
       <p:sp>
         <p:nvSpPr>
-          <p:cNvPr id="4" name="TextBox 3"/>
+          <p:cNvPr id="5" name="Rounded Rectangle 4"/>
+          <p:cNvSpPr/>
+          <p:nvPr/>
+        </p:nvSpPr>
+        <p:spPr>
+          <a:xfrm>
+            <a:off x="548640" y="5257800"/>
+            <a:ext cx="11064240" cy="1097280"/>
+          </a:xfrm>
+          <a:prstGeom prst="roundRect">
+            <a:avLst/>
+          </a:prstGeom>
+          <a:solidFill>
+            <a:srgbClr val="FDECEA"/>
+          </a:solidFill>
+          <a:ln w="15875">
+            <a:solidFill>
+              <a:srgbClr val="C0392B"/>
+            </a:solidFill>
+          </a:ln>
+          <a:effectLst/>
+        </p:spPr>
+        <p:style>
+          <a:lnRef idx="1">
+            <a:schemeClr val="accent1"/>
+          </a:lnRef>
+          <a:fillRef idx="3">
+            <a:schemeClr val="accent1"/>
+          </a:fillRef>
+          <a:effectRef idx="2">
+            <a:schemeClr val="accent1"/>
+          </a:effectRef>
+          <a:fontRef idx="minor">
+            <a:schemeClr val="lt1"/>
+          </a:fontRef>
+        </p:style>
+        <p:txBody>
+          <a:bodyPr rtlCol="0" anchor="ctr"/>
+          <a:lstStyle/>
+          <a:p/>
+        </p:txBody>
+      </p:sp>
+      <p:sp>
+        <p:nvSpPr>
+          <p:cNvPr id="6" name="TextBox 5"/>
           <p:cNvSpPr txBox="1"/>
           <p:nvPr/>
         </p:nvSpPr>
         <p:spPr>
           <a:xfrm>
-            <a:off x="640080" y="5394960"/>
-            <a:ext cx="10972800" cy="1005840"/>
+            <a:off x="777240" y="5349240"/>
+            <a:ext cx="10698480" cy="960120"/>
           </a:xfrm>
           <a:prstGeom prst="rect">
             <a:avLst/>
@@ -4633,7 +5375,7 @@
               </a:spcAft>
             </a:pPr>
             <a:r>
-              <a:rPr sz="1250" b="1">
+              <a:rPr sz="1150" b="1">
                 <a:solidFill>
                   <a:srgbClr val="C0392B"/>
                 </a:solidFill>
@@ -4648,12 +5390,90 @@
               </a:spcAft>
             </a:pPr>
             <a:r>
-              <a:rPr sz="1250" b="1">
+              <a:rPr sz="1150" b="1">
                 <a:solidFill>
                   <a:srgbClr val="C0392B"/>
                 </a:solidFill>
               </a:rPr>
               <a:t>Every attendance paper above reports one accuracy number on clean data. None of them test a presentation attack, none report a stranger-rejection rate, and none treat 'recognised' and 'marked present' as different decisions. That gap is our project.</a:t>
+            </a:r>
+          </a:p>
+        </p:txBody>
+      </p:sp>
+      <p:sp>
+        <p:nvSpPr>
+          <p:cNvPr id="7" name="Rectangle 6"/>
+          <p:cNvSpPr/>
+          <p:nvPr/>
+        </p:nvSpPr>
+        <p:spPr>
+          <a:xfrm>
+            <a:off x="0" y="6446520"/>
+            <a:ext cx="12191695" cy="411480"/>
+          </a:xfrm>
+          <a:prstGeom prst="rect">
+            <a:avLst/>
+          </a:prstGeom>
+          <a:solidFill>
+            <a:srgbClr val="1F77C2"/>
+          </a:solidFill>
+          <a:ln>
+            <a:noFill/>
+          </a:ln>
+          <a:effectLst/>
+        </p:spPr>
+        <p:style>
+          <a:lnRef idx="1">
+            <a:schemeClr val="accent1"/>
+          </a:lnRef>
+          <a:fillRef idx="3">
+            <a:schemeClr val="accent1"/>
+          </a:fillRef>
+          <a:effectRef idx="2">
+            <a:schemeClr val="accent1"/>
+          </a:effectRef>
+          <a:fontRef idx="minor">
+            <a:schemeClr val="lt1"/>
+          </a:fontRef>
+        </p:style>
+        <p:txBody>
+          <a:bodyPr rtlCol="0" anchor="ctr"/>
+          <a:lstStyle/>
+          <a:p>
+            <a:pPr algn="ctr"/>
+          </a:p>
+        </p:txBody>
+      </p:sp>
+      <p:sp>
+        <p:nvSpPr>
+          <p:cNvPr id="8" name="TextBox 7"/>
+          <p:cNvSpPr txBox="1"/>
+          <p:nvPr/>
+        </p:nvSpPr>
+        <p:spPr>
+          <a:xfrm>
+            <a:off x="11430000" y="6473952"/>
+            <a:ext cx="640080" cy="365760"/>
+          </a:xfrm>
+          <a:prstGeom prst="rect">
+            <a:avLst/>
+          </a:prstGeom>
+          <a:noFill/>
+        </p:spPr>
+        <p:txBody>
+          <a:bodyPr wrap="none">
+            <a:spAutoFit/>
+          </a:bodyPr>
+          <a:lstStyle/>
+          <a:p>
+            <a:pPr algn="r"/>
+            <a:r>
+              <a:rPr sz="1200" b="1">
+                <a:solidFill>
+                  <a:srgbClr val="FFFFFF"/>
+                </a:solidFill>
+              </a:rPr>
+              <a:t>4</a:t>
             </a:r>
           </a:p>
         </p:txBody>
@@ -4712,7 +5532,95 @@
       </p:sp>
       <p:sp>
         <p:nvSpPr>
-          <p:cNvPr id="3" name="TextBox 2"/>
+          <p:cNvPr id="3" name="Rectangle 2"/>
+          <p:cNvSpPr/>
+          <p:nvPr/>
+        </p:nvSpPr>
+        <p:spPr>
+          <a:xfrm>
+            <a:off x="4937760" y="841248"/>
+            <a:ext cx="2286000" cy="41148"/>
+          </a:xfrm>
+          <a:prstGeom prst="rect">
+            <a:avLst/>
+          </a:prstGeom>
+          <a:solidFill>
+            <a:srgbClr val="1F77C2"/>
+          </a:solidFill>
+          <a:ln>
+            <a:noFill/>
+          </a:ln>
+          <a:effectLst/>
+        </p:spPr>
+        <p:style>
+          <a:lnRef idx="1">
+            <a:schemeClr val="accent1"/>
+          </a:lnRef>
+          <a:fillRef idx="3">
+            <a:schemeClr val="accent1"/>
+          </a:fillRef>
+          <a:effectRef idx="2">
+            <a:schemeClr val="accent1"/>
+          </a:effectRef>
+          <a:fontRef idx="minor">
+            <a:schemeClr val="lt1"/>
+          </a:fontRef>
+        </p:style>
+        <p:txBody>
+          <a:bodyPr rtlCol="0" anchor="ctr"/>
+          <a:lstStyle/>
+          <a:p>
+            <a:pPr algn="ctr"/>
+          </a:p>
+        </p:txBody>
+      </p:sp>
+      <p:sp>
+        <p:nvSpPr>
+          <p:cNvPr id="4" name="Rounded Rectangle 3"/>
+          <p:cNvSpPr/>
+          <p:nvPr/>
+        </p:nvSpPr>
+        <p:spPr>
+          <a:xfrm>
+            <a:off x="548640" y="1005840"/>
+            <a:ext cx="5669280" cy="2926080"/>
+          </a:xfrm>
+          <a:prstGeom prst="roundRect">
+            <a:avLst/>
+          </a:prstGeom>
+          <a:solidFill>
+            <a:srgbClr val="E8F1FB"/>
+          </a:solidFill>
+          <a:ln w="15875">
+            <a:solidFill>
+              <a:srgbClr val="1F3A6E"/>
+            </a:solidFill>
+          </a:ln>
+          <a:effectLst/>
+        </p:spPr>
+        <p:style>
+          <a:lnRef idx="1">
+            <a:schemeClr val="accent1"/>
+          </a:lnRef>
+          <a:fillRef idx="3">
+            <a:schemeClr val="accent1"/>
+          </a:fillRef>
+          <a:effectRef idx="2">
+            <a:schemeClr val="accent1"/>
+          </a:effectRef>
+          <a:fontRef idx="minor">
+            <a:schemeClr val="lt1"/>
+          </a:fontRef>
+        </p:style>
+        <p:txBody>
+          <a:bodyPr rtlCol="0" anchor="ctr"/>
+          <a:lstStyle/>
+          <a:p/>
+        </p:txBody>
+      </p:sp>
+      <p:sp>
+        <p:nvSpPr>
+          <p:cNvPr id="5" name="TextBox 4"/>
           <p:cNvSpPr txBox="1"/>
           <p:nvPr/>
         </p:nvSpPr>
@@ -4862,7 +5770,51 @@
       </p:sp>
       <p:sp>
         <p:nvSpPr>
-          <p:cNvPr id="4" name="TextBox 3"/>
+          <p:cNvPr id="6" name="Rounded Rectangle 5"/>
+          <p:cNvSpPr/>
+          <p:nvPr/>
+        </p:nvSpPr>
+        <p:spPr>
+          <a:xfrm>
+            <a:off x="6446520" y="1005840"/>
+            <a:ext cx="5257800" cy="5303520"/>
+          </a:xfrm>
+          <a:prstGeom prst="roundRect">
+            <a:avLst/>
+          </a:prstGeom>
+          <a:solidFill>
+            <a:srgbClr val="E7F6EE"/>
+          </a:solidFill>
+          <a:ln w="15875">
+            <a:solidFill>
+              <a:srgbClr val="1E8E5A"/>
+            </a:solidFill>
+          </a:ln>
+          <a:effectLst/>
+        </p:spPr>
+        <p:style>
+          <a:lnRef idx="1">
+            <a:schemeClr val="accent1"/>
+          </a:lnRef>
+          <a:fillRef idx="3">
+            <a:schemeClr val="accent1"/>
+          </a:fillRef>
+          <a:effectRef idx="2">
+            <a:schemeClr val="accent1"/>
+          </a:effectRef>
+          <a:fontRef idx="minor">
+            <a:schemeClr val="lt1"/>
+          </a:fontRef>
+        </p:style>
+        <p:txBody>
+          <a:bodyPr rtlCol="0" anchor="ctr"/>
+          <a:lstStyle/>
+          <a:p/>
+        </p:txBody>
+      </p:sp>
+      <p:sp>
+        <p:nvSpPr>
+          <p:cNvPr id="7" name="TextBox 6"/>
           <p:cNvSpPr txBox="1"/>
           <p:nvPr/>
         </p:nvSpPr>
@@ -5043,6 +5995,84 @@
                 </a:solidFill>
               </a:rPr>
               <a:t>•  A guard that did NOT work (top-2 margin) — reported, not hidden.</a:t>
+            </a:r>
+          </a:p>
+        </p:txBody>
+      </p:sp>
+      <p:sp>
+        <p:nvSpPr>
+          <p:cNvPr id="8" name="Rectangle 7"/>
+          <p:cNvSpPr/>
+          <p:nvPr/>
+        </p:nvSpPr>
+        <p:spPr>
+          <a:xfrm>
+            <a:off x="0" y="6446520"/>
+            <a:ext cx="12191695" cy="411480"/>
+          </a:xfrm>
+          <a:prstGeom prst="rect">
+            <a:avLst/>
+          </a:prstGeom>
+          <a:solidFill>
+            <a:srgbClr val="1F77C2"/>
+          </a:solidFill>
+          <a:ln>
+            <a:noFill/>
+          </a:ln>
+          <a:effectLst/>
+        </p:spPr>
+        <p:style>
+          <a:lnRef idx="1">
+            <a:schemeClr val="accent1"/>
+          </a:lnRef>
+          <a:fillRef idx="3">
+            <a:schemeClr val="accent1"/>
+          </a:fillRef>
+          <a:effectRef idx="2">
+            <a:schemeClr val="accent1"/>
+          </a:effectRef>
+          <a:fontRef idx="minor">
+            <a:schemeClr val="lt1"/>
+          </a:fontRef>
+        </p:style>
+        <p:txBody>
+          <a:bodyPr rtlCol="0" anchor="ctr"/>
+          <a:lstStyle/>
+          <a:p>
+            <a:pPr algn="ctr"/>
+          </a:p>
+        </p:txBody>
+      </p:sp>
+      <p:sp>
+        <p:nvSpPr>
+          <p:cNvPr id="9" name="TextBox 8"/>
+          <p:cNvSpPr txBox="1"/>
+          <p:nvPr/>
+        </p:nvSpPr>
+        <p:spPr>
+          <a:xfrm>
+            <a:off x="11430000" y="6473952"/>
+            <a:ext cx="640080" cy="365760"/>
+          </a:xfrm>
+          <a:prstGeom prst="rect">
+            <a:avLst/>
+          </a:prstGeom>
+          <a:noFill/>
+        </p:spPr>
+        <p:txBody>
+          <a:bodyPr wrap="none">
+            <a:spAutoFit/>
+          </a:bodyPr>
+          <a:lstStyle/>
+          <a:p>
+            <a:pPr algn="r"/>
+            <a:r>
+              <a:rPr sz="1200" b="1">
+                <a:solidFill>
+                  <a:srgbClr val="FFFFFF"/>
+                </a:solidFill>
+              </a:rPr>
+              <a:t>5</a:t>
             </a:r>
           </a:p>
         </p:txBody>
@@ -5099,9 +6129,53 @@
           </a:p>
         </p:txBody>
       </p:sp>
+      <p:sp>
+        <p:nvSpPr>
+          <p:cNvPr id="3" name="Rectangle 2"/>
+          <p:cNvSpPr/>
+          <p:nvPr/>
+        </p:nvSpPr>
+        <p:spPr>
+          <a:xfrm>
+            <a:off x="4937760" y="841248"/>
+            <a:ext cx="2286000" cy="41148"/>
+          </a:xfrm>
+          <a:prstGeom prst="rect">
+            <a:avLst/>
+          </a:prstGeom>
+          <a:solidFill>
+            <a:srgbClr val="1F77C2"/>
+          </a:solidFill>
+          <a:ln>
+            <a:noFill/>
+          </a:ln>
+          <a:effectLst/>
+        </p:spPr>
+        <p:style>
+          <a:lnRef idx="1">
+            <a:schemeClr val="accent1"/>
+          </a:lnRef>
+          <a:fillRef idx="3">
+            <a:schemeClr val="accent1"/>
+          </a:fillRef>
+          <a:effectRef idx="2">
+            <a:schemeClr val="accent1"/>
+          </a:effectRef>
+          <a:fontRef idx="minor">
+            <a:schemeClr val="lt1"/>
+          </a:fontRef>
+        </p:style>
+        <p:txBody>
+          <a:bodyPr rtlCol="0" anchor="ctr"/>
+          <a:lstStyle/>
+          <a:p>
+            <a:pPr algn="ctr"/>
+          </a:p>
+        </p:txBody>
+      </p:sp>
       <p:pic>
         <p:nvPicPr>
-          <p:cNvPr id="3" name="Picture 2" descr="workflow.png"/>
+          <p:cNvPr id="4" name="Picture 3" descr="workflow.png"/>
           <p:cNvPicPr>
             <a:picLocks noChangeAspect="1"/>
           </p:cNvPicPr>
@@ -5125,7 +6199,7 @@
       </p:pic>
       <p:sp>
         <p:nvSpPr>
-          <p:cNvPr id="4" name="TextBox 3"/>
+          <p:cNvPr id="5" name="TextBox 4"/>
           <p:cNvSpPr txBox="1"/>
           <p:nvPr/>
         </p:nvSpPr>
@@ -5283,7 +6357,7 @@
       </p:sp>
       <p:sp>
         <p:nvSpPr>
-          <p:cNvPr id="5" name="TextBox 4"/>
+          <p:cNvPr id="6" name="TextBox 5"/>
           <p:cNvSpPr txBox="1"/>
           <p:nvPr/>
         </p:nvSpPr>
@@ -5479,6 +6553,84 @@
                 </a:solidFill>
               </a:rPr>
               <a:t>live deployment demo.</a:t>
+            </a:r>
+          </a:p>
+        </p:txBody>
+      </p:sp>
+      <p:sp>
+        <p:nvSpPr>
+          <p:cNvPr id="7" name="Rectangle 6"/>
+          <p:cNvSpPr/>
+          <p:nvPr/>
+        </p:nvSpPr>
+        <p:spPr>
+          <a:xfrm>
+            <a:off x="0" y="6446520"/>
+            <a:ext cx="12191695" cy="411480"/>
+          </a:xfrm>
+          <a:prstGeom prst="rect">
+            <a:avLst/>
+          </a:prstGeom>
+          <a:solidFill>
+            <a:srgbClr val="1F77C2"/>
+          </a:solidFill>
+          <a:ln>
+            <a:noFill/>
+          </a:ln>
+          <a:effectLst/>
+        </p:spPr>
+        <p:style>
+          <a:lnRef idx="1">
+            <a:schemeClr val="accent1"/>
+          </a:lnRef>
+          <a:fillRef idx="3">
+            <a:schemeClr val="accent1"/>
+          </a:fillRef>
+          <a:effectRef idx="2">
+            <a:schemeClr val="accent1"/>
+          </a:effectRef>
+          <a:fontRef idx="minor">
+            <a:schemeClr val="lt1"/>
+          </a:fontRef>
+        </p:style>
+        <p:txBody>
+          <a:bodyPr rtlCol="0" anchor="ctr"/>
+          <a:lstStyle/>
+          <a:p>
+            <a:pPr algn="ctr"/>
+          </a:p>
+        </p:txBody>
+      </p:sp>
+      <p:sp>
+        <p:nvSpPr>
+          <p:cNvPr id="8" name="TextBox 7"/>
+          <p:cNvSpPr txBox="1"/>
+          <p:nvPr/>
+        </p:nvSpPr>
+        <p:spPr>
+          <a:xfrm>
+            <a:off x="11430000" y="6473952"/>
+            <a:ext cx="640080" cy="365760"/>
+          </a:xfrm>
+          <a:prstGeom prst="rect">
+            <a:avLst/>
+          </a:prstGeom>
+          <a:noFill/>
+        </p:spPr>
+        <p:txBody>
+          <a:bodyPr wrap="none">
+            <a:spAutoFit/>
+          </a:bodyPr>
+          <a:lstStyle/>
+          <a:p>
+            <a:pPr algn="r"/>
+            <a:r>
+              <a:rPr sz="1200" b="1">
+                <a:solidFill>
+                  <a:srgbClr val="FFFFFF"/>
+                </a:solidFill>
+              </a:rPr>
+              <a:t>6</a:t>
             </a:r>
           </a:p>
         </p:txBody>
@@ -5535,9 +6687,53 @@
           </a:p>
         </p:txBody>
       </p:sp>
+      <p:sp>
+        <p:nvSpPr>
+          <p:cNvPr id="3" name="Rectangle 2"/>
+          <p:cNvSpPr/>
+          <p:nvPr/>
+        </p:nvSpPr>
+        <p:spPr>
+          <a:xfrm>
+            <a:off x="4937760" y="841248"/>
+            <a:ext cx="2286000" cy="41148"/>
+          </a:xfrm>
+          <a:prstGeom prst="rect">
+            <a:avLst/>
+          </a:prstGeom>
+          <a:solidFill>
+            <a:srgbClr val="1F77C2"/>
+          </a:solidFill>
+          <a:ln>
+            <a:noFill/>
+          </a:ln>
+          <a:effectLst/>
+        </p:spPr>
+        <p:style>
+          <a:lnRef idx="1">
+            <a:schemeClr val="accent1"/>
+          </a:lnRef>
+          <a:fillRef idx="3">
+            <a:schemeClr val="accent1"/>
+          </a:fillRef>
+          <a:effectRef idx="2">
+            <a:schemeClr val="accent1"/>
+          </a:effectRef>
+          <a:fontRef idx="minor">
+            <a:schemeClr val="lt1"/>
+          </a:fontRef>
+        </p:style>
+        <p:txBody>
+          <a:bodyPr rtlCol="0" anchor="ctr"/>
+          <a:lstStyle/>
+          <a:p>
+            <a:pPr algn="ctr"/>
+          </a:p>
+        </p:txBody>
+      </p:sp>
       <p:pic>
         <p:nvPicPr>
-          <p:cNvPr id="3" name="Picture 2" descr="spoof.png"/>
+          <p:cNvPr id="4" name="Picture 3" descr="spoof.png"/>
           <p:cNvPicPr>
             <a:picLocks noChangeAspect="1"/>
           </p:cNvPicPr>
@@ -5561,7 +6757,7 @@
       </p:pic>
       <p:pic>
         <p:nvPicPr>
-          <p:cNvPr id="4" name="Picture 3" descr="ablation.png"/>
+          <p:cNvPr id="5" name="Picture 4" descr="ablation.png"/>
           <p:cNvPicPr>
             <a:picLocks noChangeAspect="1"/>
           </p:cNvPicPr>
@@ -5585,7 +6781,7 @@
       </p:pic>
       <p:pic>
         <p:nvPicPr>
-          <p:cNvPr id="5" name="Picture 4" descr="degradation.png"/>
+          <p:cNvPr id="6" name="Picture 5" descr="degradation.png"/>
           <p:cNvPicPr>
             <a:picLocks noChangeAspect="1"/>
           </p:cNvPicPr>
@@ -5609,7 +6805,7 @@
       </p:pic>
       <p:graphicFrame>
         <p:nvGraphicFramePr>
-          <p:cNvPr id="6" name="Table 5"/>
+          <p:cNvPr id="7" name="Table 6"/>
           <p:cNvGraphicFramePr>
             <a:graphicFrameLocks noGrp="1"/>
           </p:cNvGraphicFramePr>
@@ -5902,7 +7098,7 @@
       </p:graphicFrame>
       <p:sp>
         <p:nvSpPr>
-          <p:cNvPr id="7" name="TextBox 6"/>
+          <p:cNvPr id="8" name="TextBox 7"/>
           <p:cNvSpPr txBox="1"/>
           <p:nvPr/>
         </p:nvSpPr>
@@ -6061,6 +7257,84 @@
                 </a:solidFill>
               </a:rPr>
               <a:t>The top-2 margin guard did NOT help — we report it.</a:t>
+            </a:r>
+          </a:p>
+        </p:txBody>
+      </p:sp>
+      <p:sp>
+        <p:nvSpPr>
+          <p:cNvPr id="9" name="Rectangle 8"/>
+          <p:cNvSpPr/>
+          <p:nvPr/>
+        </p:nvSpPr>
+        <p:spPr>
+          <a:xfrm>
+            <a:off x="0" y="6446520"/>
+            <a:ext cx="12191695" cy="411480"/>
+          </a:xfrm>
+          <a:prstGeom prst="rect">
+            <a:avLst/>
+          </a:prstGeom>
+          <a:solidFill>
+            <a:srgbClr val="1F77C2"/>
+          </a:solidFill>
+          <a:ln>
+            <a:noFill/>
+          </a:ln>
+          <a:effectLst/>
+        </p:spPr>
+        <p:style>
+          <a:lnRef idx="1">
+            <a:schemeClr val="accent1"/>
+          </a:lnRef>
+          <a:fillRef idx="3">
+            <a:schemeClr val="accent1"/>
+          </a:fillRef>
+          <a:effectRef idx="2">
+            <a:schemeClr val="accent1"/>
+          </a:effectRef>
+          <a:fontRef idx="minor">
+            <a:schemeClr val="lt1"/>
+          </a:fontRef>
+        </p:style>
+        <p:txBody>
+          <a:bodyPr rtlCol="0" anchor="ctr"/>
+          <a:lstStyle/>
+          <a:p>
+            <a:pPr algn="ctr"/>
+          </a:p>
+        </p:txBody>
+      </p:sp>
+      <p:sp>
+        <p:nvSpPr>
+          <p:cNvPr id="10" name="TextBox 9"/>
+          <p:cNvSpPr txBox="1"/>
+          <p:nvPr/>
+        </p:nvSpPr>
+        <p:spPr>
+          <a:xfrm>
+            <a:off x="11430000" y="6473952"/>
+            <a:ext cx="640080" cy="365760"/>
+          </a:xfrm>
+          <a:prstGeom prst="rect">
+            <a:avLst/>
+          </a:prstGeom>
+          <a:noFill/>
+        </p:spPr>
+        <p:txBody>
+          <a:bodyPr wrap="none">
+            <a:spAutoFit/>
+          </a:bodyPr>
+          <a:lstStyle/>
+          <a:p>
+            <a:pPr algn="r"/>
+            <a:r>
+              <a:rPr sz="1200" b="1">
+                <a:solidFill>
+                  <a:srgbClr val="FFFFFF"/>
+                </a:solidFill>
+              </a:rPr>
+              <a:t>7</a:t>
             </a:r>
           </a:p>
         </p:txBody>
@@ -6119,7 +7393,51 @@
       </p:sp>
       <p:sp>
         <p:nvSpPr>
-          <p:cNvPr id="3" name="TextBox 2"/>
+          <p:cNvPr id="3" name="Rectangle 2"/>
+          <p:cNvSpPr/>
+          <p:nvPr/>
+        </p:nvSpPr>
+        <p:spPr>
+          <a:xfrm>
+            <a:off x="4937760" y="841248"/>
+            <a:ext cx="2286000" cy="41148"/>
+          </a:xfrm>
+          <a:prstGeom prst="rect">
+            <a:avLst/>
+          </a:prstGeom>
+          <a:solidFill>
+            <a:srgbClr val="1F77C2"/>
+          </a:solidFill>
+          <a:ln>
+            <a:noFill/>
+          </a:ln>
+          <a:effectLst/>
+        </p:spPr>
+        <p:style>
+          <a:lnRef idx="1">
+            <a:schemeClr val="accent1"/>
+          </a:lnRef>
+          <a:fillRef idx="3">
+            <a:schemeClr val="accent1"/>
+          </a:fillRef>
+          <a:effectRef idx="2">
+            <a:schemeClr val="accent1"/>
+          </a:effectRef>
+          <a:fontRef idx="minor">
+            <a:schemeClr val="lt1"/>
+          </a:fontRef>
+        </p:style>
+        <p:txBody>
+          <a:bodyPr rtlCol="0" anchor="ctr"/>
+          <a:lstStyle/>
+          <a:p>
+            <a:pPr algn="ctr"/>
+          </a:p>
+        </p:txBody>
+      </p:sp>
+      <p:sp>
+        <p:nvSpPr>
+          <p:cNvPr id="4" name="TextBox 3"/>
           <p:cNvSpPr txBox="1"/>
           <p:nvPr/>
         </p:nvSpPr>
@@ -6350,7 +7668,51 @@
       </p:sp>
       <p:sp>
         <p:nvSpPr>
-          <p:cNvPr id="4" name="TextBox 3"/>
+          <p:cNvPr id="5" name="Rounded Rectangle 4"/>
+          <p:cNvSpPr/>
+          <p:nvPr/>
+        </p:nvSpPr>
+        <p:spPr>
+          <a:xfrm>
+            <a:off x="7269480" y="1005840"/>
+            <a:ext cx="4572000" cy="5303520"/>
+          </a:xfrm>
+          <a:prstGeom prst="roundRect">
+            <a:avLst/>
+          </a:prstGeom>
+          <a:solidFill>
+            <a:srgbClr val="FDECEA"/>
+          </a:solidFill>
+          <a:ln w="15875">
+            <a:solidFill>
+              <a:srgbClr val="C0392B"/>
+            </a:solidFill>
+          </a:ln>
+          <a:effectLst/>
+        </p:spPr>
+        <p:style>
+          <a:lnRef idx="1">
+            <a:schemeClr val="accent1"/>
+          </a:lnRef>
+          <a:fillRef idx="3">
+            <a:schemeClr val="accent1"/>
+          </a:fillRef>
+          <a:effectRef idx="2">
+            <a:schemeClr val="accent1"/>
+          </a:effectRef>
+          <a:fontRef idx="minor">
+            <a:schemeClr val="lt1"/>
+          </a:fontRef>
+        </p:style>
+        <p:txBody>
+          <a:bodyPr rtlCol="0" anchor="ctr"/>
+          <a:lstStyle/>
+          <a:p/>
+        </p:txBody>
+      </p:sp>
+      <p:sp>
+        <p:nvSpPr>
+          <p:cNvPr id="6" name="TextBox 5"/>
           <p:cNvSpPr txBox="1"/>
           <p:nvPr/>
         </p:nvSpPr>
@@ -6605,6 +7967,84 @@
                 </a:solidFill>
               </a:rPr>
               <a:t>be worse than these.</a:t>
+            </a:r>
+          </a:p>
+        </p:txBody>
+      </p:sp>
+      <p:sp>
+        <p:nvSpPr>
+          <p:cNvPr id="7" name="Rectangle 6"/>
+          <p:cNvSpPr/>
+          <p:nvPr/>
+        </p:nvSpPr>
+        <p:spPr>
+          <a:xfrm>
+            <a:off x="0" y="6446520"/>
+            <a:ext cx="12191695" cy="411480"/>
+          </a:xfrm>
+          <a:prstGeom prst="rect">
+            <a:avLst/>
+          </a:prstGeom>
+          <a:solidFill>
+            <a:srgbClr val="1F77C2"/>
+          </a:solidFill>
+          <a:ln>
+            <a:noFill/>
+          </a:ln>
+          <a:effectLst/>
+        </p:spPr>
+        <p:style>
+          <a:lnRef idx="1">
+            <a:schemeClr val="accent1"/>
+          </a:lnRef>
+          <a:fillRef idx="3">
+            <a:schemeClr val="accent1"/>
+          </a:fillRef>
+          <a:effectRef idx="2">
+            <a:schemeClr val="accent1"/>
+          </a:effectRef>
+          <a:fontRef idx="minor">
+            <a:schemeClr val="lt1"/>
+          </a:fontRef>
+        </p:style>
+        <p:txBody>
+          <a:bodyPr rtlCol="0" anchor="ctr"/>
+          <a:lstStyle/>
+          <a:p>
+            <a:pPr algn="ctr"/>
+          </a:p>
+        </p:txBody>
+      </p:sp>
+      <p:sp>
+        <p:nvSpPr>
+          <p:cNvPr id="8" name="TextBox 7"/>
+          <p:cNvSpPr txBox="1"/>
+          <p:nvPr/>
+        </p:nvSpPr>
+        <p:spPr>
+          <a:xfrm>
+            <a:off x="11430000" y="6473952"/>
+            <a:ext cx="640080" cy="365760"/>
+          </a:xfrm>
+          <a:prstGeom prst="rect">
+            <a:avLst/>
+          </a:prstGeom>
+          <a:noFill/>
+        </p:spPr>
+        <p:txBody>
+          <a:bodyPr wrap="none">
+            <a:spAutoFit/>
+          </a:bodyPr>
+          <a:lstStyle/>
+          <a:p>
+            <a:pPr algn="r"/>
+            <a:r>
+              <a:rPr sz="1200" b="1">
+                <a:solidFill>
+                  <a:srgbClr val="FFFFFF"/>
+                </a:solidFill>
+              </a:rPr>
+              <a:t>8</a:t>
             </a:r>
           </a:p>
         </p:txBody>

--- a/Server/results/PresenceAI_Presentation.pptx
+++ b/Server/results/PresenceAI_Presentation.pptx
@@ -16,8 +16,6 @@
     <p:sldId id="264" r:id="rId15"/>
     <p:sldId id="265" r:id="rId16"/>
     <p:sldId id="266" r:id="rId17"/>
-    <p:sldId id="267" r:id="rId18"/>
-    <p:sldId id="268" r:id="rId19"/>
   </p:sldIdLst>
   <p:sldSz cx="12191695" cy="6858000" type="screen4x3"/>
   <p:notesSz cx="6858000" cy="9144000"/>
@@ -3467,7 +3465,7 @@
                   <a:srgbClr val="142B53"/>
                 </a:solidFill>
               </a:rPr>
-              <a:t>IMPROVEMENTS MADE</a:t>
+              <a:t>REFERENCES</a:t>
             </a:r>
           </a:p>
         </p:txBody>
@@ -3524,85 +3522,8 @@
         </p:nvSpPr>
         <p:spPr>
           <a:xfrm>
-            <a:off x="457200" y="749808"/>
-            <a:ext cx="11247120" cy="320040"/>
-          </a:xfrm>
-          <a:prstGeom prst="rect">
-            <a:avLst/>
-          </a:prstGeom>
-          <a:noFill/>
-        </p:spPr>
-        <p:txBody>
-          <a:bodyPr wrap="none">
-            <a:spAutoFit/>
-          </a:bodyPr>
-          <a:lstStyle/>
-          <a:p>
-            <a:r>
-              <a:rPr sz="1100" i="1">
-                <a:solidFill>
-                  <a:srgbClr val="5B6676"/>
-                </a:solidFill>
-              </a:rPr>
-              <a:t>Measured before and after, on the same protocol.</a:t>
-            </a:r>
-          </a:p>
-        </p:txBody>
-      </p:sp>
-      <p:sp>
-        <p:nvSpPr>
-          <p:cNvPr id="5" name="Rounded Rectangle 4"/>
-          <p:cNvSpPr/>
-          <p:nvPr/>
-        </p:nvSpPr>
-        <p:spPr>
-          <a:xfrm>
-            <a:off x="548640" y="1188720"/>
-            <a:ext cx="3566160" cy="960120"/>
-          </a:xfrm>
-          <a:prstGeom prst="roundRect">
-            <a:avLst/>
-          </a:prstGeom>
-          <a:solidFill>
-            <a:srgbClr val="F4F6F9"/>
-          </a:solidFill>
-          <a:ln w="15240">
-            <a:solidFill>
-              <a:srgbClr val="5B6676"/>
-            </a:solidFill>
-          </a:ln>
-          <a:effectLst/>
-        </p:spPr>
-        <p:style>
-          <a:lnRef idx="1">
-            <a:schemeClr val="accent1"/>
-          </a:lnRef>
-          <a:fillRef idx="3">
-            <a:schemeClr val="accent1"/>
-          </a:fillRef>
-          <a:effectRef idx="2">
-            <a:schemeClr val="accent1"/>
-          </a:effectRef>
-          <a:fontRef idx="minor">
-            <a:schemeClr val="lt1"/>
-          </a:fontRef>
-        </p:style>
-        <p:txBody>
-          <a:bodyPr rtlCol="0" anchor="ctr"/>
-          <a:lstStyle/>
-          <a:p/>
-        </p:txBody>
-      </p:sp>
-      <p:sp>
-        <p:nvSpPr>
-          <p:cNvPr id="6" name="TextBox 5"/>
-          <p:cNvSpPr txBox="1"/>
-          <p:nvPr/>
-        </p:nvSpPr>
-        <p:spPr>
-          <a:xfrm>
-            <a:off x="676656" y="1271016"/>
-            <a:ext cx="3310128" cy="274320"/>
+            <a:off x="548640" y="960120"/>
+            <a:ext cx="11155680" cy="5440680"/>
           </a:xfrm>
           <a:prstGeom prst="rect">
             <a:avLst/>
@@ -3621,1285 +3542,250 @@
               </a:spcAft>
             </a:pPr>
             <a:r>
-              <a:rPr sz="1000" b="1">
+              <a:rPr sz="950" b="1">
                 <a:solidFill>
                   <a:srgbClr val="142B53"/>
                 </a:solidFill>
               </a:rPr>
-              <a:t>Photo-attack success rate</a:t>
-            </a:r>
-          </a:p>
-        </p:txBody>
-      </p:sp>
-      <p:sp>
-        <p:nvSpPr>
-          <p:cNvPr id="7" name="TextBox 6"/>
-          <p:cNvSpPr txBox="1"/>
-          <p:nvPr/>
-        </p:nvSpPr>
-        <p:spPr>
-          <a:xfrm>
-            <a:off x="676656" y="1572768"/>
-            <a:ext cx="3310128" cy="457200"/>
-          </a:xfrm>
-          <a:prstGeom prst="rect">
-            <a:avLst/>
-          </a:prstGeom>
-          <a:noFill/>
-        </p:spPr>
-        <p:txBody>
-          <a:bodyPr wrap="none">
-            <a:spAutoFit/>
-          </a:bodyPr>
-          <a:lstStyle/>
-          <a:p>
-            <a:r>
-              <a:rPr sz="1700" b="1">
+              <a:t>Attendance systems — prior work (none of which tests a presentation attack)</a:t>
+            </a:r>
+          </a:p>
+          <a:p>
+            <a:pPr>
+              <a:spcAft>
+                <a:spcPts val="400"/>
+              </a:spcAft>
+            </a:pPr>
+            <a:r>
+              <a:rPr sz="950" b="0">
+                <a:solidFill>
+                  <a:srgbClr val="222A35"/>
+                </a:solidFill>
+              </a:rPr>
+              <a:t>[1]  D'Souza, J. W. S., et al. (2019). Automated Attendance Marking and Management System by Facial Recognition Using Histogram. Array, 3–4: 100014. DOI: 10.1016/j.array.2019.100014</a:t>
+            </a:r>
+          </a:p>
+          <a:p>
+            <a:pPr>
+              <a:spcAft>
+                <a:spcPts val="400"/>
+              </a:spcAft>
+            </a:pPr>
+            <a:r>
+              <a:rPr sz="950" b="0">
+                <a:solidFill>
+                  <a:srgbClr val="222A35"/>
+                </a:solidFill>
+              </a:rPr>
+              <a:t>[2]  Arsenovic, M., Sladojevic, S., Anderla, A., Stefanovic, D. (2017). FaceTime — Deep Learning Based Face Recognition Attendance System. IEEE SISY 2017, pp. 53–58. DOI: 10.1109/SISY.2017.8080587</a:t>
+            </a:r>
+          </a:p>
+          <a:p>
+            <a:pPr>
+              <a:spcAft>
+                <a:spcPts val="400"/>
+              </a:spcAft>
+            </a:pPr>
+            <a:r>
+              <a:rPr sz="950" b="0">
+                <a:solidFill>
+                  <a:srgbClr val="222A35"/>
+                </a:solidFill>
+              </a:rPr>
+              <a:t>[3]  Kakarla, S., Gangula, P., Rahul, M. S., Singh, C. S. C., Sarma, T. H. (2020). Smart Attendance Management System Based on Face Recognition Using CNN. IEEE-HYDCON 2020. DOI: 10.1109/HYDCON48903.2020.9242847</a:t>
+            </a:r>
+          </a:p>
+          <a:p>
+            <a:pPr>
+              <a:spcAft>
+                <a:spcPts val="400"/>
+              </a:spcAft>
+            </a:pPr>
+            <a:r>
+              <a:rPr sz="950" b="0">
+                <a:solidFill>
+                  <a:srgbClr val="222A35"/>
+                </a:solidFill>
+              </a:rPr>
+              <a:t>[4]  Varadharajan, E., Dharani, R., Jeevitha, S., Kavinmathi, B., Hemalatha, S. (2016). Automatic Attendance Management System Using Face Detection. IC-GET 2016, pp. 1–3. DOI: 10.1109/GET.2016.7916753</a:t>
+            </a:r>
+          </a:p>
+          <a:p>
+            <a:pPr>
+              <a:spcAft>
+                <a:spcPts val="400"/>
+              </a:spcAft>
+            </a:pPr>
+            <a:r>
+              <a:rPr sz="950" b="0">
+                <a:solidFill>
+                  <a:srgbClr val="222A35"/>
+                </a:solidFill>
+              </a:rPr>
+              <a:t>[5]  Siswanto, A. R. S., Nugroho, A. S., Galinium, M. (2014). Implementation of Face Recognition Algorithm for Biometrics Based Time Attendance System. ICISS 2014, pp. 149–154. DOI: 10.1109/ICTSS.2014.7013165</a:t>
+            </a:r>
+          </a:p>
+          <a:p>
+            <a:pPr>
+              <a:spcAft>
+                <a:spcPts val="400"/>
+              </a:spcAft>
+            </a:pPr>
+          </a:p>
+          <a:p>
+            <a:pPr>
+              <a:spcAft>
+                <a:spcPts val="400"/>
+              </a:spcAft>
+            </a:pPr>
+            <a:r>
+              <a:rPr sz="950" b="1">
+                <a:solidFill>
+                  <a:srgbClr val="142B53"/>
+                </a:solidFill>
+              </a:rPr>
+              <a:t>Models we use — pretrained and frozen (not our contribution)</a:t>
+            </a:r>
+          </a:p>
+          <a:p>
+            <a:pPr>
+              <a:spcAft>
+                <a:spcPts val="400"/>
+              </a:spcAft>
+            </a:pPr>
+            <a:r>
+              <a:rPr sz="950" b="0">
+                <a:solidFill>
+                  <a:srgbClr val="222A35"/>
+                </a:solidFill>
+              </a:rPr>
+              <a:t>[6]  Deng, J., Guo, J., Xue, N., Zafeiriou, S. (2019). ArcFace: Additive Angular Margin Loss for Deep Face Recognition. CVPR 2019, pp. 4690–4699. DOI: 10.1109/CVPR.2019.00482</a:t>
+            </a:r>
+          </a:p>
+          <a:p>
+            <a:pPr>
+              <a:spcAft>
+                <a:spcPts val="400"/>
+              </a:spcAft>
+            </a:pPr>
+            <a:r>
+              <a:rPr sz="950" b="0">
+                <a:solidFill>
+                  <a:srgbClr val="222A35"/>
+                </a:solidFill>
+              </a:rPr>
+              <a:t>[7]  Deng, J., Guo, J., Ververas, E., Kotsia, I., Zafeiriou, S. (2020). RetinaFace: Single-Shot Multi-Level Face Localisation in the Wild. CVPR 2020. DOI: 10.1109/CVPR42600.2020.00525</a:t>
+            </a:r>
+          </a:p>
+          <a:p>
+            <a:pPr>
+              <a:spcAft>
+                <a:spcPts val="400"/>
+              </a:spcAft>
+            </a:pPr>
+            <a:r>
+              <a:rPr sz="950" b="0">
+                <a:solidFill>
+                  <a:srgbClr val="222A35"/>
+                </a:solidFill>
+              </a:rPr>
+              <a:t>[8]  Schroff, F., Kalenichenko, D., Philbin, J. (2015). FaceNet: A Unified Embedding for Face Recognition and Clustering. CVPR 2015, pp. 815–823. DOI: 10.1109/CVPR.2015.7298682</a:t>
+            </a:r>
+          </a:p>
+          <a:p>
+            <a:pPr>
+              <a:spcAft>
+                <a:spcPts val="400"/>
+              </a:spcAft>
+            </a:pPr>
+          </a:p>
+          <a:p>
+            <a:pPr>
+              <a:spcAft>
+                <a:spcPts val="400"/>
+              </a:spcAft>
+            </a:pPr>
+            <a:r>
+              <a:rPr sz="950" b="1">
                 <a:solidFill>
                   <a:srgbClr val="C0392B"/>
                 </a:solidFill>
               </a:rPr>
-              <a:t>100%   ➔   0%</a:t>
-            </a:r>
-          </a:p>
-        </p:txBody>
-      </p:sp>
-      <p:sp>
-        <p:nvSpPr>
-          <p:cNvPr id="8" name="Rounded Rectangle 7"/>
-          <p:cNvSpPr/>
-          <p:nvPr/>
-        </p:nvSpPr>
-        <p:spPr>
-          <a:xfrm>
-            <a:off x="4343400" y="1188720"/>
-            <a:ext cx="3566160" cy="960120"/>
-          </a:xfrm>
-          <a:prstGeom prst="roundRect">
-            <a:avLst/>
-          </a:prstGeom>
-          <a:solidFill>
-            <a:srgbClr val="F4F6F9"/>
-          </a:solidFill>
-          <a:ln w="15240">
-            <a:solidFill>
-              <a:srgbClr val="5B6676"/>
-            </a:solidFill>
-          </a:ln>
-          <a:effectLst/>
-        </p:spPr>
-        <p:style>
-          <a:lnRef idx="1">
-            <a:schemeClr val="accent1"/>
-          </a:lnRef>
-          <a:fillRef idx="3">
-            <a:schemeClr val="accent1"/>
-          </a:fillRef>
-          <a:effectRef idx="2">
-            <a:schemeClr val="accent1"/>
-          </a:effectRef>
-          <a:fontRef idx="minor">
-            <a:schemeClr val="lt1"/>
-          </a:fontRef>
-        </p:style>
-        <p:txBody>
-          <a:bodyPr rtlCol="0" anchor="ctr"/>
-          <a:lstStyle/>
-          <a:p/>
-        </p:txBody>
-      </p:sp>
-      <p:sp>
-        <p:nvSpPr>
-          <p:cNvPr id="9" name="TextBox 8"/>
-          <p:cNvSpPr txBox="1"/>
-          <p:nvPr/>
-        </p:nvSpPr>
-        <p:spPr>
-          <a:xfrm>
-            <a:off x="4471416" y="1271016"/>
-            <a:ext cx="3310128" cy="274320"/>
-          </a:xfrm>
-          <a:prstGeom prst="rect">
-            <a:avLst/>
-          </a:prstGeom>
-          <a:noFill/>
-        </p:spPr>
-        <p:txBody>
-          <a:bodyPr wrap="square" anchor="t">
-            <a:spAutoFit/>
-          </a:bodyPr>
-          <a:lstStyle/>
-          <a:p>
-            <a:pPr>
-              <a:spcAft>
-                <a:spcPts val="400"/>
-              </a:spcAft>
-            </a:pPr>
-            <a:r>
-              <a:rPr sz="1000" b="1">
-                <a:solidFill>
-                  <a:srgbClr val="142B53"/>
-                </a:solidFill>
-              </a:rPr>
-              <a:t>Strangers admitted (FAR)</a:t>
-            </a:r>
-          </a:p>
-        </p:txBody>
-      </p:sp>
-      <p:sp>
-        <p:nvSpPr>
-          <p:cNvPr id="10" name="TextBox 9"/>
-          <p:cNvSpPr txBox="1"/>
-          <p:nvPr/>
-        </p:nvSpPr>
-        <p:spPr>
-          <a:xfrm>
-            <a:off x="4471416" y="1572768"/>
-            <a:ext cx="3310128" cy="457200"/>
-          </a:xfrm>
-          <a:prstGeom prst="rect">
-            <a:avLst/>
-          </a:prstGeom>
-          <a:noFill/>
-        </p:spPr>
-        <p:txBody>
-          <a:bodyPr wrap="none">
-            <a:spAutoFit/>
-          </a:bodyPr>
-          <a:lstStyle/>
-          <a:p>
-            <a:r>
-              <a:rPr sz="1700" b="1">
+              <a:t>Presentation attacks — the gap this project addresses</a:t>
+            </a:r>
+          </a:p>
+          <a:p>
+            <a:pPr>
+              <a:spcAft>
+                <a:spcPts val="400"/>
+              </a:spcAft>
+            </a:pPr>
+            <a:r>
+              <a:rPr sz="950" b="0">
+                <a:solidFill>
+                  <a:srgbClr val="222A35"/>
+                </a:solidFill>
+              </a:rPr>
+              <a:t>[9]   Pan, G., Sun, L., Wu, Z., Lao, S. (2007). Eyeblink-based Anti-Spoofing in Face Recognition from a Generic Webcamera. ICCV 2007, pp. 1–8. DOI: 10.1109/ICCV.2007.4409068</a:t>
+            </a:r>
+          </a:p>
+          <a:p>
+            <a:pPr>
+              <a:spcAft>
+                <a:spcPts val="400"/>
+              </a:spcAft>
+            </a:pPr>
+            <a:r>
+              <a:rPr sz="950" b="0">
+                <a:solidFill>
+                  <a:srgbClr val="222A35"/>
+                </a:solidFill>
+              </a:rPr>
+              <a:t>[10] ISO/IEC 30107-3:2023 — Information technology — Biometric presentation attack detection — Part 3: Testing and reporting.</a:t>
+            </a:r>
+          </a:p>
+          <a:p>
+            <a:pPr>
+              <a:spcAft>
+                <a:spcPts val="400"/>
+              </a:spcAft>
+            </a:pPr>
+            <a:r>
+              <a:rPr sz="950" b="0">
+                <a:solidFill>
+                  <a:srgbClr val="222A35"/>
+                </a:solidFill>
+              </a:rPr>
+              <a:t>[11] Cao, Q., Shen, L., Xie, W., Parkhi, O. M., Zisserman, A. (2018). VGGFace2: A Dataset for Recognising Faces across Pose and Age. IEEE FG 2018, pp. 67–74.</a:t>
+            </a:r>
+          </a:p>
+          <a:p>
+            <a:pPr>
+              <a:spcAft>
+                <a:spcPts val="400"/>
+              </a:spcAft>
+            </a:pPr>
+          </a:p>
+          <a:p>
+            <a:pPr>
+              <a:spcAft>
+                <a:spcPts val="400"/>
+              </a:spcAft>
+            </a:pPr>
+            <a:r>
+              <a:rPr sz="950" b="1">
                 <a:solidFill>
                   <a:srgbClr val="1E8E5A"/>
                 </a:solidFill>
               </a:rPr>
-              <a:t>0.81%   ➔   0.20%</a:t>
-            </a:r>
-          </a:p>
-        </p:txBody>
-      </p:sp>
-      <p:sp>
-        <p:nvSpPr>
-          <p:cNvPr id="11" name="Rounded Rectangle 10"/>
-          <p:cNvSpPr/>
-          <p:nvPr/>
-        </p:nvSpPr>
-        <p:spPr>
-          <a:xfrm>
-            <a:off x="8138160" y="1188720"/>
-            <a:ext cx="3566160" cy="960120"/>
-          </a:xfrm>
-          <a:prstGeom prst="roundRect">
-            <a:avLst/>
-          </a:prstGeom>
-          <a:solidFill>
-            <a:srgbClr val="F4F6F9"/>
-          </a:solidFill>
-          <a:ln w="15240">
-            <a:solidFill>
-              <a:srgbClr val="5B6676"/>
-            </a:solidFill>
-          </a:ln>
-          <a:effectLst/>
-        </p:spPr>
-        <p:style>
-          <a:lnRef idx="1">
-            <a:schemeClr val="accent1"/>
-          </a:lnRef>
-          <a:fillRef idx="3">
-            <a:schemeClr val="accent1"/>
-          </a:fillRef>
-          <a:effectRef idx="2">
-            <a:schemeClr val="accent1"/>
-          </a:effectRef>
-          <a:fontRef idx="minor">
-            <a:schemeClr val="lt1"/>
-          </a:fontRef>
-        </p:style>
-        <p:txBody>
-          <a:bodyPr rtlCol="0" anchor="ctr"/>
-          <a:lstStyle/>
-          <a:p/>
-        </p:txBody>
-      </p:sp>
-      <p:sp>
-        <p:nvSpPr>
-          <p:cNvPr id="12" name="TextBox 11"/>
-          <p:cNvSpPr txBox="1"/>
-          <p:nvPr/>
-        </p:nvSpPr>
-        <p:spPr>
-          <a:xfrm>
-            <a:off x="8266176" y="1271016"/>
-            <a:ext cx="3310128" cy="274320"/>
-          </a:xfrm>
-          <a:prstGeom prst="rect">
-            <a:avLst/>
-          </a:prstGeom>
-          <a:noFill/>
-        </p:spPr>
-        <p:txBody>
-          <a:bodyPr wrap="square" anchor="t">
-            <a:spAutoFit/>
-          </a:bodyPr>
-          <a:lstStyle/>
-          <a:p>
-            <a:pPr>
-              <a:spcAft>
-                <a:spcPts val="400"/>
-              </a:spcAft>
-            </a:pPr>
-            <a:r>
-              <a:rPr sz="1000" b="1">
-                <a:solidFill>
-                  <a:srgbClr val="142B53"/>
-                </a:solidFill>
-              </a:rPr>
-              <a:t>Wrong attendance records</a:t>
-            </a:r>
-          </a:p>
-        </p:txBody>
-      </p:sp>
-      <p:sp>
-        <p:nvSpPr>
-          <p:cNvPr id="13" name="TextBox 12"/>
-          <p:cNvSpPr txBox="1"/>
-          <p:nvPr/>
-        </p:nvSpPr>
-        <p:spPr>
-          <a:xfrm>
-            <a:off x="8266176" y="1572768"/>
-            <a:ext cx="3310128" cy="457200"/>
-          </a:xfrm>
-          <a:prstGeom prst="rect">
-            <a:avLst/>
-          </a:prstGeom>
-          <a:noFill/>
-        </p:spPr>
-        <p:txBody>
-          <a:bodyPr wrap="none">
-            <a:spAutoFit/>
-          </a:bodyPr>
-          <a:lstStyle/>
-          <a:p>
-            <a:r>
-              <a:rPr sz="1700" b="1">
-                <a:solidFill>
-                  <a:srgbClr val="1E8E5A"/>
-                </a:solidFill>
-              </a:rPr>
-              <a:t>3.54%   ➔   0%</a:t>
-            </a:r>
-          </a:p>
-        </p:txBody>
-      </p:sp>
-      <p:sp>
-        <p:nvSpPr>
-          <p:cNvPr id="14" name="Rounded Rectangle 13"/>
-          <p:cNvSpPr/>
-          <p:nvPr/>
-        </p:nvSpPr>
-        <p:spPr>
-          <a:xfrm>
-            <a:off x="548640" y="2286000"/>
-            <a:ext cx="3566160" cy="960120"/>
-          </a:xfrm>
-          <a:prstGeom prst="roundRect">
-            <a:avLst/>
-          </a:prstGeom>
-          <a:solidFill>
-            <a:srgbClr val="F4F6F9"/>
-          </a:solidFill>
-          <a:ln w="15240">
-            <a:solidFill>
-              <a:srgbClr val="5B6676"/>
-            </a:solidFill>
-          </a:ln>
-          <a:effectLst/>
-        </p:spPr>
-        <p:style>
-          <a:lnRef idx="1">
-            <a:schemeClr val="accent1"/>
-          </a:lnRef>
-          <a:fillRef idx="3">
-            <a:schemeClr val="accent1"/>
-          </a:fillRef>
-          <a:effectRef idx="2">
-            <a:schemeClr val="accent1"/>
-          </a:effectRef>
-          <a:fontRef idx="minor">
-            <a:schemeClr val="lt1"/>
-          </a:fontRef>
-        </p:style>
-        <p:txBody>
-          <a:bodyPr rtlCol="0" anchor="ctr"/>
-          <a:lstStyle/>
-          <a:p/>
-        </p:txBody>
-      </p:sp>
-      <p:sp>
-        <p:nvSpPr>
-          <p:cNvPr id="15" name="TextBox 14"/>
-          <p:cNvSpPr txBox="1"/>
-          <p:nvPr/>
-        </p:nvSpPr>
-        <p:spPr>
-          <a:xfrm>
-            <a:off x="676656" y="2368296"/>
-            <a:ext cx="3310128" cy="274320"/>
-          </a:xfrm>
-          <a:prstGeom prst="rect">
-            <a:avLst/>
-          </a:prstGeom>
-          <a:noFill/>
-        </p:spPr>
-        <p:txBody>
-          <a:bodyPr wrap="square" anchor="t">
-            <a:spAutoFit/>
-          </a:bodyPr>
-          <a:lstStyle/>
-          <a:p>
-            <a:pPr>
-              <a:spcAft>
-                <a:spcPts val="400"/>
-              </a:spcAft>
-            </a:pPr>
-            <a:r>
-              <a:rPr sz="1000" b="1">
-                <a:solidFill>
-                  <a:srgbClr val="142B53"/>
-                </a:solidFill>
-              </a:rPr>
-              <a:t>Time to enrol a student</a:t>
-            </a:r>
-          </a:p>
-        </p:txBody>
-      </p:sp>
-      <p:sp>
-        <p:nvSpPr>
-          <p:cNvPr id="16" name="TextBox 15"/>
-          <p:cNvSpPr txBox="1"/>
-          <p:nvPr/>
-        </p:nvSpPr>
-        <p:spPr>
-          <a:xfrm>
-            <a:off x="676656" y="2670048"/>
-            <a:ext cx="3310128" cy="457200"/>
-          </a:xfrm>
-          <a:prstGeom prst="rect">
-            <a:avLst/>
-          </a:prstGeom>
-          <a:noFill/>
-        </p:spPr>
-        <p:txBody>
-          <a:bodyPr wrap="none">
-            <a:spAutoFit/>
-          </a:bodyPr>
-          <a:lstStyle/>
-          <a:p>
-            <a:r>
-              <a:rPr sz="1700" b="1">
-                <a:solidFill>
-                  <a:srgbClr val="1E8E5A"/>
-                </a:solidFill>
-              </a:rPr>
-              <a:t>607 s   ➔   1.4 s</a:t>
-            </a:r>
-          </a:p>
-        </p:txBody>
-      </p:sp>
-      <p:sp>
-        <p:nvSpPr>
-          <p:cNvPr id="17" name="Rounded Rectangle 16"/>
-          <p:cNvSpPr/>
-          <p:nvPr/>
-        </p:nvSpPr>
-        <p:spPr>
-          <a:xfrm>
-            <a:off x="4343400" y="2286000"/>
-            <a:ext cx="3566160" cy="960120"/>
-          </a:xfrm>
-          <a:prstGeom prst="roundRect">
-            <a:avLst/>
-          </a:prstGeom>
-          <a:solidFill>
-            <a:srgbClr val="F4F6F9"/>
-          </a:solidFill>
-          <a:ln w="15240">
-            <a:solidFill>
-              <a:srgbClr val="5B6676"/>
-            </a:solidFill>
-          </a:ln>
-          <a:effectLst/>
-        </p:spPr>
-        <p:style>
-          <a:lnRef idx="1">
-            <a:schemeClr val="accent1"/>
-          </a:lnRef>
-          <a:fillRef idx="3">
-            <a:schemeClr val="accent1"/>
-          </a:fillRef>
-          <a:effectRef idx="2">
-            <a:schemeClr val="accent1"/>
-          </a:effectRef>
-          <a:fontRef idx="minor">
-            <a:schemeClr val="lt1"/>
-          </a:fontRef>
-        </p:style>
-        <p:txBody>
-          <a:bodyPr rtlCol="0" anchor="ctr"/>
-          <a:lstStyle/>
-          <a:p/>
-        </p:txBody>
-      </p:sp>
-      <p:sp>
-        <p:nvSpPr>
-          <p:cNvPr id="18" name="TextBox 17"/>
-          <p:cNvSpPr txBox="1"/>
-          <p:nvPr/>
-        </p:nvSpPr>
-        <p:spPr>
-          <a:xfrm>
-            <a:off x="4471416" y="2368296"/>
-            <a:ext cx="3310128" cy="274320"/>
-          </a:xfrm>
-          <a:prstGeom prst="rect">
-            <a:avLst/>
-          </a:prstGeom>
-          <a:noFill/>
-        </p:spPr>
-        <p:txBody>
-          <a:bodyPr wrap="square" anchor="t">
-            <a:spAutoFit/>
-          </a:bodyPr>
-          <a:lstStyle/>
-          <a:p>
-            <a:pPr>
-              <a:spcAft>
-                <a:spcPts val="400"/>
-              </a:spcAft>
-            </a:pPr>
-            <a:r>
-              <a:rPr sz="1000" b="1">
-                <a:solidFill>
-                  <a:srgbClr val="142B53"/>
-                </a:solidFill>
-              </a:rPr>
-              <a:t>Time to mark present</a:t>
-            </a:r>
-          </a:p>
-        </p:txBody>
-      </p:sp>
-      <p:sp>
-        <p:nvSpPr>
-          <p:cNvPr id="19" name="TextBox 18"/>
-          <p:cNvSpPr txBox="1"/>
-          <p:nvPr/>
-        </p:nvSpPr>
-        <p:spPr>
-          <a:xfrm>
-            <a:off x="4471416" y="2670048"/>
-            <a:ext cx="3310128" cy="457200"/>
-          </a:xfrm>
-          <a:prstGeom prst="rect">
-            <a:avLst/>
-          </a:prstGeom>
-          <a:noFill/>
-        </p:spPr>
-        <p:txBody>
-          <a:bodyPr wrap="none">
-            <a:spAutoFit/>
-          </a:bodyPr>
-          <a:lstStyle/>
-          <a:p>
-            <a:r>
-              <a:rPr sz="1700" b="1">
-                <a:solidFill>
-                  <a:srgbClr val="1E8E5A"/>
-                </a:solidFill>
-              </a:rPr>
-              <a:t>10.5 s   ➔   2.8 s</a:t>
-            </a:r>
-          </a:p>
-        </p:txBody>
-      </p:sp>
-      <p:sp>
-        <p:nvSpPr>
-          <p:cNvPr id="20" name="Rounded Rectangle 19"/>
-          <p:cNvSpPr/>
-          <p:nvPr/>
-        </p:nvSpPr>
-        <p:spPr>
-          <a:xfrm>
-            <a:off x="8138160" y="2286000"/>
-            <a:ext cx="3566160" cy="960120"/>
-          </a:xfrm>
-          <a:prstGeom prst="roundRect">
-            <a:avLst/>
-          </a:prstGeom>
-          <a:solidFill>
-            <a:srgbClr val="F4F6F9"/>
-          </a:solidFill>
-          <a:ln w="15240">
-            <a:solidFill>
-              <a:srgbClr val="5B6676"/>
-            </a:solidFill>
-          </a:ln>
-          <a:effectLst/>
-        </p:spPr>
-        <p:style>
-          <a:lnRef idx="1">
-            <a:schemeClr val="accent1"/>
-          </a:lnRef>
-          <a:fillRef idx="3">
-            <a:schemeClr val="accent1"/>
-          </a:fillRef>
-          <a:effectRef idx="2">
-            <a:schemeClr val="accent1"/>
-          </a:effectRef>
-          <a:fontRef idx="minor">
-            <a:schemeClr val="lt1"/>
-          </a:fontRef>
-        </p:style>
-        <p:txBody>
-          <a:bodyPr rtlCol="0" anchor="ctr"/>
-          <a:lstStyle/>
-          <a:p/>
-        </p:txBody>
-      </p:sp>
-      <p:sp>
-        <p:nvSpPr>
-          <p:cNvPr id="21" name="TextBox 20"/>
-          <p:cNvSpPr txBox="1"/>
-          <p:nvPr/>
-        </p:nvSpPr>
-        <p:spPr>
-          <a:xfrm>
-            <a:off x="8266176" y="2368296"/>
-            <a:ext cx="3310128" cy="274320"/>
-          </a:xfrm>
-          <a:prstGeom prst="rect">
-            <a:avLst/>
-          </a:prstGeom>
-          <a:noFill/>
-        </p:spPr>
-        <p:txBody>
-          <a:bodyPr wrap="square" anchor="t">
-            <a:spAutoFit/>
-          </a:bodyPr>
-          <a:lstStyle/>
-          <a:p>
-            <a:pPr>
-              <a:spcAft>
-                <a:spcPts val="400"/>
-              </a:spcAft>
-            </a:pPr>
-            <a:r>
-              <a:rPr sz="1000" b="1">
-                <a:solidFill>
-                  <a:srgbClr val="142B53"/>
-                </a:solidFill>
-              </a:rPr>
-              <a:t>Classes the model trains on</a:t>
-            </a:r>
-          </a:p>
-        </p:txBody>
-      </p:sp>
-      <p:sp>
-        <p:nvSpPr>
-          <p:cNvPr id="22" name="TextBox 21"/>
-          <p:cNvSpPr txBox="1"/>
-          <p:nvPr/>
-        </p:nvSpPr>
-        <p:spPr>
-          <a:xfrm>
-            <a:off x="8266176" y="2670048"/>
-            <a:ext cx="3310128" cy="457200"/>
-          </a:xfrm>
-          <a:prstGeom prst="rect">
-            <a:avLst/>
-          </a:prstGeom>
-          <a:noFill/>
-        </p:spPr>
-        <p:txBody>
-          <a:bodyPr wrap="none">
-            <a:spAutoFit/>
-          </a:bodyPr>
-          <a:lstStyle/>
-          <a:p>
-            <a:r>
-              <a:rPr sz="1700" b="1">
-                <a:solidFill>
-                  <a:srgbClr val="1F77C2"/>
-                </a:solidFill>
-              </a:rPr>
-              <a:t>98   ➔   2 + 96 impostors</a:t>
-            </a:r>
-          </a:p>
-        </p:txBody>
-      </p:sp>
-      <p:sp>
-        <p:nvSpPr>
-          <p:cNvPr id="23" name="TextBox 22"/>
-          <p:cNvSpPr txBox="1"/>
-          <p:nvPr/>
-        </p:nvSpPr>
-        <p:spPr>
-          <a:xfrm>
-            <a:off x="548640" y="3401568"/>
-            <a:ext cx="11155680" cy="274320"/>
-          </a:xfrm>
-          <a:prstGeom prst="rect">
-            <a:avLst/>
-          </a:prstGeom>
-          <a:noFill/>
-        </p:spPr>
-        <p:txBody>
-          <a:bodyPr wrap="square" anchor="t">
-            <a:spAutoFit/>
-          </a:bodyPr>
-          <a:lstStyle/>
-          <a:p>
-            <a:pPr>
-              <a:spcAft>
-                <a:spcPts val="400"/>
-              </a:spcAft>
-            </a:pPr>
-            <a:r>
-              <a:rPr sz="1250" b="1">
-                <a:solidFill>
-                  <a:srgbClr val="142B53"/>
-                </a:solidFill>
-              </a:rPr>
-              <a:t>Also fixed along the way</a:t>
-            </a:r>
-          </a:p>
-        </p:txBody>
-      </p:sp>
-      <p:sp>
-        <p:nvSpPr>
-          <p:cNvPr id="24" name="Rounded Rectangle 23"/>
-          <p:cNvSpPr/>
-          <p:nvPr/>
-        </p:nvSpPr>
-        <p:spPr>
-          <a:xfrm>
-            <a:off x="548640" y="3703320"/>
-            <a:ext cx="3566160" cy="1097280"/>
-          </a:xfrm>
-          <a:prstGeom prst="roundRect">
-            <a:avLst/>
-          </a:prstGeom>
-          <a:solidFill>
-            <a:srgbClr val="FEF5E3"/>
-          </a:solidFill>
-          <a:ln w="15240">
-            <a:solidFill>
-              <a:srgbClr val="B97A0B"/>
-            </a:solidFill>
-          </a:ln>
-          <a:effectLst/>
-        </p:spPr>
-        <p:style>
-          <a:lnRef idx="1">
-            <a:schemeClr val="accent1"/>
-          </a:lnRef>
-          <a:fillRef idx="3">
-            <a:schemeClr val="accent1"/>
-          </a:fillRef>
-          <a:effectRef idx="2">
-            <a:schemeClr val="accent1"/>
-          </a:effectRef>
-          <a:fontRef idx="minor">
-            <a:schemeClr val="lt1"/>
-          </a:fontRef>
-        </p:style>
-        <p:txBody>
-          <a:bodyPr rtlCol="0" anchor="ctr"/>
-          <a:lstStyle/>
-          <a:p/>
-        </p:txBody>
-      </p:sp>
-      <p:sp>
-        <p:nvSpPr>
-          <p:cNvPr id="25" name="TextBox 24"/>
-          <p:cNvSpPr txBox="1"/>
-          <p:nvPr/>
-        </p:nvSpPr>
-        <p:spPr>
-          <a:xfrm>
-            <a:off x="685800" y="3803904"/>
-            <a:ext cx="3291840" cy="960120"/>
-          </a:xfrm>
-          <a:prstGeom prst="rect">
-            <a:avLst/>
-          </a:prstGeom>
-          <a:noFill/>
-        </p:spPr>
-        <p:txBody>
-          <a:bodyPr wrap="square" anchor="t">
-            <a:spAutoFit/>
-          </a:bodyPr>
-          <a:lstStyle/>
-          <a:p>
-            <a:pPr>
-              <a:spcAft>
-                <a:spcPts val="400"/>
-              </a:spcAft>
-            </a:pPr>
-            <a:r>
-              <a:rPr sz="900" b="1">
-                <a:solidFill>
-                  <a:srgbClr val="B97A0B"/>
-                </a:solidFill>
-              </a:rPr>
-              <a:t>Registration never retrained</a:t>
-            </a:r>
-          </a:p>
-          <a:p>
-            <a:pPr>
-              <a:spcAft>
-                <a:spcPts val="400"/>
-              </a:spcAft>
-            </a:pPr>
-            <a:r>
-              <a:rPr sz="900" b="0">
-                <a:solidFill>
-                  <a:srgbClr val="222A35"/>
-                </a:solidFill>
-              </a:rPr>
-              <a:t>A newly registered student stayed 'Unknown' forever — the images were saved, but the model was never refit.</a:t>
-            </a:r>
-          </a:p>
-        </p:txBody>
-      </p:sp>
-      <p:sp>
-        <p:nvSpPr>
-          <p:cNvPr id="26" name="Rounded Rectangle 25"/>
-          <p:cNvSpPr/>
-          <p:nvPr/>
-        </p:nvSpPr>
-        <p:spPr>
-          <a:xfrm>
-            <a:off x="4343400" y="3703320"/>
-            <a:ext cx="3566160" cy="1097280"/>
-          </a:xfrm>
-          <a:prstGeom prst="roundRect">
-            <a:avLst/>
-          </a:prstGeom>
-          <a:solidFill>
-            <a:srgbClr val="FEF5E3"/>
-          </a:solidFill>
-          <a:ln w="15240">
-            <a:solidFill>
-              <a:srgbClr val="B97A0B"/>
-            </a:solidFill>
-          </a:ln>
-          <a:effectLst/>
-        </p:spPr>
-        <p:style>
-          <a:lnRef idx="1">
-            <a:schemeClr val="accent1"/>
-          </a:lnRef>
-          <a:fillRef idx="3">
-            <a:schemeClr val="accent1"/>
-          </a:fillRef>
-          <a:effectRef idx="2">
-            <a:schemeClr val="accent1"/>
-          </a:effectRef>
-          <a:fontRef idx="minor">
-            <a:schemeClr val="lt1"/>
-          </a:fontRef>
-        </p:style>
-        <p:txBody>
-          <a:bodyPr rtlCol="0" anchor="ctr"/>
-          <a:lstStyle/>
-          <a:p/>
-        </p:txBody>
-      </p:sp>
-      <p:sp>
-        <p:nvSpPr>
-          <p:cNvPr id="27" name="TextBox 26"/>
-          <p:cNvSpPr txBox="1"/>
-          <p:nvPr/>
-        </p:nvSpPr>
-        <p:spPr>
-          <a:xfrm>
-            <a:off x="4480560" y="3803904"/>
-            <a:ext cx="3291840" cy="960120"/>
-          </a:xfrm>
-          <a:prstGeom prst="rect">
-            <a:avLst/>
-          </a:prstGeom>
-          <a:noFill/>
-        </p:spPr>
-        <p:txBody>
-          <a:bodyPr wrap="square" anchor="t">
-            <a:spAutoFit/>
-          </a:bodyPr>
-          <a:lstStyle/>
-          <a:p>
-            <a:pPr>
-              <a:spcAft>
-                <a:spcPts val="400"/>
-              </a:spcAft>
-            </a:pPr>
-            <a:r>
-              <a:rPr sz="900" b="1">
-                <a:solidFill>
-                  <a:srgbClr val="B97A0B"/>
-                </a:solidFill>
-              </a:rPr>
-              <a:t>The API was unauthenticated</a:t>
-            </a:r>
-          </a:p>
-          <a:p>
-            <a:pPr>
-              <a:spcAft>
-                <a:spcPts val="400"/>
-              </a:spcAft>
-            </a:pPr>
-            <a:r>
-              <a:rPr sz="900" b="0">
-                <a:solidFill>
-                  <a:srgbClr val="222A35"/>
-                </a:solidFill>
-              </a:rPr>
-              <a:t>Anyone on the network could mark themselves present or delete a student. All 11 data routes now require a token.</a:t>
-            </a:r>
-          </a:p>
-        </p:txBody>
-      </p:sp>
-      <p:sp>
-        <p:nvSpPr>
-          <p:cNvPr id="28" name="Rounded Rectangle 27"/>
-          <p:cNvSpPr/>
-          <p:nvPr/>
-        </p:nvSpPr>
-        <p:spPr>
-          <a:xfrm>
-            <a:off x="8138160" y="3703320"/>
-            <a:ext cx="3566160" cy="1097280"/>
-          </a:xfrm>
-          <a:prstGeom prst="roundRect">
-            <a:avLst/>
-          </a:prstGeom>
-          <a:solidFill>
-            <a:srgbClr val="FEF5E3"/>
-          </a:solidFill>
-          <a:ln w="15240">
-            <a:solidFill>
-              <a:srgbClr val="B97A0B"/>
-            </a:solidFill>
-          </a:ln>
-          <a:effectLst/>
-        </p:spPr>
-        <p:style>
-          <a:lnRef idx="1">
-            <a:schemeClr val="accent1"/>
-          </a:lnRef>
-          <a:fillRef idx="3">
-            <a:schemeClr val="accent1"/>
-          </a:fillRef>
-          <a:effectRef idx="2">
-            <a:schemeClr val="accent1"/>
-          </a:effectRef>
-          <a:fontRef idx="minor">
-            <a:schemeClr val="lt1"/>
-          </a:fontRef>
-        </p:style>
-        <p:txBody>
-          <a:bodyPr rtlCol="0" anchor="ctr"/>
-          <a:lstStyle/>
-          <a:p/>
-        </p:txBody>
-      </p:sp>
-      <p:sp>
-        <p:nvSpPr>
-          <p:cNvPr id="29" name="TextBox 28"/>
-          <p:cNvSpPr txBox="1"/>
-          <p:nvPr/>
-        </p:nvSpPr>
-        <p:spPr>
-          <a:xfrm>
-            <a:off x="8275320" y="3803904"/>
-            <a:ext cx="3291840" cy="960120"/>
-          </a:xfrm>
-          <a:prstGeom prst="rect">
-            <a:avLst/>
-          </a:prstGeom>
-          <a:noFill/>
-        </p:spPr>
-        <p:txBody>
-          <a:bodyPr wrap="square" anchor="t">
-            <a:spAutoFit/>
-          </a:bodyPr>
-          <a:lstStyle/>
-          <a:p>
-            <a:pPr>
-              <a:spcAft>
-                <a:spcPts val="400"/>
-              </a:spcAft>
-            </a:pPr>
-            <a:r>
-              <a:rPr sz="900" b="1">
-                <a:solidFill>
-                  <a:srgbClr val="B97A0B"/>
-                </a:solidFill>
-              </a:rPr>
-              <a:t>Remote code execution</a:t>
-            </a:r>
-          </a:p>
-          <a:p>
-            <a:pPr>
-              <a:spcAft>
-                <a:spcPts val="400"/>
-              </a:spcAft>
-            </a:pPr>
-            <a:r>
-              <a:rPr sz="900" b="0">
-                <a:solidFill>
-                  <a:srgbClr val="222A35"/>
-                </a:solidFill>
-              </a:rPr>
-              <a:t>Flask ran with debug=True bound to 0.0.0.0, exposing the Werkzeug console to the entire network.</a:t>
-            </a:r>
-          </a:p>
-        </p:txBody>
-      </p:sp>
-      <p:sp>
-        <p:nvSpPr>
-          <p:cNvPr id="30" name="TextBox 29"/>
-          <p:cNvSpPr txBox="1"/>
-          <p:nvPr/>
-        </p:nvSpPr>
-        <p:spPr>
-          <a:xfrm>
-            <a:off x="548640" y="4937760"/>
-            <a:ext cx="11155680" cy="274320"/>
-          </a:xfrm>
-          <a:prstGeom prst="rect">
-            <a:avLst/>
-          </a:prstGeom>
-          <a:noFill/>
-        </p:spPr>
-        <p:txBody>
-          <a:bodyPr wrap="square" anchor="t">
-            <a:spAutoFit/>
-          </a:bodyPr>
-          <a:lstStyle/>
-          <a:p>
-            <a:pPr>
-              <a:spcAft>
-                <a:spcPts val="400"/>
-              </a:spcAft>
-            </a:pPr>
-            <a:r>
-              <a:rPr sz="1250" b="1">
-                <a:solidFill>
-                  <a:srgbClr val="142B53"/>
-                </a:solidFill>
-              </a:rPr>
-              <a:t>FUTURE SCOPE</a:t>
-            </a:r>
-          </a:p>
-        </p:txBody>
-      </p:sp>
-      <p:sp>
-        <p:nvSpPr>
-          <p:cNvPr id="31" name="Rounded Rectangle 30"/>
-          <p:cNvSpPr/>
-          <p:nvPr/>
-        </p:nvSpPr>
-        <p:spPr>
-          <a:xfrm>
-            <a:off x="548640" y="5239512"/>
-            <a:ext cx="3566160" cy="1097280"/>
-          </a:xfrm>
-          <a:prstGeom prst="roundRect">
-            <a:avLst/>
-          </a:prstGeom>
-          <a:solidFill>
-            <a:srgbClr val="E8F7EF"/>
-          </a:solidFill>
-          <a:ln w="15240">
-            <a:solidFill>
-              <a:srgbClr val="1E8E5A"/>
-            </a:solidFill>
-          </a:ln>
-          <a:effectLst/>
-        </p:spPr>
-        <p:style>
-          <a:lnRef idx="1">
-            <a:schemeClr val="accent1"/>
-          </a:lnRef>
-          <a:fillRef idx="3">
-            <a:schemeClr val="accent1"/>
-          </a:fillRef>
-          <a:effectRef idx="2">
-            <a:schemeClr val="accent1"/>
-          </a:effectRef>
-          <a:fontRef idx="minor">
-            <a:schemeClr val="lt1"/>
-          </a:fontRef>
-        </p:style>
-        <p:txBody>
-          <a:bodyPr rtlCol="0" anchor="ctr"/>
-          <a:lstStyle/>
-          <a:p/>
-        </p:txBody>
-      </p:sp>
-      <p:sp>
-        <p:nvSpPr>
-          <p:cNvPr id="32" name="TextBox 31"/>
-          <p:cNvSpPr txBox="1"/>
-          <p:nvPr/>
-        </p:nvSpPr>
-        <p:spPr>
-          <a:xfrm>
-            <a:off x="685800" y="5340096"/>
-            <a:ext cx="3291840" cy="960120"/>
-          </a:xfrm>
-          <a:prstGeom prst="rect">
-            <a:avLst/>
-          </a:prstGeom>
-          <a:noFill/>
-        </p:spPr>
-        <p:txBody>
-          <a:bodyPr wrap="square" anchor="t">
-            <a:spAutoFit/>
-          </a:bodyPr>
-          <a:lstStyle/>
-          <a:p>
-            <a:pPr>
-              <a:spcAft>
-                <a:spcPts val="400"/>
-              </a:spcAft>
-            </a:pPr>
-            <a:r>
-              <a:rPr sz="900" b="1">
-                <a:solidFill>
-                  <a:srgbClr val="1E8E5A"/>
-                </a:solidFill>
-              </a:rPr>
-              <a:t>Defeat video replay</a:t>
-            </a:r>
-          </a:p>
-          <a:p>
-            <a:pPr>
-              <a:spcAft>
-                <a:spcPts val="400"/>
-              </a:spcAft>
-            </a:pPr>
-            <a:r>
-              <a:rPr sz="900" b="0">
-                <a:solidFill>
-                  <a:srgbClr val="222A35"/>
-                </a:solidFill>
-              </a:rPr>
-              <a:t>A recorded face genuinely moves, so it still passes. A depth or texture-based anti-spoof model is the next step.</a:t>
-            </a:r>
-          </a:p>
-        </p:txBody>
-      </p:sp>
-      <p:sp>
-        <p:nvSpPr>
-          <p:cNvPr id="33" name="Rounded Rectangle 32"/>
-          <p:cNvSpPr/>
-          <p:nvPr/>
-        </p:nvSpPr>
-        <p:spPr>
-          <a:xfrm>
-            <a:off x="4343400" y="5239512"/>
-            <a:ext cx="3566160" cy="1097280"/>
-          </a:xfrm>
-          <a:prstGeom prst="roundRect">
-            <a:avLst/>
-          </a:prstGeom>
-          <a:solidFill>
-            <a:srgbClr val="E8F7EF"/>
-          </a:solidFill>
-          <a:ln w="15240">
-            <a:solidFill>
-              <a:srgbClr val="1E8E5A"/>
-            </a:solidFill>
-          </a:ln>
-          <a:effectLst/>
-        </p:spPr>
-        <p:style>
-          <a:lnRef idx="1">
-            <a:schemeClr val="accent1"/>
-          </a:lnRef>
-          <a:fillRef idx="3">
-            <a:schemeClr val="accent1"/>
-          </a:fillRef>
-          <a:effectRef idx="2">
-            <a:schemeClr val="accent1"/>
-          </a:effectRef>
-          <a:fontRef idx="minor">
-            <a:schemeClr val="lt1"/>
-          </a:fontRef>
-        </p:style>
-        <p:txBody>
-          <a:bodyPr rtlCol="0" anchor="ctr"/>
-          <a:lstStyle/>
-          <a:p/>
-        </p:txBody>
-      </p:sp>
-      <p:sp>
-        <p:nvSpPr>
-          <p:cNvPr id="34" name="TextBox 33"/>
-          <p:cNvSpPr txBox="1"/>
-          <p:nvPr/>
-        </p:nvSpPr>
-        <p:spPr>
-          <a:xfrm>
-            <a:off x="4480560" y="5340096"/>
-            <a:ext cx="3291840" cy="960120"/>
-          </a:xfrm>
-          <a:prstGeom prst="rect">
-            <a:avLst/>
-          </a:prstGeom>
-          <a:noFill/>
-        </p:spPr>
-        <p:txBody>
-          <a:bodyPr wrap="square" anchor="t">
-            <a:spAutoFit/>
-          </a:bodyPr>
-          <a:lstStyle/>
-          <a:p>
-            <a:pPr>
-              <a:spcAft>
-                <a:spcPts val="400"/>
-              </a:spcAft>
-            </a:pPr>
-            <a:r>
-              <a:rPr sz="900" b="1">
-                <a:solidFill>
-                  <a:srgbClr val="1E8E5A"/>
-                </a:solidFill>
-              </a:rPr>
-              <a:t>Enrol a real cohort</a:t>
-            </a:r>
-          </a:p>
-          <a:p>
-            <a:pPr>
-              <a:spcAft>
-                <a:spcPts val="400"/>
-              </a:spcAft>
-            </a:pPr>
-            <a:r>
-              <a:rPr sz="900" b="0">
-                <a:solidFill>
-                  <a:srgbClr val="222A35"/>
-                </a:solidFill>
-              </a:rPr>
-              <a:t>Only 2 real users today. 30+ enrolled students would let every claim be re-measured on real webcam data.</a:t>
-            </a:r>
-          </a:p>
-        </p:txBody>
-      </p:sp>
-      <p:sp>
-        <p:nvSpPr>
-          <p:cNvPr id="35" name="Rounded Rectangle 34"/>
-          <p:cNvSpPr/>
-          <p:nvPr/>
-        </p:nvSpPr>
-        <p:spPr>
-          <a:xfrm>
-            <a:off x="8138160" y="5239512"/>
-            <a:ext cx="3566160" cy="1097280"/>
-          </a:xfrm>
-          <a:prstGeom prst="roundRect">
-            <a:avLst/>
-          </a:prstGeom>
-          <a:solidFill>
-            <a:srgbClr val="E8F7EF"/>
-          </a:solidFill>
-          <a:ln w="15240">
-            <a:solidFill>
-              <a:srgbClr val="1E8E5A"/>
-            </a:solidFill>
-          </a:ln>
-          <a:effectLst/>
-        </p:spPr>
-        <p:style>
-          <a:lnRef idx="1">
-            <a:schemeClr val="accent1"/>
-          </a:lnRef>
-          <a:fillRef idx="3">
-            <a:schemeClr val="accent1"/>
-          </a:fillRef>
-          <a:effectRef idx="2">
-            <a:schemeClr val="accent1"/>
-          </a:effectRef>
-          <a:fontRef idx="minor">
-            <a:schemeClr val="lt1"/>
-          </a:fontRef>
-        </p:style>
-        <p:txBody>
-          <a:bodyPr rtlCol="0" anchor="ctr"/>
-          <a:lstStyle/>
-          <a:p/>
-        </p:txBody>
-      </p:sp>
-      <p:sp>
-        <p:nvSpPr>
-          <p:cNvPr id="36" name="TextBox 35"/>
-          <p:cNvSpPr txBox="1"/>
-          <p:nvPr/>
-        </p:nvSpPr>
-        <p:spPr>
-          <a:xfrm>
-            <a:off x="8275320" y="5340096"/>
-            <a:ext cx="3291840" cy="960120"/>
-          </a:xfrm>
-          <a:prstGeom prst="rect">
-            <a:avLst/>
-          </a:prstGeom>
-          <a:noFill/>
-        </p:spPr>
-        <p:txBody>
-          <a:bodyPr wrap="square" anchor="t">
-            <a:spAutoFit/>
-          </a:bodyPr>
-          <a:lstStyle/>
-          <a:p>
-            <a:pPr>
-              <a:spcAft>
-                <a:spcPts val="400"/>
-              </a:spcAft>
-            </a:pPr>
-            <a:r>
-              <a:rPr sz="900" b="1">
-                <a:solidFill>
-                  <a:srgbClr val="1E8E5A"/>
-                </a:solidFill>
-              </a:rPr>
-              <a:t>Store embeddings, not photos</a:t>
-            </a:r>
-          </a:p>
-          <a:p>
-            <a:pPr>
-              <a:spcAft>
-                <a:spcPts val="400"/>
-              </a:spcAft>
-            </a:pPr>
-            <a:r>
-              <a:rPr sz="900" b="0">
-                <a:solidFill>
-                  <a:srgbClr val="222A35"/>
-                </a:solidFill>
-              </a:rPr>
-              <a:t>A face cannot be reconstructed from a 512-d vector — a stolen database would leak nothing.</a:t>
-            </a:r>
-          </a:p>
-        </p:txBody>
-      </p:sp>
-      <p:sp>
-        <p:nvSpPr>
-          <p:cNvPr id="37" name="Rectangle 36"/>
+              <a:t>Source code, dataset and every measurement script:  github.com/SohamBhattacharjee2003/MutiFace-Attendance-System</a:t>
+            </a:r>
+          </a:p>
+        </p:txBody>
+      </p:sp>
+      <p:sp>
+        <p:nvSpPr>
+          <p:cNvPr id="5" name="Rectangle 4"/>
           <p:cNvSpPr/>
           <p:nvPr/>
         </p:nvSpPr>
@@ -4943,7 +3829,7 @@
       </p:sp>
       <p:sp>
         <p:nvSpPr>
-          <p:cNvPr id="38" name="TextBox 37"/>
+          <p:cNvPr id="6" name="TextBox 5"/>
           <p:cNvSpPr txBox="1"/>
           <p:nvPr/>
         </p:nvSpPr>
@@ -4995,47 +3881,14 @@
       <p:grpSpPr/>
       <p:sp>
         <p:nvSpPr>
-          <p:cNvPr id="2" name="TextBox 1"/>
-          <p:cNvSpPr txBox="1"/>
-          <p:nvPr/>
-        </p:nvSpPr>
-        <p:spPr>
-          <a:xfrm>
-            <a:off x="411480" y="146304"/>
-            <a:ext cx="11338560" cy="548640"/>
-          </a:xfrm>
-          <a:prstGeom prst="rect">
-            <a:avLst/>
-          </a:prstGeom>
-          <a:noFill/>
-        </p:spPr>
-        <p:txBody>
-          <a:bodyPr wrap="none">
-            <a:spAutoFit/>
-          </a:bodyPr>
-          <a:lstStyle/>
-          <a:p>
-            <a:r>
-              <a:rPr sz="2500" b="1">
-                <a:solidFill>
-                  <a:srgbClr val="142B53"/>
-                </a:solidFill>
-              </a:rPr>
-              <a:t>IMPACTS AND BENEFITS</a:t>
-            </a:r>
-          </a:p>
-        </p:txBody>
-      </p:sp>
-      <p:sp>
-        <p:nvSpPr>
-          <p:cNvPr id="3" name="Rectangle 2"/>
+          <p:cNvPr id="2" name="Rectangle 1"/>
           <p:cNvSpPr/>
           <p:nvPr/>
         </p:nvSpPr>
         <p:spPr>
           <a:xfrm>
-            <a:off x="457200" y="676656"/>
-            <a:ext cx="1463040" cy="45720"/>
+            <a:off x="0" y="0"/>
+            <a:ext cx="12191695" cy="256032"/>
           </a:xfrm>
           <a:prstGeom prst="rect">
             <a:avLst/>
@@ -5072,58 +3925,14 @@
       </p:sp>
       <p:sp>
         <p:nvSpPr>
-          <p:cNvPr id="4" name="Rounded Rectangle 3"/>
-          <p:cNvSpPr/>
-          <p:nvPr/>
-        </p:nvSpPr>
-        <p:spPr>
-          <a:xfrm>
-            <a:off x="548640" y="1280160"/>
-            <a:ext cx="5532120" cy="2148840"/>
-          </a:xfrm>
-          <a:prstGeom prst="roundRect">
-            <a:avLst/>
-          </a:prstGeom>
-          <a:solidFill>
-            <a:srgbClr val="E9F2FC"/>
-          </a:solidFill>
-          <a:ln w="15240">
-            <a:solidFill>
-              <a:srgbClr val="1F77C2"/>
-            </a:solidFill>
-          </a:ln>
-          <a:effectLst/>
-        </p:spPr>
-        <p:style>
-          <a:lnRef idx="1">
-            <a:schemeClr val="accent1"/>
-          </a:lnRef>
-          <a:fillRef idx="3">
-            <a:schemeClr val="accent1"/>
-          </a:fillRef>
-          <a:effectRef idx="2">
-            <a:schemeClr val="accent1"/>
-          </a:effectRef>
-          <a:fontRef idx="minor">
-            <a:schemeClr val="lt1"/>
-          </a:fontRef>
-        </p:style>
-        <p:txBody>
-          <a:bodyPr rtlCol="0" anchor="ctr"/>
-          <a:lstStyle/>
-          <a:p/>
-        </p:txBody>
-      </p:sp>
-      <p:sp>
-        <p:nvSpPr>
-          <p:cNvPr id="5" name="TextBox 4"/>
+          <p:cNvPr id="3" name="TextBox 2"/>
           <p:cNvSpPr txBox="1"/>
           <p:nvPr/>
         </p:nvSpPr>
         <p:spPr>
           <a:xfrm>
-            <a:off x="713232" y="1399031"/>
-            <a:ext cx="5212080" cy="1965960"/>
+            <a:off x="731520" y="2651760"/>
+            <a:ext cx="10698480" cy="1463040"/>
           </a:xfrm>
           <a:prstGeom prst="rect">
             <a:avLst/>
@@ -5131,626 +3940,37 @@
           <a:noFill/>
         </p:spPr>
         <p:txBody>
-          <a:bodyPr wrap="square" anchor="t">
+          <a:bodyPr wrap="none">
             <a:spAutoFit/>
           </a:bodyPr>
           <a:lstStyle/>
           <a:p>
-            <a:pPr>
-              <a:spcAft>
-                <a:spcPts val="400"/>
-              </a:spcAft>
-            </a:pPr>
-            <a:r>
-              <a:rPr sz="1050" b="1">
-                <a:solidFill>
-                  <a:srgbClr val="1F77C2"/>
-                </a:solidFill>
-              </a:rPr>
-              <a:t>SOCIAL</a:t>
-            </a:r>
-          </a:p>
-          <a:p>
-            <a:pPr>
-              <a:spcAft>
-                <a:spcPts val="400"/>
-              </a:spcAft>
-            </a:pPr>
-          </a:p>
-          <a:p>
-            <a:pPr>
-              <a:spcAft>
-                <a:spcPts val="400"/>
-              </a:spcAft>
-            </a:pPr>
-            <a:r>
-              <a:rPr sz="1050" b="0">
-                <a:solidFill>
-                  <a:srgbClr val="222A35"/>
-                </a:solidFill>
-              </a:rPr>
-              <a:t>~80 teaching hours returned per year (5 min × 200 days).</a:t>
-            </a:r>
-          </a:p>
-          <a:p>
-            <a:pPr>
-              <a:spcAft>
-                <a:spcPts val="400"/>
-              </a:spcAft>
-            </a:pPr>
-            <a:r>
-              <a:rPr sz="1050" b="0">
-                <a:solidFill>
-                  <a:srgbClr val="222A35"/>
-                </a:solidFill>
-              </a:rPr>
-              <a:t>Contactless — no queue, no register passed around the room.</a:t>
-            </a:r>
-          </a:p>
-          <a:p>
-            <a:pPr>
-              <a:spcAft>
-                <a:spcPts val="400"/>
-              </a:spcAft>
-            </a:pPr>
-            <a:r>
-              <a:rPr sz="1050" b="0">
-                <a:solidFill>
-                  <a:srgbClr val="222A35"/>
-                </a:solidFill>
-              </a:rPr>
-              <a:t>Manual proxy eliminated; photo proxy blocked (100% → 0%).</a:t>
-            </a:r>
-          </a:p>
-          <a:p>
-            <a:pPr>
-              <a:spcAft>
-                <a:spcPts val="400"/>
-              </a:spcAft>
-            </a:pPr>
-            <a:r>
-              <a:rPr sz="1050" b="0">
-                <a:solidFill>
-                  <a:srgbClr val="222A35"/>
-                </a:solidFill>
-              </a:rPr>
-              <a:t>Video-replay proxy is NOT yet blocked — stated, not hidden.</a:t>
-            </a:r>
-          </a:p>
-        </p:txBody>
-      </p:sp>
-      <p:sp>
-        <p:nvSpPr>
-          <p:cNvPr id="6" name="Rounded Rectangle 5"/>
-          <p:cNvSpPr/>
-          <p:nvPr/>
-        </p:nvSpPr>
-        <p:spPr>
-          <a:xfrm>
-            <a:off x="6355079" y="1280160"/>
-            <a:ext cx="5532120" cy="2148840"/>
-          </a:xfrm>
-          <a:prstGeom prst="roundRect">
-            <a:avLst/>
-          </a:prstGeom>
-          <a:solidFill>
-            <a:srgbClr val="E8F7EF"/>
-          </a:solidFill>
-          <a:ln w="15240">
-            <a:solidFill>
-              <a:srgbClr val="1E8E5A"/>
-            </a:solidFill>
-          </a:ln>
-          <a:effectLst/>
-        </p:spPr>
-        <p:style>
-          <a:lnRef idx="1">
-            <a:schemeClr val="accent1"/>
-          </a:lnRef>
-          <a:fillRef idx="3">
-            <a:schemeClr val="accent1"/>
-          </a:fillRef>
-          <a:effectRef idx="2">
-            <a:schemeClr val="accent1"/>
-          </a:effectRef>
-          <a:fontRef idx="minor">
-            <a:schemeClr val="lt1"/>
-          </a:fontRef>
-        </p:style>
-        <p:txBody>
-          <a:bodyPr rtlCol="0" anchor="ctr"/>
-          <a:lstStyle/>
-          <a:p/>
-        </p:txBody>
-      </p:sp>
-      <p:sp>
-        <p:nvSpPr>
-          <p:cNvPr id="7" name="TextBox 6"/>
-          <p:cNvSpPr txBox="1"/>
-          <p:nvPr/>
-        </p:nvSpPr>
-        <p:spPr>
-          <a:xfrm>
-            <a:off x="6519671" y="1399031"/>
-            <a:ext cx="5212080" cy="1965960"/>
-          </a:xfrm>
-          <a:prstGeom prst="rect">
-            <a:avLst/>
-          </a:prstGeom>
-          <a:noFill/>
-        </p:spPr>
-        <p:txBody>
-          <a:bodyPr wrap="square" anchor="t">
-            <a:spAutoFit/>
-          </a:bodyPr>
-          <a:lstStyle/>
-          <a:p>
-            <a:pPr>
-              <a:spcAft>
-                <a:spcPts val="400"/>
-              </a:spcAft>
-            </a:pPr>
-            <a:r>
-              <a:rPr sz="1050" b="1">
-                <a:solidFill>
-                  <a:srgbClr val="1E8E5A"/>
-                </a:solidFill>
-              </a:rPr>
-              <a:t>ECONOMIC</a:t>
-            </a:r>
-          </a:p>
-          <a:p>
-            <a:pPr>
-              <a:spcAft>
-                <a:spcPts val="400"/>
-              </a:spcAft>
-            </a:pPr>
-          </a:p>
-          <a:p>
-            <a:pPr>
-              <a:spcAft>
-                <a:spcPts val="400"/>
-              </a:spcAft>
-            </a:pPr>
-            <a:r>
-              <a:rPr sz="1050" b="0">
-                <a:solidFill>
-                  <a:srgbClr val="222A35"/>
-                </a:solidFill>
-              </a:rPr>
-              <a:t>One laptop and one webcam. No GPU. No servers.</a:t>
-            </a:r>
-          </a:p>
-          <a:p>
-            <a:pPr>
-              <a:spcAft>
-                <a:spcPts val="400"/>
-              </a:spcAft>
-            </a:pPr>
-            <a:r>
-              <a:rPr sz="1050" b="0">
-                <a:solidFill>
-                  <a:srgbClr val="222A35"/>
-                </a:solidFill>
-              </a:rPr>
-              <a:t>Recurring cost ≈ ₹0.</a:t>
-            </a:r>
-          </a:p>
-          <a:p>
-            <a:pPr>
-              <a:spcAft>
-                <a:spcPts val="400"/>
-              </a:spcAft>
-            </a:pPr>
-            <a:r>
-              <a:rPr sz="1050" b="0">
-                <a:solidFill>
-                  <a:srgbClr val="222A35"/>
-                </a:solidFill>
-              </a:rPr>
-              <a:t>A cloud face API at ~$0.001/image, scanning continuously,</a:t>
-            </a:r>
-          </a:p>
-          <a:p>
-            <a:pPr>
-              <a:spcAft>
-                <a:spcPts val="400"/>
-              </a:spcAft>
-            </a:pPr>
-            <a:r>
-              <a:rPr sz="1050" b="0">
-                <a:solidFill>
-                  <a:srgbClr val="222A35"/>
-                </a:solidFill>
-              </a:rPr>
-              <a:t>costs ≈ ₹1,50,000 per year, per school.</a:t>
-            </a:r>
-          </a:p>
-        </p:txBody>
-      </p:sp>
-      <p:sp>
-        <p:nvSpPr>
-          <p:cNvPr id="8" name="Rounded Rectangle 7"/>
-          <p:cNvSpPr/>
-          <p:nvPr/>
-        </p:nvSpPr>
-        <p:spPr>
-          <a:xfrm>
-            <a:off x="548640" y="3657600"/>
-            <a:ext cx="5532120" cy="2148840"/>
-          </a:xfrm>
-          <a:prstGeom prst="roundRect">
-            <a:avLst/>
-          </a:prstGeom>
-          <a:solidFill>
-            <a:srgbClr val="FDECEA"/>
-          </a:solidFill>
-          <a:ln w="15240">
-            <a:solidFill>
-              <a:srgbClr val="C0392B"/>
-            </a:solidFill>
-          </a:ln>
-          <a:effectLst/>
-        </p:spPr>
-        <p:style>
-          <a:lnRef idx="1">
-            <a:schemeClr val="accent1"/>
-          </a:lnRef>
-          <a:fillRef idx="3">
-            <a:schemeClr val="accent1"/>
-          </a:fillRef>
-          <a:effectRef idx="2">
-            <a:schemeClr val="accent1"/>
-          </a:effectRef>
-          <a:fontRef idx="minor">
-            <a:schemeClr val="lt1"/>
-          </a:fontRef>
-        </p:style>
-        <p:txBody>
-          <a:bodyPr rtlCol="0" anchor="ctr"/>
-          <a:lstStyle/>
-          <a:p/>
-        </p:txBody>
-      </p:sp>
-      <p:sp>
-        <p:nvSpPr>
-          <p:cNvPr id="9" name="TextBox 8"/>
-          <p:cNvSpPr txBox="1"/>
-          <p:nvPr/>
-        </p:nvSpPr>
-        <p:spPr>
-          <a:xfrm>
-            <a:off x="713232" y="3776472"/>
-            <a:ext cx="5212080" cy="1965960"/>
-          </a:xfrm>
-          <a:prstGeom prst="rect">
-            <a:avLst/>
-          </a:prstGeom>
-          <a:noFill/>
-        </p:spPr>
-        <p:txBody>
-          <a:bodyPr wrap="square" anchor="t">
-            <a:spAutoFit/>
-          </a:bodyPr>
-          <a:lstStyle/>
-          <a:p>
-            <a:pPr>
-              <a:spcAft>
-                <a:spcPts val="400"/>
-              </a:spcAft>
-            </a:pPr>
-            <a:r>
-              <a:rPr sz="1050" b="1">
-                <a:solidFill>
-                  <a:srgbClr val="C0392B"/>
-                </a:solidFill>
-              </a:rPr>
-              <a:t>PRIVACY &amp; LEGAL</a:t>
-            </a:r>
-          </a:p>
-          <a:p>
-            <a:pPr>
-              <a:spcAft>
-                <a:spcPts val="400"/>
-              </a:spcAft>
-            </a:pPr>
-          </a:p>
-          <a:p>
-            <a:pPr>
-              <a:spcAft>
-                <a:spcPts val="400"/>
-              </a:spcAft>
-            </a:pPr>
-            <a:r>
-              <a:rPr sz="1050" b="0">
-                <a:solidFill>
-                  <a:srgbClr val="222A35"/>
-                </a:solidFill>
-              </a:rPr>
-              <a:t>Runs fully offline. Student faces never leave the campus.</a:t>
-            </a:r>
-          </a:p>
-          <a:p>
-            <a:pPr>
-              <a:spcAft>
-                <a:spcPts val="400"/>
-              </a:spcAft>
-            </a:pPr>
-            <a:r>
-              <a:rPr sz="1050" b="0">
-                <a:solidFill>
-                  <a:srgbClr val="222A35"/>
-                </a:solidFill>
-              </a:rPr>
-              <a:t>Under India's DPDP Act 2023, biometric data is sensitive</a:t>
-            </a:r>
-          </a:p>
-          <a:p>
-            <a:pPr>
-              <a:spcAft>
-                <a:spcPts val="400"/>
-              </a:spcAft>
-            </a:pPr>
-            <a:r>
-              <a:rPr sz="1050" b="0">
-                <a:solidFill>
-                  <a:srgbClr val="222A35"/>
-                </a:solidFill>
-              </a:rPr>
-              <a:t>personal data — uploading children's faces to a third-party</a:t>
-            </a:r>
-          </a:p>
-          <a:p>
-            <a:pPr>
-              <a:spcAft>
-                <a:spcPts val="400"/>
-              </a:spcAft>
-            </a:pPr>
-            <a:r>
-              <a:rPr sz="1050" b="0">
-                <a:solidFill>
-                  <a:srgbClr val="222A35"/>
-                </a:solidFill>
-              </a:rPr>
-              <a:t>cloud is a liability, not a feature.</a:t>
-            </a:r>
-          </a:p>
-        </p:txBody>
-      </p:sp>
-      <p:sp>
-        <p:nvSpPr>
-          <p:cNvPr id="10" name="Rounded Rectangle 9"/>
-          <p:cNvSpPr/>
-          <p:nvPr/>
-        </p:nvSpPr>
-        <p:spPr>
-          <a:xfrm>
-            <a:off x="6355079" y="3657600"/>
-            <a:ext cx="5532120" cy="2148840"/>
-          </a:xfrm>
-          <a:prstGeom prst="roundRect">
-            <a:avLst/>
-          </a:prstGeom>
-          <a:solidFill>
-            <a:srgbClr val="FEF5E3"/>
-          </a:solidFill>
-          <a:ln w="15240">
-            <a:solidFill>
-              <a:srgbClr val="B97A0B"/>
-            </a:solidFill>
-          </a:ln>
-          <a:effectLst/>
-        </p:spPr>
-        <p:style>
-          <a:lnRef idx="1">
-            <a:schemeClr val="accent1"/>
-          </a:lnRef>
-          <a:fillRef idx="3">
-            <a:schemeClr val="accent1"/>
-          </a:fillRef>
-          <a:effectRef idx="2">
-            <a:schemeClr val="accent1"/>
-          </a:effectRef>
-          <a:fontRef idx="minor">
-            <a:schemeClr val="lt1"/>
-          </a:fontRef>
-        </p:style>
-        <p:txBody>
-          <a:bodyPr rtlCol="0" anchor="ctr"/>
-          <a:lstStyle/>
-          <a:p/>
-        </p:txBody>
-      </p:sp>
-      <p:sp>
-        <p:nvSpPr>
-          <p:cNvPr id="11" name="TextBox 10"/>
-          <p:cNvSpPr txBox="1"/>
-          <p:nvPr/>
-        </p:nvSpPr>
-        <p:spPr>
-          <a:xfrm>
-            <a:off x="6519671" y="3776472"/>
-            <a:ext cx="5212080" cy="1965960"/>
-          </a:xfrm>
-          <a:prstGeom prst="rect">
-            <a:avLst/>
-          </a:prstGeom>
-          <a:noFill/>
-        </p:spPr>
-        <p:txBody>
-          <a:bodyPr wrap="square" anchor="t">
-            <a:spAutoFit/>
-          </a:bodyPr>
-          <a:lstStyle/>
-          <a:p>
-            <a:pPr>
-              <a:spcAft>
-                <a:spcPts val="400"/>
-              </a:spcAft>
-            </a:pPr>
-            <a:r>
-              <a:rPr sz="1050" b="1">
-                <a:solidFill>
-                  <a:srgbClr val="B97A0B"/>
-                </a:solidFill>
-              </a:rPr>
-              <a:t>TECHNICAL</a:t>
-            </a:r>
-          </a:p>
-          <a:p>
-            <a:pPr>
-              <a:spcAft>
-                <a:spcPts val="400"/>
-              </a:spcAft>
-            </a:pPr>
-          </a:p>
-          <a:p>
-            <a:pPr>
-              <a:spcAft>
-                <a:spcPts val="400"/>
-              </a:spcAft>
-            </a:pPr>
-            <a:r>
-              <a:rPr sz="1050" b="0">
-                <a:solidFill>
-                  <a:srgbClr val="222A35"/>
-                </a:solidFill>
-              </a:rPr>
-              <a:t>Every decision exposes its evidence: similarity score,</a:t>
-            </a:r>
-          </a:p>
-          <a:p>
-            <a:pPr>
-              <a:spcAft>
-                <a:spcPts val="400"/>
-              </a:spcAft>
-            </a:pPr>
-            <a:r>
-              <a:rPr sz="1050" b="0">
-                <a:solidFill>
-                  <a:srgbClr val="222A35"/>
-                </a:solidFill>
-              </a:rPr>
-              <a:t>runner-up margin, face size, liveness verdict.</a:t>
-            </a:r>
-          </a:p>
-          <a:p>
-            <a:pPr>
-              <a:spcAft>
-                <a:spcPts val="400"/>
-              </a:spcAft>
-            </a:pPr>
-            <a:r>
-              <a:rPr sz="1050" b="0">
-                <a:solidFill>
-                  <a:srgbClr val="222A35"/>
-                </a:solidFill>
-              </a:rPr>
-              <a:t>A disputed attendance record can be explained.</a:t>
-            </a:r>
-          </a:p>
-          <a:p>
-            <a:pPr>
-              <a:spcAft>
-                <a:spcPts val="400"/>
-              </a:spcAft>
-            </a:pPr>
-            <a:r>
-              <a:rPr sz="1050" b="0">
-                <a:solidFill>
-                  <a:srgbClr val="222A35"/>
-                </a:solidFill>
-              </a:rPr>
-              <a:t>Commercial systems are black boxes.</a:t>
-            </a:r>
-          </a:p>
-        </p:txBody>
-      </p:sp>
-      <p:sp>
-        <p:nvSpPr>
-          <p:cNvPr id="12" name="Rounded Rectangle 11"/>
-          <p:cNvSpPr/>
-          <p:nvPr/>
-        </p:nvSpPr>
-        <p:spPr>
-          <a:xfrm>
-            <a:off x="548640" y="5806440"/>
-            <a:ext cx="11109960" cy="548640"/>
-          </a:xfrm>
-          <a:prstGeom prst="roundRect">
-            <a:avLst/>
-          </a:prstGeom>
-          <a:solidFill>
-            <a:srgbClr val="F4F6F9"/>
-          </a:solidFill>
-          <a:ln w="15240">
-            <a:solidFill>
-              <a:srgbClr val="142B53"/>
-            </a:solidFill>
-          </a:ln>
-          <a:effectLst/>
-        </p:spPr>
-        <p:style>
-          <a:lnRef idx="1">
-            <a:schemeClr val="accent1"/>
-          </a:lnRef>
-          <a:fillRef idx="3">
-            <a:schemeClr val="accent1"/>
-          </a:fillRef>
-          <a:effectRef idx="2">
-            <a:schemeClr val="accent1"/>
-          </a:effectRef>
-          <a:fontRef idx="minor">
-            <a:schemeClr val="lt1"/>
-          </a:fontRef>
-        </p:style>
-        <p:txBody>
-          <a:bodyPr rtlCol="0" anchor="ctr"/>
-          <a:lstStyle/>
-          <a:p/>
-        </p:txBody>
-      </p:sp>
-      <p:sp>
-        <p:nvSpPr>
-          <p:cNvPr id="13" name="TextBox 12"/>
-          <p:cNvSpPr txBox="1"/>
-          <p:nvPr/>
-        </p:nvSpPr>
-        <p:spPr>
-          <a:xfrm>
-            <a:off x="713232" y="5897880"/>
-            <a:ext cx="10789920" cy="411480"/>
-          </a:xfrm>
-          <a:prstGeom prst="rect">
-            <a:avLst/>
-          </a:prstGeom>
-          <a:noFill/>
-        </p:spPr>
-        <p:txBody>
-          <a:bodyPr wrap="square" anchor="t">
-            <a:spAutoFit/>
-          </a:bodyPr>
-          <a:lstStyle/>
-          <a:p>
-            <a:pPr>
-              <a:spcAft>
-                <a:spcPts val="400"/>
-              </a:spcAft>
-            </a:pPr>
-            <a:r>
-              <a:rPr sz="1050" b="1">
+            <a:pPr algn="ctr"/>
+            <a:r>
+              <a:rPr sz="4600" b="1">
                 <a:solidFill>
                   <a:srgbClr val="142B53"/>
                 </a:solidFill>
               </a:rPr>
-              <a:t>Target audience — schools and colleges that cannot afford a GPU or a cloud subscription, and cannot legally upload their students' faces to one.</a:t>
-            </a:r>
-          </a:p>
-        </p:txBody>
-      </p:sp>
-      <p:sp>
-        <p:nvSpPr>
-          <p:cNvPr id="14" name="Rectangle 13"/>
+              <a:t>THANK YOU</a:t>
+            </a:r>
+          </a:p>
+          <a:p>
+            <a:pPr algn="ctr"/>
+            <a:r>
+              <a:rPr sz="1600">
+                <a:solidFill>
+                  <a:srgbClr val="5B6676"/>
+                </a:solidFill>
+              </a:rPr>
+              <a:t>Questions?</a:t>
+            </a:r>
+          </a:p>
+        </p:txBody>
+      </p:sp>
+      <p:sp>
+        <p:nvSpPr>
+          <p:cNvPr id="4" name="Rectangle 3"/>
           <p:cNvSpPr/>
           <p:nvPr/>
         </p:nvSpPr>
@@ -5794,7 +4014,7 @@
       </p:sp>
       <p:sp>
         <p:nvSpPr>
-          <p:cNvPr id="15" name="TextBox 14"/>
+          <p:cNvPr id="5" name="TextBox 4"/>
           <p:cNvSpPr txBox="1"/>
           <p:nvPr/>
         </p:nvSpPr>
@@ -5822,633 +4042,6 @@
                 </a:solidFill>
               </a:rPr>
               <a:t>10</a:t>
-            </a:r>
-          </a:p>
-        </p:txBody>
-      </p:sp>
-    </p:spTree>
-  </p:cSld>
-  <p:clrMapOvr>
-    <a:masterClrMapping/>
-  </p:clrMapOvr>
-</p:sld>
-</file>
-
-<file path=ppt/slides/slide12.xml><?xml version="1.0" encoding="utf-8"?>
-<p:sld xmlns:a="http://schemas.openxmlformats.org/drawingml/2006/main" xmlns:p="http://schemas.openxmlformats.org/presentationml/2006/main" xmlns:r="http://schemas.openxmlformats.org/officeDocument/2006/relationships">
-  <p:cSld>
-    <p:spTree>
-      <p:nvGrpSpPr>
-        <p:cNvPr id="1" name=""/>
-        <p:cNvGrpSpPr/>
-        <p:nvPr/>
-      </p:nvGrpSpPr>
-      <p:grpSpPr/>
-      <p:sp>
-        <p:nvSpPr>
-          <p:cNvPr id="2" name="TextBox 1"/>
-          <p:cNvSpPr txBox="1"/>
-          <p:nvPr/>
-        </p:nvSpPr>
-        <p:spPr>
-          <a:xfrm>
-            <a:off x="411480" y="146304"/>
-            <a:ext cx="11338560" cy="548640"/>
-          </a:xfrm>
-          <a:prstGeom prst="rect">
-            <a:avLst/>
-          </a:prstGeom>
-          <a:noFill/>
-        </p:spPr>
-        <p:txBody>
-          <a:bodyPr wrap="none">
-            <a:spAutoFit/>
-          </a:bodyPr>
-          <a:lstStyle/>
-          <a:p>
-            <a:r>
-              <a:rPr sz="2500" b="1">
-                <a:solidFill>
-                  <a:srgbClr val="142B53"/>
-                </a:solidFill>
-              </a:rPr>
-              <a:t>REFERENCES</a:t>
-            </a:r>
-          </a:p>
-        </p:txBody>
-      </p:sp>
-      <p:sp>
-        <p:nvSpPr>
-          <p:cNvPr id="3" name="Rectangle 2"/>
-          <p:cNvSpPr/>
-          <p:nvPr/>
-        </p:nvSpPr>
-        <p:spPr>
-          <a:xfrm>
-            <a:off x="457200" y="676656"/>
-            <a:ext cx="1463040" cy="45720"/>
-          </a:xfrm>
-          <a:prstGeom prst="rect">
-            <a:avLst/>
-          </a:prstGeom>
-          <a:solidFill>
-            <a:srgbClr val="1F77C2"/>
-          </a:solidFill>
-          <a:ln>
-            <a:noFill/>
-          </a:ln>
-          <a:effectLst/>
-        </p:spPr>
-        <p:style>
-          <a:lnRef idx="1">
-            <a:schemeClr val="accent1"/>
-          </a:lnRef>
-          <a:fillRef idx="3">
-            <a:schemeClr val="accent1"/>
-          </a:fillRef>
-          <a:effectRef idx="2">
-            <a:schemeClr val="accent1"/>
-          </a:effectRef>
-          <a:fontRef idx="minor">
-            <a:schemeClr val="lt1"/>
-          </a:fontRef>
-        </p:style>
-        <p:txBody>
-          <a:bodyPr rtlCol="0" anchor="ctr"/>
-          <a:lstStyle/>
-          <a:p>
-            <a:pPr algn="ctr"/>
-          </a:p>
-        </p:txBody>
-      </p:sp>
-      <p:sp>
-        <p:nvSpPr>
-          <p:cNvPr id="4" name="TextBox 3"/>
-          <p:cNvSpPr txBox="1"/>
-          <p:nvPr/>
-        </p:nvSpPr>
-        <p:spPr>
-          <a:xfrm>
-            <a:off x="548640" y="960120"/>
-            <a:ext cx="11155680" cy="5440680"/>
-          </a:xfrm>
-          <a:prstGeom prst="rect">
-            <a:avLst/>
-          </a:prstGeom>
-          <a:noFill/>
-        </p:spPr>
-        <p:txBody>
-          <a:bodyPr wrap="square" anchor="t">
-            <a:spAutoFit/>
-          </a:bodyPr>
-          <a:lstStyle/>
-          <a:p>
-            <a:pPr>
-              <a:spcAft>
-                <a:spcPts val="400"/>
-              </a:spcAft>
-            </a:pPr>
-            <a:r>
-              <a:rPr sz="950" b="1">
-                <a:solidFill>
-                  <a:srgbClr val="142B53"/>
-                </a:solidFill>
-              </a:rPr>
-              <a:t>Attendance systems — prior work (none of which tests a presentation attack)</a:t>
-            </a:r>
-          </a:p>
-          <a:p>
-            <a:pPr>
-              <a:spcAft>
-                <a:spcPts val="400"/>
-              </a:spcAft>
-            </a:pPr>
-            <a:r>
-              <a:rPr sz="950" b="0">
-                <a:solidFill>
-                  <a:srgbClr val="222A35"/>
-                </a:solidFill>
-              </a:rPr>
-              <a:t>[1]  D'Souza, J. W. S., et al. (2019). Automated Attendance Marking and Management System by Facial Recognition Using Histogram. Array, 3–4: 100014. DOI: 10.1016/j.array.2019.100014</a:t>
-            </a:r>
-          </a:p>
-          <a:p>
-            <a:pPr>
-              <a:spcAft>
-                <a:spcPts val="400"/>
-              </a:spcAft>
-            </a:pPr>
-            <a:r>
-              <a:rPr sz="950" b="0">
-                <a:solidFill>
-                  <a:srgbClr val="222A35"/>
-                </a:solidFill>
-              </a:rPr>
-              <a:t>[2]  Arsenovic, M., Sladojevic, S., Anderla, A., Stefanovic, D. (2017). FaceTime — Deep Learning Based Face Recognition Attendance System. IEEE SISY 2017, pp. 53–58. DOI: 10.1109/SISY.2017.8080587</a:t>
-            </a:r>
-          </a:p>
-          <a:p>
-            <a:pPr>
-              <a:spcAft>
-                <a:spcPts val="400"/>
-              </a:spcAft>
-            </a:pPr>
-            <a:r>
-              <a:rPr sz="950" b="0">
-                <a:solidFill>
-                  <a:srgbClr val="222A35"/>
-                </a:solidFill>
-              </a:rPr>
-              <a:t>[3]  Kakarla, S., Gangula, P., Rahul, M. S., Singh, C. S. C., Sarma, T. H. (2020). Smart Attendance Management System Based on Face Recognition Using CNN. IEEE-HYDCON 2020. DOI: 10.1109/HYDCON48903.2020.9242847</a:t>
-            </a:r>
-          </a:p>
-          <a:p>
-            <a:pPr>
-              <a:spcAft>
-                <a:spcPts val="400"/>
-              </a:spcAft>
-            </a:pPr>
-            <a:r>
-              <a:rPr sz="950" b="0">
-                <a:solidFill>
-                  <a:srgbClr val="222A35"/>
-                </a:solidFill>
-              </a:rPr>
-              <a:t>[4]  Varadharajan, E., Dharani, R., Jeevitha, S., Kavinmathi, B., Hemalatha, S. (2016). Automatic Attendance Management System Using Face Detection. IC-GET 2016, pp. 1–3. DOI: 10.1109/GET.2016.7916753</a:t>
-            </a:r>
-          </a:p>
-          <a:p>
-            <a:pPr>
-              <a:spcAft>
-                <a:spcPts val="400"/>
-              </a:spcAft>
-            </a:pPr>
-            <a:r>
-              <a:rPr sz="950" b="0">
-                <a:solidFill>
-                  <a:srgbClr val="222A35"/>
-                </a:solidFill>
-              </a:rPr>
-              <a:t>[5]  Siswanto, A. R. S., Nugroho, A. S., Galinium, M. (2014). Implementation of Face Recognition Algorithm for Biometrics Based Time Attendance System. ICISS 2014, pp. 149–154. DOI: 10.1109/ICTSS.2014.7013165</a:t>
-            </a:r>
-          </a:p>
-          <a:p>
-            <a:pPr>
-              <a:spcAft>
-                <a:spcPts val="400"/>
-              </a:spcAft>
-            </a:pPr>
-          </a:p>
-          <a:p>
-            <a:pPr>
-              <a:spcAft>
-                <a:spcPts val="400"/>
-              </a:spcAft>
-            </a:pPr>
-            <a:r>
-              <a:rPr sz="950" b="1">
-                <a:solidFill>
-                  <a:srgbClr val="142B53"/>
-                </a:solidFill>
-              </a:rPr>
-              <a:t>Models we use — pretrained and frozen (not our contribution)</a:t>
-            </a:r>
-          </a:p>
-          <a:p>
-            <a:pPr>
-              <a:spcAft>
-                <a:spcPts val="400"/>
-              </a:spcAft>
-            </a:pPr>
-            <a:r>
-              <a:rPr sz="950" b="0">
-                <a:solidFill>
-                  <a:srgbClr val="222A35"/>
-                </a:solidFill>
-              </a:rPr>
-              <a:t>[6]  Deng, J., Guo, J., Xue, N., Zafeiriou, S. (2019). ArcFace: Additive Angular Margin Loss for Deep Face Recognition. CVPR 2019, pp. 4690–4699. DOI: 10.1109/CVPR.2019.00482</a:t>
-            </a:r>
-          </a:p>
-          <a:p>
-            <a:pPr>
-              <a:spcAft>
-                <a:spcPts val="400"/>
-              </a:spcAft>
-            </a:pPr>
-            <a:r>
-              <a:rPr sz="950" b="0">
-                <a:solidFill>
-                  <a:srgbClr val="222A35"/>
-                </a:solidFill>
-              </a:rPr>
-              <a:t>[7]  Deng, J., Guo, J., Ververas, E., Kotsia, I., Zafeiriou, S. (2020). RetinaFace: Single-Shot Multi-Level Face Localisation in the Wild. CVPR 2020. DOI: 10.1109/CVPR42600.2020.00525</a:t>
-            </a:r>
-          </a:p>
-          <a:p>
-            <a:pPr>
-              <a:spcAft>
-                <a:spcPts val="400"/>
-              </a:spcAft>
-            </a:pPr>
-            <a:r>
-              <a:rPr sz="950" b="0">
-                <a:solidFill>
-                  <a:srgbClr val="222A35"/>
-                </a:solidFill>
-              </a:rPr>
-              <a:t>[8]  Schroff, F., Kalenichenko, D., Philbin, J. (2015). FaceNet: A Unified Embedding for Face Recognition and Clustering. CVPR 2015, pp. 815–823. DOI: 10.1109/CVPR.2015.7298682</a:t>
-            </a:r>
-          </a:p>
-          <a:p>
-            <a:pPr>
-              <a:spcAft>
-                <a:spcPts val="400"/>
-              </a:spcAft>
-            </a:pPr>
-          </a:p>
-          <a:p>
-            <a:pPr>
-              <a:spcAft>
-                <a:spcPts val="400"/>
-              </a:spcAft>
-            </a:pPr>
-            <a:r>
-              <a:rPr sz="950" b="1">
-                <a:solidFill>
-                  <a:srgbClr val="C0392B"/>
-                </a:solidFill>
-              </a:rPr>
-              <a:t>Presentation attacks — the gap this project addresses</a:t>
-            </a:r>
-          </a:p>
-          <a:p>
-            <a:pPr>
-              <a:spcAft>
-                <a:spcPts val="400"/>
-              </a:spcAft>
-            </a:pPr>
-            <a:r>
-              <a:rPr sz="950" b="0">
-                <a:solidFill>
-                  <a:srgbClr val="222A35"/>
-                </a:solidFill>
-              </a:rPr>
-              <a:t>[9]   Pan, G., Sun, L., Wu, Z., Lao, S. (2007). Eyeblink-based Anti-Spoofing in Face Recognition from a Generic Webcamera. ICCV 2007, pp. 1–8. DOI: 10.1109/ICCV.2007.4409068</a:t>
-            </a:r>
-          </a:p>
-          <a:p>
-            <a:pPr>
-              <a:spcAft>
-                <a:spcPts val="400"/>
-              </a:spcAft>
-            </a:pPr>
-            <a:r>
-              <a:rPr sz="950" b="0">
-                <a:solidFill>
-                  <a:srgbClr val="222A35"/>
-                </a:solidFill>
-              </a:rPr>
-              <a:t>[10] ISO/IEC 30107-3:2023 — Information technology — Biometric presentation attack detection — Part 3: Testing and reporting.</a:t>
-            </a:r>
-          </a:p>
-          <a:p>
-            <a:pPr>
-              <a:spcAft>
-                <a:spcPts val="400"/>
-              </a:spcAft>
-            </a:pPr>
-            <a:r>
-              <a:rPr sz="950" b="0">
-                <a:solidFill>
-                  <a:srgbClr val="222A35"/>
-                </a:solidFill>
-              </a:rPr>
-              <a:t>[11] Cao, Q., Shen, L., Xie, W., Parkhi, O. M., Zisserman, A. (2018). VGGFace2: A Dataset for Recognising Faces across Pose and Age. IEEE FG 2018, pp. 67–74.</a:t>
-            </a:r>
-          </a:p>
-          <a:p>
-            <a:pPr>
-              <a:spcAft>
-                <a:spcPts val="400"/>
-              </a:spcAft>
-            </a:pPr>
-          </a:p>
-          <a:p>
-            <a:pPr>
-              <a:spcAft>
-                <a:spcPts val="400"/>
-              </a:spcAft>
-            </a:pPr>
-            <a:r>
-              <a:rPr sz="950" b="1">
-                <a:solidFill>
-                  <a:srgbClr val="1E8E5A"/>
-                </a:solidFill>
-              </a:rPr>
-              <a:t>Source code, dataset and every measurement script:  github.com/SohamBhattacharjee2003/MutiFace-Attendance-System</a:t>
-            </a:r>
-          </a:p>
-        </p:txBody>
-      </p:sp>
-      <p:sp>
-        <p:nvSpPr>
-          <p:cNvPr id="5" name="Rectangle 4"/>
-          <p:cNvSpPr/>
-          <p:nvPr/>
-        </p:nvSpPr>
-        <p:spPr>
-          <a:xfrm>
-            <a:off x="0" y="6473952"/>
-            <a:ext cx="12191695" cy="384048"/>
-          </a:xfrm>
-          <a:prstGeom prst="rect">
-            <a:avLst/>
-          </a:prstGeom>
-          <a:solidFill>
-            <a:srgbClr val="1F77C2"/>
-          </a:solidFill>
-          <a:ln>
-            <a:noFill/>
-          </a:ln>
-          <a:effectLst/>
-        </p:spPr>
-        <p:style>
-          <a:lnRef idx="1">
-            <a:schemeClr val="accent1"/>
-          </a:lnRef>
-          <a:fillRef idx="3">
-            <a:schemeClr val="accent1"/>
-          </a:fillRef>
-          <a:effectRef idx="2">
-            <a:schemeClr val="accent1"/>
-          </a:effectRef>
-          <a:fontRef idx="minor">
-            <a:schemeClr val="lt1"/>
-          </a:fontRef>
-        </p:style>
-        <p:txBody>
-          <a:bodyPr rtlCol="0" anchor="ctr"/>
-          <a:lstStyle/>
-          <a:p>
-            <a:pPr algn="ctr"/>
-          </a:p>
-        </p:txBody>
-      </p:sp>
-      <p:sp>
-        <p:nvSpPr>
-          <p:cNvPr id="6" name="TextBox 5"/>
-          <p:cNvSpPr txBox="1"/>
-          <p:nvPr/>
-        </p:nvSpPr>
-        <p:spPr>
-          <a:xfrm>
-            <a:off x="11338560" y="6492240"/>
-            <a:ext cx="731520" cy="347472"/>
-          </a:xfrm>
-          <a:prstGeom prst="rect">
-            <a:avLst/>
-          </a:prstGeom>
-          <a:noFill/>
-        </p:spPr>
-        <p:txBody>
-          <a:bodyPr wrap="none">
-            <a:spAutoFit/>
-          </a:bodyPr>
-          <a:lstStyle/>
-          <a:p>
-            <a:pPr algn="r"/>
-            <a:r>
-              <a:rPr sz="1100" b="1">
-                <a:solidFill>
-                  <a:srgbClr val="FFFFFF"/>
-                </a:solidFill>
-              </a:rPr>
-              <a:t>11</a:t>
-            </a:r>
-          </a:p>
-        </p:txBody>
-      </p:sp>
-    </p:spTree>
-  </p:cSld>
-  <p:clrMapOvr>
-    <a:masterClrMapping/>
-  </p:clrMapOvr>
-</p:sld>
-</file>
-
-<file path=ppt/slides/slide13.xml><?xml version="1.0" encoding="utf-8"?>
-<p:sld xmlns:a="http://schemas.openxmlformats.org/drawingml/2006/main" xmlns:p="http://schemas.openxmlformats.org/presentationml/2006/main" xmlns:r="http://schemas.openxmlformats.org/officeDocument/2006/relationships">
-  <p:cSld>
-    <p:spTree>
-      <p:nvGrpSpPr>
-        <p:cNvPr id="1" name=""/>
-        <p:cNvGrpSpPr/>
-        <p:nvPr/>
-      </p:nvGrpSpPr>
-      <p:grpSpPr/>
-      <p:sp>
-        <p:nvSpPr>
-          <p:cNvPr id="2" name="Rectangle 1"/>
-          <p:cNvSpPr/>
-          <p:nvPr/>
-        </p:nvSpPr>
-        <p:spPr>
-          <a:xfrm>
-            <a:off x="0" y="0"/>
-            <a:ext cx="12191695" cy="256032"/>
-          </a:xfrm>
-          <a:prstGeom prst="rect">
-            <a:avLst/>
-          </a:prstGeom>
-          <a:solidFill>
-            <a:srgbClr val="1F77C2"/>
-          </a:solidFill>
-          <a:ln>
-            <a:noFill/>
-          </a:ln>
-          <a:effectLst/>
-        </p:spPr>
-        <p:style>
-          <a:lnRef idx="1">
-            <a:schemeClr val="accent1"/>
-          </a:lnRef>
-          <a:fillRef idx="3">
-            <a:schemeClr val="accent1"/>
-          </a:fillRef>
-          <a:effectRef idx="2">
-            <a:schemeClr val="accent1"/>
-          </a:effectRef>
-          <a:fontRef idx="minor">
-            <a:schemeClr val="lt1"/>
-          </a:fontRef>
-        </p:style>
-        <p:txBody>
-          <a:bodyPr rtlCol="0" anchor="ctr"/>
-          <a:lstStyle/>
-          <a:p>
-            <a:pPr algn="ctr"/>
-          </a:p>
-        </p:txBody>
-      </p:sp>
-      <p:sp>
-        <p:nvSpPr>
-          <p:cNvPr id="3" name="TextBox 2"/>
-          <p:cNvSpPr txBox="1"/>
-          <p:nvPr/>
-        </p:nvSpPr>
-        <p:spPr>
-          <a:xfrm>
-            <a:off x="731520" y="2651760"/>
-            <a:ext cx="10698480" cy="1463040"/>
-          </a:xfrm>
-          <a:prstGeom prst="rect">
-            <a:avLst/>
-          </a:prstGeom>
-          <a:noFill/>
-        </p:spPr>
-        <p:txBody>
-          <a:bodyPr wrap="none">
-            <a:spAutoFit/>
-          </a:bodyPr>
-          <a:lstStyle/>
-          <a:p>
-            <a:pPr algn="ctr"/>
-            <a:r>
-              <a:rPr sz="4600" b="1">
-                <a:solidFill>
-                  <a:srgbClr val="142B53"/>
-                </a:solidFill>
-              </a:rPr>
-              <a:t>THANK YOU</a:t>
-            </a:r>
-          </a:p>
-          <a:p>
-            <a:pPr algn="ctr"/>
-            <a:r>
-              <a:rPr sz="1600">
-                <a:solidFill>
-                  <a:srgbClr val="5B6676"/>
-                </a:solidFill>
-              </a:rPr>
-              <a:t>Questions?</a:t>
-            </a:r>
-          </a:p>
-        </p:txBody>
-      </p:sp>
-      <p:sp>
-        <p:nvSpPr>
-          <p:cNvPr id="4" name="Rectangle 3"/>
-          <p:cNvSpPr/>
-          <p:nvPr/>
-        </p:nvSpPr>
-        <p:spPr>
-          <a:xfrm>
-            <a:off x="0" y="6473952"/>
-            <a:ext cx="12191695" cy="384048"/>
-          </a:xfrm>
-          <a:prstGeom prst="rect">
-            <a:avLst/>
-          </a:prstGeom>
-          <a:solidFill>
-            <a:srgbClr val="1F77C2"/>
-          </a:solidFill>
-          <a:ln>
-            <a:noFill/>
-          </a:ln>
-          <a:effectLst/>
-        </p:spPr>
-        <p:style>
-          <a:lnRef idx="1">
-            <a:schemeClr val="accent1"/>
-          </a:lnRef>
-          <a:fillRef idx="3">
-            <a:schemeClr val="accent1"/>
-          </a:fillRef>
-          <a:effectRef idx="2">
-            <a:schemeClr val="accent1"/>
-          </a:effectRef>
-          <a:fontRef idx="minor">
-            <a:schemeClr val="lt1"/>
-          </a:fontRef>
-        </p:style>
-        <p:txBody>
-          <a:bodyPr rtlCol="0" anchor="ctr"/>
-          <a:lstStyle/>
-          <a:p>
-            <a:pPr algn="ctr"/>
-          </a:p>
-        </p:txBody>
-      </p:sp>
-      <p:sp>
-        <p:nvSpPr>
-          <p:cNvPr id="5" name="TextBox 4"/>
-          <p:cNvSpPr txBox="1"/>
-          <p:nvPr/>
-        </p:nvSpPr>
-        <p:spPr>
-          <a:xfrm>
-            <a:off x="11338560" y="6492240"/>
-            <a:ext cx="731520" cy="347472"/>
-          </a:xfrm>
-          <a:prstGeom prst="rect">
-            <a:avLst/>
-          </a:prstGeom>
-          <a:noFill/>
-        </p:spPr>
-        <p:txBody>
-          <a:bodyPr wrap="none">
-            <a:spAutoFit/>
-          </a:bodyPr>
-          <a:lstStyle/>
-          <a:p>
-            <a:pPr algn="r"/>
-            <a:r>
-              <a:rPr sz="1100" b="1">
-                <a:solidFill>
-                  <a:srgbClr val="FFFFFF"/>
-                </a:solidFill>
-              </a:rPr>
-              <a:t>12</a:t>
             </a:r>
           </a:p>
         </p:txBody>
@@ -6850,44 +4443,30 @@
           </a:p>
         </p:txBody>
       </p:sp>
-      <p:sp>
-        <p:nvSpPr>
-          <p:cNvPr id="9" name="TextBox 8"/>
-          <p:cNvSpPr txBox="1"/>
-          <p:nvPr/>
-        </p:nvSpPr>
-        <p:spPr>
-          <a:xfrm>
-            <a:off x="457200" y="3200400"/>
-            <a:ext cx="11247120" cy="320040"/>
+      <p:pic>
+        <p:nvPicPr>
+          <p:cNvPr id="9" name="Picture 8" descr="attack.png"/>
+          <p:cNvPicPr>
+            <a:picLocks noChangeAspect="1"/>
+          </p:cNvPicPr>
+          <p:nvPr/>
+        </p:nvPicPr>
+        <p:blipFill>
+          <a:blip r:embed="rId2"/>
+          <a:stretch>
+            <a:fillRect/>
+          </a:stretch>
+        </p:blipFill>
+        <p:spPr>
+          <a:xfrm>
+            <a:off x="1417320" y="3063240"/>
+            <a:ext cx="9326880" cy="2590800"/>
           </a:xfrm>
           <a:prstGeom prst="rect">
             <a:avLst/>
           </a:prstGeom>
-          <a:noFill/>
-        </p:spPr>
-        <p:txBody>
-          <a:bodyPr wrap="square" anchor="t">
-            <a:spAutoFit/>
-          </a:bodyPr>
-          <a:lstStyle/>
-          <a:p>
-            <a:pPr>
-              <a:spcAft>
-                <a:spcPts val="400"/>
-              </a:spcAft>
-            </a:pPr>
-            <a:r>
-              <a:rPr sz="1300" b="1">
-                <a:solidFill>
-                  <a:srgbClr val="142B53"/>
-                </a:solidFill>
-              </a:rPr>
-              <a:t>Four failures a real classroom deployment must survive</a:t>
-            </a:r>
-          </a:p>
-        </p:txBody>
-      </p:sp>
+        </p:spPr>
+      </p:pic>
       <p:sp>
         <p:nvSpPr>
           <p:cNvPr id="10" name="Rounded Rectangle 9"/>
@@ -6896,8 +4475,8 @@
         </p:nvSpPr>
         <p:spPr>
           <a:xfrm>
-            <a:off x="457200" y="3611880"/>
-            <a:ext cx="2697480" cy="1417320"/>
+            <a:off x="457200" y="5303520"/>
+            <a:ext cx="2697480" cy="1051560"/>
           </a:xfrm>
           <a:prstGeom prst="roundRect">
             <a:avLst/>
@@ -6940,8 +4519,8 @@
         </p:nvSpPr>
         <p:spPr>
           <a:xfrm>
-            <a:off x="585216" y="3712463"/>
-            <a:ext cx="2468880" cy="1234440"/>
+            <a:off x="585216" y="5376672"/>
+            <a:ext cx="2468880" cy="914400"/>
           </a:xfrm>
           <a:prstGeom prst="rect">
             <a:avLst/>
@@ -6960,7 +4539,7 @@
               </a:spcAft>
             </a:pPr>
             <a:r>
-              <a:rPr sz="950" b="1">
+              <a:rPr sz="850" b="1">
                 <a:solidFill>
                   <a:srgbClr val="C0392B"/>
                 </a:solidFill>
@@ -6975,16 +4554,16 @@
               </a:spcAft>
             </a:pPr>
             <a:r>
-              <a:rPr sz="950" b="0">
+              <a:rPr sz="850" b="0">
                 <a:solidFill>
                   <a:srgbClr val="222A35"/>
                 </a:solidFill>
               </a:rPr>
-              <a:t>A photo or a phone screen held up to</a:t>
+              <a:t>A photo or phone screen held to</a:t>
             </a:r>
             <a:br/>
             <a:r>
-              <a:rPr sz="950" b="0">
+              <a:rPr sz="850" b="0">
                 <a:solidFill>
                   <a:srgbClr val="222A35"/>
                 </a:solidFill>
@@ -7002,8 +4581,8 @@
         </p:nvSpPr>
         <p:spPr>
           <a:xfrm>
-            <a:off x="3328416" y="3611880"/>
-            <a:ext cx="2697480" cy="1417320"/>
+            <a:off x="3328416" y="5303520"/>
+            <a:ext cx="2697480" cy="1051560"/>
           </a:xfrm>
           <a:prstGeom prst="roundRect">
             <a:avLst/>
@@ -7046,8 +4625,8 @@
         </p:nvSpPr>
         <p:spPr>
           <a:xfrm>
-            <a:off x="3456432" y="3712463"/>
-            <a:ext cx="2468880" cy="1234440"/>
+            <a:off x="3456432" y="5376672"/>
+            <a:ext cx="2468880" cy="914400"/>
           </a:xfrm>
           <a:prstGeom prst="rect">
             <a:avLst/>
@@ -7066,7 +4645,7 @@
               </a:spcAft>
             </a:pPr>
             <a:r>
-              <a:rPr sz="950" b="1">
+              <a:rPr sz="850" b="1">
                 <a:solidFill>
                   <a:srgbClr val="B97A0B"/>
                 </a:solidFill>
@@ -7081,7 +4660,7 @@
               </a:spcAft>
             </a:pPr>
             <a:r>
-              <a:rPr sz="950" b="0">
+              <a:rPr sz="850" b="0">
                 <a:solidFill>
                   <a:srgbClr val="222A35"/>
                 </a:solidFill>
@@ -7090,7 +4669,7 @@
             </a:r>
             <a:br/>
             <a:r>
-              <a:rPr sz="950" b="0">
+              <a:rPr sz="850" b="0">
                 <a:solidFill>
                   <a:srgbClr val="222A35"/>
                 </a:solidFill>
@@ -7108,8 +4687,8 @@
         </p:nvSpPr>
         <p:spPr>
           <a:xfrm>
-            <a:off x="6199632" y="3611880"/>
-            <a:ext cx="2697480" cy="1417320"/>
+            <a:off x="6199632" y="5303520"/>
+            <a:ext cx="2697480" cy="1051560"/>
           </a:xfrm>
           <a:prstGeom prst="roundRect">
             <a:avLst/>
@@ -7152,8 +4731,8 @@
         </p:nvSpPr>
         <p:spPr>
           <a:xfrm>
-            <a:off x="6327648" y="3712463"/>
-            <a:ext cx="2468880" cy="1234440"/>
+            <a:off x="6327648" y="5376672"/>
+            <a:ext cx="2468880" cy="914400"/>
           </a:xfrm>
           <a:prstGeom prst="rect">
             <a:avLst/>
@@ -7172,7 +4751,7 @@
               </a:spcAft>
             </a:pPr>
             <a:r>
-              <a:rPr sz="950" b="1">
+              <a:rPr sz="850" b="1">
                 <a:solidFill>
                   <a:srgbClr val="B97A0B"/>
                 </a:solidFill>
@@ -7187,7 +4766,7 @@
               </a:spcAft>
             </a:pPr>
             <a:r>
-              <a:rPr sz="950" b="0">
+              <a:rPr sz="850" b="0">
                 <a:solidFill>
                   <a:srgbClr val="222A35"/>
                 </a:solidFill>
@@ -7196,7 +4775,7 @@
             </a:r>
             <a:br/>
             <a:r>
-              <a:rPr sz="950" b="0">
+              <a:rPr sz="850" b="0">
                 <a:solidFill>
                   <a:srgbClr val="222A35"/>
                 </a:solidFill>
@@ -7214,8 +4793,8 @@
         </p:nvSpPr>
         <p:spPr>
           <a:xfrm>
-            <a:off x="9070848" y="3611880"/>
-            <a:ext cx="2697480" cy="1417320"/>
+            <a:off x="9070848" y="5303520"/>
+            <a:ext cx="2697480" cy="1051560"/>
           </a:xfrm>
           <a:prstGeom prst="roundRect">
             <a:avLst/>
@@ -7258,8 +4837,8 @@
         </p:nvSpPr>
         <p:spPr>
           <a:xfrm>
-            <a:off x="9198864" y="3712463"/>
-            <a:ext cx="2468880" cy="1234440"/>
+            <a:off x="9198864" y="5376672"/>
+            <a:ext cx="2468880" cy="914400"/>
           </a:xfrm>
           <a:prstGeom prst="rect">
             <a:avLst/>
@@ -7278,7 +4857,7 @@
               </a:spcAft>
             </a:pPr>
             <a:r>
-              <a:rPr sz="950" b="1">
+              <a:rPr sz="850" b="1">
                 <a:solidFill>
                   <a:srgbClr val="1F77C2"/>
                 </a:solidFill>
@@ -7293,125 +4872,28 @@
               </a:spcAft>
             </a:pPr>
             <a:r>
-              <a:rPr sz="950" b="0">
+              <a:rPr sz="850" b="0">
                 <a:solidFill>
                   <a:srgbClr val="222A35"/>
                 </a:solidFill>
               </a:rPr>
-              <a:t>Attendance is written once per day. One</a:t>
+              <a:t>Written once per day. One bad frame</a:t>
             </a:r>
             <a:br/>
             <a:r>
-              <a:rPr sz="950" b="0">
+              <a:rPr sz="850" b="0">
                 <a:solidFill>
                   <a:srgbClr val="222A35"/>
                 </a:solidFill>
               </a:rPr>
-              <a:t>bad frame marks the wrong student all day.</a:t>
-            </a:r>
-          </a:p>
-        </p:txBody>
-      </p:sp>
-      <p:sp>
-        <p:nvSpPr>
-          <p:cNvPr id="18" name="Rounded Rectangle 17"/>
-          <p:cNvSpPr/>
-          <p:nvPr/>
-        </p:nvSpPr>
-        <p:spPr>
-          <a:xfrm>
-            <a:off x="457200" y="5257800"/>
-            <a:ext cx="11247120" cy="777240"/>
-          </a:xfrm>
-          <a:prstGeom prst="roundRect">
-            <a:avLst/>
-          </a:prstGeom>
-          <a:solidFill>
-            <a:srgbClr val="F4F6F9"/>
-          </a:solidFill>
-          <a:ln w="15240">
-            <a:solidFill>
-              <a:srgbClr val="142B53"/>
-            </a:solidFill>
-          </a:ln>
-          <a:effectLst/>
-        </p:spPr>
-        <p:style>
-          <a:lnRef idx="1">
-            <a:schemeClr val="accent1"/>
-          </a:lnRef>
-          <a:fillRef idx="3">
-            <a:schemeClr val="accent1"/>
-          </a:fillRef>
-          <a:effectRef idx="2">
-            <a:schemeClr val="accent1"/>
-          </a:effectRef>
-          <a:fontRef idx="minor">
-            <a:schemeClr val="lt1"/>
-          </a:fontRef>
-        </p:style>
-        <p:txBody>
-          <a:bodyPr rtlCol="0" anchor="ctr"/>
-          <a:lstStyle/>
-          <a:p/>
-        </p:txBody>
-      </p:sp>
-      <p:sp>
-        <p:nvSpPr>
-          <p:cNvPr id="19" name="TextBox 18"/>
-          <p:cNvSpPr txBox="1"/>
-          <p:nvPr/>
-        </p:nvSpPr>
-        <p:spPr>
-          <a:xfrm>
-            <a:off x="621792" y="5358384"/>
-            <a:ext cx="10881360" cy="640080"/>
-          </a:xfrm>
-          <a:prstGeom prst="rect">
-            <a:avLst/>
-          </a:prstGeom>
-          <a:noFill/>
-        </p:spPr>
-        <p:txBody>
-          <a:bodyPr wrap="square" anchor="t">
-            <a:spAutoFit/>
-          </a:bodyPr>
-          <a:lstStyle/>
-          <a:p>
-            <a:pPr>
-              <a:spcAft>
-                <a:spcPts val="400"/>
-              </a:spcAft>
-            </a:pPr>
-            <a:r>
-              <a:rPr sz="1100" b="1">
-                <a:solidFill>
-                  <a:srgbClr val="142B53"/>
-                </a:solidFill>
-              </a:rPr>
-              <a:t>OBJECTIVE</a:t>
-            </a:r>
-          </a:p>
-          <a:p>
-            <a:pPr>
-              <a:spcAft>
-                <a:spcPts val="400"/>
-              </a:spcAft>
-            </a:pPr>
-            <a:r>
-              <a:rPr sz="1100" b="0">
-                <a:solidFill>
-                  <a:srgbClr val="222A35"/>
-                </a:solidFill>
-              </a:rPr>
-              <a:t>Detect and recognise every face in one frame; reject strangers; refuse faces too small to identify; block photo attacks; and commit attendance only when several frames agree — on a laptop CPU, fully offline.</a:t>
-            </a:r>
-          </a:p>
-        </p:txBody>
-      </p:sp>
-      <p:sp>
-        <p:nvSpPr>
-          <p:cNvPr id="20" name="Rectangle 19"/>
+              <a:t>marks the wrong student all day.</a:t>
+            </a:r>
+          </a:p>
+        </p:txBody>
+      </p:sp>
+      <p:sp>
+        <p:nvSpPr>
+          <p:cNvPr id="18" name="Rectangle 17"/>
           <p:cNvSpPr/>
           <p:nvPr/>
         </p:nvSpPr>
@@ -7455,7 +4937,7 @@
       </p:sp>
       <p:sp>
         <p:nvSpPr>
-          <p:cNvPr id="21" name="TextBox 20"/>
+          <p:cNvPr id="19" name="TextBox 18"/>
           <p:cNvSpPr txBox="1"/>
           <p:nvPr/>
         </p:nvSpPr>
@@ -7944,8 +5426,8 @@
         </p:nvSpPr>
         <p:spPr>
           <a:xfrm>
-            <a:off x="457200" y="3520440"/>
-            <a:ext cx="2697480" cy="2514600"/>
+            <a:off x="457200" y="3291840"/>
+            <a:ext cx="2697480" cy="1417320"/>
           </a:xfrm>
           <a:prstGeom prst="roundRect">
             <a:avLst/>
@@ -7988,8 +5470,8 @@
         </p:nvSpPr>
         <p:spPr>
           <a:xfrm>
-            <a:off x="585216" y="3621024"/>
-            <a:ext cx="2450592" cy="2331720"/>
+            <a:off x="585216" y="3364992"/>
+            <a:ext cx="2450592" cy="1298448"/>
           </a:xfrm>
           <a:prstGeom prst="rect">
             <a:avLst/>
@@ -8008,7 +5490,7 @@
               </a:spcAft>
             </a:pPr>
             <a:r>
-              <a:rPr sz="850" b="1">
+              <a:rPr sz="750" b="1">
                 <a:solidFill>
                   <a:srgbClr val="C0392B"/>
                 </a:solidFill>
@@ -8022,15 +5504,8 @@
                 <a:spcPts val="400"/>
               </a:spcAft>
             </a:pPr>
-          </a:p>
-          <a:p>
-            <a:pPr>
-              <a:spcAft>
-                <a:spcPts val="400"/>
-              </a:spcAft>
-            </a:pPr>
-            <a:r>
-              <a:rPr sz="850" b="0">
+            <a:r>
+              <a:rPr sz="750" b="0">
                 <a:solidFill>
                   <a:srgbClr val="222A35"/>
                 </a:solidFill>
@@ -8048,8 +5523,8 @@
         </p:nvSpPr>
         <p:spPr>
           <a:xfrm>
-            <a:off x="3328416" y="3520440"/>
-            <a:ext cx="2697480" cy="2514600"/>
+            <a:off x="3328416" y="3291840"/>
+            <a:ext cx="2697480" cy="1417320"/>
           </a:xfrm>
           <a:prstGeom prst="roundRect">
             <a:avLst/>
@@ -8092,8 +5567,8 @@
         </p:nvSpPr>
         <p:spPr>
           <a:xfrm>
-            <a:off x="3456432" y="3621024"/>
-            <a:ext cx="2450592" cy="2331720"/>
+            <a:off x="3456432" y="3364992"/>
+            <a:ext cx="2450592" cy="1298448"/>
           </a:xfrm>
           <a:prstGeom prst="rect">
             <a:avLst/>
@@ -8112,7 +5587,7 @@
               </a:spcAft>
             </a:pPr>
             <a:r>
-              <a:rPr sz="850" b="1">
+              <a:rPr sz="750" b="1">
                 <a:solidFill>
                   <a:srgbClr val="1F77C2"/>
                 </a:solidFill>
@@ -8126,15 +5601,8 @@
                 <a:spcPts val="400"/>
               </a:spcAft>
             </a:pPr>
-          </a:p>
-          <a:p>
-            <a:pPr>
-              <a:spcAft>
-                <a:spcPts val="400"/>
-              </a:spcAft>
-            </a:pPr>
-            <a:r>
-              <a:rPr sz="850" b="0">
+            <a:r>
+              <a:rPr sz="750" b="0">
                 <a:solidFill>
                   <a:srgbClr val="222A35"/>
                 </a:solidFill>
@@ -8152,8 +5620,8 @@
         </p:nvSpPr>
         <p:spPr>
           <a:xfrm>
-            <a:off x="6199632" y="3520440"/>
-            <a:ext cx="2697480" cy="2514600"/>
+            <a:off x="6199632" y="3291840"/>
+            <a:ext cx="2697480" cy="1417320"/>
           </a:xfrm>
           <a:prstGeom prst="roundRect">
             <a:avLst/>
@@ -8196,8 +5664,8 @@
         </p:nvSpPr>
         <p:spPr>
           <a:xfrm>
-            <a:off x="6327648" y="3621024"/>
-            <a:ext cx="2450592" cy="2331720"/>
+            <a:off x="6327648" y="3364992"/>
+            <a:ext cx="2450592" cy="1298448"/>
           </a:xfrm>
           <a:prstGeom prst="rect">
             <a:avLst/>
@@ -8216,7 +5684,7 @@
               </a:spcAft>
             </a:pPr>
             <a:r>
-              <a:rPr sz="850" b="1">
+              <a:rPr sz="750" b="1">
                 <a:solidFill>
                   <a:srgbClr val="B97A0B"/>
                 </a:solidFill>
@@ -8230,15 +5698,8 @@
                 <a:spcPts val="400"/>
               </a:spcAft>
             </a:pPr>
-          </a:p>
-          <a:p>
-            <a:pPr>
-              <a:spcAft>
-                <a:spcPts val="400"/>
-              </a:spcAft>
-            </a:pPr>
-            <a:r>
-              <a:rPr sz="850" b="0">
+            <a:r>
+              <a:rPr sz="750" b="0">
                 <a:solidFill>
                   <a:srgbClr val="222A35"/>
                 </a:solidFill>
@@ -8256,8 +5717,8 @@
         </p:nvSpPr>
         <p:spPr>
           <a:xfrm>
-            <a:off x="9070848" y="3520440"/>
-            <a:ext cx="2697480" cy="2514600"/>
+            <a:off x="9070848" y="3291840"/>
+            <a:ext cx="2697480" cy="1417320"/>
           </a:xfrm>
           <a:prstGeom prst="roundRect">
             <a:avLst/>
@@ -8300,8 +5761,8 @@
         </p:nvSpPr>
         <p:spPr>
           <a:xfrm>
-            <a:off x="9198864" y="3621024"/>
-            <a:ext cx="2450592" cy="2331720"/>
+            <a:off x="9198864" y="3364992"/>
+            <a:ext cx="2450592" cy="1298448"/>
           </a:xfrm>
           <a:prstGeom prst="rect">
             <a:avLst/>
@@ -8320,7 +5781,7 @@
               </a:spcAft>
             </a:pPr>
             <a:r>
-              <a:rPr sz="850" b="1">
+              <a:rPr sz="750" b="1">
                 <a:solidFill>
                   <a:srgbClr val="1E8E5A"/>
                 </a:solidFill>
@@ -8334,15 +5795,8 @@
                 <a:spcPts val="400"/>
               </a:spcAft>
             </a:pPr>
-          </a:p>
-          <a:p>
-            <a:pPr>
-              <a:spcAft>
-                <a:spcPts val="400"/>
-              </a:spcAft>
-            </a:pPr>
-            <a:r>
-              <a:rPr sz="850" b="0">
+            <a:r>
+              <a:rPr sz="750" b="0">
                 <a:solidFill>
                   <a:srgbClr val="222A35"/>
                 </a:solidFill>
@@ -8352,9 +5806,33 @@
           </a:p>
         </p:txBody>
       </p:sp>
-      <p:sp>
-        <p:nvSpPr>
-          <p:cNvPr id="17" name="Rectangle 16"/>
+      <p:pic>
+        <p:nvPicPr>
+          <p:cNvPr id="17" name="Picture 16" descr="architecture.png"/>
+          <p:cNvPicPr>
+            <a:picLocks noChangeAspect="1"/>
+          </p:cNvPicPr>
+          <p:nvPr/>
+        </p:nvPicPr>
+        <p:blipFill>
+          <a:blip r:embed="rId2"/>
+          <a:stretch>
+            <a:fillRect/>
+          </a:stretch>
+        </p:blipFill>
+        <p:spPr>
+          <a:xfrm>
+            <a:off x="457200" y="4800600"/>
+            <a:ext cx="11247120" cy="3520838"/>
+          </a:xfrm>
+          <a:prstGeom prst="rect">
+            <a:avLst/>
+          </a:prstGeom>
+        </p:spPr>
+      </p:pic>
+      <p:sp>
+        <p:nvSpPr>
+          <p:cNvPr id="18" name="Rectangle 17"/>
           <p:cNvSpPr/>
           <p:nvPr/>
         </p:nvSpPr>
@@ -8398,7 +5876,7 @@
       </p:sp>
       <p:sp>
         <p:nvSpPr>
-          <p:cNvPr id="18" name="TextBox 17"/>
+          <p:cNvPr id="19" name="TextBox 18"/>
           <p:cNvSpPr txBox="1"/>
           <p:nvPr/>
         </p:nvSpPr>
@@ -8476,7 +5954,7 @@
                   <a:srgbClr val="142B53"/>
                 </a:solidFill>
               </a:rPr>
-              <a:t>PROPOSED METHODOLOGY — Representation &amp; Enrolment</a:t>
+              <a:t>PROPOSED METHODOLOGY</a:t>
             </a:r>
           </a:p>
         </p:txBody>
@@ -8553,7 +6031,7 @@
                   <a:srgbClr val="5B6676"/>
                 </a:solidFill>
               </a:rPr>
-              <a:t>The deep model is frozen. 'Learning' a student means storing one vector.</a:t>
+              <a:t>A · The model is frozen — 'learning' a student means storing one vector.   B · Four gates decide who is actually present.</a:t>
             </a:r>
           </a:p>
         </p:txBody>
@@ -8574,7 +6052,7 @@
         </p:blipFill>
         <p:spPr>
           <a:xfrm>
-            <a:off x="457200" y="1188720"/>
+            <a:off x="457200" y="1143000"/>
             <a:ext cx="11247120" cy="3423037"/>
           </a:xfrm>
           <a:prstGeom prst="rect">
@@ -8582,26 +6060,50 @@
           </a:prstGeom>
         </p:spPr>
       </p:pic>
-      <p:sp>
-        <p:nvSpPr>
-          <p:cNvPr id="6" name="Rounded Rectangle 5"/>
+      <p:pic>
+        <p:nvPicPr>
+          <p:cNvPr id="6" name="Picture 5" descr="methodology_gates.png"/>
+          <p:cNvPicPr>
+            <a:picLocks noChangeAspect="1"/>
+          </p:cNvPicPr>
+          <p:nvPr/>
+        </p:nvPicPr>
+        <p:blipFill>
+          <a:blip r:embed="rId3"/>
+          <a:stretch>
+            <a:fillRect/>
+          </a:stretch>
+        </p:blipFill>
+        <p:spPr>
+          <a:xfrm>
+            <a:off x="457200" y="3703320"/>
+            <a:ext cx="11247120" cy="4205445"/>
+          </a:xfrm>
+          <a:prstGeom prst="rect">
+            <a:avLst/>
+          </a:prstGeom>
+        </p:spPr>
+      </p:pic>
+      <p:sp>
+        <p:nvSpPr>
+          <p:cNvPr id="7" name="Rounded Rectangle 6"/>
           <p:cNvSpPr/>
           <p:nvPr/>
         </p:nvSpPr>
         <p:spPr>
           <a:xfrm>
-            <a:off x="457200" y="4846320"/>
-            <a:ext cx="11247120" cy="1325880"/>
+            <a:off x="457200" y="6144768"/>
+            <a:ext cx="11247120" cy="256032"/>
           </a:xfrm>
           <a:prstGeom prst="roundRect">
             <a:avLst/>
           </a:prstGeom>
           <a:solidFill>
-            <a:srgbClr val="E9F2FC"/>
+            <a:srgbClr val="FDECEA"/>
           </a:solidFill>
           <a:ln w="15240">
             <a:solidFill>
-              <a:srgbClr val="1F77C2"/>
+              <a:srgbClr val="C0392B"/>
             </a:solidFill>
           </a:ln>
           <a:effectLst/>
@@ -8628,14 +6130,14 @@
       </p:sp>
       <p:sp>
         <p:nvSpPr>
-          <p:cNvPr id="7" name="TextBox 6"/>
+          <p:cNvPr id="8" name="TextBox 7"/>
           <p:cNvSpPr txBox="1"/>
           <p:nvPr/>
         </p:nvSpPr>
         <p:spPr>
           <a:xfrm>
-            <a:off x="640080" y="4956048"/>
-            <a:ext cx="10881360" cy="1143000"/>
+            <a:off x="621792" y="6153912"/>
+            <a:ext cx="10881360" cy="237744"/>
           </a:xfrm>
           <a:prstGeom prst="rect">
             <a:avLst/>
@@ -8654,49 +6156,19 @@
               </a:spcAft>
             </a:pPr>
             <a:r>
-              <a:rPr sz="1100" b="1">
-                <a:solidFill>
-                  <a:srgbClr val="142B53"/>
-                </a:solidFill>
-              </a:rPr>
-              <a:t>Why this matters — closed-set vs open-set recognition</a:t>
-            </a:r>
-          </a:p>
-          <a:p>
-            <a:pPr>
-              <a:spcAft>
-                <a:spcPts val="400"/>
-              </a:spcAft>
-            </a:pPr>
-            <a:r>
-              <a:rPr sz="1100" b="0">
-                <a:solidFill>
-                  <a:srgbClr val="222A35"/>
-                </a:solidFill>
-              </a:rPr>
-              <a:t>Prior work trains an N-class CNN and asks "WHICH of my N students is this?" — a softmax must always name someone, so a stranger is guaranteed to be misidentified, and every new student means retraining the network.</a:t>
-            </a:r>
-          </a:p>
-          <a:p>
-            <a:pPr>
-              <a:spcAft>
-                <a:spcPts val="400"/>
-              </a:spcAft>
-            </a:pPr>
-            <a:r>
-              <a:rPr sz="1100" b="0">
-                <a:solidFill>
-                  <a:srgbClr val="222A35"/>
-                </a:solidFill>
-              </a:rPr>
-              <a:t>We ask "is this ANY of my students at all?" The system is allowed to answer 'nobody'. That is the only honest answer when a stranger walks past the camera — and it is why enrolment is a table insert, not a training run.</a:t>
-            </a:r>
-          </a:p>
-        </p:txBody>
-      </p:sp>
-      <p:sp>
-        <p:nvSpPr>
-          <p:cNvPr id="8" name="Rectangle 7"/>
+              <a:rPr sz="900" b="1">
+                <a:solidFill>
+                  <a:srgbClr val="C0392B"/>
+                </a:solidFill>
+              </a:rPr>
+              <a:t>The classifier has no 'I don't know' option — it ALWAYS outputs a name. Every gate exists because a confident answer from a bad input is worse than no answer at all.</a:t>
+            </a:r>
+          </a:p>
+        </p:txBody>
+      </p:sp>
+      <p:sp>
+        <p:nvSpPr>
+          <p:cNvPr id="9" name="Rectangle 8"/>
           <p:cNvSpPr/>
           <p:nvPr/>
         </p:nvSpPr>
@@ -8740,7 +6212,7 @@
       </p:sp>
       <p:sp>
         <p:nvSpPr>
-          <p:cNvPr id="9" name="TextBox 8"/>
+          <p:cNvPr id="10" name="TextBox 9"/>
           <p:cNvSpPr txBox="1"/>
           <p:nvPr/>
         </p:nvSpPr>
@@ -8818,7 +6290,7 @@
                   <a:srgbClr val="142B53"/>
                 </a:solidFill>
               </a:rPr>
-              <a:t>PROPOSED METHODOLOGY — The Decision Pipeline</a:t>
+              <a:t>EXPERIMENTAL SETUP &amp; PROTOCOL</a:t>
             </a:r>
           </a:p>
         </p:txBody>
@@ -8895,14 +6367,14 @@
                   <a:srgbClr val="5B6676"/>
                 </a:solidFill>
               </a:rPr>
-              <a:t>Four gates. Any one of them can refuse — and refusing is the point.</a:t>
+              <a:t>The splits are what make the numbers believable — and they are not optional.</a:t>
             </a:r>
           </a:p>
         </p:txBody>
       </p:sp>
       <p:pic>
         <p:nvPicPr>
-          <p:cNvPr id="5" name="Picture 4" descr="methodology_gates.png"/>
+          <p:cNvPr id="5" name="Picture 4" descr="protocol.png"/>
           <p:cNvPicPr>
             <a:picLocks noChangeAspect="1"/>
           </p:cNvPicPr>
@@ -8916,24 +6388,295 @@
         </p:blipFill>
         <p:spPr>
           <a:xfrm>
-            <a:off x="457200" y="1188720"/>
-            <a:ext cx="11247120" cy="4205445"/>
+            <a:off x="548640" y="1188720"/>
+            <a:ext cx="8189259" cy="2651760"/>
           </a:xfrm>
           <a:prstGeom prst="rect">
             <a:avLst/>
           </a:prstGeom>
         </p:spPr>
       </p:pic>
-      <p:sp>
-        <p:nvSpPr>
-          <p:cNvPr id="6" name="Rounded Rectangle 5"/>
+      <p:pic>
+        <p:nvPicPr>
+          <p:cNvPr id="6" name="Picture 5" descr="scores.png"/>
+          <p:cNvPicPr>
+            <a:picLocks noChangeAspect="1"/>
+          </p:cNvPicPr>
+          <p:nvPr/>
+        </p:nvPicPr>
+        <p:blipFill>
+          <a:blip r:embed="rId3"/>
+          <a:stretch>
+            <a:fillRect/>
+          </a:stretch>
+        </p:blipFill>
+        <p:spPr>
+          <a:xfrm>
+            <a:off x="548640" y="3977639"/>
+            <a:ext cx="4171556" cy="2240280"/>
+          </a:xfrm>
+          <a:prstGeom prst="rect">
+            <a:avLst/>
+          </a:prstGeom>
+        </p:spPr>
+      </p:pic>
+      <p:pic>
+        <p:nvPicPr>
+          <p:cNvPr id="7" name="Picture 6" descr="roc.png"/>
+          <p:cNvPicPr>
+            <a:picLocks noChangeAspect="1"/>
+          </p:cNvPicPr>
+          <p:nvPr/>
+        </p:nvPicPr>
+        <p:blipFill>
+          <a:blip r:embed="rId4"/>
+          <a:stretch>
+            <a:fillRect/>
+          </a:stretch>
+        </p:blipFill>
+        <p:spPr>
+          <a:xfrm>
+            <a:off x="4892040" y="3977639"/>
+            <a:ext cx="3399046" cy="2240280"/>
+          </a:xfrm>
+          <a:prstGeom prst="rect">
+            <a:avLst/>
+          </a:prstGeom>
+        </p:spPr>
+      </p:pic>
+      <p:sp>
+        <p:nvSpPr>
+          <p:cNvPr id="8" name="Rounded Rectangle 7"/>
           <p:cNvSpPr/>
           <p:nvPr/>
         </p:nvSpPr>
         <p:spPr>
           <a:xfrm>
-            <a:off x="457200" y="5440680"/>
-            <a:ext cx="11247120" cy="777240"/>
+            <a:off x="8686800" y="3977639"/>
+            <a:ext cx="3017520" cy="2240280"/>
+          </a:xfrm>
+          <a:prstGeom prst="roundRect">
+            <a:avLst/>
+          </a:prstGeom>
+          <a:solidFill>
+            <a:srgbClr val="E9F2FC"/>
+          </a:solidFill>
+          <a:ln w="15240">
+            <a:solidFill>
+              <a:srgbClr val="1F77C2"/>
+            </a:solidFill>
+          </a:ln>
+          <a:effectLst/>
+        </p:spPr>
+        <p:style>
+          <a:lnRef idx="1">
+            <a:schemeClr val="accent1"/>
+          </a:lnRef>
+          <a:fillRef idx="3">
+            <a:schemeClr val="accent1"/>
+          </a:fillRef>
+          <a:effectRef idx="2">
+            <a:schemeClr val="accent1"/>
+          </a:effectRef>
+          <a:fontRef idx="minor">
+            <a:schemeClr val="lt1"/>
+          </a:fontRef>
+        </p:style>
+        <p:txBody>
+          <a:bodyPr rtlCol="0" anchor="ctr"/>
+          <a:lstStyle/>
+          <a:p/>
+        </p:txBody>
+      </p:sp>
+      <p:sp>
+        <p:nvSpPr>
+          <p:cNvPr id="9" name="TextBox 8"/>
+          <p:cNvSpPr txBox="1"/>
+          <p:nvPr/>
+        </p:nvSpPr>
+        <p:spPr>
+          <a:xfrm>
+            <a:off x="8851392" y="4087368"/>
+            <a:ext cx="2743200" cy="2057400"/>
+          </a:xfrm>
+          <a:prstGeom prst="rect">
+            <a:avLst/>
+          </a:prstGeom>
+          <a:noFill/>
+        </p:spPr>
+        <p:txBody>
+          <a:bodyPr wrap="square" anchor="t">
+            <a:spAutoFit/>
+          </a:bodyPr>
+          <a:lstStyle/>
+          <a:p>
+            <a:pPr>
+              <a:spcAft>
+                <a:spcPts val="400"/>
+              </a:spcAft>
+            </a:pPr>
+            <a:r>
+              <a:rPr sz="850" b="1">
+                <a:solidFill>
+                  <a:srgbClr val="142B53"/>
+                </a:solidFill>
+              </a:rPr>
+              <a:t>What these two charts prove</a:t>
+            </a:r>
+          </a:p>
+          <a:p>
+            <a:pPr>
+              <a:spcAft>
+                <a:spcPts val="400"/>
+              </a:spcAft>
+            </a:pPr>
+          </a:p>
+          <a:p>
+            <a:pPr>
+              <a:spcAft>
+                <a:spcPts val="400"/>
+              </a:spcAft>
+            </a:pPr>
+            <a:r>
+              <a:rPr sz="850" b="0">
+                <a:solidFill>
+                  <a:srgbClr val="222A35"/>
+                </a:solidFill>
+              </a:rPr>
+              <a:t>The genuine and impostor populations are almost</a:t>
+            </a:r>
+          </a:p>
+          <a:p>
+            <a:pPr>
+              <a:spcAft>
+                <a:spcPts val="400"/>
+              </a:spcAft>
+            </a:pPr>
+            <a:r>
+              <a:rPr sz="850" b="0">
+                <a:solidFill>
+                  <a:srgbClr val="222A35"/>
+                </a:solidFill>
+              </a:rPr>
+              <a:t>completely separated — which is what lets a single</a:t>
+            </a:r>
+          </a:p>
+          <a:p>
+            <a:pPr>
+              <a:spcAft>
+                <a:spcPts val="400"/>
+              </a:spcAft>
+            </a:pPr>
+            <a:r>
+              <a:rPr sz="850" b="0">
+                <a:solidFill>
+                  <a:srgbClr val="222A35"/>
+                </a:solidFill>
+              </a:rPr>
+              <a:t>cosine threshold work at all.</a:t>
+            </a:r>
+          </a:p>
+          <a:p>
+            <a:pPr>
+              <a:spcAft>
+                <a:spcPts val="400"/>
+              </a:spcAft>
+            </a:pPr>
+          </a:p>
+          <a:p>
+            <a:pPr>
+              <a:spcAft>
+                <a:spcPts val="400"/>
+              </a:spcAft>
+            </a:pPr>
+            <a:r>
+              <a:rPr sz="850" b="0">
+                <a:solidFill>
+                  <a:srgbClr val="222A35"/>
+                </a:solidFill>
+              </a:rPr>
+              <a:t>The threshold is placed where only 1% of the</a:t>
+            </a:r>
+          </a:p>
+          <a:p>
+            <a:pPr>
+              <a:spcAft>
+                <a:spcPts val="400"/>
+              </a:spcAft>
+            </a:pPr>
+            <a:r>
+              <a:rPr sz="850" b="0">
+                <a:solidFill>
+                  <a:srgbClr val="222A35"/>
+                </a:solidFill>
+              </a:rPr>
+              <a:t>CALIBRATION strangers get through, then measured</a:t>
+            </a:r>
+          </a:p>
+          <a:p>
+            <a:pPr>
+              <a:spcAft>
+                <a:spcPts val="400"/>
+              </a:spcAft>
+            </a:pPr>
+            <a:r>
+              <a:rPr sz="850" b="0">
+                <a:solidFill>
+                  <a:srgbClr val="222A35"/>
+                </a:solidFill>
+              </a:rPr>
+              <a:t>on strangers it has never seen.</a:t>
+            </a:r>
+          </a:p>
+          <a:p>
+            <a:pPr>
+              <a:spcAft>
+                <a:spcPts val="400"/>
+              </a:spcAft>
+            </a:pPr>
+          </a:p>
+          <a:p>
+            <a:pPr>
+              <a:spcAft>
+                <a:spcPts val="400"/>
+              </a:spcAft>
+            </a:pPr>
+            <a:r>
+              <a:rPr sz="850" b="1">
+                <a:solidFill>
+                  <a:srgbClr val="C0392B"/>
+                </a:solidFill>
+              </a:rPr>
+              <a:t>That is the difference between a measurement</a:t>
+            </a:r>
+          </a:p>
+          <a:p>
+            <a:pPr>
+              <a:spcAft>
+                <a:spcPts val="400"/>
+              </a:spcAft>
+            </a:pPr>
+            <a:r>
+              <a:rPr sz="850" b="1">
+                <a:solidFill>
+                  <a:srgbClr val="C0392B"/>
+                </a:solidFill>
+              </a:rPr>
+              <a:t>and a number you tuned until it looked good.</a:t>
+            </a:r>
+          </a:p>
+        </p:txBody>
+      </p:sp>
+      <p:sp>
+        <p:nvSpPr>
+          <p:cNvPr id="10" name="Rounded Rectangle 9"/>
+          <p:cNvSpPr/>
+          <p:nvPr/>
+        </p:nvSpPr>
+        <p:spPr>
+          <a:xfrm>
+            <a:off x="8686800" y="1188720"/>
+            <a:ext cx="3017520" cy="2651760"/>
           </a:xfrm>
           <a:prstGeom prst="roundRect">
             <a:avLst/>
@@ -8970,14 +6713,14 @@
       </p:sp>
       <p:sp>
         <p:nvSpPr>
-          <p:cNvPr id="7" name="TextBox 6"/>
+          <p:cNvPr id="11" name="TextBox 10"/>
           <p:cNvSpPr txBox="1"/>
           <p:nvPr/>
         </p:nvSpPr>
         <p:spPr>
           <a:xfrm>
-            <a:off x="640080" y="5541264"/>
-            <a:ext cx="10881360" cy="621792"/>
+            <a:off x="8851392" y="1298448"/>
+            <a:ext cx="2743200" cy="2468880"/>
           </a:xfrm>
           <a:prstGeom prst="rect">
             <a:avLst/>
@@ -8996,34 +6739,160 @@
               </a:spcAft>
             </a:pPr>
             <a:r>
-              <a:rPr sz="1100" b="1">
+              <a:rPr sz="850" b="1">
                 <a:solidFill>
                   <a:srgbClr val="C0392B"/>
                 </a:solidFill>
               </a:rPr>
-              <a:t>The classifier has no 'I don't know' option — it ALWAYS outputs a name.</a:t>
-            </a:r>
-          </a:p>
-          <a:p>
-            <a:pPr>
-              <a:spcAft>
-                <a:spcPts val="400"/>
-              </a:spcAft>
-            </a:pPr>
-            <a:r>
-              <a:rPr sz="1100" b="0">
+              <a:t>Why the 2 real users are NOT the experiment</a:t>
+            </a:r>
+          </a:p>
+          <a:p>
+            <a:pPr>
+              <a:spcAft>
+                <a:spcPts val="400"/>
+              </a:spcAft>
+            </a:pPr>
+          </a:p>
+          <a:p>
+            <a:pPr>
+              <a:spcAft>
+                <a:spcPts val="400"/>
+              </a:spcAft>
+            </a:pPr>
+            <a:r>
+              <a:rPr sz="850" b="0">
                 <a:solidFill>
                   <a:srgbClr val="222A35"/>
                 </a:solidFill>
               </a:rPr>
-              <a:t>Every gate above exists because a confident answer from a bad input is worse than no answer at all.</a:t>
-            </a:r>
-          </a:p>
-        </p:txBody>
-      </p:sp>
-      <p:sp>
-        <p:nvSpPr>
-          <p:cNvPr id="8" name="Rectangle 7"/>
+              <a:t>With N=2, chance alone scores 50%. Any accuracy</a:t>
+            </a:r>
+          </a:p>
+          <a:p>
+            <a:pPr>
+              <a:spcAft>
+                <a:spcPts val="400"/>
+              </a:spcAft>
+            </a:pPr>
+            <a:r>
+              <a:rPr sz="850" b="0">
+                <a:solidFill>
+                  <a:srgbClr val="222A35"/>
+                </a:solidFill>
+              </a:rPr>
+              <a:t>figure taken from two people is meaningless.</a:t>
+            </a:r>
+          </a:p>
+          <a:p>
+            <a:pPr>
+              <a:spcAft>
+                <a:spcPts val="400"/>
+              </a:spcAft>
+            </a:pPr>
+          </a:p>
+          <a:p>
+            <a:pPr>
+              <a:spcAft>
+                <a:spcPts val="400"/>
+              </a:spcAft>
+            </a:pPr>
+            <a:r>
+              <a:rPr sz="850" b="0">
+                <a:solidFill>
+                  <a:srgbClr val="222A35"/>
+                </a:solidFill>
+              </a:rPr>
+              <a:t>Every quantitative claim in this deck comes from</a:t>
+            </a:r>
+          </a:p>
+          <a:p>
+            <a:pPr>
+              <a:spcAft>
+                <a:spcPts val="400"/>
+              </a:spcAft>
+            </a:pPr>
+            <a:r>
+              <a:rPr sz="850" b="0">
+                <a:solidFill>
+                  <a:srgbClr val="222A35"/>
+                </a:solidFill>
+              </a:rPr>
+              <a:t>the 30-identity cohort. The live system with 2 real</a:t>
+            </a:r>
+          </a:p>
+          <a:p>
+            <a:pPr>
+              <a:spcAft>
+                <a:spcPts val="400"/>
+              </a:spcAft>
+            </a:pPr>
+            <a:r>
+              <a:rPr sz="850" b="0">
+                <a:solidFill>
+                  <a:srgbClr val="222A35"/>
+                </a:solidFill>
+              </a:rPr>
+              <a:t>users is a feasibility demonstration — and we say</a:t>
+            </a:r>
+          </a:p>
+          <a:p>
+            <a:pPr>
+              <a:spcAft>
+                <a:spcPts val="400"/>
+              </a:spcAft>
+            </a:pPr>
+            <a:r>
+              <a:rPr sz="850" b="0">
+                <a:solidFill>
+                  <a:srgbClr val="222A35"/>
+                </a:solidFill>
+              </a:rPr>
+              <a:t>so, rather than inflate it.</a:t>
+            </a:r>
+          </a:p>
+          <a:p>
+            <a:pPr>
+              <a:spcAft>
+                <a:spcPts val="400"/>
+              </a:spcAft>
+            </a:pPr>
+          </a:p>
+          <a:p>
+            <a:pPr>
+              <a:spcAft>
+                <a:spcPts val="400"/>
+              </a:spcAft>
+            </a:pPr>
+            <a:r>
+              <a:rPr sz="850" b="1">
+                <a:solidFill>
+                  <a:srgbClr val="142B53"/>
+                </a:solidFill>
+              </a:rPr>
+              <a:t>Environment</a:t>
+            </a:r>
+          </a:p>
+          <a:p>
+            <a:pPr>
+              <a:spcAft>
+                <a:spcPts val="400"/>
+              </a:spcAft>
+            </a:pPr>
+            <a:r>
+              <a:rPr sz="850" b="0">
+                <a:solidFill>
+                  <a:srgbClr val="222A35"/>
+                </a:solidFill>
+              </a:rPr>
+              <a:t>MacBook Air · CPU only · no GPU · 298 MB</a:t>
+            </a:r>
+          </a:p>
+        </p:txBody>
+      </p:sp>
+      <p:sp>
+        <p:nvSpPr>
+          <p:cNvPr id="12" name="Rectangle 11"/>
           <p:cNvSpPr/>
           <p:nvPr/>
         </p:nvSpPr>
@@ -9067,7 +6936,7 @@
       </p:sp>
       <p:sp>
         <p:nvSpPr>
-          <p:cNvPr id="9" name="TextBox 8"/>
+          <p:cNvPr id="13" name="TextBox 12"/>
           <p:cNvSpPr txBox="1"/>
           <p:nvPr/>
         </p:nvSpPr>
@@ -9108,1034 +6977,6 @@
 </file>
 
 <file path=ppt/slides/slide6.xml><?xml version="1.0" encoding="utf-8"?>
-<p:sld xmlns:a="http://schemas.openxmlformats.org/drawingml/2006/main" xmlns:p="http://schemas.openxmlformats.org/presentationml/2006/main" xmlns:r="http://schemas.openxmlformats.org/officeDocument/2006/relationships">
-  <p:cSld>
-    <p:spTree>
-      <p:nvGrpSpPr>
-        <p:cNvPr id="1" name=""/>
-        <p:cNvGrpSpPr/>
-        <p:nvPr/>
-      </p:nvGrpSpPr>
-      <p:grpSpPr/>
-      <p:sp>
-        <p:nvSpPr>
-          <p:cNvPr id="2" name="TextBox 1"/>
-          <p:cNvSpPr txBox="1"/>
-          <p:nvPr/>
-        </p:nvSpPr>
-        <p:spPr>
-          <a:xfrm>
-            <a:off x="411480" y="146304"/>
-            <a:ext cx="11338560" cy="548640"/>
-          </a:xfrm>
-          <a:prstGeom prst="rect">
-            <a:avLst/>
-          </a:prstGeom>
-          <a:noFill/>
-        </p:spPr>
-        <p:txBody>
-          <a:bodyPr wrap="none">
-            <a:spAutoFit/>
-          </a:bodyPr>
-          <a:lstStyle/>
-          <a:p>
-            <a:r>
-              <a:rPr sz="2500" b="1">
-                <a:solidFill>
-                  <a:srgbClr val="142B53"/>
-                </a:solidFill>
-              </a:rPr>
-              <a:t>SEQUENCE DIAGRAM</a:t>
-            </a:r>
-          </a:p>
-        </p:txBody>
-      </p:sp>
-      <p:sp>
-        <p:nvSpPr>
-          <p:cNvPr id="3" name="Rectangle 2"/>
-          <p:cNvSpPr/>
-          <p:nvPr/>
-        </p:nvSpPr>
-        <p:spPr>
-          <a:xfrm>
-            <a:off x="457200" y="676656"/>
-            <a:ext cx="1463040" cy="45720"/>
-          </a:xfrm>
-          <a:prstGeom prst="rect">
-            <a:avLst/>
-          </a:prstGeom>
-          <a:solidFill>
-            <a:srgbClr val="1F77C2"/>
-          </a:solidFill>
-          <a:ln>
-            <a:noFill/>
-          </a:ln>
-          <a:effectLst/>
-        </p:spPr>
-        <p:style>
-          <a:lnRef idx="1">
-            <a:schemeClr val="accent1"/>
-          </a:lnRef>
-          <a:fillRef idx="3">
-            <a:schemeClr val="accent1"/>
-          </a:fillRef>
-          <a:effectRef idx="2">
-            <a:schemeClr val="accent1"/>
-          </a:effectRef>
-          <a:fontRef idx="minor">
-            <a:schemeClr val="lt1"/>
-          </a:fontRef>
-        </p:style>
-        <p:txBody>
-          <a:bodyPr rtlCol="0" anchor="ctr"/>
-          <a:lstStyle/>
-          <a:p>
-            <a:pPr algn="ctr"/>
-          </a:p>
-        </p:txBody>
-      </p:sp>
-      <p:sp>
-        <p:nvSpPr>
-          <p:cNvPr id="4" name="TextBox 3"/>
-          <p:cNvSpPr txBox="1"/>
-          <p:nvPr/>
-        </p:nvSpPr>
-        <p:spPr>
-          <a:xfrm>
-            <a:off x="457200" y="749808"/>
-            <a:ext cx="11247120" cy="320040"/>
-          </a:xfrm>
-          <a:prstGeom prst="rect">
-            <a:avLst/>
-          </a:prstGeom>
-          <a:noFill/>
-        </p:spPr>
-        <p:txBody>
-          <a:bodyPr wrap="none">
-            <a:spAutoFit/>
-          </a:bodyPr>
-          <a:lstStyle/>
-          <a:p>
-            <a:r>
-              <a:rPr sz="1100" i="1">
-                <a:solidFill>
-                  <a:srgbClr val="5B6676"/>
-                </a:solidFill>
-              </a:rPr>
-              <a:t>One frame, end to end. Frames arrive 700 ms apart; ~250 ms of work per frame.</a:t>
-            </a:r>
-          </a:p>
-        </p:txBody>
-      </p:sp>
-      <p:pic>
-        <p:nvPicPr>
-          <p:cNvPr id="5" name="Picture 4" descr="sequence.png"/>
-          <p:cNvPicPr>
-            <a:picLocks noChangeAspect="1"/>
-          </p:cNvPicPr>
-          <p:nvPr/>
-        </p:nvPicPr>
-        <p:blipFill>
-          <a:blip r:embed="rId2"/>
-          <a:stretch>
-            <a:fillRect/>
-          </a:stretch>
-        </p:blipFill>
-        <p:spPr>
-          <a:xfrm>
-            <a:off x="457200" y="1188720"/>
-            <a:ext cx="11247120" cy="4401047"/>
-          </a:xfrm>
-          <a:prstGeom prst="rect">
-            <a:avLst/>
-          </a:prstGeom>
-        </p:spPr>
-      </p:pic>
-      <p:sp>
-        <p:nvSpPr>
-          <p:cNvPr id="6" name="Rounded Rectangle 5"/>
-          <p:cNvSpPr/>
-          <p:nvPr/>
-        </p:nvSpPr>
-        <p:spPr>
-          <a:xfrm>
-            <a:off x="457200" y="5577840"/>
-            <a:ext cx="11247120" cy="731520"/>
-          </a:xfrm>
-          <a:prstGeom prst="roundRect">
-            <a:avLst/>
-          </a:prstGeom>
-          <a:solidFill>
-            <a:srgbClr val="F4F6F9"/>
-          </a:solidFill>
-          <a:ln w="15240">
-            <a:solidFill>
-              <a:srgbClr val="5B6676"/>
-            </a:solidFill>
-          </a:ln>
-          <a:effectLst/>
-        </p:spPr>
-        <p:style>
-          <a:lnRef idx="1">
-            <a:schemeClr val="accent1"/>
-          </a:lnRef>
-          <a:fillRef idx="3">
-            <a:schemeClr val="accent1"/>
-          </a:fillRef>
-          <a:effectRef idx="2">
-            <a:schemeClr val="accent1"/>
-          </a:effectRef>
-          <a:fontRef idx="minor">
-            <a:schemeClr val="lt1"/>
-          </a:fontRef>
-        </p:style>
-        <p:txBody>
-          <a:bodyPr rtlCol="0" anchor="ctr"/>
-          <a:lstStyle/>
-          <a:p/>
-        </p:txBody>
-      </p:sp>
-      <p:sp>
-        <p:nvSpPr>
-          <p:cNvPr id="7" name="TextBox 6"/>
-          <p:cNvSpPr txBox="1"/>
-          <p:nvPr/>
-        </p:nvSpPr>
-        <p:spPr>
-          <a:xfrm>
-            <a:off x="621792" y="5669280"/>
-            <a:ext cx="10881360" cy="566928"/>
-          </a:xfrm>
-          <a:prstGeom prst="rect">
-            <a:avLst/>
-          </a:prstGeom>
-          <a:noFill/>
-        </p:spPr>
-        <p:txBody>
-          <a:bodyPr wrap="square" anchor="t">
-            <a:spAutoFit/>
-          </a:bodyPr>
-          <a:lstStyle/>
-          <a:p>
-            <a:pPr>
-              <a:spcAft>
-                <a:spcPts val="400"/>
-              </a:spcAft>
-            </a:pPr>
-            <a:r>
-              <a:rPr sz="1050" b="1">
-                <a:solidFill>
-                  <a:srgbClr val="142B53"/>
-                </a:solidFill>
-              </a:rPr>
-              <a:t>Technology stack</a:t>
-            </a:r>
-          </a:p>
-          <a:p>
-            <a:pPr>
-              <a:spcAft>
-                <a:spcPts val="400"/>
-              </a:spcAft>
-            </a:pPr>
-            <a:r>
-              <a:rPr sz="1050" b="0">
-                <a:solidFill>
-                  <a:srgbClr val="222A35"/>
-                </a:solidFill>
-              </a:rPr>
-              <a:t>Frontend: React · Vite · TailwindCSS    |    Backend: Flask REST API with Bearer-token auth    |    Engine: InsightFace (RetinaFace + ArcFace) on ONNX Runtime, CPU only    |    Store: CSV + JSON on disk</a:t>
-            </a:r>
-          </a:p>
-        </p:txBody>
-      </p:sp>
-      <p:sp>
-        <p:nvSpPr>
-          <p:cNvPr id="8" name="Rectangle 7"/>
-          <p:cNvSpPr/>
-          <p:nvPr/>
-        </p:nvSpPr>
-        <p:spPr>
-          <a:xfrm>
-            <a:off x="0" y="6473952"/>
-            <a:ext cx="12191695" cy="384048"/>
-          </a:xfrm>
-          <a:prstGeom prst="rect">
-            <a:avLst/>
-          </a:prstGeom>
-          <a:solidFill>
-            <a:srgbClr val="1F77C2"/>
-          </a:solidFill>
-          <a:ln>
-            <a:noFill/>
-          </a:ln>
-          <a:effectLst/>
-        </p:spPr>
-        <p:style>
-          <a:lnRef idx="1">
-            <a:schemeClr val="accent1"/>
-          </a:lnRef>
-          <a:fillRef idx="3">
-            <a:schemeClr val="accent1"/>
-          </a:fillRef>
-          <a:effectRef idx="2">
-            <a:schemeClr val="accent1"/>
-          </a:effectRef>
-          <a:fontRef idx="minor">
-            <a:schemeClr val="lt1"/>
-          </a:fontRef>
-        </p:style>
-        <p:txBody>
-          <a:bodyPr rtlCol="0" anchor="ctr"/>
-          <a:lstStyle/>
-          <a:p>
-            <a:pPr algn="ctr"/>
-          </a:p>
-        </p:txBody>
-      </p:sp>
-      <p:sp>
-        <p:nvSpPr>
-          <p:cNvPr id="9" name="TextBox 8"/>
-          <p:cNvSpPr txBox="1"/>
-          <p:nvPr/>
-        </p:nvSpPr>
-        <p:spPr>
-          <a:xfrm>
-            <a:off x="11338560" y="6492240"/>
-            <a:ext cx="731520" cy="347472"/>
-          </a:xfrm>
-          <a:prstGeom prst="rect">
-            <a:avLst/>
-          </a:prstGeom>
-          <a:noFill/>
-        </p:spPr>
-        <p:txBody>
-          <a:bodyPr wrap="none">
-            <a:spAutoFit/>
-          </a:bodyPr>
-          <a:lstStyle/>
-          <a:p>
-            <a:pPr algn="r"/>
-            <a:r>
-              <a:rPr sz="1100" b="1">
-                <a:solidFill>
-                  <a:srgbClr val="FFFFFF"/>
-                </a:solidFill>
-              </a:rPr>
-              <a:t>5</a:t>
-            </a:r>
-          </a:p>
-        </p:txBody>
-      </p:sp>
-    </p:spTree>
-  </p:cSld>
-  <p:clrMapOvr>
-    <a:masterClrMapping/>
-  </p:clrMapOvr>
-</p:sld>
-</file>
-
-<file path=ppt/slides/slide7.xml><?xml version="1.0" encoding="utf-8"?>
-<p:sld xmlns:a="http://schemas.openxmlformats.org/drawingml/2006/main" xmlns:p="http://schemas.openxmlformats.org/presentationml/2006/main" xmlns:r="http://schemas.openxmlformats.org/officeDocument/2006/relationships">
-  <p:cSld>
-    <p:spTree>
-      <p:nvGrpSpPr>
-        <p:cNvPr id="1" name=""/>
-        <p:cNvGrpSpPr/>
-        <p:nvPr/>
-      </p:nvGrpSpPr>
-      <p:grpSpPr/>
-      <p:sp>
-        <p:nvSpPr>
-          <p:cNvPr id="2" name="TextBox 1"/>
-          <p:cNvSpPr txBox="1"/>
-          <p:nvPr/>
-        </p:nvSpPr>
-        <p:spPr>
-          <a:xfrm>
-            <a:off x="411480" y="146304"/>
-            <a:ext cx="11338560" cy="548640"/>
-          </a:xfrm>
-          <a:prstGeom prst="rect">
-            <a:avLst/>
-          </a:prstGeom>
-          <a:noFill/>
-        </p:spPr>
-        <p:txBody>
-          <a:bodyPr wrap="none">
-            <a:spAutoFit/>
-          </a:bodyPr>
-          <a:lstStyle/>
-          <a:p>
-            <a:r>
-              <a:rPr sz="2500" b="1">
-                <a:solidFill>
-                  <a:srgbClr val="142B53"/>
-                </a:solidFill>
-              </a:rPr>
-              <a:t>EXPERIMENTAL SETUP &amp; PROTOCOL</a:t>
-            </a:r>
-          </a:p>
-        </p:txBody>
-      </p:sp>
-      <p:sp>
-        <p:nvSpPr>
-          <p:cNvPr id="3" name="Rectangle 2"/>
-          <p:cNvSpPr/>
-          <p:nvPr/>
-        </p:nvSpPr>
-        <p:spPr>
-          <a:xfrm>
-            <a:off x="457200" y="676656"/>
-            <a:ext cx="1463040" cy="45720"/>
-          </a:xfrm>
-          <a:prstGeom prst="rect">
-            <a:avLst/>
-          </a:prstGeom>
-          <a:solidFill>
-            <a:srgbClr val="1F77C2"/>
-          </a:solidFill>
-          <a:ln>
-            <a:noFill/>
-          </a:ln>
-          <a:effectLst/>
-        </p:spPr>
-        <p:style>
-          <a:lnRef idx="1">
-            <a:schemeClr val="accent1"/>
-          </a:lnRef>
-          <a:fillRef idx="3">
-            <a:schemeClr val="accent1"/>
-          </a:fillRef>
-          <a:effectRef idx="2">
-            <a:schemeClr val="accent1"/>
-          </a:effectRef>
-          <a:fontRef idx="minor">
-            <a:schemeClr val="lt1"/>
-          </a:fontRef>
-        </p:style>
-        <p:txBody>
-          <a:bodyPr rtlCol="0" anchor="ctr"/>
-          <a:lstStyle/>
-          <a:p>
-            <a:pPr algn="ctr"/>
-          </a:p>
-        </p:txBody>
-      </p:sp>
-      <p:sp>
-        <p:nvSpPr>
-          <p:cNvPr id="4" name="TextBox 3"/>
-          <p:cNvSpPr txBox="1"/>
-          <p:nvPr/>
-        </p:nvSpPr>
-        <p:spPr>
-          <a:xfrm>
-            <a:off x="457200" y="749808"/>
-            <a:ext cx="11247120" cy="320040"/>
-          </a:xfrm>
-          <a:prstGeom prst="rect">
-            <a:avLst/>
-          </a:prstGeom>
-          <a:noFill/>
-        </p:spPr>
-        <p:txBody>
-          <a:bodyPr wrap="none">
-            <a:spAutoFit/>
-          </a:bodyPr>
-          <a:lstStyle/>
-          <a:p>
-            <a:r>
-              <a:rPr sz="1100" i="1">
-                <a:solidFill>
-                  <a:srgbClr val="5B6676"/>
-                </a:solidFill>
-              </a:rPr>
-              <a:t>The splits are what make the numbers believable — and they are not optional.</a:t>
-            </a:r>
-          </a:p>
-        </p:txBody>
-      </p:sp>
-      <p:pic>
-        <p:nvPicPr>
-          <p:cNvPr id="5" name="Picture 4" descr="protocol.png"/>
-          <p:cNvPicPr>
-            <a:picLocks noChangeAspect="1"/>
-          </p:cNvPicPr>
-          <p:nvPr/>
-        </p:nvPicPr>
-        <p:blipFill>
-          <a:blip r:embed="rId2"/>
-          <a:stretch>
-            <a:fillRect/>
-          </a:stretch>
-        </p:blipFill>
-        <p:spPr>
-          <a:xfrm>
-            <a:off x="1188720" y="1143000"/>
-            <a:ext cx="9601200" cy="3108960"/>
-          </a:xfrm>
-          <a:prstGeom prst="rect">
-            <a:avLst/>
-          </a:prstGeom>
-        </p:spPr>
-      </p:pic>
-      <p:sp>
-        <p:nvSpPr>
-          <p:cNvPr id="6" name="Rounded Rectangle 5"/>
-          <p:cNvSpPr/>
-          <p:nvPr/>
-        </p:nvSpPr>
-        <p:spPr>
-          <a:xfrm>
-            <a:off x="457200" y="4434840"/>
-            <a:ext cx="3657600" cy="1737360"/>
-          </a:xfrm>
-          <a:prstGeom prst="roundRect">
-            <a:avLst/>
-          </a:prstGeom>
-          <a:solidFill>
-            <a:srgbClr val="E9F2FC"/>
-          </a:solidFill>
-          <a:ln w="15240">
-            <a:solidFill>
-              <a:srgbClr val="1F77C2"/>
-            </a:solidFill>
-          </a:ln>
-          <a:effectLst/>
-        </p:spPr>
-        <p:style>
-          <a:lnRef idx="1">
-            <a:schemeClr val="accent1"/>
-          </a:lnRef>
-          <a:fillRef idx="3">
-            <a:schemeClr val="accent1"/>
-          </a:fillRef>
-          <a:effectRef idx="2">
-            <a:schemeClr val="accent1"/>
-          </a:effectRef>
-          <a:fontRef idx="minor">
-            <a:schemeClr val="lt1"/>
-          </a:fontRef>
-        </p:style>
-        <p:txBody>
-          <a:bodyPr rtlCol="0" anchor="ctr"/>
-          <a:lstStyle/>
-          <a:p/>
-        </p:txBody>
-      </p:sp>
-      <p:sp>
-        <p:nvSpPr>
-          <p:cNvPr id="7" name="TextBox 6"/>
-          <p:cNvSpPr txBox="1"/>
-          <p:nvPr/>
-        </p:nvSpPr>
-        <p:spPr>
-          <a:xfrm>
-            <a:off x="621792" y="4544568"/>
-            <a:ext cx="3383280" cy="1554480"/>
-          </a:xfrm>
-          <a:prstGeom prst="rect">
-            <a:avLst/>
-          </a:prstGeom>
-          <a:noFill/>
-        </p:spPr>
-        <p:txBody>
-          <a:bodyPr wrap="square" anchor="t">
-            <a:spAutoFit/>
-          </a:bodyPr>
-          <a:lstStyle/>
-          <a:p>
-            <a:pPr>
-              <a:spcAft>
-                <a:spcPts val="400"/>
-              </a:spcAft>
-            </a:pPr>
-            <a:r>
-              <a:rPr sz="1000" b="1">
-                <a:solidFill>
-                  <a:srgbClr val="142B53"/>
-                </a:solidFill>
-              </a:rPr>
-              <a:t>Metrics reported</a:t>
-            </a:r>
-          </a:p>
-          <a:p>
-            <a:pPr>
-              <a:spcAft>
-                <a:spcPts val="400"/>
-              </a:spcAft>
-            </a:pPr>
-            <a:r>
-              <a:rPr sz="1000" b="0">
-                <a:solidFill>
-                  <a:srgbClr val="222A35"/>
-                </a:solidFill>
-              </a:rPr>
-              <a:t>Accuracy — correct identity on held-out probes</a:t>
-            </a:r>
-          </a:p>
-          <a:p>
-            <a:pPr>
-              <a:spcAft>
-                <a:spcPts val="400"/>
-              </a:spcAft>
-            </a:pPr>
-            <a:r>
-              <a:rPr sz="1000" b="0">
-                <a:solidFill>
-                  <a:srgbClr val="222A35"/>
-                </a:solidFill>
-              </a:rPr>
-              <a:t>FAR — strangers wrongly admitted</a:t>
-            </a:r>
-          </a:p>
-          <a:p>
-            <a:pPr>
-              <a:spcAft>
-                <a:spcPts val="400"/>
-              </a:spcAft>
-            </a:pPr>
-            <a:r>
-              <a:rPr sz="1000" b="0">
-                <a:solidFill>
-                  <a:srgbClr val="222A35"/>
-                </a:solidFill>
-              </a:rPr>
-              <a:t>False-log rate — wrong records written</a:t>
-            </a:r>
-          </a:p>
-          <a:p>
-            <a:pPr>
-              <a:spcAft>
-                <a:spcPts val="400"/>
-              </a:spcAft>
-            </a:pPr>
-            <a:r>
-              <a:rPr sz="1000" b="0">
-                <a:solidFill>
-                  <a:srgbClr val="222A35"/>
-                </a:solidFill>
-              </a:rPr>
-              <a:t>Attack success — photo marked present</a:t>
-            </a:r>
-          </a:p>
-          <a:p>
-            <a:pPr>
-              <a:spcAft>
-                <a:spcPts val="400"/>
-              </a:spcAft>
-            </a:pPr>
-            <a:r>
-              <a:rPr sz="1000" b="0">
-                <a:solidFill>
-                  <a:srgbClr val="222A35"/>
-                </a:solidFill>
-              </a:rPr>
-              <a:t>Latency — per frame, and per enrolment</a:t>
-            </a:r>
-          </a:p>
-        </p:txBody>
-      </p:sp>
-      <p:sp>
-        <p:nvSpPr>
-          <p:cNvPr id="8" name="Rounded Rectangle 7"/>
-          <p:cNvSpPr/>
-          <p:nvPr/>
-        </p:nvSpPr>
-        <p:spPr>
-          <a:xfrm>
-            <a:off x="4297680" y="4434840"/>
-            <a:ext cx="3657600" cy="1737360"/>
-          </a:xfrm>
-          <a:prstGeom prst="roundRect">
-            <a:avLst/>
-          </a:prstGeom>
-          <a:solidFill>
-            <a:srgbClr val="F4F6F9"/>
-          </a:solidFill>
-          <a:ln w="15240">
-            <a:solidFill>
-              <a:srgbClr val="5B6676"/>
-            </a:solidFill>
-          </a:ln>
-          <a:effectLst/>
-        </p:spPr>
-        <p:style>
-          <a:lnRef idx="1">
-            <a:schemeClr val="accent1"/>
-          </a:lnRef>
-          <a:fillRef idx="3">
-            <a:schemeClr val="accent1"/>
-          </a:fillRef>
-          <a:effectRef idx="2">
-            <a:schemeClr val="accent1"/>
-          </a:effectRef>
-          <a:fontRef idx="minor">
-            <a:schemeClr val="lt1"/>
-          </a:fontRef>
-        </p:style>
-        <p:txBody>
-          <a:bodyPr rtlCol="0" anchor="ctr"/>
-          <a:lstStyle/>
-          <a:p/>
-        </p:txBody>
-      </p:sp>
-      <p:sp>
-        <p:nvSpPr>
-          <p:cNvPr id="9" name="TextBox 8"/>
-          <p:cNvSpPr txBox="1"/>
-          <p:nvPr/>
-        </p:nvSpPr>
-        <p:spPr>
-          <a:xfrm>
-            <a:off x="4462272" y="4544568"/>
-            <a:ext cx="3383280" cy="1554480"/>
-          </a:xfrm>
-          <a:prstGeom prst="rect">
-            <a:avLst/>
-          </a:prstGeom>
-          <a:noFill/>
-        </p:spPr>
-        <p:txBody>
-          <a:bodyPr wrap="square" anchor="t">
-            <a:spAutoFit/>
-          </a:bodyPr>
-          <a:lstStyle/>
-          <a:p>
-            <a:pPr>
-              <a:spcAft>
-                <a:spcPts val="400"/>
-              </a:spcAft>
-            </a:pPr>
-            <a:r>
-              <a:rPr sz="1000" b="1">
-                <a:solidFill>
-                  <a:srgbClr val="142B53"/>
-                </a:solidFill>
-              </a:rPr>
-              <a:t>Environment</a:t>
-            </a:r>
-          </a:p>
-          <a:p>
-            <a:pPr>
-              <a:spcAft>
-                <a:spcPts val="400"/>
-              </a:spcAft>
-            </a:pPr>
-            <a:r>
-              <a:rPr sz="1000" b="0">
-                <a:solidFill>
-                  <a:srgbClr val="222A35"/>
-                </a:solidFill>
-              </a:rPr>
-              <a:t>MacBook Air · CPU only · no GPU</a:t>
-            </a:r>
-          </a:p>
-          <a:p>
-            <a:pPr>
-              <a:spcAft>
-                <a:spcPts val="400"/>
-              </a:spcAft>
-            </a:pPr>
-            <a:r>
-              <a:rPr sz="1000" b="0">
-                <a:solidFill>
-                  <a:srgbClr val="222A35"/>
-                </a:solidFill>
-              </a:rPr>
-              <a:t>Python 3.13 · ONNX Runtime</a:t>
-            </a:r>
-          </a:p>
-          <a:p>
-            <a:pPr>
-              <a:spcAft>
-                <a:spcPts val="400"/>
-              </a:spcAft>
-            </a:pPr>
-            <a:r>
-              <a:rPr sz="1000" b="0">
-                <a:solidFill>
-                  <a:srgbClr val="222A35"/>
-                </a:solidFill>
-              </a:rPr>
-              <a:t>Model memory: 298 MB</a:t>
-            </a:r>
-          </a:p>
-          <a:p>
-            <a:pPr>
-              <a:spcAft>
-                <a:spcPts val="400"/>
-              </a:spcAft>
-            </a:pPr>
-            <a:r>
-              <a:rPr sz="1000" b="0">
-                <a:solidFill>
-                  <a:srgbClr val="222A35"/>
-                </a:solidFill>
-              </a:rPr>
-              <a:t>96 VGGFace2 identities · 2,930 embeddings</a:t>
-            </a:r>
-          </a:p>
-          <a:p>
-            <a:pPr>
-              <a:spcAft>
-                <a:spcPts val="400"/>
-              </a:spcAft>
-            </a:pPr>
-            <a:r>
-              <a:rPr sz="1000" b="0">
-                <a:solidFill>
-                  <a:srgbClr val="222A35"/>
-                </a:solidFill>
-              </a:rPr>
-              <a:t>2 real users enrolled for the live demo</a:t>
-            </a:r>
-          </a:p>
-        </p:txBody>
-      </p:sp>
-      <p:sp>
-        <p:nvSpPr>
-          <p:cNvPr id="10" name="Rounded Rectangle 9"/>
-          <p:cNvSpPr/>
-          <p:nvPr/>
-        </p:nvSpPr>
-        <p:spPr>
-          <a:xfrm>
-            <a:off x="8138160" y="4434840"/>
-            <a:ext cx="3566160" cy="1737360"/>
-          </a:xfrm>
-          <a:prstGeom prst="roundRect">
-            <a:avLst/>
-          </a:prstGeom>
-          <a:solidFill>
-            <a:srgbClr val="FDECEA"/>
-          </a:solidFill>
-          <a:ln w="15240">
-            <a:solidFill>
-              <a:srgbClr val="C0392B"/>
-            </a:solidFill>
-          </a:ln>
-          <a:effectLst/>
-        </p:spPr>
-        <p:style>
-          <a:lnRef idx="1">
-            <a:schemeClr val="accent1"/>
-          </a:lnRef>
-          <a:fillRef idx="3">
-            <a:schemeClr val="accent1"/>
-          </a:fillRef>
-          <a:effectRef idx="2">
-            <a:schemeClr val="accent1"/>
-          </a:effectRef>
-          <a:fontRef idx="minor">
-            <a:schemeClr val="lt1"/>
-          </a:fontRef>
-        </p:style>
-        <p:txBody>
-          <a:bodyPr rtlCol="0" anchor="ctr"/>
-          <a:lstStyle/>
-          <a:p/>
-        </p:txBody>
-      </p:sp>
-      <p:sp>
-        <p:nvSpPr>
-          <p:cNvPr id="11" name="TextBox 10"/>
-          <p:cNvSpPr txBox="1"/>
-          <p:nvPr/>
-        </p:nvSpPr>
-        <p:spPr>
-          <a:xfrm>
-            <a:off x="8302752" y="4544568"/>
-            <a:ext cx="3291840" cy="1554480"/>
-          </a:xfrm>
-          <a:prstGeom prst="rect">
-            <a:avLst/>
-          </a:prstGeom>
-          <a:noFill/>
-        </p:spPr>
-        <p:txBody>
-          <a:bodyPr wrap="square" anchor="t">
-            <a:spAutoFit/>
-          </a:bodyPr>
-          <a:lstStyle/>
-          <a:p>
-            <a:pPr>
-              <a:spcAft>
-                <a:spcPts val="400"/>
-              </a:spcAft>
-            </a:pPr>
-            <a:r>
-              <a:rPr sz="950" b="1">
-                <a:solidFill>
-                  <a:srgbClr val="C0392B"/>
-                </a:solidFill>
-              </a:rPr>
-              <a:t>Why the 2 real users are NOT the experiment</a:t>
-            </a:r>
-          </a:p>
-          <a:p>
-            <a:pPr>
-              <a:spcAft>
-                <a:spcPts val="400"/>
-              </a:spcAft>
-            </a:pPr>
-            <a:r>
-              <a:rPr sz="950" b="0">
-                <a:solidFill>
-                  <a:srgbClr val="222A35"/>
-                </a:solidFill>
-              </a:rPr>
-              <a:t>With N=2, chance alone scores 50%. Any accuracy</a:t>
-            </a:r>
-          </a:p>
-          <a:p>
-            <a:pPr>
-              <a:spcAft>
-                <a:spcPts val="400"/>
-              </a:spcAft>
-            </a:pPr>
-            <a:r>
-              <a:rPr sz="950" b="0">
-                <a:solidFill>
-                  <a:srgbClr val="222A35"/>
-                </a:solidFill>
-              </a:rPr>
-              <a:t>figure from two people is meaningless.</a:t>
-            </a:r>
-          </a:p>
-          <a:p>
-            <a:pPr>
-              <a:spcAft>
-                <a:spcPts val="400"/>
-              </a:spcAft>
-            </a:pPr>
-            <a:r>
-              <a:rPr sz="950" b="0">
-                <a:solidFill>
-                  <a:srgbClr val="222A35"/>
-                </a:solidFill>
-              </a:rPr>
-              <a:t>All quantitative claims come from the 30-identity</a:t>
-            </a:r>
-          </a:p>
-          <a:p>
-            <a:pPr>
-              <a:spcAft>
-                <a:spcPts val="400"/>
-              </a:spcAft>
-            </a:pPr>
-            <a:r>
-              <a:rPr sz="950" b="0">
-                <a:solidFill>
-                  <a:srgbClr val="222A35"/>
-                </a:solidFill>
-              </a:rPr>
-              <a:t>cohort. The live system is a feasibility demo —</a:t>
-            </a:r>
-          </a:p>
-          <a:p>
-            <a:pPr>
-              <a:spcAft>
-                <a:spcPts val="400"/>
-              </a:spcAft>
-            </a:pPr>
-            <a:r>
-              <a:rPr sz="950" b="0">
-                <a:solidFill>
-                  <a:srgbClr val="222A35"/>
-                </a:solidFill>
-              </a:rPr>
-              <a:t>and we say so rather than inflate it.</a:t>
-            </a:r>
-          </a:p>
-        </p:txBody>
-      </p:sp>
-      <p:sp>
-        <p:nvSpPr>
-          <p:cNvPr id="12" name="Rectangle 11"/>
-          <p:cNvSpPr/>
-          <p:nvPr/>
-        </p:nvSpPr>
-        <p:spPr>
-          <a:xfrm>
-            <a:off x="0" y="6473952"/>
-            <a:ext cx="12191695" cy="384048"/>
-          </a:xfrm>
-          <a:prstGeom prst="rect">
-            <a:avLst/>
-          </a:prstGeom>
-          <a:solidFill>
-            <a:srgbClr val="1F77C2"/>
-          </a:solidFill>
-          <a:ln>
-            <a:noFill/>
-          </a:ln>
-          <a:effectLst/>
-        </p:spPr>
-        <p:style>
-          <a:lnRef idx="1">
-            <a:schemeClr val="accent1"/>
-          </a:lnRef>
-          <a:fillRef idx="3">
-            <a:schemeClr val="accent1"/>
-          </a:fillRef>
-          <a:effectRef idx="2">
-            <a:schemeClr val="accent1"/>
-          </a:effectRef>
-          <a:fontRef idx="minor">
-            <a:schemeClr val="lt1"/>
-          </a:fontRef>
-        </p:style>
-        <p:txBody>
-          <a:bodyPr rtlCol="0" anchor="ctr"/>
-          <a:lstStyle/>
-          <a:p>
-            <a:pPr algn="ctr"/>
-          </a:p>
-        </p:txBody>
-      </p:sp>
-      <p:sp>
-        <p:nvSpPr>
-          <p:cNvPr id="13" name="TextBox 12"/>
-          <p:cNvSpPr txBox="1"/>
-          <p:nvPr/>
-        </p:nvSpPr>
-        <p:spPr>
-          <a:xfrm>
-            <a:off x="11338560" y="6492240"/>
-            <a:ext cx="731520" cy="347472"/>
-          </a:xfrm>
-          <a:prstGeom prst="rect">
-            <a:avLst/>
-          </a:prstGeom>
-          <a:noFill/>
-        </p:spPr>
-        <p:txBody>
-          <a:bodyPr wrap="none">
-            <a:spAutoFit/>
-          </a:bodyPr>
-          <a:lstStyle/>
-          <a:p>
-            <a:pPr algn="r"/>
-            <a:r>
-              <a:rPr sz="1100" b="1">
-                <a:solidFill>
-                  <a:srgbClr val="FFFFFF"/>
-                </a:solidFill>
-              </a:rPr>
-              <a:t>6</a:t>
-            </a:r>
-          </a:p>
-        </p:txBody>
-      </p:sp>
-    </p:spTree>
-  </p:cSld>
-  <p:clrMapOvr>
-    <a:masterClrMapping/>
-  </p:clrMapOvr>
-</p:sld>
-</file>
-
-<file path=ppt/slides/slide8.xml><?xml version="1.0" encoding="utf-8"?>
 <p:sld xmlns:a="http://schemas.openxmlformats.org/drawingml/2006/main" xmlns:p="http://schemas.openxmlformats.org/presentationml/2006/main" xmlns:r="http://schemas.openxmlformats.org/officeDocument/2006/relationships">
   <p:cSld>
     <p:spTree>
@@ -11017,7 +7858,7 @@
                   <a:srgbClr val="FFFFFF"/>
                 </a:solidFill>
               </a:rPr>
-              <a:t>7</a:t>
+              <a:t>5</a:t>
             </a:r>
           </a:p>
         </p:txBody>
@@ -11030,7 +7871,7 @@
 </p:sld>
 </file>
 
-<file path=ppt/slides/slide9.xml><?xml version="1.0" encoding="utf-8"?>
+<file path=ppt/slides/slide7.xml><?xml version="1.0" encoding="utf-8"?>
 <p:sld xmlns:a="http://schemas.openxmlformats.org/drawingml/2006/main" xmlns:p="http://schemas.openxmlformats.org/presentationml/2006/main" xmlns:r="http://schemas.openxmlformats.org/officeDocument/2006/relationships">
   <p:cSld>
     <p:spTree>
@@ -11988,6 +8829,2435 @@
       <p:sp>
         <p:nvSpPr>
           <p:cNvPr id="13" name="TextBox 12"/>
+          <p:cNvSpPr txBox="1"/>
+          <p:nvPr/>
+        </p:nvSpPr>
+        <p:spPr>
+          <a:xfrm>
+            <a:off x="11338560" y="6492240"/>
+            <a:ext cx="731520" cy="347472"/>
+          </a:xfrm>
+          <a:prstGeom prst="rect">
+            <a:avLst/>
+          </a:prstGeom>
+          <a:noFill/>
+        </p:spPr>
+        <p:txBody>
+          <a:bodyPr wrap="none">
+            <a:spAutoFit/>
+          </a:bodyPr>
+          <a:lstStyle/>
+          <a:p>
+            <a:pPr algn="r"/>
+            <a:r>
+              <a:rPr sz="1100" b="1">
+                <a:solidFill>
+                  <a:srgbClr val="FFFFFF"/>
+                </a:solidFill>
+              </a:rPr>
+              <a:t>6</a:t>
+            </a:r>
+          </a:p>
+        </p:txBody>
+      </p:sp>
+    </p:spTree>
+  </p:cSld>
+  <p:clrMapOvr>
+    <a:masterClrMapping/>
+  </p:clrMapOvr>
+</p:sld>
+</file>
+
+<file path=ppt/slides/slide8.xml><?xml version="1.0" encoding="utf-8"?>
+<p:sld xmlns:a="http://schemas.openxmlformats.org/drawingml/2006/main" xmlns:p="http://schemas.openxmlformats.org/presentationml/2006/main" xmlns:r="http://schemas.openxmlformats.org/officeDocument/2006/relationships">
+  <p:cSld>
+    <p:spTree>
+      <p:nvGrpSpPr>
+        <p:cNvPr id="1" name=""/>
+        <p:cNvGrpSpPr/>
+        <p:nvPr/>
+      </p:nvGrpSpPr>
+      <p:grpSpPr/>
+      <p:sp>
+        <p:nvSpPr>
+          <p:cNvPr id="2" name="TextBox 1"/>
+          <p:cNvSpPr txBox="1"/>
+          <p:nvPr/>
+        </p:nvSpPr>
+        <p:spPr>
+          <a:xfrm>
+            <a:off x="411480" y="146304"/>
+            <a:ext cx="11338560" cy="548640"/>
+          </a:xfrm>
+          <a:prstGeom prst="rect">
+            <a:avLst/>
+          </a:prstGeom>
+          <a:noFill/>
+        </p:spPr>
+        <p:txBody>
+          <a:bodyPr wrap="none">
+            <a:spAutoFit/>
+          </a:bodyPr>
+          <a:lstStyle/>
+          <a:p>
+            <a:r>
+              <a:rPr sz="2500" b="1">
+                <a:solidFill>
+                  <a:srgbClr val="142B53"/>
+                </a:solidFill>
+              </a:rPr>
+              <a:t>IMPROVEMENTS MADE</a:t>
+            </a:r>
+          </a:p>
+        </p:txBody>
+      </p:sp>
+      <p:sp>
+        <p:nvSpPr>
+          <p:cNvPr id="3" name="Rectangle 2"/>
+          <p:cNvSpPr/>
+          <p:nvPr/>
+        </p:nvSpPr>
+        <p:spPr>
+          <a:xfrm>
+            <a:off x="457200" y="676656"/>
+            <a:ext cx="1463040" cy="45720"/>
+          </a:xfrm>
+          <a:prstGeom prst="rect">
+            <a:avLst/>
+          </a:prstGeom>
+          <a:solidFill>
+            <a:srgbClr val="1F77C2"/>
+          </a:solidFill>
+          <a:ln>
+            <a:noFill/>
+          </a:ln>
+          <a:effectLst/>
+        </p:spPr>
+        <p:style>
+          <a:lnRef idx="1">
+            <a:schemeClr val="accent1"/>
+          </a:lnRef>
+          <a:fillRef idx="3">
+            <a:schemeClr val="accent1"/>
+          </a:fillRef>
+          <a:effectRef idx="2">
+            <a:schemeClr val="accent1"/>
+          </a:effectRef>
+          <a:fontRef idx="minor">
+            <a:schemeClr val="lt1"/>
+          </a:fontRef>
+        </p:style>
+        <p:txBody>
+          <a:bodyPr rtlCol="0" anchor="ctr"/>
+          <a:lstStyle/>
+          <a:p>
+            <a:pPr algn="ctr"/>
+          </a:p>
+        </p:txBody>
+      </p:sp>
+      <p:sp>
+        <p:nvSpPr>
+          <p:cNvPr id="4" name="TextBox 3"/>
+          <p:cNvSpPr txBox="1"/>
+          <p:nvPr/>
+        </p:nvSpPr>
+        <p:spPr>
+          <a:xfrm>
+            <a:off x="457200" y="749808"/>
+            <a:ext cx="11247120" cy="320040"/>
+          </a:xfrm>
+          <a:prstGeom prst="rect">
+            <a:avLst/>
+          </a:prstGeom>
+          <a:noFill/>
+        </p:spPr>
+        <p:txBody>
+          <a:bodyPr wrap="none">
+            <a:spAutoFit/>
+          </a:bodyPr>
+          <a:lstStyle/>
+          <a:p>
+            <a:r>
+              <a:rPr sz="1100" i="1">
+                <a:solidFill>
+                  <a:srgbClr val="5B6676"/>
+                </a:solidFill>
+              </a:rPr>
+              <a:t>Measured before and after, on the same protocol.</a:t>
+            </a:r>
+          </a:p>
+        </p:txBody>
+      </p:sp>
+      <p:sp>
+        <p:nvSpPr>
+          <p:cNvPr id="5" name="Rounded Rectangle 4"/>
+          <p:cNvSpPr/>
+          <p:nvPr/>
+        </p:nvSpPr>
+        <p:spPr>
+          <a:xfrm>
+            <a:off x="548640" y="1188720"/>
+            <a:ext cx="3566160" cy="960120"/>
+          </a:xfrm>
+          <a:prstGeom prst="roundRect">
+            <a:avLst/>
+          </a:prstGeom>
+          <a:solidFill>
+            <a:srgbClr val="F4F6F9"/>
+          </a:solidFill>
+          <a:ln w="15240">
+            <a:solidFill>
+              <a:srgbClr val="5B6676"/>
+            </a:solidFill>
+          </a:ln>
+          <a:effectLst/>
+        </p:spPr>
+        <p:style>
+          <a:lnRef idx="1">
+            <a:schemeClr val="accent1"/>
+          </a:lnRef>
+          <a:fillRef idx="3">
+            <a:schemeClr val="accent1"/>
+          </a:fillRef>
+          <a:effectRef idx="2">
+            <a:schemeClr val="accent1"/>
+          </a:effectRef>
+          <a:fontRef idx="minor">
+            <a:schemeClr val="lt1"/>
+          </a:fontRef>
+        </p:style>
+        <p:txBody>
+          <a:bodyPr rtlCol="0" anchor="ctr"/>
+          <a:lstStyle/>
+          <a:p/>
+        </p:txBody>
+      </p:sp>
+      <p:sp>
+        <p:nvSpPr>
+          <p:cNvPr id="6" name="TextBox 5"/>
+          <p:cNvSpPr txBox="1"/>
+          <p:nvPr/>
+        </p:nvSpPr>
+        <p:spPr>
+          <a:xfrm>
+            <a:off x="676656" y="1271016"/>
+            <a:ext cx="3310128" cy="274320"/>
+          </a:xfrm>
+          <a:prstGeom prst="rect">
+            <a:avLst/>
+          </a:prstGeom>
+          <a:noFill/>
+        </p:spPr>
+        <p:txBody>
+          <a:bodyPr wrap="square" anchor="t">
+            <a:spAutoFit/>
+          </a:bodyPr>
+          <a:lstStyle/>
+          <a:p>
+            <a:pPr>
+              <a:spcAft>
+                <a:spcPts val="400"/>
+              </a:spcAft>
+            </a:pPr>
+            <a:r>
+              <a:rPr sz="1000" b="1">
+                <a:solidFill>
+                  <a:srgbClr val="142B53"/>
+                </a:solidFill>
+              </a:rPr>
+              <a:t>Photo-attack success rate</a:t>
+            </a:r>
+          </a:p>
+        </p:txBody>
+      </p:sp>
+      <p:sp>
+        <p:nvSpPr>
+          <p:cNvPr id="7" name="TextBox 6"/>
+          <p:cNvSpPr txBox="1"/>
+          <p:nvPr/>
+        </p:nvSpPr>
+        <p:spPr>
+          <a:xfrm>
+            <a:off x="676656" y="1572768"/>
+            <a:ext cx="3310128" cy="457200"/>
+          </a:xfrm>
+          <a:prstGeom prst="rect">
+            <a:avLst/>
+          </a:prstGeom>
+          <a:noFill/>
+        </p:spPr>
+        <p:txBody>
+          <a:bodyPr wrap="none">
+            <a:spAutoFit/>
+          </a:bodyPr>
+          <a:lstStyle/>
+          <a:p>
+            <a:r>
+              <a:rPr sz="1700" b="1">
+                <a:solidFill>
+                  <a:srgbClr val="C0392B"/>
+                </a:solidFill>
+              </a:rPr>
+              <a:t>100%   ➔   0%</a:t>
+            </a:r>
+          </a:p>
+        </p:txBody>
+      </p:sp>
+      <p:sp>
+        <p:nvSpPr>
+          <p:cNvPr id="8" name="Rounded Rectangle 7"/>
+          <p:cNvSpPr/>
+          <p:nvPr/>
+        </p:nvSpPr>
+        <p:spPr>
+          <a:xfrm>
+            <a:off x="4343400" y="1188720"/>
+            <a:ext cx="3566160" cy="960120"/>
+          </a:xfrm>
+          <a:prstGeom prst="roundRect">
+            <a:avLst/>
+          </a:prstGeom>
+          <a:solidFill>
+            <a:srgbClr val="F4F6F9"/>
+          </a:solidFill>
+          <a:ln w="15240">
+            <a:solidFill>
+              <a:srgbClr val="5B6676"/>
+            </a:solidFill>
+          </a:ln>
+          <a:effectLst/>
+        </p:spPr>
+        <p:style>
+          <a:lnRef idx="1">
+            <a:schemeClr val="accent1"/>
+          </a:lnRef>
+          <a:fillRef idx="3">
+            <a:schemeClr val="accent1"/>
+          </a:fillRef>
+          <a:effectRef idx="2">
+            <a:schemeClr val="accent1"/>
+          </a:effectRef>
+          <a:fontRef idx="minor">
+            <a:schemeClr val="lt1"/>
+          </a:fontRef>
+        </p:style>
+        <p:txBody>
+          <a:bodyPr rtlCol="0" anchor="ctr"/>
+          <a:lstStyle/>
+          <a:p/>
+        </p:txBody>
+      </p:sp>
+      <p:sp>
+        <p:nvSpPr>
+          <p:cNvPr id="9" name="TextBox 8"/>
+          <p:cNvSpPr txBox="1"/>
+          <p:nvPr/>
+        </p:nvSpPr>
+        <p:spPr>
+          <a:xfrm>
+            <a:off x="4471416" y="1271016"/>
+            <a:ext cx="3310128" cy="274320"/>
+          </a:xfrm>
+          <a:prstGeom prst="rect">
+            <a:avLst/>
+          </a:prstGeom>
+          <a:noFill/>
+        </p:spPr>
+        <p:txBody>
+          <a:bodyPr wrap="square" anchor="t">
+            <a:spAutoFit/>
+          </a:bodyPr>
+          <a:lstStyle/>
+          <a:p>
+            <a:pPr>
+              <a:spcAft>
+                <a:spcPts val="400"/>
+              </a:spcAft>
+            </a:pPr>
+            <a:r>
+              <a:rPr sz="1000" b="1">
+                <a:solidFill>
+                  <a:srgbClr val="142B53"/>
+                </a:solidFill>
+              </a:rPr>
+              <a:t>Strangers admitted (FAR)</a:t>
+            </a:r>
+          </a:p>
+        </p:txBody>
+      </p:sp>
+      <p:sp>
+        <p:nvSpPr>
+          <p:cNvPr id="10" name="TextBox 9"/>
+          <p:cNvSpPr txBox="1"/>
+          <p:nvPr/>
+        </p:nvSpPr>
+        <p:spPr>
+          <a:xfrm>
+            <a:off x="4471416" y="1572768"/>
+            <a:ext cx="3310128" cy="457200"/>
+          </a:xfrm>
+          <a:prstGeom prst="rect">
+            <a:avLst/>
+          </a:prstGeom>
+          <a:noFill/>
+        </p:spPr>
+        <p:txBody>
+          <a:bodyPr wrap="none">
+            <a:spAutoFit/>
+          </a:bodyPr>
+          <a:lstStyle/>
+          <a:p>
+            <a:r>
+              <a:rPr sz="1700" b="1">
+                <a:solidFill>
+                  <a:srgbClr val="1E8E5A"/>
+                </a:solidFill>
+              </a:rPr>
+              <a:t>0.81%   ➔   0.20%</a:t>
+            </a:r>
+          </a:p>
+        </p:txBody>
+      </p:sp>
+      <p:sp>
+        <p:nvSpPr>
+          <p:cNvPr id="11" name="Rounded Rectangle 10"/>
+          <p:cNvSpPr/>
+          <p:nvPr/>
+        </p:nvSpPr>
+        <p:spPr>
+          <a:xfrm>
+            <a:off x="8138160" y="1188720"/>
+            <a:ext cx="3566160" cy="960120"/>
+          </a:xfrm>
+          <a:prstGeom prst="roundRect">
+            <a:avLst/>
+          </a:prstGeom>
+          <a:solidFill>
+            <a:srgbClr val="F4F6F9"/>
+          </a:solidFill>
+          <a:ln w="15240">
+            <a:solidFill>
+              <a:srgbClr val="5B6676"/>
+            </a:solidFill>
+          </a:ln>
+          <a:effectLst/>
+        </p:spPr>
+        <p:style>
+          <a:lnRef idx="1">
+            <a:schemeClr val="accent1"/>
+          </a:lnRef>
+          <a:fillRef idx="3">
+            <a:schemeClr val="accent1"/>
+          </a:fillRef>
+          <a:effectRef idx="2">
+            <a:schemeClr val="accent1"/>
+          </a:effectRef>
+          <a:fontRef idx="minor">
+            <a:schemeClr val="lt1"/>
+          </a:fontRef>
+        </p:style>
+        <p:txBody>
+          <a:bodyPr rtlCol="0" anchor="ctr"/>
+          <a:lstStyle/>
+          <a:p/>
+        </p:txBody>
+      </p:sp>
+      <p:sp>
+        <p:nvSpPr>
+          <p:cNvPr id="12" name="TextBox 11"/>
+          <p:cNvSpPr txBox="1"/>
+          <p:nvPr/>
+        </p:nvSpPr>
+        <p:spPr>
+          <a:xfrm>
+            <a:off x="8266176" y="1271016"/>
+            <a:ext cx="3310128" cy="274320"/>
+          </a:xfrm>
+          <a:prstGeom prst="rect">
+            <a:avLst/>
+          </a:prstGeom>
+          <a:noFill/>
+        </p:spPr>
+        <p:txBody>
+          <a:bodyPr wrap="square" anchor="t">
+            <a:spAutoFit/>
+          </a:bodyPr>
+          <a:lstStyle/>
+          <a:p>
+            <a:pPr>
+              <a:spcAft>
+                <a:spcPts val="400"/>
+              </a:spcAft>
+            </a:pPr>
+            <a:r>
+              <a:rPr sz="1000" b="1">
+                <a:solidFill>
+                  <a:srgbClr val="142B53"/>
+                </a:solidFill>
+              </a:rPr>
+              <a:t>Wrong attendance records</a:t>
+            </a:r>
+          </a:p>
+        </p:txBody>
+      </p:sp>
+      <p:sp>
+        <p:nvSpPr>
+          <p:cNvPr id="13" name="TextBox 12"/>
+          <p:cNvSpPr txBox="1"/>
+          <p:nvPr/>
+        </p:nvSpPr>
+        <p:spPr>
+          <a:xfrm>
+            <a:off x="8266176" y="1572768"/>
+            <a:ext cx="3310128" cy="457200"/>
+          </a:xfrm>
+          <a:prstGeom prst="rect">
+            <a:avLst/>
+          </a:prstGeom>
+          <a:noFill/>
+        </p:spPr>
+        <p:txBody>
+          <a:bodyPr wrap="none">
+            <a:spAutoFit/>
+          </a:bodyPr>
+          <a:lstStyle/>
+          <a:p>
+            <a:r>
+              <a:rPr sz="1700" b="1">
+                <a:solidFill>
+                  <a:srgbClr val="1E8E5A"/>
+                </a:solidFill>
+              </a:rPr>
+              <a:t>3.54%   ➔   0%</a:t>
+            </a:r>
+          </a:p>
+        </p:txBody>
+      </p:sp>
+      <p:sp>
+        <p:nvSpPr>
+          <p:cNvPr id="14" name="Rounded Rectangle 13"/>
+          <p:cNvSpPr/>
+          <p:nvPr/>
+        </p:nvSpPr>
+        <p:spPr>
+          <a:xfrm>
+            <a:off x="548640" y="2286000"/>
+            <a:ext cx="3566160" cy="960120"/>
+          </a:xfrm>
+          <a:prstGeom prst="roundRect">
+            <a:avLst/>
+          </a:prstGeom>
+          <a:solidFill>
+            <a:srgbClr val="F4F6F9"/>
+          </a:solidFill>
+          <a:ln w="15240">
+            <a:solidFill>
+              <a:srgbClr val="5B6676"/>
+            </a:solidFill>
+          </a:ln>
+          <a:effectLst/>
+        </p:spPr>
+        <p:style>
+          <a:lnRef idx="1">
+            <a:schemeClr val="accent1"/>
+          </a:lnRef>
+          <a:fillRef idx="3">
+            <a:schemeClr val="accent1"/>
+          </a:fillRef>
+          <a:effectRef idx="2">
+            <a:schemeClr val="accent1"/>
+          </a:effectRef>
+          <a:fontRef idx="minor">
+            <a:schemeClr val="lt1"/>
+          </a:fontRef>
+        </p:style>
+        <p:txBody>
+          <a:bodyPr rtlCol="0" anchor="ctr"/>
+          <a:lstStyle/>
+          <a:p/>
+        </p:txBody>
+      </p:sp>
+      <p:sp>
+        <p:nvSpPr>
+          <p:cNvPr id="15" name="TextBox 14"/>
+          <p:cNvSpPr txBox="1"/>
+          <p:nvPr/>
+        </p:nvSpPr>
+        <p:spPr>
+          <a:xfrm>
+            <a:off x="676656" y="2368296"/>
+            <a:ext cx="3310128" cy="274320"/>
+          </a:xfrm>
+          <a:prstGeom prst="rect">
+            <a:avLst/>
+          </a:prstGeom>
+          <a:noFill/>
+        </p:spPr>
+        <p:txBody>
+          <a:bodyPr wrap="square" anchor="t">
+            <a:spAutoFit/>
+          </a:bodyPr>
+          <a:lstStyle/>
+          <a:p>
+            <a:pPr>
+              <a:spcAft>
+                <a:spcPts val="400"/>
+              </a:spcAft>
+            </a:pPr>
+            <a:r>
+              <a:rPr sz="1000" b="1">
+                <a:solidFill>
+                  <a:srgbClr val="142B53"/>
+                </a:solidFill>
+              </a:rPr>
+              <a:t>Time to enrol a student</a:t>
+            </a:r>
+          </a:p>
+        </p:txBody>
+      </p:sp>
+      <p:sp>
+        <p:nvSpPr>
+          <p:cNvPr id="16" name="TextBox 15"/>
+          <p:cNvSpPr txBox="1"/>
+          <p:nvPr/>
+        </p:nvSpPr>
+        <p:spPr>
+          <a:xfrm>
+            <a:off x="676656" y="2670048"/>
+            <a:ext cx="3310128" cy="457200"/>
+          </a:xfrm>
+          <a:prstGeom prst="rect">
+            <a:avLst/>
+          </a:prstGeom>
+          <a:noFill/>
+        </p:spPr>
+        <p:txBody>
+          <a:bodyPr wrap="none">
+            <a:spAutoFit/>
+          </a:bodyPr>
+          <a:lstStyle/>
+          <a:p>
+            <a:r>
+              <a:rPr sz="1700" b="1">
+                <a:solidFill>
+                  <a:srgbClr val="1E8E5A"/>
+                </a:solidFill>
+              </a:rPr>
+              <a:t>607 s   ➔   1.4 s</a:t>
+            </a:r>
+          </a:p>
+        </p:txBody>
+      </p:sp>
+      <p:sp>
+        <p:nvSpPr>
+          <p:cNvPr id="17" name="Rounded Rectangle 16"/>
+          <p:cNvSpPr/>
+          <p:nvPr/>
+        </p:nvSpPr>
+        <p:spPr>
+          <a:xfrm>
+            <a:off x="4343400" y="2286000"/>
+            <a:ext cx="3566160" cy="960120"/>
+          </a:xfrm>
+          <a:prstGeom prst="roundRect">
+            <a:avLst/>
+          </a:prstGeom>
+          <a:solidFill>
+            <a:srgbClr val="F4F6F9"/>
+          </a:solidFill>
+          <a:ln w="15240">
+            <a:solidFill>
+              <a:srgbClr val="5B6676"/>
+            </a:solidFill>
+          </a:ln>
+          <a:effectLst/>
+        </p:spPr>
+        <p:style>
+          <a:lnRef idx="1">
+            <a:schemeClr val="accent1"/>
+          </a:lnRef>
+          <a:fillRef idx="3">
+            <a:schemeClr val="accent1"/>
+          </a:fillRef>
+          <a:effectRef idx="2">
+            <a:schemeClr val="accent1"/>
+          </a:effectRef>
+          <a:fontRef idx="minor">
+            <a:schemeClr val="lt1"/>
+          </a:fontRef>
+        </p:style>
+        <p:txBody>
+          <a:bodyPr rtlCol="0" anchor="ctr"/>
+          <a:lstStyle/>
+          <a:p/>
+        </p:txBody>
+      </p:sp>
+      <p:sp>
+        <p:nvSpPr>
+          <p:cNvPr id="18" name="TextBox 17"/>
+          <p:cNvSpPr txBox="1"/>
+          <p:nvPr/>
+        </p:nvSpPr>
+        <p:spPr>
+          <a:xfrm>
+            <a:off x="4471416" y="2368296"/>
+            <a:ext cx="3310128" cy="274320"/>
+          </a:xfrm>
+          <a:prstGeom prst="rect">
+            <a:avLst/>
+          </a:prstGeom>
+          <a:noFill/>
+        </p:spPr>
+        <p:txBody>
+          <a:bodyPr wrap="square" anchor="t">
+            <a:spAutoFit/>
+          </a:bodyPr>
+          <a:lstStyle/>
+          <a:p>
+            <a:pPr>
+              <a:spcAft>
+                <a:spcPts val="400"/>
+              </a:spcAft>
+            </a:pPr>
+            <a:r>
+              <a:rPr sz="1000" b="1">
+                <a:solidFill>
+                  <a:srgbClr val="142B53"/>
+                </a:solidFill>
+              </a:rPr>
+              <a:t>Time to mark present</a:t>
+            </a:r>
+          </a:p>
+        </p:txBody>
+      </p:sp>
+      <p:sp>
+        <p:nvSpPr>
+          <p:cNvPr id="19" name="TextBox 18"/>
+          <p:cNvSpPr txBox="1"/>
+          <p:nvPr/>
+        </p:nvSpPr>
+        <p:spPr>
+          <a:xfrm>
+            <a:off x="4471416" y="2670048"/>
+            <a:ext cx="3310128" cy="457200"/>
+          </a:xfrm>
+          <a:prstGeom prst="rect">
+            <a:avLst/>
+          </a:prstGeom>
+          <a:noFill/>
+        </p:spPr>
+        <p:txBody>
+          <a:bodyPr wrap="none">
+            <a:spAutoFit/>
+          </a:bodyPr>
+          <a:lstStyle/>
+          <a:p>
+            <a:r>
+              <a:rPr sz="1700" b="1">
+                <a:solidFill>
+                  <a:srgbClr val="1E8E5A"/>
+                </a:solidFill>
+              </a:rPr>
+              <a:t>10.5 s   ➔   2.8 s</a:t>
+            </a:r>
+          </a:p>
+        </p:txBody>
+      </p:sp>
+      <p:sp>
+        <p:nvSpPr>
+          <p:cNvPr id="20" name="Rounded Rectangle 19"/>
+          <p:cNvSpPr/>
+          <p:nvPr/>
+        </p:nvSpPr>
+        <p:spPr>
+          <a:xfrm>
+            <a:off x="8138160" y="2286000"/>
+            <a:ext cx="3566160" cy="960120"/>
+          </a:xfrm>
+          <a:prstGeom prst="roundRect">
+            <a:avLst/>
+          </a:prstGeom>
+          <a:solidFill>
+            <a:srgbClr val="F4F6F9"/>
+          </a:solidFill>
+          <a:ln w="15240">
+            <a:solidFill>
+              <a:srgbClr val="5B6676"/>
+            </a:solidFill>
+          </a:ln>
+          <a:effectLst/>
+        </p:spPr>
+        <p:style>
+          <a:lnRef idx="1">
+            <a:schemeClr val="accent1"/>
+          </a:lnRef>
+          <a:fillRef idx="3">
+            <a:schemeClr val="accent1"/>
+          </a:fillRef>
+          <a:effectRef idx="2">
+            <a:schemeClr val="accent1"/>
+          </a:effectRef>
+          <a:fontRef idx="minor">
+            <a:schemeClr val="lt1"/>
+          </a:fontRef>
+        </p:style>
+        <p:txBody>
+          <a:bodyPr rtlCol="0" anchor="ctr"/>
+          <a:lstStyle/>
+          <a:p/>
+        </p:txBody>
+      </p:sp>
+      <p:sp>
+        <p:nvSpPr>
+          <p:cNvPr id="21" name="TextBox 20"/>
+          <p:cNvSpPr txBox="1"/>
+          <p:nvPr/>
+        </p:nvSpPr>
+        <p:spPr>
+          <a:xfrm>
+            <a:off x="8266176" y="2368296"/>
+            <a:ext cx="3310128" cy="274320"/>
+          </a:xfrm>
+          <a:prstGeom prst="rect">
+            <a:avLst/>
+          </a:prstGeom>
+          <a:noFill/>
+        </p:spPr>
+        <p:txBody>
+          <a:bodyPr wrap="square" anchor="t">
+            <a:spAutoFit/>
+          </a:bodyPr>
+          <a:lstStyle/>
+          <a:p>
+            <a:pPr>
+              <a:spcAft>
+                <a:spcPts val="400"/>
+              </a:spcAft>
+            </a:pPr>
+            <a:r>
+              <a:rPr sz="1000" b="1">
+                <a:solidFill>
+                  <a:srgbClr val="142B53"/>
+                </a:solidFill>
+              </a:rPr>
+              <a:t>Classes the model trains on</a:t>
+            </a:r>
+          </a:p>
+        </p:txBody>
+      </p:sp>
+      <p:sp>
+        <p:nvSpPr>
+          <p:cNvPr id="22" name="TextBox 21"/>
+          <p:cNvSpPr txBox="1"/>
+          <p:nvPr/>
+        </p:nvSpPr>
+        <p:spPr>
+          <a:xfrm>
+            <a:off x="8266176" y="2670048"/>
+            <a:ext cx="3310128" cy="457200"/>
+          </a:xfrm>
+          <a:prstGeom prst="rect">
+            <a:avLst/>
+          </a:prstGeom>
+          <a:noFill/>
+        </p:spPr>
+        <p:txBody>
+          <a:bodyPr wrap="none">
+            <a:spAutoFit/>
+          </a:bodyPr>
+          <a:lstStyle/>
+          <a:p>
+            <a:r>
+              <a:rPr sz="1700" b="1">
+                <a:solidFill>
+                  <a:srgbClr val="1F77C2"/>
+                </a:solidFill>
+              </a:rPr>
+              <a:t>98   ➔   2 + 96 impostors</a:t>
+            </a:r>
+          </a:p>
+        </p:txBody>
+      </p:sp>
+      <p:sp>
+        <p:nvSpPr>
+          <p:cNvPr id="23" name="TextBox 22"/>
+          <p:cNvSpPr txBox="1"/>
+          <p:nvPr/>
+        </p:nvSpPr>
+        <p:spPr>
+          <a:xfrm>
+            <a:off x="548640" y="3401568"/>
+            <a:ext cx="11155680" cy="274320"/>
+          </a:xfrm>
+          <a:prstGeom prst="rect">
+            <a:avLst/>
+          </a:prstGeom>
+          <a:noFill/>
+        </p:spPr>
+        <p:txBody>
+          <a:bodyPr wrap="square" anchor="t">
+            <a:spAutoFit/>
+          </a:bodyPr>
+          <a:lstStyle/>
+          <a:p>
+            <a:pPr>
+              <a:spcAft>
+                <a:spcPts val="400"/>
+              </a:spcAft>
+            </a:pPr>
+            <a:r>
+              <a:rPr sz="1250" b="1">
+                <a:solidFill>
+                  <a:srgbClr val="142B53"/>
+                </a:solidFill>
+              </a:rPr>
+              <a:t>Also fixed along the way</a:t>
+            </a:r>
+          </a:p>
+        </p:txBody>
+      </p:sp>
+      <p:sp>
+        <p:nvSpPr>
+          <p:cNvPr id="24" name="Rounded Rectangle 23"/>
+          <p:cNvSpPr/>
+          <p:nvPr/>
+        </p:nvSpPr>
+        <p:spPr>
+          <a:xfrm>
+            <a:off x="548640" y="3703320"/>
+            <a:ext cx="3566160" cy="1097280"/>
+          </a:xfrm>
+          <a:prstGeom prst="roundRect">
+            <a:avLst/>
+          </a:prstGeom>
+          <a:solidFill>
+            <a:srgbClr val="FEF5E3"/>
+          </a:solidFill>
+          <a:ln w="15240">
+            <a:solidFill>
+              <a:srgbClr val="B97A0B"/>
+            </a:solidFill>
+          </a:ln>
+          <a:effectLst/>
+        </p:spPr>
+        <p:style>
+          <a:lnRef idx="1">
+            <a:schemeClr val="accent1"/>
+          </a:lnRef>
+          <a:fillRef idx="3">
+            <a:schemeClr val="accent1"/>
+          </a:fillRef>
+          <a:effectRef idx="2">
+            <a:schemeClr val="accent1"/>
+          </a:effectRef>
+          <a:fontRef idx="minor">
+            <a:schemeClr val="lt1"/>
+          </a:fontRef>
+        </p:style>
+        <p:txBody>
+          <a:bodyPr rtlCol="0" anchor="ctr"/>
+          <a:lstStyle/>
+          <a:p/>
+        </p:txBody>
+      </p:sp>
+      <p:sp>
+        <p:nvSpPr>
+          <p:cNvPr id="25" name="TextBox 24"/>
+          <p:cNvSpPr txBox="1"/>
+          <p:nvPr/>
+        </p:nvSpPr>
+        <p:spPr>
+          <a:xfrm>
+            <a:off x="685800" y="3803904"/>
+            <a:ext cx="3291840" cy="960120"/>
+          </a:xfrm>
+          <a:prstGeom prst="rect">
+            <a:avLst/>
+          </a:prstGeom>
+          <a:noFill/>
+        </p:spPr>
+        <p:txBody>
+          <a:bodyPr wrap="square" anchor="t">
+            <a:spAutoFit/>
+          </a:bodyPr>
+          <a:lstStyle/>
+          <a:p>
+            <a:pPr>
+              <a:spcAft>
+                <a:spcPts val="400"/>
+              </a:spcAft>
+            </a:pPr>
+            <a:r>
+              <a:rPr sz="900" b="1">
+                <a:solidFill>
+                  <a:srgbClr val="B97A0B"/>
+                </a:solidFill>
+              </a:rPr>
+              <a:t>Registration never retrained</a:t>
+            </a:r>
+          </a:p>
+          <a:p>
+            <a:pPr>
+              <a:spcAft>
+                <a:spcPts val="400"/>
+              </a:spcAft>
+            </a:pPr>
+            <a:r>
+              <a:rPr sz="900" b="0">
+                <a:solidFill>
+                  <a:srgbClr val="222A35"/>
+                </a:solidFill>
+              </a:rPr>
+              <a:t>A newly registered student stayed 'Unknown' forever — the images were saved, but the model was never refit.</a:t>
+            </a:r>
+          </a:p>
+        </p:txBody>
+      </p:sp>
+      <p:sp>
+        <p:nvSpPr>
+          <p:cNvPr id="26" name="Rounded Rectangle 25"/>
+          <p:cNvSpPr/>
+          <p:nvPr/>
+        </p:nvSpPr>
+        <p:spPr>
+          <a:xfrm>
+            <a:off x="4343400" y="3703320"/>
+            <a:ext cx="3566160" cy="1097280"/>
+          </a:xfrm>
+          <a:prstGeom prst="roundRect">
+            <a:avLst/>
+          </a:prstGeom>
+          <a:solidFill>
+            <a:srgbClr val="FEF5E3"/>
+          </a:solidFill>
+          <a:ln w="15240">
+            <a:solidFill>
+              <a:srgbClr val="B97A0B"/>
+            </a:solidFill>
+          </a:ln>
+          <a:effectLst/>
+        </p:spPr>
+        <p:style>
+          <a:lnRef idx="1">
+            <a:schemeClr val="accent1"/>
+          </a:lnRef>
+          <a:fillRef idx="3">
+            <a:schemeClr val="accent1"/>
+          </a:fillRef>
+          <a:effectRef idx="2">
+            <a:schemeClr val="accent1"/>
+          </a:effectRef>
+          <a:fontRef idx="minor">
+            <a:schemeClr val="lt1"/>
+          </a:fontRef>
+        </p:style>
+        <p:txBody>
+          <a:bodyPr rtlCol="0" anchor="ctr"/>
+          <a:lstStyle/>
+          <a:p/>
+        </p:txBody>
+      </p:sp>
+      <p:sp>
+        <p:nvSpPr>
+          <p:cNvPr id="27" name="TextBox 26"/>
+          <p:cNvSpPr txBox="1"/>
+          <p:nvPr/>
+        </p:nvSpPr>
+        <p:spPr>
+          <a:xfrm>
+            <a:off x="4480560" y="3803904"/>
+            <a:ext cx="3291840" cy="960120"/>
+          </a:xfrm>
+          <a:prstGeom prst="rect">
+            <a:avLst/>
+          </a:prstGeom>
+          <a:noFill/>
+        </p:spPr>
+        <p:txBody>
+          <a:bodyPr wrap="square" anchor="t">
+            <a:spAutoFit/>
+          </a:bodyPr>
+          <a:lstStyle/>
+          <a:p>
+            <a:pPr>
+              <a:spcAft>
+                <a:spcPts val="400"/>
+              </a:spcAft>
+            </a:pPr>
+            <a:r>
+              <a:rPr sz="900" b="1">
+                <a:solidFill>
+                  <a:srgbClr val="B97A0B"/>
+                </a:solidFill>
+              </a:rPr>
+              <a:t>The API was unauthenticated</a:t>
+            </a:r>
+          </a:p>
+          <a:p>
+            <a:pPr>
+              <a:spcAft>
+                <a:spcPts val="400"/>
+              </a:spcAft>
+            </a:pPr>
+            <a:r>
+              <a:rPr sz="900" b="0">
+                <a:solidFill>
+                  <a:srgbClr val="222A35"/>
+                </a:solidFill>
+              </a:rPr>
+              <a:t>Anyone on the network could mark themselves present or delete a student. All 11 data routes now require a token.</a:t>
+            </a:r>
+          </a:p>
+        </p:txBody>
+      </p:sp>
+      <p:sp>
+        <p:nvSpPr>
+          <p:cNvPr id="28" name="Rounded Rectangle 27"/>
+          <p:cNvSpPr/>
+          <p:nvPr/>
+        </p:nvSpPr>
+        <p:spPr>
+          <a:xfrm>
+            <a:off x="8138160" y="3703320"/>
+            <a:ext cx="3566160" cy="1097280"/>
+          </a:xfrm>
+          <a:prstGeom prst="roundRect">
+            <a:avLst/>
+          </a:prstGeom>
+          <a:solidFill>
+            <a:srgbClr val="FEF5E3"/>
+          </a:solidFill>
+          <a:ln w="15240">
+            <a:solidFill>
+              <a:srgbClr val="B97A0B"/>
+            </a:solidFill>
+          </a:ln>
+          <a:effectLst/>
+        </p:spPr>
+        <p:style>
+          <a:lnRef idx="1">
+            <a:schemeClr val="accent1"/>
+          </a:lnRef>
+          <a:fillRef idx="3">
+            <a:schemeClr val="accent1"/>
+          </a:fillRef>
+          <a:effectRef idx="2">
+            <a:schemeClr val="accent1"/>
+          </a:effectRef>
+          <a:fontRef idx="minor">
+            <a:schemeClr val="lt1"/>
+          </a:fontRef>
+        </p:style>
+        <p:txBody>
+          <a:bodyPr rtlCol="0" anchor="ctr"/>
+          <a:lstStyle/>
+          <a:p/>
+        </p:txBody>
+      </p:sp>
+      <p:sp>
+        <p:nvSpPr>
+          <p:cNvPr id="29" name="TextBox 28"/>
+          <p:cNvSpPr txBox="1"/>
+          <p:nvPr/>
+        </p:nvSpPr>
+        <p:spPr>
+          <a:xfrm>
+            <a:off x="8275320" y="3803904"/>
+            <a:ext cx="3291840" cy="960120"/>
+          </a:xfrm>
+          <a:prstGeom prst="rect">
+            <a:avLst/>
+          </a:prstGeom>
+          <a:noFill/>
+        </p:spPr>
+        <p:txBody>
+          <a:bodyPr wrap="square" anchor="t">
+            <a:spAutoFit/>
+          </a:bodyPr>
+          <a:lstStyle/>
+          <a:p>
+            <a:pPr>
+              <a:spcAft>
+                <a:spcPts val="400"/>
+              </a:spcAft>
+            </a:pPr>
+            <a:r>
+              <a:rPr sz="900" b="1">
+                <a:solidFill>
+                  <a:srgbClr val="B97A0B"/>
+                </a:solidFill>
+              </a:rPr>
+              <a:t>Remote code execution</a:t>
+            </a:r>
+          </a:p>
+          <a:p>
+            <a:pPr>
+              <a:spcAft>
+                <a:spcPts val="400"/>
+              </a:spcAft>
+            </a:pPr>
+            <a:r>
+              <a:rPr sz="900" b="0">
+                <a:solidFill>
+                  <a:srgbClr val="222A35"/>
+                </a:solidFill>
+              </a:rPr>
+              <a:t>Flask ran with debug=True bound to 0.0.0.0, exposing the Werkzeug console to the entire network.</a:t>
+            </a:r>
+          </a:p>
+        </p:txBody>
+      </p:sp>
+      <p:sp>
+        <p:nvSpPr>
+          <p:cNvPr id="30" name="TextBox 29"/>
+          <p:cNvSpPr txBox="1"/>
+          <p:nvPr/>
+        </p:nvSpPr>
+        <p:spPr>
+          <a:xfrm>
+            <a:off x="548640" y="4937760"/>
+            <a:ext cx="11155680" cy="274320"/>
+          </a:xfrm>
+          <a:prstGeom prst="rect">
+            <a:avLst/>
+          </a:prstGeom>
+          <a:noFill/>
+        </p:spPr>
+        <p:txBody>
+          <a:bodyPr wrap="square" anchor="t">
+            <a:spAutoFit/>
+          </a:bodyPr>
+          <a:lstStyle/>
+          <a:p>
+            <a:pPr>
+              <a:spcAft>
+                <a:spcPts val="400"/>
+              </a:spcAft>
+            </a:pPr>
+            <a:r>
+              <a:rPr sz="1250" b="1">
+                <a:solidFill>
+                  <a:srgbClr val="142B53"/>
+                </a:solidFill>
+              </a:rPr>
+              <a:t>FUTURE SCOPE</a:t>
+            </a:r>
+          </a:p>
+        </p:txBody>
+      </p:sp>
+      <p:sp>
+        <p:nvSpPr>
+          <p:cNvPr id="31" name="Rounded Rectangle 30"/>
+          <p:cNvSpPr/>
+          <p:nvPr/>
+        </p:nvSpPr>
+        <p:spPr>
+          <a:xfrm>
+            <a:off x="548640" y="5239512"/>
+            <a:ext cx="3566160" cy="1097280"/>
+          </a:xfrm>
+          <a:prstGeom prst="roundRect">
+            <a:avLst/>
+          </a:prstGeom>
+          <a:solidFill>
+            <a:srgbClr val="E8F7EF"/>
+          </a:solidFill>
+          <a:ln w="15240">
+            <a:solidFill>
+              <a:srgbClr val="1E8E5A"/>
+            </a:solidFill>
+          </a:ln>
+          <a:effectLst/>
+        </p:spPr>
+        <p:style>
+          <a:lnRef idx="1">
+            <a:schemeClr val="accent1"/>
+          </a:lnRef>
+          <a:fillRef idx="3">
+            <a:schemeClr val="accent1"/>
+          </a:fillRef>
+          <a:effectRef idx="2">
+            <a:schemeClr val="accent1"/>
+          </a:effectRef>
+          <a:fontRef idx="minor">
+            <a:schemeClr val="lt1"/>
+          </a:fontRef>
+        </p:style>
+        <p:txBody>
+          <a:bodyPr rtlCol="0" anchor="ctr"/>
+          <a:lstStyle/>
+          <a:p/>
+        </p:txBody>
+      </p:sp>
+      <p:sp>
+        <p:nvSpPr>
+          <p:cNvPr id="32" name="TextBox 31"/>
+          <p:cNvSpPr txBox="1"/>
+          <p:nvPr/>
+        </p:nvSpPr>
+        <p:spPr>
+          <a:xfrm>
+            <a:off x="685800" y="5340096"/>
+            <a:ext cx="3291840" cy="960120"/>
+          </a:xfrm>
+          <a:prstGeom prst="rect">
+            <a:avLst/>
+          </a:prstGeom>
+          <a:noFill/>
+        </p:spPr>
+        <p:txBody>
+          <a:bodyPr wrap="square" anchor="t">
+            <a:spAutoFit/>
+          </a:bodyPr>
+          <a:lstStyle/>
+          <a:p>
+            <a:pPr>
+              <a:spcAft>
+                <a:spcPts val="400"/>
+              </a:spcAft>
+            </a:pPr>
+            <a:r>
+              <a:rPr sz="900" b="1">
+                <a:solidFill>
+                  <a:srgbClr val="1E8E5A"/>
+                </a:solidFill>
+              </a:rPr>
+              <a:t>Defeat video replay</a:t>
+            </a:r>
+          </a:p>
+          <a:p>
+            <a:pPr>
+              <a:spcAft>
+                <a:spcPts val="400"/>
+              </a:spcAft>
+            </a:pPr>
+            <a:r>
+              <a:rPr sz="900" b="0">
+                <a:solidFill>
+                  <a:srgbClr val="222A35"/>
+                </a:solidFill>
+              </a:rPr>
+              <a:t>A recorded face genuinely moves, so it still passes. A depth or texture-based anti-spoof model is the next step.</a:t>
+            </a:r>
+          </a:p>
+        </p:txBody>
+      </p:sp>
+      <p:sp>
+        <p:nvSpPr>
+          <p:cNvPr id="33" name="Rounded Rectangle 32"/>
+          <p:cNvSpPr/>
+          <p:nvPr/>
+        </p:nvSpPr>
+        <p:spPr>
+          <a:xfrm>
+            <a:off x="4343400" y="5239512"/>
+            <a:ext cx="3566160" cy="1097280"/>
+          </a:xfrm>
+          <a:prstGeom prst="roundRect">
+            <a:avLst/>
+          </a:prstGeom>
+          <a:solidFill>
+            <a:srgbClr val="E8F7EF"/>
+          </a:solidFill>
+          <a:ln w="15240">
+            <a:solidFill>
+              <a:srgbClr val="1E8E5A"/>
+            </a:solidFill>
+          </a:ln>
+          <a:effectLst/>
+        </p:spPr>
+        <p:style>
+          <a:lnRef idx="1">
+            <a:schemeClr val="accent1"/>
+          </a:lnRef>
+          <a:fillRef idx="3">
+            <a:schemeClr val="accent1"/>
+          </a:fillRef>
+          <a:effectRef idx="2">
+            <a:schemeClr val="accent1"/>
+          </a:effectRef>
+          <a:fontRef idx="minor">
+            <a:schemeClr val="lt1"/>
+          </a:fontRef>
+        </p:style>
+        <p:txBody>
+          <a:bodyPr rtlCol="0" anchor="ctr"/>
+          <a:lstStyle/>
+          <a:p/>
+        </p:txBody>
+      </p:sp>
+      <p:sp>
+        <p:nvSpPr>
+          <p:cNvPr id="34" name="TextBox 33"/>
+          <p:cNvSpPr txBox="1"/>
+          <p:nvPr/>
+        </p:nvSpPr>
+        <p:spPr>
+          <a:xfrm>
+            <a:off x="4480560" y="5340096"/>
+            <a:ext cx="3291840" cy="960120"/>
+          </a:xfrm>
+          <a:prstGeom prst="rect">
+            <a:avLst/>
+          </a:prstGeom>
+          <a:noFill/>
+        </p:spPr>
+        <p:txBody>
+          <a:bodyPr wrap="square" anchor="t">
+            <a:spAutoFit/>
+          </a:bodyPr>
+          <a:lstStyle/>
+          <a:p>
+            <a:pPr>
+              <a:spcAft>
+                <a:spcPts val="400"/>
+              </a:spcAft>
+            </a:pPr>
+            <a:r>
+              <a:rPr sz="900" b="1">
+                <a:solidFill>
+                  <a:srgbClr val="1E8E5A"/>
+                </a:solidFill>
+              </a:rPr>
+              <a:t>Enrol a real cohort</a:t>
+            </a:r>
+          </a:p>
+          <a:p>
+            <a:pPr>
+              <a:spcAft>
+                <a:spcPts val="400"/>
+              </a:spcAft>
+            </a:pPr>
+            <a:r>
+              <a:rPr sz="900" b="0">
+                <a:solidFill>
+                  <a:srgbClr val="222A35"/>
+                </a:solidFill>
+              </a:rPr>
+              <a:t>Only 2 real users today. 30+ enrolled students would let every claim be re-measured on real webcam data.</a:t>
+            </a:r>
+          </a:p>
+        </p:txBody>
+      </p:sp>
+      <p:sp>
+        <p:nvSpPr>
+          <p:cNvPr id="35" name="Rounded Rectangle 34"/>
+          <p:cNvSpPr/>
+          <p:nvPr/>
+        </p:nvSpPr>
+        <p:spPr>
+          <a:xfrm>
+            <a:off x="8138160" y="5239512"/>
+            <a:ext cx="3566160" cy="1097280"/>
+          </a:xfrm>
+          <a:prstGeom prst="roundRect">
+            <a:avLst/>
+          </a:prstGeom>
+          <a:solidFill>
+            <a:srgbClr val="E8F7EF"/>
+          </a:solidFill>
+          <a:ln w="15240">
+            <a:solidFill>
+              <a:srgbClr val="1E8E5A"/>
+            </a:solidFill>
+          </a:ln>
+          <a:effectLst/>
+        </p:spPr>
+        <p:style>
+          <a:lnRef idx="1">
+            <a:schemeClr val="accent1"/>
+          </a:lnRef>
+          <a:fillRef idx="3">
+            <a:schemeClr val="accent1"/>
+          </a:fillRef>
+          <a:effectRef idx="2">
+            <a:schemeClr val="accent1"/>
+          </a:effectRef>
+          <a:fontRef idx="minor">
+            <a:schemeClr val="lt1"/>
+          </a:fontRef>
+        </p:style>
+        <p:txBody>
+          <a:bodyPr rtlCol="0" anchor="ctr"/>
+          <a:lstStyle/>
+          <a:p/>
+        </p:txBody>
+      </p:sp>
+      <p:sp>
+        <p:nvSpPr>
+          <p:cNvPr id="36" name="TextBox 35"/>
+          <p:cNvSpPr txBox="1"/>
+          <p:nvPr/>
+        </p:nvSpPr>
+        <p:spPr>
+          <a:xfrm>
+            <a:off x="8275320" y="5340096"/>
+            <a:ext cx="3291840" cy="960120"/>
+          </a:xfrm>
+          <a:prstGeom prst="rect">
+            <a:avLst/>
+          </a:prstGeom>
+          <a:noFill/>
+        </p:spPr>
+        <p:txBody>
+          <a:bodyPr wrap="square" anchor="t">
+            <a:spAutoFit/>
+          </a:bodyPr>
+          <a:lstStyle/>
+          <a:p>
+            <a:pPr>
+              <a:spcAft>
+                <a:spcPts val="400"/>
+              </a:spcAft>
+            </a:pPr>
+            <a:r>
+              <a:rPr sz="900" b="1">
+                <a:solidFill>
+                  <a:srgbClr val="1E8E5A"/>
+                </a:solidFill>
+              </a:rPr>
+              <a:t>Store embeddings, not photos</a:t>
+            </a:r>
+          </a:p>
+          <a:p>
+            <a:pPr>
+              <a:spcAft>
+                <a:spcPts val="400"/>
+              </a:spcAft>
+            </a:pPr>
+            <a:r>
+              <a:rPr sz="900" b="0">
+                <a:solidFill>
+                  <a:srgbClr val="222A35"/>
+                </a:solidFill>
+              </a:rPr>
+              <a:t>A face cannot be reconstructed from a 512-d vector — a stolen database would leak nothing.</a:t>
+            </a:r>
+          </a:p>
+        </p:txBody>
+      </p:sp>
+      <p:sp>
+        <p:nvSpPr>
+          <p:cNvPr id="37" name="Rectangle 36"/>
+          <p:cNvSpPr/>
+          <p:nvPr/>
+        </p:nvSpPr>
+        <p:spPr>
+          <a:xfrm>
+            <a:off x="0" y="6473952"/>
+            <a:ext cx="12191695" cy="384048"/>
+          </a:xfrm>
+          <a:prstGeom prst="rect">
+            <a:avLst/>
+          </a:prstGeom>
+          <a:solidFill>
+            <a:srgbClr val="1F77C2"/>
+          </a:solidFill>
+          <a:ln>
+            <a:noFill/>
+          </a:ln>
+          <a:effectLst/>
+        </p:spPr>
+        <p:style>
+          <a:lnRef idx="1">
+            <a:schemeClr val="accent1"/>
+          </a:lnRef>
+          <a:fillRef idx="3">
+            <a:schemeClr val="accent1"/>
+          </a:fillRef>
+          <a:effectRef idx="2">
+            <a:schemeClr val="accent1"/>
+          </a:effectRef>
+          <a:fontRef idx="minor">
+            <a:schemeClr val="lt1"/>
+          </a:fontRef>
+        </p:style>
+        <p:txBody>
+          <a:bodyPr rtlCol="0" anchor="ctr"/>
+          <a:lstStyle/>
+          <a:p>
+            <a:pPr algn="ctr"/>
+          </a:p>
+        </p:txBody>
+      </p:sp>
+      <p:sp>
+        <p:nvSpPr>
+          <p:cNvPr id="38" name="TextBox 37"/>
+          <p:cNvSpPr txBox="1"/>
+          <p:nvPr/>
+        </p:nvSpPr>
+        <p:spPr>
+          <a:xfrm>
+            <a:off x="11338560" y="6492240"/>
+            <a:ext cx="731520" cy="347472"/>
+          </a:xfrm>
+          <a:prstGeom prst="rect">
+            <a:avLst/>
+          </a:prstGeom>
+          <a:noFill/>
+        </p:spPr>
+        <p:txBody>
+          <a:bodyPr wrap="none">
+            <a:spAutoFit/>
+          </a:bodyPr>
+          <a:lstStyle/>
+          <a:p>
+            <a:pPr algn="r"/>
+            <a:r>
+              <a:rPr sz="1100" b="1">
+                <a:solidFill>
+                  <a:srgbClr val="FFFFFF"/>
+                </a:solidFill>
+              </a:rPr>
+              <a:t>7</a:t>
+            </a:r>
+          </a:p>
+        </p:txBody>
+      </p:sp>
+    </p:spTree>
+  </p:cSld>
+  <p:clrMapOvr>
+    <a:masterClrMapping/>
+  </p:clrMapOvr>
+</p:sld>
+</file>
+
+<file path=ppt/slides/slide9.xml><?xml version="1.0" encoding="utf-8"?>
+<p:sld xmlns:a="http://schemas.openxmlformats.org/drawingml/2006/main" xmlns:p="http://schemas.openxmlformats.org/presentationml/2006/main" xmlns:r="http://schemas.openxmlformats.org/officeDocument/2006/relationships">
+  <p:cSld>
+    <p:spTree>
+      <p:nvGrpSpPr>
+        <p:cNvPr id="1" name=""/>
+        <p:cNvGrpSpPr/>
+        <p:nvPr/>
+      </p:nvGrpSpPr>
+      <p:grpSpPr/>
+      <p:sp>
+        <p:nvSpPr>
+          <p:cNvPr id="2" name="TextBox 1"/>
+          <p:cNvSpPr txBox="1"/>
+          <p:nvPr/>
+        </p:nvSpPr>
+        <p:spPr>
+          <a:xfrm>
+            <a:off x="411480" y="146304"/>
+            <a:ext cx="11338560" cy="548640"/>
+          </a:xfrm>
+          <a:prstGeom prst="rect">
+            <a:avLst/>
+          </a:prstGeom>
+          <a:noFill/>
+        </p:spPr>
+        <p:txBody>
+          <a:bodyPr wrap="none">
+            <a:spAutoFit/>
+          </a:bodyPr>
+          <a:lstStyle/>
+          <a:p>
+            <a:r>
+              <a:rPr sz="2500" b="1">
+                <a:solidFill>
+                  <a:srgbClr val="142B53"/>
+                </a:solidFill>
+              </a:rPr>
+              <a:t>IMPACTS AND BENEFITS</a:t>
+            </a:r>
+          </a:p>
+        </p:txBody>
+      </p:sp>
+      <p:sp>
+        <p:nvSpPr>
+          <p:cNvPr id="3" name="Rectangle 2"/>
+          <p:cNvSpPr/>
+          <p:nvPr/>
+        </p:nvSpPr>
+        <p:spPr>
+          <a:xfrm>
+            <a:off x="457200" y="676656"/>
+            <a:ext cx="1463040" cy="45720"/>
+          </a:xfrm>
+          <a:prstGeom prst="rect">
+            <a:avLst/>
+          </a:prstGeom>
+          <a:solidFill>
+            <a:srgbClr val="1F77C2"/>
+          </a:solidFill>
+          <a:ln>
+            <a:noFill/>
+          </a:ln>
+          <a:effectLst/>
+        </p:spPr>
+        <p:style>
+          <a:lnRef idx="1">
+            <a:schemeClr val="accent1"/>
+          </a:lnRef>
+          <a:fillRef idx="3">
+            <a:schemeClr val="accent1"/>
+          </a:fillRef>
+          <a:effectRef idx="2">
+            <a:schemeClr val="accent1"/>
+          </a:effectRef>
+          <a:fontRef idx="minor">
+            <a:schemeClr val="lt1"/>
+          </a:fontRef>
+        </p:style>
+        <p:txBody>
+          <a:bodyPr rtlCol="0" anchor="ctr"/>
+          <a:lstStyle/>
+          <a:p>
+            <a:pPr algn="ctr"/>
+          </a:p>
+        </p:txBody>
+      </p:sp>
+      <p:sp>
+        <p:nvSpPr>
+          <p:cNvPr id="4" name="Rounded Rectangle 3"/>
+          <p:cNvSpPr/>
+          <p:nvPr/>
+        </p:nvSpPr>
+        <p:spPr>
+          <a:xfrm>
+            <a:off x="548640" y="1280160"/>
+            <a:ext cx="3611880" cy="2148840"/>
+          </a:xfrm>
+          <a:prstGeom prst="roundRect">
+            <a:avLst/>
+          </a:prstGeom>
+          <a:solidFill>
+            <a:srgbClr val="E9F2FC"/>
+          </a:solidFill>
+          <a:ln w="15240">
+            <a:solidFill>
+              <a:srgbClr val="1F77C2"/>
+            </a:solidFill>
+          </a:ln>
+          <a:effectLst/>
+        </p:spPr>
+        <p:style>
+          <a:lnRef idx="1">
+            <a:schemeClr val="accent1"/>
+          </a:lnRef>
+          <a:fillRef idx="3">
+            <a:schemeClr val="accent1"/>
+          </a:fillRef>
+          <a:effectRef idx="2">
+            <a:schemeClr val="accent1"/>
+          </a:effectRef>
+          <a:fontRef idx="minor">
+            <a:schemeClr val="lt1"/>
+          </a:fontRef>
+        </p:style>
+        <p:txBody>
+          <a:bodyPr rtlCol="0" anchor="ctr"/>
+          <a:lstStyle/>
+          <a:p/>
+        </p:txBody>
+      </p:sp>
+      <p:sp>
+        <p:nvSpPr>
+          <p:cNvPr id="5" name="TextBox 4"/>
+          <p:cNvSpPr txBox="1"/>
+          <p:nvPr/>
+        </p:nvSpPr>
+        <p:spPr>
+          <a:xfrm>
+            <a:off x="694944" y="1399031"/>
+            <a:ext cx="3319272" cy="1965960"/>
+          </a:xfrm>
+          <a:prstGeom prst="rect">
+            <a:avLst/>
+          </a:prstGeom>
+          <a:noFill/>
+        </p:spPr>
+        <p:txBody>
+          <a:bodyPr wrap="square" anchor="t">
+            <a:spAutoFit/>
+          </a:bodyPr>
+          <a:lstStyle/>
+          <a:p>
+            <a:pPr>
+              <a:spcAft>
+                <a:spcPts val="400"/>
+              </a:spcAft>
+            </a:pPr>
+            <a:r>
+              <a:rPr sz="850" b="1">
+                <a:solidFill>
+                  <a:srgbClr val="1F77C2"/>
+                </a:solidFill>
+              </a:rPr>
+              <a:t>SOCIAL</a:t>
+            </a:r>
+          </a:p>
+          <a:p>
+            <a:pPr>
+              <a:spcAft>
+                <a:spcPts val="400"/>
+              </a:spcAft>
+            </a:pPr>
+          </a:p>
+          <a:p>
+            <a:pPr>
+              <a:spcAft>
+                <a:spcPts val="400"/>
+              </a:spcAft>
+            </a:pPr>
+            <a:r>
+              <a:rPr sz="850" b="0">
+                <a:solidFill>
+                  <a:srgbClr val="222A35"/>
+                </a:solidFill>
+              </a:rPr>
+              <a:t>~80 teaching hours returned per year (5 min × 200 days).</a:t>
+            </a:r>
+          </a:p>
+          <a:p>
+            <a:pPr>
+              <a:spcAft>
+                <a:spcPts val="400"/>
+              </a:spcAft>
+            </a:pPr>
+            <a:r>
+              <a:rPr sz="850" b="0">
+                <a:solidFill>
+                  <a:srgbClr val="222A35"/>
+                </a:solidFill>
+              </a:rPr>
+              <a:t>Contactless — no queue, no register passed around the room.</a:t>
+            </a:r>
+          </a:p>
+          <a:p>
+            <a:pPr>
+              <a:spcAft>
+                <a:spcPts val="400"/>
+              </a:spcAft>
+            </a:pPr>
+            <a:r>
+              <a:rPr sz="850" b="0">
+                <a:solidFill>
+                  <a:srgbClr val="222A35"/>
+                </a:solidFill>
+              </a:rPr>
+              <a:t>Manual proxy eliminated; photo proxy blocked (100% → 0%).</a:t>
+            </a:r>
+          </a:p>
+          <a:p>
+            <a:pPr>
+              <a:spcAft>
+                <a:spcPts val="400"/>
+              </a:spcAft>
+            </a:pPr>
+            <a:r>
+              <a:rPr sz="850" b="0">
+                <a:solidFill>
+                  <a:srgbClr val="222A35"/>
+                </a:solidFill>
+              </a:rPr>
+              <a:t>Video-replay proxy is NOT yet blocked — stated, not hidden.</a:t>
+            </a:r>
+          </a:p>
+        </p:txBody>
+      </p:sp>
+      <p:sp>
+        <p:nvSpPr>
+          <p:cNvPr id="6" name="Rounded Rectangle 5"/>
+          <p:cNvSpPr/>
+          <p:nvPr/>
+        </p:nvSpPr>
+        <p:spPr>
+          <a:xfrm>
+            <a:off x="4434840" y="1280160"/>
+            <a:ext cx="3611880" cy="2148840"/>
+          </a:xfrm>
+          <a:prstGeom prst="roundRect">
+            <a:avLst/>
+          </a:prstGeom>
+          <a:solidFill>
+            <a:srgbClr val="E8F7EF"/>
+          </a:solidFill>
+          <a:ln w="15240">
+            <a:solidFill>
+              <a:srgbClr val="1E8E5A"/>
+            </a:solidFill>
+          </a:ln>
+          <a:effectLst/>
+        </p:spPr>
+        <p:style>
+          <a:lnRef idx="1">
+            <a:schemeClr val="accent1"/>
+          </a:lnRef>
+          <a:fillRef idx="3">
+            <a:schemeClr val="accent1"/>
+          </a:fillRef>
+          <a:effectRef idx="2">
+            <a:schemeClr val="accent1"/>
+          </a:effectRef>
+          <a:fontRef idx="minor">
+            <a:schemeClr val="lt1"/>
+          </a:fontRef>
+        </p:style>
+        <p:txBody>
+          <a:bodyPr rtlCol="0" anchor="ctr"/>
+          <a:lstStyle/>
+          <a:p/>
+        </p:txBody>
+      </p:sp>
+      <p:sp>
+        <p:nvSpPr>
+          <p:cNvPr id="7" name="TextBox 6"/>
+          <p:cNvSpPr txBox="1"/>
+          <p:nvPr/>
+        </p:nvSpPr>
+        <p:spPr>
+          <a:xfrm>
+            <a:off x="4581144" y="1399031"/>
+            <a:ext cx="3319272" cy="1965960"/>
+          </a:xfrm>
+          <a:prstGeom prst="rect">
+            <a:avLst/>
+          </a:prstGeom>
+          <a:noFill/>
+        </p:spPr>
+        <p:txBody>
+          <a:bodyPr wrap="square" anchor="t">
+            <a:spAutoFit/>
+          </a:bodyPr>
+          <a:lstStyle/>
+          <a:p>
+            <a:pPr>
+              <a:spcAft>
+                <a:spcPts val="400"/>
+              </a:spcAft>
+            </a:pPr>
+            <a:r>
+              <a:rPr sz="850" b="1">
+                <a:solidFill>
+                  <a:srgbClr val="1E8E5A"/>
+                </a:solidFill>
+              </a:rPr>
+              <a:t>ECONOMIC</a:t>
+            </a:r>
+          </a:p>
+          <a:p>
+            <a:pPr>
+              <a:spcAft>
+                <a:spcPts val="400"/>
+              </a:spcAft>
+            </a:pPr>
+          </a:p>
+          <a:p>
+            <a:pPr>
+              <a:spcAft>
+                <a:spcPts val="400"/>
+              </a:spcAft>
+            </a:pPr>
+            <a:r>
+              <a:rPr sz="850" b="0">
+                <a:solidFill>
+                  <a:srgbClr val="222A35"/>
+                </a:solidFill>
+              </a:rPr>
+              <a:t>One laptop and one webcam. No GPU. No servers.</a:t>
+            </a:r>
+          </a:p>
+          <a:p>
+            <a:pPr>
+              <a:spcAft>
+                <a:spcPts val="400"/>
+              </a:spcAft>
+            </a:pPr>
+            <a:r>
+              <a:rPr sz="850" b="0">
+                <a:solidFill>
+                  <a:srgbClr val="222A35"/>
+                </a:solidFill>
+              </a:rPr>
+              <a:t>Recurring cost ≈ ₹0.</a:t>
+            </a:r>
+          </a:p>
+          <a:p>
+            <a:pPr>
+              <a:spcAft>
+                <a:spcPts val="400"/>
+              </a:spcAft>
+            </a:pPr>
+            <a:r>
+              <a:rPr sz="850" b="0">
+                <a:solidFill>
+                  <a:srgbClr val="222A35"/>
+                </a:solidFill>
+              </a:rPr>
+              <a:t>A cloud face API at ~$0.001/image, scanning continuously,</a:t>
+            </a:r>
+          </a:p>
+          <a:p>
+            <a:pPr>
+              <a:spcAft>
+                <a:spcPts val="400"/>
+              </a:spcAft>
+            </a:pPr>
+            <a:r>
+              <a:rPr sz="850" b="0">
+                <a:solidFill>
+                  <a:srgbClr val="222A35"/>
+                </a:solidFill>
+              </a:rPr>
+              <a:t>costs ≈ ₹1,50,000 per year, per school.</a:t>
+            </a:r>
+          </a:p>
+        </p:txBody>
+      </p:sp>
+      <p:sp>
+        <p:nvSpPr>
+          <p:cNvPr id="8" name="Rounded Rectangle 7"/>
+          <p:cNvSpPr/>
+          <p:nvPr/>
+        </p:nvSpPr>
+        <p:spPr>
+          <a:xfrm>
+            <a:off x="548640" y="3657600"/>
+            <a:ext cx="3611880" cy="2148840"/>
+          </a:xfrm>
+          <a:prstGeom prst="roundRect">
+            <a:avLst/>
+          </a:prstGeom>
+          <a:solidFill>
+            <a:srgbClr val="FDECEA"/>
+          </a:solidFill>
+          <a:ln w="15240">
+            <a:solidFill>
+              <a:srgbClr val="C0392B"/>
+            </a:solidFill>
+          </a:ln>
+          <a:effectLst/>
+        </p:spPr>
+        <p:style>
+          <a:lnRef idx="1">
+            <a:schemeClr val="accent1"/>
+          </a:lnRef>
+          <a:fillRef idx="3">
+            <a:schemeClr val="accent1"/>
+          </a:fillRef>
+          <a:effectRef idx="2">
+            <a:schemeClr val="accent1"/>
+          </a:effectRef>
+          <a:fontRef idx="minor">
+            <a:schemeClr val="lt1"/>
+          </a:fontRef>
+        </p:style>
+        <p:txBody>
+          <a:bodyPr rtlCol="0" anchor="ctr"/>
+          <a:lstStyle/>
+          <a:p/>
+        </p:txBody>
+      </p:sp>
+      <p:sp>
+        <p:nvSpPr>
+          <p:cNvPr id="9" name="TextBox 8"/>
+          <p:cNvSpPr txBox="1"/>
+          <p:nvPr/>
+        </p:nvSpPr>
+        <p:spPr>
+          <a:xfrm>
+            <a:off x="694944" y="3776472"/>
+            <a:ext cx="3319272" cy="1965960"/>
+          </a:xfrm>
+          <a:prstGeom prst="rect">
+            <a:avLst/>
+          </a:prstGeom>
+          <a:noFill/>
+        </p:spPr>
+        <p:txBody>
+          <a:bodyPr wrap="square" anchor="t">
+            <a:spAutoFit/>
+          </a:bodyPr>
+          <a:lstStyle/>
+          <a:p>
+            <a:pPr>
+              <a:spcAft>
+                <a:spcPts val="400"/>
+              </a:spcAft>
+            </a:pPr>
+            <a:r>
+              <a:rPr sz="850" b="1">
+                <a:solidFill>
+                  <a:srgbClr val="C0392B"/>
+                </a:solidFill>
+              </a:rPr>
+              <a:t>PRIVACY &amp; LEGAL</a:t>
+            </a:r>
+          </a:p>
+          <a:p>
+            <a:pPr>
+              <a:spcAft>
+                <a:spcPts val="400"/>
+              </a:spcAft>
+            </a:pPr>
+          </a:p>
+          <a:p>
+            <a:pPr>
+              <a:spcAft>
+                <a:spcPts val="400"/>
+              </a:spcAft>
+            </a:pPr>
+            <a:r>
+              <a:rPr sz="850" b="0">
+                <a:solidFill>
+                  <a:srgbClr val="222A35"/>
+                </a:solidFill>
+              </a:rPr>
+              <a:t>Runs fully offline. Student faces never leave the campus.</a:t>
+            </a:r>
+          </a:p>
+          <a:p>
+            <a:pPr>
+              <a:spcAft>
+                <a:spcPts val="400"/>
+              </a:spcAft>
+            </a:pPr>
+            <a:r>
+              <a:rPr sz="850" b="0">
+                <a:solidFill>
+                  <a:srgbClr val="222A35"/>
+                </a:solidFill>
+              </a:rPr>
+              <a:t>Under India's DPDP Act 2023, biometric data is sensitive</a:t>
+            </a:r>
+          </a:p>
+          <a:p>
+            <a:pPr>
+              <a:spcAft>
+                <a:spcPts val="400"/>
+              </a:spcAft>
+            </a:pPr>
+            <a:r>
+              <a:rPr sz="850" b="0">
+                <a:solidFill>
+                  <a:srgbClr val="222A35"/>
+                </a:solidFill>
+              </a:rPr>
+              <a:t>personal data — uploading children's faces to a third-party</a:t>
+            </a:r>
+          </a:p>
+          <a:p>
+            <a:pPr>
+              <a:spcAft>
+                <a:spcPts val="400"/>
+              </a:spcAft>
+            </a:pPr>
+            <a:r>
+              <a:rPr sz="850" b="0">
+                <a:solidFill>
+                  <a:srgbClr val="222A35"/>
+                </a:solidFill>
+              </a:rPr>
+              <a:t>cloud is a liability, not a feature.</a:t>
+            </a:r>
+          </a:p>
+        </p:txBody>
+      </p:sp>
+      <p:sp>
+        <p:nvSpPr>
+          <p:cNvPr id="10" name="Rounded Rectangle 9"/>
+          <p:cNvSpPr/>
+          <p:nvPr/>
+        </p:nvSpPr>
+        <p:spPr>
+          <a:xfrm>
+            <a:off x="4434840" y="3657600"/>
+            <a:ext cx="3611880" cy="2148840"/>
+          </a:xfrm>
+          <a:prstGeom prst="roundRect">
+            <a:avLst/>
+          </a:prstGeom>
+          <a:solidFill>
+            <a:srgbClr val="FEF5E3"/>
+          </a:solidFill>
+          <a:ln w="15240">
+            <a:solidFill>
+              <a:srgbClr val="B97A0B"/>
+            </a:solidFill>
+          </a:ln>
+          <a:effectLst/>
+        </p:spPr>
+        <p:style>
+          <a:lnRef idx="1">
+            <a:schemeClr val="accent1"/>
+          </a:lnRef>
+          <a:fillRef idx="3">
+            <a:schemeClr val="accent1"/>
+          </a:fillRef>
+          <a:effectRef idx="2">
+            <a:schemeClr val="accent1"/>
+          </a:effectRef>
+          <a:fontRef idx="minor">
+            <a:schemeClr val="lt1"/>
+          </a:fontRef>
+        </p:style>
+        <p:txBody>
+          <a:bodyPr rtlCol="0" anchor="ctr"/>
+          <a:lstStyle/>
+          <a:p/>
+        </p:txBody>
+      </p:sp>
+      <p:sp>
+        <p:nvSpPr>
+          <p:cNvPr id="11" name="TextBox 10"/>
+          <p:cNvSpPr txBox="1"/>
+          <p:nvPr/>
+        </p:nvSpPr>
+        <p:spPr>
+          <a:xfrm>
+            <a:off x="4581144" y="3776472"/>
+            <a:ext cx="3319272" cy="1965960"/>
+          </a:xfrm>
+          <a:prstGeom prst="rect">
+            <a:avLst/>
+          </a:prstGeom>
+          <a:noFill/>
+        </p:spPr>
+        <p:txBody>
+          <a:bodyPr wrap="square" anchor="t">
+            <a:spAutoFit/>
+          </a:bodyPr>
+          <a:lstStyle/>
+          <a:p>
+            <a:pPr>
+              <a:spcAft>
+                <a:spcPts val="400"/>
+              </a:spcAft>
+            </a:pPr>
+            <a:r>
+              <a:rPr sz="850" b="1">
+                <a:solidFill>
+                  <a:srgbClr val="B97A0B"/>
+                </a:solidFill>
+              </a:rPr>
+              <a:t>TECHNICAL</a:t>
+            </a:r>
+          </a:p>
+          <a:p>
+            <a:pPr>
+              <a:spcAft>
+                <a:spcPts val="400"/>
+              </a:spcAft>
+            </a:pPr>
+          </a:p>
+          <a:p>
+            <a:pPr>
+              <a:spcAft>
+                <a:spcPts val="400"/>
+              </a:spcAft>
+            </a:pPr>
+            <a:r>
+              <a:rPr sz="850" b="0">
+                <a:solidFill>
+                  <a:srgbClr val="222A35"/>
+                </a:solidFill>
+              </a:rPr>
+              <a:t>Every decision exposes its evidence: similarity score,</a:t>
+            </a:r>
+          </a:p>
+          <a:p>
+            <a:pPr>
+              <a:spcAft>
+                <a:spcPts val="400"/>
+              </a:spcAft>
+            </a:pPr>
+            <a:r>
+              <a:rPr sz="850" b="0">
+                <a:solidFill>
+                  <a:srgbClr val="222A35"/>
+                </a:solidFill>
+              </a:rPr>
+              <a:t>runner-up margin, face size, liveness verdict.</a:t>
+            </a:r>
+          </a:p>
+          <a:p>
+            <a:pPr>
+              <a:spcAft>
+                <a:spcPts val="400"/>
+              </a:spcAft>
+            </a:pPr>
+            <a:r>
+              <a:rPr sz="850" b="0">
+                <a:solidFill>
+                  <a:srgbClr val="222A35"/>
+                </a:solidFill>
+              </a:rPr>
+              <a:t>A disputed attendance record can be explained.</a:t>
+            </a:r>
+          </a:p>
+          <a:p>
+            <a:pPr>
+              <a:spcAft>
+                <a:spcPts val="400"/>
+              </a:spcAft>
+            </a:pPr>
+            <a:r>
+              <a:rPr sz="850" b="0">
+                <a:solidFill>
+                  <a:srgbClr val="222A35"/>
+                </a:solidFill>
+              </a:rPr>
+              <a:t>Commercial systems are black boxes.</a:t>
+            </a:r>
+          </a:p>
+        </p:txBody>
+      </p:sp>
+      <p:pic>
+        <p:nvPicPr>
+          <p:cNvPr id="12" name="Picture 11" descr="cost.png"/>
+          <p:cNvPicPr>
+            <a:picLocks noChangeAspect="1"/>
+          </p:cNvPicPr>
+          <p:nvPr/>
+        </p:nvPicPr>
+        <p:blipFill>
+          <a:blip r:embed="rId2"/>
+          <a:stretch>
+            <a:fillRect/>
+          </a:stretch>
+        </p:blipFill>
+        <p:spPr>
+          <a:xfrm>
+            <a:off x="8229600" y="3794760"/>
+            <a:ext cx="3423581" cy="2011680"/>
+          </a:xfrm>
+          <a:prstGeom prst="rect">
+            <a:avLst/>
+          </a:prstGeom>
+        </p:spPr>
+      </p:pic>
+      <p:sp>
+        <p:nvSpPr>
+          <p:cNvPr id="13" name="Rounded Rectangle 12"/>
+          <p:cNvSpPr/>
+          <p:nvPr/>
+        </p:nvSpPr>
+        <p:spPr>
+          <a:xfrm>
+            <a:off x="548640" y="5806440"/>
+            <a:ext cx="11109960" cy="548640"/>
+          </a:xfrm>
+          <a:prstGeom prst="roundRect">
+            <a:avLst/>
+          </a:prstGeom>
+          <a:solidFill>
+            <a:srgbClr val="F4F6F9"/>
+          </a:solidFill>
+          <a:ln w="15240">
+            <a:solidFill>
+              <a:srgbClr val="142B53"/>
+            </a:solidFill>
+          </a:ln>
+          <a:effectLst/>
+        </p:spPr>
+        <p:style>
+          <a:lnRef idx="1">
+            <a:schemeClr val="accent1"/>
+          </a:lnRef>
+          <a:fillRef idx="3">
+            <a:schemeClr val="accent1"/>
+          </a:fillRef>
+          <a:effectRef idx="2">
+            <a:schemeClr val="accent1"/>
+          </a:effectRef>
+          <a:fontRef idx="minor">
+            <a:schemeClr val="lt1"/>
+          </a:fontRef>
+        </p:style>
+        <p:txBody>
+          <a:bodyPr rtlCol="0" anchor="ctr"/>
+          <a:lstStyle/>
+          <a:p/>
+        </p:txBody>
+      </p:sp>
+      <p:sp>
+        <p:nvSpPr>
+          <p:cNvPr id="14" name="TextBox 13"/>
+          <p:cNvSpPr txBox="1"/>
+          <p:nvPr/>
+        </p:nvSpPr>
+        <p:spPr>
+          <a:xfrm>
+            <a:off x="713232" y="5897880"/>
+            <a:ext cx="10789920" cy="411480"/>
+          </a:xfrm>
+          <a:prstGeom prst="rect">
+            <a:avLst/>
+          </a:prstGeom>
+          <a:noFill/>
+        </p:spPr>
+        <p:txBody>
+          <a:bodyPr wrap="square" anchor="t">
+            <a:spAutoFit/>
+          </a:bodyPr>
+          <a:lstStyle/>
+          <a:p>
+            <a:pPr>
+              <a:spcAft>
+                <a:spcPts val="400"/>
+              </a:spcAft>
+            </a:pPr>
+            <a:r>
+              <a:rPr sz="1050" b="1">
+                <a:solidFill>
+                  <a:srgbClr val="142B53"/>
+                </a:solidFill>
+              </a:rPr>
+              <a:t>Target audience — schools and colleges that cannot afford a GPU or a cloud subscription, and cannot legally upload their students' faces to one.</a:t>
+            </a:r>
+          </a:p>
+        </p:txBody>
+      </p:sp>
+      <p:sp>
+        <p:nvSpPr>
+          <p:cNvPr id="15" name="Rectangle 14"/>
+          <p:cNvSpPr/>
+          <p:nvPr/>
+        </p:nvSpPr>
+        <p:spPr>
+          <a:xfrm>
+            <a:off x="0" y="6473952"/>
+            <a:ext cx="12191695" cy="384048"/>
+          </a:xfrm>
+          <a:prstGeom prst="rect">
+            <a:avLst/>
+          </a:prstGeom>
+          <a:solidFill>
+            <a:srgbClr val="1F77C2"/>
+          </a:solidFill>
+          <a:ln>
+            <a:noFill/>
+          </a:ln>
+          <a:effectLst/>
+        </p:spPr>
+        <p:style>
+          <a:lnRef idx="1">
+            <a:schemeClr val="accent1"/>
+          </a:lnRef>
+          <a:fillRef idx="3">
+            <a:schemeClr val="accent1"/>
+          </a:fillRef>
+          <a:effectRef idx="2">
+            <a:schemeClr val="accent1"/>
+          </a:effectRef>
+          <a:fontRef idx="minor">
+            <a:schemeClr val="lt1"/>
+          </a:fontRef>
+        </p:style>
+        <p:txBody>
+          <a:bodyPr rtlCol="0" anchor="ctr"/>
+          <a:lstStyle/>
+          <a:p>
+            <a:pPr algn="ctr"/>
+          </a:p>
+        </p:txBody>
+      </p:sp>
+      <p:sp>
+        <p:nvSpPr>
+          <p:cNvPr id="16" name="TextBox 15"/>
           <p:cNvSpPr txBox="1"/>
           <p:nvPr/>
         </p:nvSpPr>

--- a/Server/results/PresenceAI_Presentation.pptx
+++ b/Server/results/PresenceAI_Presentation.pptx
@@ -12,6 +12,10 @@
     <p:sldId id="260" r:id="rId11"/>
     <p:sldId id="261" r:id="rId12"/>
     <p:sldId id="262" r:id="rId13"/>
+    <p:sldId id="263" r:id="rId14"/>
+    <p:sldId id="264" r:id="rId15"/>
+    <p:sldId id="265" r:id="rId16"/>
+    <p:sldId id="266" r:id="rId17"/>
   </p:sldIdLst>
   <p:sldSz cx="12191695" cy="6858000" type="screen4x3"/>
   <p:notesSz cx="6858000" cy="9144000"/>
@@ -3118,9 +3122,9 @@
           <a:p>
             <a:pPr algn="ctr"/>
             <a:r>
-              <a:rPr sz="3400" b="1">
-                <a:solidFill>
-                  <a:srgbClr val="1F3A6E"/>
+              <a:rPr sz="3600" b="1">
+                <a:solidFill>
+                  <a:srgbClr val="1F3864"/>
                 </a:solidFill>
                 <a:latin typeface="Times New Roman"/>
               </a:rPr>
@@ -3130,9 +3134,9 @@
           <a:p>
             <a:pPr algn="ctr"/>
             <a:r>
-              <a:rPr sz="3400" b="1">
-                <a:solidFill>
-                  <a:srgbClr val="1F3A6E"/>
+              <a:rPr sz="3600" b="1">
+                <a:solidFill>
+                  <a:srgbClr val="1F3864"/>
                 </a:solidFill>
                 <a:latin typeface="Times New Roman"/>
               </a:rPr>
@@ -3149,8 +3153,8 @@
         </p:nvSpPr>
         <p:spPr>
           <a:xfrm>
-            <a:off x="2011680" y="1737360"/>
-            <a:ext cx="8229600" cy="731520"/>
+            <a:off x="1645920" y="1920240"/>
+            <a:ext cx="9144000" cy="2743200"/>
           </a:xfrm>
           <a:prstGeom prst="rect">
             <a:avLst/>
@@ -3158,40 +3162,116 @@
           <a:noFill/>
         </p:spPr>
         <p:txBody>
-          <a:bodyPr wrap="square">
+          <a:bodyPr wrap="square" anchor="t">
             <a:spAutoFit/>
           </a:bodyPr>
           <a:lstStyle/>
           <a:p>
             <a:pPr>
               <a:spcAft>
-                <a:spcPts val="600"/>
+                <a:spcPts val="500"/>
               </a:spcAft>
             </a:pPr>
             <a:r>
-              <a:rPr sz="1400" b="1">
+              <a:rPr sz="1400" b="1" i="0">
                 <a:solidFill>
                   <a:srgbClr val="000000"/>
                 </a:solidFill>
-                <a:latin typeface="Arial"/>
-              </a:rPr>
-              <a:t>Problem Statement Title -  Recognition alone cannot stop proxy attendance:</a:t>
+                <a:latin typeface="Calibri"/>
+              </a:rPr>
+              <a:t>Team Members' Name and Roll Number-</a:t>
             </a:r>
           </a:p>
           <a:p>
             <a:pPr>
               <a:spcAft>
-                <a:spcPts val="600"/>
+                <a:spcPts val="500"/>
               </a:spcAft>
             </a:pPr>
-            <a:r>
-              <a:rPr sz="1400" b="1">
-                <a:solidFill>
-                  <a:srgbClr val="C00000"/>
-                </a:solidFill>
-                <a:latin typeface="Arial"/>
-              </a:rPr>
-              <a:t>a printed photo is marked present 100% of the time.</a:t>
+          </a:p>
+          <a:p>
+            <a:pPr>
+              <a:spcAft>
+                <a:spcPts val="500"/>
+              </a:spcAft>
+            </a:pPr>
+            <a:r>
+              <a:rPr sz="1400" b="1" i="0">
+                <a:solidFill>
+                  <a:srgbClr val="000000"/>
+                </a:solidFill>
+                <a:latin typeface="Calibri"/>
+              </a:rPr>
+              <a:t>          1. Souryadeep Deb (13000222064)              2. Soham Bhattacharya (13000222065)</a:t>
+            </a:r>
+          </a:p>
+          <a:p>
+            <a:pPr>
+              <a:spcAft>
+                <a:spcPts val="500"/>
+              </a:spcAft>
+            </a:pPr>
+          </a:p>
+          <a:p>
+            <a:pPr>
+              <a:spcAft>
+                <a:spcPts val="500"/>
+              </a:spcAft>
+            </a:pPr>
+            <a:r>
+              <a:rPr sz="1400" b="1" i="0">
+                <a:solidFill>
+                  <a:srgbClr val="000000"/>
+                </a:solidFill>
+                <a:latin typeface="Calibri"/>
+              </a:rPr>
+              <a:t>          3. Srija Basak (13000222066)                  4. Sneha Singh (13000222067)</a:t>
+            </a:r>
+          </a:p>
+          <a:p>
+            <a:pPr>
+              <a:spcAft>
+                <a:spcPts val="500"/>
+              </a:spcAft>
+            </a:pPr>
+          </a:p>
+          <a:p>
+            <a:pPr>
+              <a:spcAft>
+                <a:spcPts val="500"/>
+              </a:spcAft>
+            </a:pPr>
+            <a:r>
+              <a:rPr sz="1400" b="1" i="0">
+                <a:solidFill>
+                  <a:srgbClr val="000000"/>
+                </a:solidFill>
+                <a:latin typeface="Calibri"/>
+              </a:rPr>
+              <a:t>Group Number-  18</a:t>
+            </a:r>
+          </a:p>
+          <a:p>
+            <a:pPr>
+              <a:spcAft>
+                <a:spcPts val="500"/>
+              </a:spcAft>
+            </a:pPr>
+          </a:p>
+          <a:p>
+            <a:pPr>
+              <a:spcAft>
+                <a:spcPts val="500"/>
+              </a:spcAft>
+            </a:pPr>
+            <a:r>
+              <a:rPr sz="1400" b="1" i="0">
+                <a:solidFill>
+                  <a:srgbClr val="000000"/>
+                </a:solidFill>
+                <a:latin typeface="Calibri"/>
+              </a:rPr>
+              <a:t>Mentor Name-  Mr Prodipta Bhowmik</a:t>
             </a:r>
           </a:p>
         </p:txBody>
@@ -3204,8 +3284,8 @@
         </p:nvSpPr>
         <p:spPr>
           <a:xfrm>
-            <a:off x="2011680" y="2606040"/>
-            <a:ext cx="8229600" cy="2286000"/>
+            <a:off x="4023360" y="5029200"/>
+            <a:ext cx="4206240" cy="1188720"/>
           </a:xfrm>
           <a:prstGeom prst="rect">
             <a:avLst/>
@@ -3213,116 +3293,748 @@
           <a:noFill/>
         </p:spPr>
         <p:txBody>
-          <a:bodyPr wrap="square">
+          <a:bodyPr wrap="square" anchor="t">
             <a:spAutoFit/>
           </a:bodyPr>
           <a:lstStyle/>
           <a:p>
+            <a:pPr algn="ctr">
+              <a:spcAft>
+                <a:spcPts val="500"/>
+              </a:spcAft>
+            </a:pPr>
+            <a:r>
+              <a:rPr sz="1400" b="1" i="0">
+                <a:solidFill>
+                  <a:srgbClr val="000000"/>
+                </a:solidFill>
+                <a:latin typeface="Calibri"/>
+              </a:rPr>
+              <a:t>Department of Information Technology</a:t>
+            </a:r>
+          </a:p>
+          <a:p>
+            <a:pPr algn="ctr">
+              <a:spcAft>
+                <a:spcPts val="500"/>
+              </a:spcAft>
+            </a:pPr>
+            <a:r>
+              <a:rPr sz="1400" b="1" i="0">
+                <a:solidFill>
+                  <a:srgbClr val="000000"/>
+                </a:solidFill>
+                <a:latin typeface="Calibri"/>
+              </a:rPr>
+              <a:t>Techno Main Salt Lake</a:t>
+            </a:r>
+          </a:p>
+          <a:p>
+            <a:pPr algn="ctr">
+              <a:spcAft>
+                <a:spcPts val="500"/>
+              </a:spcAft>
+            </a:pPr>
+            <a:r>
+              <a:rPr sz="1400" b="1" i="0">
+                <a:solidFill>
+                  <a:srgbClr val="000000"/>
+                </a:solidFill>
+                <a:latin typeface="Calibri"/>
+              </a:rPr>
+              <a:t>Kolkata -700091</a:t>
+            </a:r>
+          </a:p>
+        </p:txBody>
+      </p:sp>
+    </p:spTree>
+  </p:cSld>
+  <p:clrMapOvr>
+    <a:masterClrMapping/>
+  </p:clrMapOvr>
+</p:sld>
+</file>
+
+<file path=ppt/slides/slide10.xml><?xml version="1.0" encoding="utf-8"?>
+<p:sld xmlns:a="http://schemas.openxmlformats.org/drawingml/2006/main" xmlns:p="http://schemas.openxmlformats.org/presentationml/2006/main" xmlns:r="http://schemas.openxmlformats.org/officeDocument/2006/relationships">
+  <p:cSld>
+    <p:spTree>
+      <p:nvGrpSpPr>
+        <p:cNvPr id="1" name=""/>
+        <p:cNvGrpSpPr/>
+        <p:nvPr/>
+      </p:nvGrpSpPr>
+      <p:grpSpPr/>
+      <p:sp>
+        <p:nvSpPr>
+          <p:cNvPr id="2" name="TextBox 1"/>
+          <p:cNvSpPr txBox="1"/>
+          <p:nvPr/>
+        </p:nvSpPr>
+        <p:spPr>
+          <a:xfrm>
+            <a:off x="457200" y="109728"/>
+            <a:ext cx="11247120" cy="822960"/>
+          </a:xfrm>
+          <a:prstGeom prst="rect">
+            <a:avLst/>
+          </a:prstGeom>
+          <a:noFill/>
+        </p:spPr>
+        <p:txBody>
+          <a:bodyPr wrap="none">
+            <a:spAutoFit/>
+          </a:bodyPr>
+          <a:lstStyle/>
+          <a:p>
+            <a:pPr algn="ctr"/>
+            <a:r>
+              <a:rPr sz="3600" b="1">
+                <a:solidFill>
+                  <a:srgbClr val="1F3864"/>
+                </a:solidFill>
+                <a:latin typeface="Times New Roman"/>
+              </a:rPr>
+              <a:t>REFERENCES</a:t>
+            </a:r>
+          </a:p>
+        </p:txBody>
+      </p:sp>
+      <p:sp>
+        <p:nvSpPr>
+          <p:cNvPr id="3" name="Rounded Rectangle 2"/>
+          <p:cNvSpPr/>
+          <p:nvPr/>
+        </p:nvSpPr>
+        <p:spPr>
+          <a:xfrm>
+            <a:off x="457200" y="1005840"/>
+            <a:ext cx="11247120" cy="502920"/>
+          </a:xfrm>
+          <a:prstGeom prst="roundRect">
+            <a:avLst/>
+          </a:prstGeom>
+          <a:solidFill>
+            <a:srgbClr val="FFFFFF"/>
+          </a:solidFill>
+          <a:ln w="12700">
+            <a:solidFill>
+              <a:srgbClr val="2E75B6"/>
+            </a:solidFill>
+          </a:ln>
+          <a:effectLst/>
+        </p:spPr>
+        <p:style>
+          <a:lnRef idx="1">
+            <a:schemeClr val="accent1"/>
+          </a:lnRef>
+          <a:fillRef idx="3">
+            <a:schemeClr val="accent1"/>
+          </a:fillRef>
+          <a:effectRef idx="2">
+            <a:schemeClr val="accent1"/>
+          </a:effectRef>
+          <a:fontRef idx="minor">
+            <a:schemeClr val="lt1"/>
+          </a:fontRef>
+        </p:style>
+        <p:txBody>
+          <a:bodyPr rtlCol="0" anchor="ctr"/>
+          <a:lstStyle/>
+          <a:p/>
+        </p:txBody>
+      </p:sp>
+      <p:sp>
+        <p:nvSpPr>
+          <p:cNvPr id="4" name="TextBox 3"/>
+          <p:cNvSpPr txBox="1"/>
+          <p:nvPr/>
+        </p:nvSpPr>
+        <p:spPr>
+          <a:xfrm>
+            <a:off x="594360" y="1088136"/>
+            <a:ext cx="10972800" cy="384048"/>
+          </a:xfrm>
+          <a:prstGeom prst="rect">
+            <a:avLst/>
+          </a:prstGeom>
+          <a:noFill/>
+        </p:spPr>
+        <p:txBody>
+          <a:bodyPr wrap="square" anchor="t">
+            <a:spAutoFit/>
+          </a:bodyPr>
+          <a:lstStyle/>
+          <a:p>
             <a:pPr>
               <a:spcAft>
-                <a:spcPts val="600"/>
+                <a:spcPts val="500"/>
               </a:spcAft>
             </a:pPr>
             <a:r>
-              <a:rPr sz="1400" b="1">
-                <a:solidFill>
-                  <a:srgbClr val="000000"/>
-                </a:solidFill>
-                <a:latin typeface="Arial"/>
-              </a:rPr>
-              <a:t>Team Members' Name and Roll Number -</a:t>
-            </a:r>
-          </a:p>
+              <a:rPr sz="1000" b="0" i="0">
+                <a:solidFill>
+                  <a:srgbClr val="1A1A1A"/>
+                </a:solidFill>
+                <a:latin typeface="Calibri"/>
+              </a:rPr>
+              <a:t>1.  D'Souza, J. W. S., et al. (2019). Automated Attendance Marking and Management System by Facial Recognition Using Histogram. Array, 3–4: 100014.  DOI: 10.1016/j.array.2019.100014</a:t>
+            </a:r>
+          </a:p>
+        </p:txBody>
+      </p:sp>
+      <p:sp>
+        <p:nvSpPr>
+          <p:cNvPr id="5" name="Rounded Rectangle 4"/>
+          <p:cNvSpPr/>
+          <p:nvPr/>
+        </p:nvSpPr>
+        <p:spPr>
+          <a:xfrm>
+            <a:off x="457200" y="1581912"/>
+            <a:ext cx="11247120" cy="502920"/>
+          </a:xfrm>
+          <a:prstGeom prst="roundRect">
+            <a:avLst/>
+          </a:prstGeom>
+          <a:solidFill>
+            <a:srgbClr val="FFFFFF"/>
+          </a:solidFill>
+          <a:ln w="12700">
+            <a:solidFill>
+              <a:srgbClr val="2E75B6"/>
+            </a:solidFill>
+          </a:ln>
+          <a:effectLst/>
+        </p:spPr>
+        <p:style>
+          <a:lnRef idx="1">
+            <a:schemeClr val="accent1"/>
+          </a:lnRef>
+          <a:fillRef idx="3">
+            <a:schemeClr val="accent1"/>
+          </a:fillRef>
+          <a:effectRef idx="2">
+            <a:schemeClr val="accent1"/>
+          </a:effectRef>
+          <a:fontRef idx="minor">
+            <a:schemeClr val="lt1"/>
+          </a:fontRef>
+        </p:style>
+        <p:txBody>
+          <a:bodyPr rtlCol="0" anchor="ctr"/>
+          <a:lstStyle/>
+          <a:p/>
+        </p:txBody>
+      </p:sp>
+      <p:sp>
+        <p:nvSpPr>
+          <p:cNvPr id="6" name="TextBox 5"/>
+          <p:cNvSpPr txBox="1"/>
+          <p:nvPr/>
+        </p:nvSpPr>
+        <p:spPr>
+          <a:xfrm>
+            <a:off x="594360" y="1664208"/>
+            <a:ext cx="10972800" cy="384048"/>
+          </a:xfrm>
+          <a:prstGeom prst="rect">
+            <a:avLst/>
+          </a:prstGeom>
+          <a:noFill/>
+        </p:spPr>
+        <p:txBody>
+          <a:bodyPr wrap="square" anchor="t">
+            <a:spAutoFit/>
+          </a:bodyPr>
+          <a:lstStyle/>
           <a:p>
             <a:pPr>
               <a:spcAft>
-                <a:spcPts val="600"/>
+                <a:spcPts val="500"/>
               </a:spcAft>
             </a:pPr>
             <a:r>
-              <a:rPr sz="1400" b="0">
+              <a:rPr sz="1000" b="0" i="0">
                 <a:solidFill>
                   <a:srgbClr val="1A1A1A"/>
                 </a:solidFill>
-                <a:latin typeface="Arial"/>
-              </a:rPr>
-              <a:t>        1. Souryadeep Deb (13000222064)            2. Soham Bhattacharya (13000222065)</a:t>
-            </a:r>
-          </a:p>
+                <a:latin typeface="Calibri"/>
+              </a:rPr>
+              <a:t>2.  Arsenovic, M., Sladojevic, S., Anderla, A., Stefanovic, D. (2017). FaceTime — Deep Learning Based Face Recognition Attendance System. IEEE SISY 2017, pp. 53–58.  DOI: 10.1109/SISY.2017.8080587</a:t>
+            </a:r>
+          </a:p>
+        </p:txBody>
+      </p:sp>
+      <p:sp>
+        <p:nvSpPr>
+          <p:cNvPr id="7" name="Rounded Rectangle 6"/>
+          <p:cNvSpPr/>
+          <p:nvPr/>
+        </p:nvSpPr>
+        <p:spPr>
+          <a:xfrm>
+            <a:off x="457200" y="2157984"/>
+            <a:ext cx="11247120" cy="502920"/>
+          </a:xfrm>
+          <a:prstGeom prst="roundRect">
+            <a:avLst/>
+          </a:prstGeom>
+          <a:solidFill>
+            <a:srgbClr val="FFFFFF"/>
+          </a:solidFill>
+          <a:ln w="12700">
+            <a:solidFill>
+              <a:srgbClr val="2E75B6"/>
+            </a:solidFill>
+          </a:ln>
+          <a:effectLst/>
+        </p:spPr>
+        <p:style>
+          <a:lnRef idx="1">
+            <a:schemeClr val="accent1"/>
+          </a:lnRef>
+          <a:fillRef idx="3">
+            <a:schemeClr val="accent1"/>
+          </a:fillRef>
+          <a:effectRef idx="2">
+            <a:schemeClr val="accent1"/>
+          </a:effectRef>
+          <a:fontRef idx="minor">
+            <a:schemeClr val="lt1"/>
+          </a:fontRef>
+        </p:style>
+        <p:txBody>
+          <a:bodyPr rtlCol="0" anchor="ctr"/>
+          <a:lstStyle/>
+          <a:p/>
+        </p:txBody>
+      </p:sp>
+      <p:sp>
+        <p:nvSpPr>
+          <p:cNvPr id="8" name="TextBox 7"/>
+          <p:cNvSpPr txBox="1"/>
+          <p:nvPr/>
+        </p:nvSpPr>
+        <p:spPr>
+          <a:xfrm>
+            <a:off x="594360" y="2240280"/>
+            <a:ext cx="10972800" cy="384048"/>
+          </a:xfrm>
+          <a:prstGeom prst="rect">
+            <a:avLst/>
+          </a:prstGeom>
+          <a:noFill/>
+        </p:spPr>
+        <p:txBody>
+          <a:bodyPr wrap="square" anchor="t">
+            <a:spAutoFit/>
+          </a:bodyPr>
+          <a:lstStyle/>
           <a:p>
             <a:pPr>
               <a:spcAft>
-                <a:spcPts val="600"/>
+                <a:spcPts val="500"/>
               </a:spcAft>
             </a:pPr>
             <a:r>
-              <a:rPr sz="1400" b="0">
+              <a:rPr sz="1000" b="0" i="0">
                 <a:solidFill>
                   <a:srgbClr val="1A1A1A"/>
                 </a:solidFill>
-                <a:latin typeface="Arial"/>
-              </a:rPr>
-              <a:t>        3. Srija Basak (13000222066)                4. Sneha Singh (13000222067)</a:t>
-            </a:r>
-          </a:p>
+                <a:latin typeface="Calibri"/>
+              </a:rPr>
+              <a:t>3.  Kakarla, S., Gangula, P., Rahul, M. S., Singh, C. S. C., Sarma, T. H. (2020). Smart Attendance Management System Based on Face Recognition Using CNN. IEEE-HYDCON 2020, pp. 1–5.  DOI: 10.1109/HYDCON48903.2020.9242847</a:t>
+            </a:r>
+          </a:p>
+        </p:txBody>
+      </p:sp>
+      <p:sp>
+        <p:nvSpPr>
+          <p:cNvPr id="9" name="Rounded Rectangle 8"/>
+          <p:cNvSpPr/>
+          <p:nvPr/>
+        </p:nvSpPr>
+        <p:spPr>
+          <a:xfrm>
+            <a:off x="457200" y="2734056"/>
+            <a:ext cx="11247120" cy="502920"/>
+          </a:xfrm>
+          <a:prstGeom prst="roundRect">
+            <a:avLst/>
+          </a:prstGeom>
+          <a:solidFill>
+            <a:srgbClr val="FFFFFF"/>
+          </a:solidFill>
+          <a:ln w="12700">
+            <a:solidFill>
+              <a:srgbClr val="2E75B6"/>
+            </a:solidFill>
+          </a:ln>
+          <a:effectLst/>
+        </p:spPr>
+        <p:style>
+          <a:lnRef idx="1">
+            <a:schemeClr val="accent1"/>
+          </a:lnRef>
+          <a:fillRef idx="3">
+            <a:schemeClr val="accent1"/>
+          </a:fillRef>
+          <a:effectRef idx="2">
+            <a:schemeClr val="accent1"/>
+          </a:effectRef>
+          <a:fontRef idx="minor">
+            <a:schemeClr val="lt1"/>
+          </a:fontRef>
+        </p:style>
+        <p:txBody>
+          <a:bodyPr rtlCol="0" anchor="ctr"/>
+          <a:lstStyle/>
+          <a:p/>
+        </p:txBody>
+      </p:sp>
+      <p:sp>
+        <p:nvSpPr>
+          <p:cNvPr id="10" name="TextBox 9"/>
+          <p:cNvSpPr txBox="1"/>
+          <p:nvPr/>
+        </p:nvSpPr>
+        <p:spPr>
+          <a:xfrm>
+            <a:off x="594360" y="2816352"/>
+            <a:ext cx="10972800" cy="384048"/>
+          </a:xfrm>
+          <a:prstGeom prst="rect">
+            <a:avLst/>
+          </a:prstGeom>
+          <a:noFill/>
+        </p:spPr>
+        <p:txBody>
+          <a:bodyPr wrap="square" anchor="t">
+            <a:spAutoFit/>
+          </a:bodyPr>
+          <a:lstStyle/>
           <a:p>
             <a:pPr>
               <a:spcAft>
-                <a:spcPts val="600"/>
+                <a:spcPts val="500"/>
               </a:spcAft>
             </a:pPr>
-          </a:p>
+            <a:r>
+              <a:rPr sz="1000" b="0" i="0">
+                <a:solidFill>
+                  <a:srgbClr val="1A1A1A"/>
+                </a:solidFill>
+                <a:latin typeface="Calibri"/>
+              </a:rPr>
+              <a:t>4.  Varadharajan, E., Dharani, R., Jeevitha, S., Kavinmathi, B., Hemalatha, S. (2016). Automatic Attendance Management System Using Face Detection. IC-GET 2016, pp. 1–3.  DOI: 10.1109/GET.2016.7916753</a:t>
+            </a:r>
+          </a:p>
+        </p:txBody>
+      </p:sp>
+      <p:sp>
+        <p:nvSpPr>
+          <p:cNvPr id="11" name="Rounded Rectangle 10"/>
+          <p:cNvSpPr/>
+          <p:nvPr/>
+        </p:nvSpPr>
+        <p:spPr>
+          <a:xfrm>
+            <a:off x="457200" y="3310128"/>
+            <a:ext cx="11247120" cy="502920"/>
+          </a:xfrm>
+          <a:prstGeom prst="roundRect">
+            <a:avLst/>
+          </a:prstGeom>
+          <a:solidFill>
+            <a:srgbClr val="FFFFFF"/>
+          </a:solidFill>
+          <a:ln w="12700">
+            <a:solidFill>
+              <a:srgbClr val="2E75B6"/>
+            </a:solidFill>
+          </a:ln>
+          <a:effectLst/>
+        </p:spPr>
+        <p:style>
+          <a:lnRef idx="1">
+            <a:schemeClr val="accent1"/>
+          </a:lnRef>
+          <a:fillRef idx="3">
+            <a:schemeClr val="accent1"/>
+          </a:fillRef>
+          <a:effectRef idx="2">
+            <a:schemeClr val="accent1"/>
+          </a:effectRef>
+          <a:fontRef idx="minor">
+            <a:schemeClr val="lt1"/>
+          </a:fontRef>
+        </p:style>
+        <p:txBody>
+          <a:bodyPr rtlCol="0" anchor="ctr"/>
+          <a:lstStyle/>
+          <a:p/>
+        </p:txBody>
+      </p:sp>
+      <p:sp>
+        <p:nvSpPr>
+          <p:cNvPr id="12" name="TextBox 11"/>
+          <p:cNvSpPr txBox="1"/>
+          <p:nvPr/>
+        </p:nvSpPr>
+        <p:spPr>
+          <a:xfrm>
+            <a:off x="594360" y="3392424"/>
+            <a:ext cx="10972800" cy="384048"/>
+          </a:xfrm>
+          <a:prstGeom prst="rect">
+            <a:avLst/>
+          </a:prstGeom>
+          <a:noFill/>
+        </p:spPr>
+        <p:txBody>
+          <a:bodyPr wrap="square" anchor="t">
+            <a:spAutoFit/>
+          </a:bodyPr>
+          <a:lstStyle/>
           <a:p>
             <a:pPr>
               <a:spcAft>
-                <a:spcPts val="600"/>
+                <a:spcPts val="500"/>
               </a:spcAft>
             </a:pPr>
             <a:r>
-              <a:rPr sz="1400" b="1">
-                <a:solidFill>
-                  <a:srgbClr val="000000"/>
-                </a:solidFill>
-                <a:latin typeface="Arial"/>
-              </a:rPr>
-              <a:t>Group Number -  18</a:t>
-            </a:r>
-          </a:p>
+              <a:rPr sz="1000" b="0" i="0">
+                <a:solidFill>
+                  <a:srgbClr val="1A1A1A"/>
+                </a:solidFill>
+                <a:latin typeface="Calibri"/>
+              </a:rPr>
+              <a:t>5.  Siswanto, A. R. S., Nugroho, A. S., Galinium, M. (2014). Implementation of Face Recognition Algorithm for Biometrics Based Time Attendance System. ICISS 2014, pp. 149–154.  DOI: 10.1109/ICTSS.2014.7013165</a:t>
+            </a:r>
+          </a:p>
+        </p:txBody>
+      </p:sp>
+      <p:sp>
+        <p:nvSpPr>
+          <p:cNvPr id="13" name="Rounded Rectangle 12"/>
+          <p:cNvSpPr/>
+          <p:nvPr/>
+        </p:nvSpPr>
+        <p:spPr>
+          <a:xfrm>
+            <a:off x="457200" y="3886200"/>
+            <a:ext cx="11247120" cy="502920"/>
+          </a:xfrm>
+          <a:prstGeom prst="roundRect">
+            <a:avLst/>
+          </a:prstGeom>
+          <a:solidFill>
+            <a:srgbClr val="FFFFFF"/>
+          </a:solidFill>
+          <a:ln w="12700">
+            <a:solidFill>
+              <a:srgbClr val="2E75B6"/>
+            </a:solidFill>
+          </a:ln>
+          <a:effectLst/>
+        </p:spPr>
+        <p:style>
+          <a:lnRef idx="1">
+            <a:schemeClr val="accent1"/>
+          </a:lnRef>
+          <a:fillRef idx="3">
+            <a:schemeClr val="accent1"/>
+          </a:fillRef>
+          <a:effectRef idx="2">
+            <a:schemeClr val="accent1"/>
+          </a:effectRef>
+          <a:fontRef idx="minor">
+            <a:schemeClr val="lt1"/>
+          </a:fontRef>
+        </p:style>
+        <p:txBody>
+          <a:bodyPr rtlCol="0" anchor="ctr"/>
+          <a:lstStyle/>
+          <a:p/>
+        </p:txBody>
+      </p:sp>
+      <p:sp>
+        <p:nvSpPr>
+          <p:cNvPr id="14" name="TextBox 13"/>
+          <p:cNvSpPr txBox="1"/>
+          <p:nvPr/>
+        </p:nvSpPr>
+        <p:spPr>
+          <a:xfrm>
+            <a:off x="594360" y="3968496"/>
+            <a:ext cx="10972800" cy="384048"/>
+          </a:xfrm>
+          <a:prstGeom prst="rect">
+            <a:avLst/>
+          </a:prstGeom>
+          <a:noFill/>
+        </p:spPr>
+        <p:txBody>
+          <a:bodyPr wrap="square" anchor="t">
+            <a:spAutoFit/>
+          </a:bodyPr>
+          <a:lstStyle/>
           <a:p>
             <a:pPr>
               <a:spcAft>
-                <a:spcPts val="600"/>
+                <a:spcPts val="500"/>
               </a:spcAft>
             </a:pPr>
-          </a:p>
+            <a:r>
+              <a:rPr sz="1000" b="0" i="0">
+                <a:solidFill>
+                  <a:srgbClr val="C00000"/>
+                </a:solidFill>
+                <a:latin typeface="Calibri"/>
+              </a:rPr>
+              <a:t>6.  Deng, J., Guo, J., Xue, N., Zafeiriou, S. (2019). ArcFace: Additive Angular Margin Loss for Deep Face Recognition. CVPR 2019, pp. 4690–4699.  DOI: 10.1109/CVPR.2019.00482    ← the model this system uses</a:t>
+            </a:r>
+          </a:p>
+        </p:txBody>
+      </p:sp>
+      <p:sp>
+        <p:nvSpPr>
+          <p:cNvPr id="15" name="Rounded Rectangle 14"/>
+          <p:cNvSpPr/>
+          <p:nvPr/>
+        </p:nvSpPr>
+        <p:spPr>
+          <a:xfrm>
+            <a:off x="457200" y="4462272"/>
+            <a:ext cx="11247120" cy="502920"/>
+          </a:xfrm>
+          <a:prstGeom prst="roundRect">
+            <a:avLst/>
+          </a:prstGeom>
+          <a:solidFill>
+            <a:srgbClr val="FFFFFF"/>
+          </a:solidFill>
+          <a:ln w="12700">
+            <a:solidFill>
+              <a:srgbClr val="2E75B6"/>
+            </a:solidFill>
+          </a:ln>
+          <a:effectLst/>
+        </p:spPr>
+        <p:style>
+          <a:lnRef idx="1">
+            <a:schemeClr val="accent1"/>
+          </a:lnRef>
+          <a:fillRef idx="3">
+            <a:schemeClr val="accent1"/>
+          </a:fillRef>
+          <a:effectRef idx="2">
+            <a:schemeClr val="accent1"/>
+          </a:effectRef>
+          <a:fontRef idx="minor">
+            <a:schemeClr val="lt1"/>
+          </a:fontRef>
+        </p:style>
+        <p:txBody>
+          <a:bodyPr rtlCol="0" anchor="ctr"/>
+          <a:lstStyle/>
+          <a:p/>
+        </p:txBody>
+      </p:sp>
+      <p:sp>
+        <p:nvSpPr>
+          <p:cNvPr id="16" name="TextBox 15"/>
+          <p:cNvSpPr txBox="1"/>
+          <p:nvPr/>
+        </p:nvSpPr>
+        <p:spPr>
+          <a:xfrm>
+            <a:off x="594360" y="4544568"/>
+            <a:ext cx="10972800" cy="384048"/>
+          </a:xfrm>
+          <a:prstGeom prst="rect">
+            <a:avLst/>
+          </a:prstGeom>
+          <a:noFill/>
+        </p:spPr>
+        <p:txBody>
+          <a:bodyPr wrap="square" anchor="t">
+            <a:spAutoFit/>
+          </a:bodyPr>
+          <a:lstStyle/>
           <a:p>
             <a:pPr>
               <a:spcAft>
-                <a:spcPts val="600"/>
+                <a:spcPts val="500"/>
               </a:spcAft>
             </a:pPr>
             <a:r>
-              <a:rPr sz="1400" b="1">
-                <a:solidFill>
-                  <a:srgbClr val="000000"/>
-                </a:solidFill>
-                <a:latin typeface="Arial"/>
-              </a:rPr>
-              <a:t>Mentor Name -  Mr Prodipta Bhowmik</a:t>
-            </a:r>
-          </a:p>
-        </p:txBody>
-      </p:sp>
-      <p:sp>
-        <p:nvSpPr>
-          <p:cNvPr id="5" name="TextBox 4"/>
+              <a:rPr sz="1000" b="0" i="0">
+                <a:solidFill>
+                  <a:srgbClr val="1A1A1A"/>
+                </a:solidFill>
+                <a:latin typeface="Calibri"/>
+              </a:rPr>
+              <a:t>7.  Deng, J., Guo, J., Ververas, E., Kotsia, I., Zafeiriou, S. (2020). RetinaFace: Single-Shot Multi-Level Face Localisation in the Wild. CVPR 2020.  DOI: 10.1109/CVPR42600.2020.00525</a:t>
+            </a:r>
+          </a:p>
+        </p:txBody>
+      </p:sp>
+      <p:sp>
+        <p:nvSpPr>
+          <p:cNvPr id="17" name="Rounded Rectangle 16"/>
+          <p:cNvSpPr/>
+          <p:nvPr/>
+        </p:nvSpPr>
+        <p:spPr>
+          <a:xfrm>
+            <a:off x="457200" y="5038344"/>
+            <a:ext cx="11247120" cy="502920"/>
+          </a:xfrm>
+          <a:prstGeom prst="roundRect">
+            <a:avLst/>
+          </a:prstGeom>
+          <a:solidFill>
+            <a:srgbClr val="FFFFFF"/>
+          </a:solidFill>
+          <a:ln w="12700">
+            <a:solidFill>
+              <a:srgbClr val="2E75B6"/>
+            </a:solidFill>
+          </a:ln>
+          <a:effectLst/>
+        </p:spPr>
+        <p:style>
+          <a:lnRef idx="1">
+            <a:schemeClr val="accent1"/>
+          </a:lnRef>
+          <a:fillRef idx="3">
+            <a:schemeClr val="accent1"/>
+          </a:fillRef>
+          <a:effectRef idx="2">
+            <a:schemeClr val="accent1"/>
+          </a:effectRef>
+          <a:fontRef idx="minor">
+            <a:schemeClr val="lt1"/>
+          </a:fontRef>
+        </p:style>
+        <p:txBody>
+          <a:bodyPr rtlCol="0" anchor="ctr"/>
+          <a:lstStyle/>
+          <a:p/>
+        </p:txBody>
+      </p:sp>
+      <p:sp>
+        <p:nvSpPr>
+          <p:cNvPr id="18" name="TextBox 17"/>
           <p:cNvSpPr txBox="1"/>
           <p:nvPr/>
         </p:nvSpPr>
         <p:spPr>
           <a:xfrm>
-            <a:off x="4023360" y="4983480"/>
-            <a:ext cx="4206240" cy="1188720"/>
+            <a:off x="594360" y="5120640"/>
+            <a:ext cx="10972800" cy="384048"/>
           </a:xfrm>
           <a:prstGeom prst="rect">
             <a:avLst/>
@@ -3330,56 +4042,318 @@
           <a:noFill/>
         </p:spPr>
         <p:txBody>
-          <a:bodyPr wrap="square">
+          <a:bodyPr wrap="square" anchor="t">
             <a:spAutoFit/>
           </a:bodyPr>
           <a:lstStyle/>
           <a:p>
-            <a:pPr algn="ctr">
+            <a:pPr>
               <a:spcAft>
-                <a:spcPts val="600"/>
+                <a:spcPts val="500"/>
               </a:spcAft>
             </a:pPr>
             <a:r>
-              <a:rPr sz="1300" b="1">
-                <a:solidFill>
-                  <a:srgbClr val="000000"/>
-                </a:solidFill>
-                <a:latin typeface="Arial"/>
-              </a:rPr>
-              <a:t>Department of Information Technology</a:t>
-            </a:r>
-          </a:p>
-          <a:p>
-            <a:pPr algn="ctr">
+              <a:rPr sz="1000" b="0" i="0">
+                <a:solidFill>
+                  <a:srgbClr val="C00000"/>
+                </a:solidFill>
+                <a:latin typeface="Calibri"/>
+              </a:rPr>
+              <a:t>8.  Pan, G., Sun, L., Wu, Z., Lao, S. (2007). Eyeblink-based Anti-Spoofing in Face Recognition from a Generic Webcamera. ICCV 2007, pp. 1–8.  DOI: 10.1109/ICCV.2007.4409068</a:t>
+            </a:r>
+          </a:p>
+        </p:txBody>
+      </p:sp>
+      <p:sp>
+        <p:nvSpPr>
+          <p:cNvPr id="19" name="Rounded Rectangle 18"/>
+          <p:cNvSpPr/>
+          <p:nvPr/>
+        </p:nvSpPr>
+        <p:spPr>
+          <a:xfrm>
+            <a:off x="457200" y="5614416"/>
+            <a:ext cx="11247120" cy="502920"/>
+          </a:xfrm>
+          <a:prstGeom prst="roundRect">
+            <a:avLst/>
+          </a:prstGeom>
+          <a:solidFill>
+            <a:srgbClr val="FFFFFF"/>
+          </a:solidFill>
+          <a:ln w="12700">
+            <a:solidFill>
+              <a:srgbClr val="2E75B6"/>
+            </a:solidFill>
+          </a:ln>
+          <a:effectLst/>
+        </p:spPr>
+        <p:style>
+          <a:lnRef idx="1">
+            <a:schemeClr val="accent1"/>
+          </a:lnRef>
+          <a:fillRef idx="3">
+            <a:schemeClr val="accent1"/>
+          </a:fillRef>
+          <a:effectRef idx="2">
+            <a:schemeClr val="accent1"/>
+          </a:effectRef>
+          <a:fontRef idx="minor">
+            <a:schemeClr val="lt1"/>
+          </a:fontRef>
+        </p:style>
+        <p:txBody>
+          <a:bodyPr rtlCol="0" anchor="ctr"/>
+          <a:lstStyle/>
+          <a:p/>
+        </p:txBody>
+      </p:sp>
+      <p:sp>
+        <p:nvSpPr>
+          <p:cNvPr id="20" name="TextBox 19"/>
+          <p:cNvSpPr txBox="1"/>
+          <p:nvPr/>
+        </p:nvSpPr>
+        <p:spPr>
+          <a:xfrm>
+            <a:off x="594360" y="5696712"/>
+            <a:ext cx="10972800" cy="384048"/>
+          </a:xfrm>
+          <a:prstGeom prst="rect">
+            <a:avLst/>
+          </a:prstGeom>
+          <a:noFill/>
+        </p:spPr>
+        <p:txBody>
+          <a:bodyPr wrap="square" anchor="t">
+            <a:spAutoFit/>
+          </a:bodyPr>
+          <a:lstStyle/>
+          <a:p>
+            <a:pPr>
               <a:spcAft>
-                <a:spcPts val="600"/>
+                <a:spcPts val="500"/>
               </a:spcAft>
             </a:pPr>
             <a:r>
-              <a:rPr sz="1300" b="1">
+              <a:rPr sz="1000" b="0" i="0">
+                <a:solidFill>
+                  <a:srgbClr val="C00000"/>
+                </a:solidFill>
+                <a:latin typeface="Calibri"/>
+              </a:rPr>
+              <a:t>9.  ISO/IEC 30107-3:2023 — Biometric presentation attack detection — Part 3: Testing and reporting.</a:t>
+            </a:r>
+          </a:p>
+        </p:txBody>
+      </p:sp>
+      <p:sp>
+        <p:nvSpPr>
+          <p:cNvPr id="21" name="Rectangle 20"/>
+          <p:cNvSpPr/>
+          <p:nvPr/>
+        </p:nvSpPr>
+        <p:spPr>
+          <a:xfrm>
+            <a:off x="0" y="6355080"/>
+            <a:ext cx="12191695" cy="502920"/>
+          </a:xfrm>
+          <a:prstGeom prst="rect">
+            <a:avLst/>
+          </a:prstGeom>
+          <a:solidFill>
+            <a:srgbClr val="1076BC"/>
+          </a:solidFill>
+          <a:ln>
+            <a:noFill/>
+          </a:ln>
+          <a:effectLst/>
+        </p:spPr>
+        <p:style>
+          <a:lnRef idx="1">
+            <a:schemeClr val="accent1"/>
+          </a:lnRef>
+          <a:fillRef idx="3">
+            <a:schemeClr val="accent1"/>
+          </a:fillRef>
+          <a:effectRef idx="2">
+            <a:schemeClr val="accent1"/>
+          </a:effectRef>
+          <a:fontRef idx="minor">
+            <a:schemeClr val="lt1"/>
+          </a:fontRef>
+        </p:style>
+        <p:txBody>
+          <a:bodyPr rtlCol="0" anchor="ctr"/>
+          <a:lstStyle/>
+          <a:p>
+            <a:pPr algn="ctr"/>
+          </a:p>
+        </p:txBody>
+      </p:sp>
+      <p:sp>
+        <p:nvSpPr>
+          <p:cNvPr id="22" name="TextBox 21"/>
+          <p:cNvSpPr txBox="1"/>
+          <p:nvPr/>
+        </p:nvSpPr>
+        <p:spPr>
+          <a:xfrm>
+            <a:off x="11247120" y="6419088"/>
+            <a:ext cx="777240" cy="365760"/>
+          </a:xfrm>
+          <a:prstGeom prst="rect">
+            <a:avLst/>
+          </a:prstGeom>
+          <a:noFill/>
+        </p:spPr>
+        <p:txBody>
+          <a:bodyPr wrap="none">
+            <a:spAutoFit/>
+          </a:bodyPr>
+          <a:lstStyle/>
+          <a:p>
+            <a:pPr algn="r"/>
+            <a:r>
+              <a:rPr sz="1200" b="1">
+                <a:solidFill>
+                  <a:srgbClr val="FFFFFF"/>
+                </a:solidFill>
+                <a:latin typeface="Calibri"/>
+              </a:rPr>
+              <a:t>9</a:t>
+            </a:r>
+          </a:p>
+        </p:txBody>
+      </p:sp>
+    </p:spTree>
+  </p:cSld>
+  <p:clrMapOvr>
+    <a:masterClrMapping/>
+  </p:clrMapOvr>
+</p:sld>
+</file>
+
+<file path=ppt/slides/slide11.xml><?xml version="1.0" encoding="utf-8"?>
+<p:sld xmlns:a="http://schemas.openxmlformats.org/drawingml/2006/main" xmlns:p="http://schemas.openxmlformats.org/presentationml/2006/main" xmlns:r="http://schemas.openxmlformats.org/officeDocument/2006/relationships">
+  <p:cSld>
+    <p:spTree>
+      <p:nvGrpSpPr>
+        <p:cNvPr id="1" name=""/>
+        <p:cNvGrpSpPr/>
+        <p:nvPr/>
+      </p:nvGrpSpPr>
+      <p:grpSpPr/>
+      <p:sp>
+        <p:nvSpPr>
+          <p:cNvPr id="2" name="TextBox 1"/>
+          <p:cNvSpPr txBox="1"/>
+          <p:nvPr/>
+        </p:nvSpPr>
+        <p:spPr>
+          <a:xfrm>
+            <a:off x="731520" y="2651760"/>
+            <a:ext cx="10698480" cy="1280160"/>
+          </a:xfrm>
+          <a:prstGeom prst="rect">
+            <a:avLst/>
+          </a:prstGeom>
+          <a:noFill/>
+        </p:spPr>
+        <p:txBody>
+          <a:bodyPr wrap="none">
+            <a:spAutoFit/>
+          </a:bodyPr>
+          <a:lstStyle/>
+          <a:p>
+            <a:pPr algn="ctr"/>
+            <a:r>
+              <a:rPr sz="5400" b="1" i="1">
                 <a:solidFill>
                   <a:srgbClr val="000000"/>
                 </a:solidFill>
-                <a:latin typeface="Arial"/>
-              </a:rPr>
-              <a:t>Techno Main Salt Lake</a:t>
-            </a:r>
-          </a:p>
-          <a:p>
-            <a:pPr algn="ctr">
-              <a:spcAft>
-                <a:spcPts val="600"/>
-              </a:spcAft>
-            </a:pPr>
-            <a:r>
-              <a:rPr sz="1300" b="1">
-                <a:solidFill>
-                  <a:srgbClr val="000000"/>
-                </a:solidFill>
-                <a:latin typeface="Arial"/>
-              </a:rPr>
-              <a:t>Kolkata -700091</a:t>
+                <a:latin typeface="Times New Roman"/>
+              </a:rPr>
+              <a:t>THANK YOU</a:t>
+            </a:r>
+          </a:p>
+        </p:txBody>
+      </p:sp>
+      <p:sp>
+        <p:nvSpPr>
+          <p:cNvPr id="3" name="Rectangle 2"/>
+          <p:cNvSpPr/>
+          <p:nvPr/>
+        </p:nvSpPr>
+        <p:spPr>
+          <a:xfrm>
+            <a:off x="0" y="6355080"/>
+            <a:ext cx="12191695" cy="502920"/>
+          </a:xfrm>
+          <a:prstGeom prst="rect">
+            <a:avLst/>
+          </a:prstGeom>
+          <a:solidFill>
+            <a:srgbClr val="1076BC"/>
+          </a:solidFill>
+          <a:ln>
+            <a:noFill/>
+          </a:ln>
+          <a:effectLst/>
+        </p:spPr>
+        <p:style>
+          <a:lnRef idx="1">
+            <a:schemeClr val="accent1"/>
+          </a:lnRef>
+          <a:fillRef idx="3">
+            <a:schemeClr val="accent1"/>
+          </a:fillRef>
+          <a:effectRef idx="2">
+            <a:schemeClr val="accent1"/>
+          </a:effectRef>
+          <a:fontRef idx="minor">
+            <a:schemeClr val="lt1"/>
+          </a:fontRef>
+        </p:style>
+        <p:txBody>
+          <a:bodyPr rtlCol="0" anchor="ctr"/>
+          <a:lstStyle/>
+          <a:p>
+            <a:pPr algn="ctr"/>
+          </a:p>
+        </p:txBody>
+      </p:sp>
+      <p:sp>
+        <p:nvSpPr>
+          <p:cNvPr id="4" name="TextBox 3"/>
+          <p:cNvSpPr txBox="1"/>
+          <p:nvPr/>
+        </p:nvSpPr>
+        <p:spPr>
+          <a:xfrm>
+            <a:off x="11247120" y="6419088"/>
+            <a:ext cx="777240" cy="365760"/>
+          </a:xfrm>
+          <a:prstGeom prst="rect">
+            <a:avLst/>
+          </a:prstGeom>
+          <a:noFill/>
+        </p:spPr>
+        <p:txBody>
+          <a:bodyPr wrap="none">
+            <a:spAutoFit/>
+          </a:bodyPr>
+          <a:lstStyle/>
+          <a:p>
+            <a:pPr algn="r"/>
+            <a:r>
+              <a:rPr sz="1200" b="1">
+                <a:solidFill>
+                  <a:srgbClr val="FFFFFF"/>
+                </a:solidFill>
+                <a:latin typeface="Calibri"/>
+              </a:rPr>
+              <a:t>10</a:t>
             </a:r>
           </a:p>
         </p:txBody>
@@ -3410,8 +4384,8 @@
         </p:nvSpPr>
         <p:spPr>
           <a:xfrm>
-            <a:off x="548640" y="109728"/>
-            <a:ext cx="11064240" cy="777240"/>
+            <a:off x="457200" y="109728"/>
+            <a:ext cx="11247120" cy="822960"/>
           </a:xfrm>
           <a:prstGeom prst="rect">
             <a:avLst/>
@@ -3419,20 +4393,20 @@
           <a:noFill/>
         </p:spPr>
         <p:txBody>
-          <a:bodyPr wrap="square">
+          <a:bodyPr wrap="none">
             <a:spAutoFit/>
           </a:bodyPr>
           <a:lstStyle/>
           <a:p>
             <a:pPr algn="ctr"/>
             <a:r>
-              <a:rPr sz="3400" b="1">
-                <a:solidFill>
-                  <a:srgbClr val="000000"/>
+              <a:rPr sz="3600" b="1">
+                <a:solidFill>
+                  <a:srgbClr val="1F3864"/>
                 </a:solidFill>
                 <a:latin typeface="Times New Roman"/>
               </a:rPr>
-              <a:t>IDEA TITLE</a:t>
+              <a:t>PROJECT TITLE</a:t>
             </a:r>
           </a:p>
         </p:txBody>
@@ -3445,8 +4419,8 @@
         </p:nvSpPr>
         <p:spPr>
           <a:xfrm>
-            <a:off x="548640" y="914400"/>
-            <a:ext cx="11064240" cy="365760"/>
+            <a:off x="914400" y="1051560"/>
+            <a:ext cx="10332720" cy="457200"/>
           </a:xfrm>
           <a:prstGeom prst="rect">
             <a:avLst/>
@@ -3454,24 +4428,24 @@
           <a:noFill/>
         </p:spPr>
         <p:txBody>
-          <a:bodyPr wrap="square">
+          <a:bodyPr wrap="square" anchor="t">
             <a:spAutoFit/>
           </a:bodyPr>
           <a:lstStyle/>
           <a:p>
-            <a:pPr>
+            <a:pPr algn="ctr">
               <a:spcAft>
-                <a:spcPts val="600"/>
+                <a:spcPts val="500"/>
               </a:spcAft>
             </a:pPr>
             <a:r>
-              <a:rPr sz="1900" b="1">
-                <a:solidFill>
-                  <a:srgbClr val="1F3A6E"/>
-                </a:solidFill>
-                <a:latin typeface="Arial"/>
-              </a:rPr>
-              <a:t>❖ Proposed Solution</a:t>
+              <a:rPr sz="2000" b="0" i="1">
+                <a:solidFill>
+                  <a:srgbClr val="1F3864"/>
+                </a:solidFill>
+                <a:latin typeface="Calibri"/>
+              </a:rPr>
+              <a:t>Automatic Attendance System using Multiple Face Recognition</a:t>
             </a:r>
           </a:p>
         </p:txBody>
@@ -3484,8 +4458,8 @@
         </p:nvSpPr>
         <p:spPr>
           <a:xfrm>
-            <a:off x="685800" y="1325880"/>
-            <a:ext cx="10972800" cy="1005840"/>
+            <a:off x="914400" y="1600200"/>
+            <a:ext cx="10332720" cy="411480"/>
           </a:xfrm>
           <a:prstGeom prst="rect">
             <a:avLst/>
@@ -3493,102 +4467,31 @@
           <a:noFill/>
         </p:spPr>
         <p:txBody>
-          <a:bodyPr wrap="square">
+          <a:bodyPr wrap="square" anchor="t">
             <a:spAutoFit/>
           </a:bodyPr>
           <a:lstStyle/>
           <a:p>
-            <a:pPr>
+            <a:pPr algn="ctr">
               <a:spcAft>
-                <a:spcPts val="600"/>
+                <a:spcPts val="500"/>
               </a:spcAft>
             </a:pPr>
             <a:r>
-              <a:rPr sz="1400" b="0">
-                <a:solidFill>
-                  <a:srgbClr val="1A1A1A"/>
-                </a:solidFill>
-                <a:latin typeface="Arial"/>
-              </a:rPr>
-              <a:t>•  Detect and recognise EVERY face in one frame  (RetinaFace + ArcFace, 512-d).</a:t>
-            </a:r>
-          </a:p>
-          <a:p>
-            <a:pPr>
-              <a:spcAft>
-                <a:spcPts val="600"/>
-              </a:spcAft>
-            </a:pPr>
-            <a:r>
-              <a:rPr sz="1400" b="0">
-                <a:solidFill>
-                  <a:srgbClr val="1A1A1A"/>
-                </a:solidFill>
-                <a:latin typeface="Arial"/>
-              </a:rPr>
-              <a:t>•  A face must pass FOUR gates — size, threshold, margin, liveness — before it gets a name.</a:t>
-            </a:r>
-          </a:p>
-          <a:p>
-            <a:pPr>
-              <a:spcAft>
-                <a:spcPts val="600"/>
-              </a:spcAft>
-            </a:pPr>
-            <a:r>
-              <a:rPr sz="1400" b="0">
-                <a:solidFill>
-                  <a:srgbClr val="1A1A1A"/>
-                </a:solidFill>
-                <a:latin typeface="Arial"/>
-              </a:rPr>
-              <a:t>•  Attendance is committed only when 3 frames agree.  Runs offline on a laptop CPU.</a:t>
-            </a:r>
-          </a:p>
-        </p:txBody>
-      </p:sp>
-      <p:sp>
-        <p:nvSpPr>
-          <p:cNvPr id="5" name="TextBox 4"/>
-          <p:cNvSpPr txBox="1"/>
-          <p:nvPr/>
-        </p:nvSpPr>
-        <p:spPr>
-          <a:xfrm>
-            <a:off x="548640" y="2377440"/>
-            <a:ext cx="11064240" cy="365760"/>
-          </a:xfrm>
-          <a:prstGeom prst="rect">
-            <a:avLst/>
-          </a:prstGeom>
-          <a:noFill/>
-        </p:spPr>
-        <p:txBody>
-          <a:bodyPr wrap="square">
-            <a:spAutoFit/>
-          </a:bodyPr>
-          <a:lstStyle/>
-          <a:p>
-            <a:pPr>
-              <a:spcAft>
-                <a:spcPts val="600"/>
-              </a:spcAft>
-            </a:pPr>
-            <a:r>
-              <a:rPr sz="1900" b="1">
-                <a:solidFill>
-                  <a:srgbClr val="1F3A6E"/>
-                </a:solidFill>
-                <a:latin typeface="Arial"/>
-              </a:rPr>
-              <a:t>❖ How it addresses the problem</a:t>
+              <a:rPr sz="1500" b="1" i="0">
+                <a:solidFill>
+                  <a:srgbClr val="C00000"/>
+                </a:solidFill>
+                <a:latin typeface="Calibri"/>
+              </a:rPr>
+              <a:t>Spoof-Resistant Multi-Face Attendance with Liveness-Gated Commit</a:t>
             </a:r>
           </a:p>
         </p:txBody>
       </p:sp>
       <p:pic>
         <p:nvPicPr>
-          <p:cNvPr id="6" name="Picture 5" descr="attack.png"/>
+          <p:cNvPr id="5" name="Picture 4" descr="attack.png"/>
           <p:cNvPicPr>
             <a:picLocks noChangeAspect="1"/>
           </p:cNvPicPr>
@@ -3602,14 +4505,58 @@
         </p:blipFill>
         <p:spPr>
           <a:xfrm>
-            <a:off x="1737360" y="2788920"/>
-            <a:ext cx="8686800" cy="2033081"/>
+            <a:off x="1920240" y="2194560"/>
+            <a:ext cx="8321040" cy="2121865"/>
           </a:xfrm>
           <a:prstGeom prst="rect">
             <a:avLst/>
           </a:prstGeom>
         </p:spPr>
       </p:pic>
+      <p:sp>
+        <p:nvSpPr>
+          <p:cNvPr id="6" name="Rounded Rectangle 5"/>
+          <p:cNvSpPr/>
+          <p:nvPr/>
+        </p:nvSpPr>
+        <p:spPr>
+          <a:xfrm>
+            <a:off x="1920240" y="4846320"/>
+            <a:ext cx="8321040" cy="960120"/>
+          </a:xfrm>
+          <a:prstGeom prst="roundRect">
+            <a:avLst/>
+          </a:prstGeom>
+          <a:solidFill>
+            <a:srgbClr val="FFFFFF"/>
+          </a:solidFill>
+          <a:ln w="19050">
+            <a:solidFill>
+              <a:srgbClr val="C00000"/>
+            </a:solidFill>
+          </a:ln>
+          <a:effectLst/>
+        </p:spPr>
+        <p:style>
+          <a:lnRef idx="1">
+            <a:schemeClr val="accent1"/>
+          </a:lnRef>
+          <a:fillRef idx="3">
+            <a:schemeClr val="accent1"/>
+          </a:fillRef>
+          <a:effectRef idx="2">
+            <a:schemeClr val="accent1"/>
+          </a:effectRef>
+          <a:fontRef idx="minor">
+            <a:schemeClr val="lt1"/>
+          </a:fontRef>
+        </p:style>
+        <p:txBody>
+          <a:bodyPr rtlCol="0" anchor="ctr"/>
+          <a:lstStyle/>
+          <a:p/>
+        </p:txBody>
+      </p:sp>
       <p:sp>
         <p:nvSpPr>
           <p:cNvPr id="7" name="TextBox 6"/>
@@ -3618,8 +4565,8 @@
         </p:nvSpPr>
         <p:spPr>
           <a:xfrm>
-            <a:off x="548640" y="4754880"/>
-            <a:ext cx="11064240" cy="365760"/>
+            <a:off x="2103120" y="4983480"/>
+            <a:ext cx="7955279" cy="777240"/>
           </a:xfrm>
           <a:prstGeom prst="rect">
             <a:avLst/>
@@ -3627,118 +4574,47 @@
           <a:noFill/>
         </p:spPr>
         <p:txBody>
-          <a:bodyPr wrap="square">
+          <a:bodyPr wrap="square" anchor="t">
             <a:spAutoFit/>
           </a:bodyPr>
           <a:lstStyle/>
           <a:p>
-            <a:pPr>
+            <a:pPr algn="ctr">
               <a:spcAft>
-                <a:spcPts val="600"/>
+                <a:spcPts val="500"/>
               </a:spcAft>
             </a:pPr>
             <a:r>
-              <a:rPr sz="1900" b="1">
-                <a:solidFill>
-                  <a:srgbClr val="1F3A6E"/>
-                </a:solidFill>
-                <a:latin typeface="Arial"/>
-              </a:rPr>
-              <a:t>❖ Innovation and uniqueness</a:t>
-            </a:r>
-          </a:p>
-        </p:txBody>
-      </p:sp>
-      <p:sp>
-        <p:nvSpPr>
-          <p:cNvPr id="8" name="TextBox 7"/>
-          <p:cNvSpPr txBox="1"/>
-          <p:nvPr/>
-        </p:nvSpPr>
-        <p:spPr>
-          <a:xfrm>
-            <a:off x="685800" y="5166360"/>
-            <a:ext cx="10972800" cy="1097280"/>
-          </a:xfrm>
-          <a:prstGeom prst="rect">
-            <a:avLst/>
-          </a:prstGeom>
-          <a:noFill/>
-        </p:spPr>
-        <p:txBody>
-          <a:bodyPr wrap="square">
-            <a:spAutoFit/>
-          </a:bodyPr>
-          <a:lstStyle/>
-          <a:p>
-            <a:pPr>
+              <a:rPr sz="1400" b="1" i="0">
+                <a:solidFill>
+                  <a:srgbClr val="C00000"/>
+                </a:solidFill>
+                <a:latin typeface="Calibri"/>
+              </a:rPr>
+              <a:t>We tested it: a printed photograph was marked present 100% of the time.</a:t>
+            </a:r>
+          </a:p>
+          <a:p>
+            <a:pPr algn="ctr">
               <a:spcAft>
-                <a:spcPts val="600"/>
+                <a:spcPts val="500"/>
               </a:spcAft>
             </a:pPr>
             <a:r>
-              <a:rPr sz="1300" b="1">
-                <a:solidFill>
-                  <a:srgbClr val="C00000"/>
-                </a:solidFill>
-                <a:latin typeface="Arial"/>
-              </a:rPr>
-              <a:t>•  We do NOT claim a new face model — ArcFace is pretrained and frozen.</a:t>
-            </a:r>
-          </a:p>
-          <a:p>
-            <a:pPr>
-              <a:spcAft>
-                <a:spcPts val="600"/>
-              </a:spcAft>
-            </a:pPr>
-            <a:r>
-              <a:rPr sz="1300" b="0">
+              <a:rPr sz="1400" b="0" i="0">
                 <a:solidFill>
                   <a:srgbClr val="1A1A1A"/>
                 </a:solidFill>
-                <a:latin typeface="Arial"/>
-              </a:rPr>
-              <a:t>•  Liveness that works at 1.4 frames/sec, where blink detection provably fails.</a:t>
-            </a:r>
-          </a:p>
-          <a:p>
-            <a:pPr>
-              <a:spcAft>
-                <a:spcPts val="600"/>
-              </a:spcAft>
-            </a:pPr>
-            <a:r>
-              <a:rPr sz="1300" b="0">
-                <a:solidFill>
-                  <a:srgbClr val="1A1A1A"/>
-                </a:solidFill>
-                <a:latin typeface="Arial"/>
-              </a:rPr>
-              <a:t>•  Threshold calibrated on 2,880 impostor faces — not hand-picked.</a:t>
-            </a:r>
-          </a:p>
-          <a:p>
-            <a:pPr>
-              <a:spcAft>
-                <a:spcPts val="600"/>
-              </a:spcAft>
-            </a:pPr>
-            <a:r>
-              <a:rPr sz="1300" b="0">
-                <a:solidFill>
-                  <a:srgbClr val="1A1A1A"/>
-                </a:solidFill>
-                <a:latin typeface="Arial"/>
-              </a:rPr>
-              <a:t>•  Attendance treated as an irreversible commit.   Enrolment:  607 s → 1.4 s.</a:t>
-            </a:r>
-          </a:p>
-        </p:txBody>
-      </p:sp>
-      <p:sp>
-        <p:nvSpPr>
-          <p:cNvPr id="9" name="Rectangle 8"/>
+                <a:latin typeface="Calibri"/>
+              </a:rPr>
+              <a:t>This project is about closing that gap.</a:t>
+            </a:r>
+          </a:p>
+        </p:txBody>
+      </p:sp>
+      <p:sp>
+        <p:nvSpPr>
+          <p:cNvPr id="8" name="Rectangle 7"/>
           <p:cNvSpPr/>
           <p:nvPr/>
         </p:nvSpPr>
@@ -3782,7 +4658,7 @@
       </p:sp>
       <p:sp>
         <p:nvSpPr>
-          <p:cNvPr id="10" name="TextBox 9"/>
+          <p:cNvPr id="9" name="TextBox 8"/>
           <p:cNvSpPr txBox="1"/>
           <p:nvPr/>
         </p:nvSpPr>
@@ -3808,9 +4684,9 @@
                 <a:solidFill>
                   <a:srgbClr val="FFFFFF"/>
                 </a:solidFill>
-                <a:latin typeface="Arial"/>
-              </a:rPr>
-              <a:t>2</a:t>
+                <a:latin typeface="Calibri"/>
+              </a:rPr>
+              <a:t>1</a:t>
             </a:r>
           </a:p>
         </p:txBody>
@@ -3841,8 +4717,8 @@
         </p:nvSpPr>
         <p:spPr>
           <a:xfrm>
-            <a:off x="548640" y="109728"/>
-            <a:ext cx="11064240" cy="777240"/>
+            <a:off x="457200" y="109728"/>
+            <a:ext cx="11247120" cy="822960"/>
           </a:xfrm>
           <a:prstGeom prst="rect">
             <a:avLst/>
@@ -3850,34 +4726,78 @@
           <a:noFill/>
         </p:spPr>
         <p:txBody>
-          <a:bodyPr wrap="square">
+          <a:bodyPr wrap="none">
             <a:spAutoFit/>
           </a:bodyPr>
           <a:lstStyle/>
           <a:p>
             <a:pPr algn="ctr"/>
             <a:r>
-              <a:rPr sz="2900" b="1">
-                <a:solidFill>
-                  <a:srgbClr val="000000"/>
+              <a:rPr sz="3600" b="1">
+                <a:solidFill>
+                  <a:srgbClr val="1F3864"/>
                 </a:solidFill>
                 <a:latin typeface="Times New Roman"/>
               </a:rPr>
-              <a:t>TECHNICAL APPROACH &amp; WORKFLOW DIAGRAM</a:t>
-            </a:r>
-          </a:p>
-        </p:txBody>
-      </p:sp>
-      <p:sp>
-        <p:nvSpPr>
-          <p:cNvPr id="3" name="TextBox 2"/>
+              <a:t>OBJECTIVE OF THE PROJECT</a:t>
+            </a:r>
+          </a:p>
+        </p:txBody>
+      </p:sp>
+      <p:sp>
+        <p:nvSpPr>
+          <p:cNvPr id="3" name="Rounded Rectangle 2"/>
+          <p:cNvSpPr/>
+          <p:nvPr/>
+        </p:nvSpPr>
+        <p:spPr>
+          <a:xfrm>
+            <a:off x="2377440" y="1188720"/>
+            <a:ext cx="7863840" cy="777240"/>
+          </a:xfrm>
+          <a:prstGeom prst="roundRect">
+            <a:avLst/>
+          </a:prstGeom>
+          <a:solidFill>
+            <a:srgbClr val="FFFFFF"/>
+          </a:solidFill>
+          <a:ln w="22225">
+            <a:solidFill>
+              <a:srgbClr val="70AD47"/>
+            </a:solidFill>
+          </a:ln>
+          <a:effectLst/>
+        </p:spPr>
+        <p:style>
+          <a:lnRef idx="1">
+            <a:schemeClr val="accent1"/>
+          </a:lnRef>
+          <a:fillRef idx="3">
+            <a:schemeClr val="accent1"/>
+          </a:fillRef>
+          <a:effectRef idx="2">
+            <a:schemeClr val="accent1"/>
+          </a:effectRef>
+          <a:fontRef idx="minor">
+            <a:schemeClr val="lt1"/>
+          </a:fontRef>
+        </p:style>
+        <p:txBody>
+          <a:bodyPr rtlCol="0" anchor="ctr"/>
+          <a:lstStyle/>
+          <a:p/>
+        </p:txBody>
+      </p:sp>
+      <p:sp>
+        <p:nvSpPr>
+          <p:cNvPr id="4" name="TextBox 3"/>
           <p:cNvSpPr txBox="1"/>
           <p:nvPr/>
         </p:nvSpPr>
         <p:spPr>
           <a:xfrm>
-            <a:off x="548640" y="822960"/>
-            <a:ext cx="11064240" cy="365760"/>
+            <a:off x="2606040" y="1362456"/>
+            <a:ext cx="7406640" cy="548640"/>
           </a:xfrm>
           <a:prstGeom prst="rect">
             <a:avLst/>
@@ -3885,320 +4805,126 @@
           <a:noFill/>
         </p:spPr>
         <p:txBody>
-          <a:bodyPr wrap="square">
+          <a:bodyPr wrap="square" anchor="t">
             <a:spAutoFit/>
           </a:bodyPr>
           <a:lstStyle/>
           <a:p>
             <a:pPr>
               <a:spcAft>
-                <a:spcPts val="600"/>
+                <a:spcPts val="500"/>
               </a:spcAft>
             </a:pPr>
             <a:r>
-              <a:rPr sz="1800" b="1">
-                <a:solidFill>
-                  <a:srgbClr val="1F3A6E"/>
-                </a:solidFill>
-                <a:latin typeface="Arial"/>
-              </a:rPr>
-              <a:t>❖ Technologies used</a:t>
-            </a:r>
-          </a:p>
-        </p:txBody>
-      </p:sp>
-      <p:graphicFrame>
-        <p:nvGraphicFramePr>
-          <p:cNvPr id="4" name="Table 3"/>
-          <p:cNvGraphicFramePr>
-            <a:graphicFrameLocks noGrp="1"/>
-          </p:cNvGraphicFramePr>
-          <p:nvPr/>
-        </p:nvGraphicFramePr>
-        <p:xfrm>
-          <a:off x="640080" y="1234440"/>
-          <a:ext cx="6858000" cy="2468880"/>
-        </p:xfrm>
-        <a:graphic>
-          <a:graphicData uri="http://schemas.openxmlformats.org/drawingml/2006/table">
-            <a:tbl>
-              <a:tblPr firstRow="1" bandRow="1">
-                <a:tableStyleId>{5C22544A-7EE6-4342-B048-85BDC9FD1C3A}</a:tableStyleId>
-              </a:tblPr>
-              <a:tblGrid>
-                <a:gridCol w="1920240"/>
-                <a:gridCol w="4937760"/>
-              </a:tblGrid>
-              <a:tr h="308610">
-                <a:tc>
-                  <a:txBody>
-                    <a:bodyPr/>
-                    <a:lstStyle/>
-                    <a:p>
-                      <a:r>
-                        <a:rPr sz="1100" b="1">
-                          <a:latin typeface="Arial"/>
-                        </a:rPr>
-                        <a:t>Layer</a:t>
-                      </a:r>
-                    </a:p>
-                  </a:txBody>
-                  <a:tcPr/>
-                </a:tc>
-                <a:tc>
-                  <a:txBody>
-                    <a:bodyPr/>
-                    <a:lstStyle/>
-                    <a:p>
-                      <a:r>
-                        <a:rPr sz="1100" b="1">
-                          <a:latin typeface="Arial"/>
-                        </a:rPr>
-                        <a:t>Technology</a:t>
-                      </a:r>
-                    </a:p>
-                  </a:txBody>
-                  <a:tcPr/>
-                </a:tc>
-              </a:tr>
-              <a:tr h="308610">
-                <a:tc>
-                  <a:txBody>
-                    <a:bodyPr/>
-                    <a:lstStyle/>
-                    <a:p>
-                      <a:r>
-                        <a:rPr sz="1100" b="1">
-                          <a:latin typeface="Arial"/>
-                        </a:rPr>
-                        <a:t>Language</a:t>
-                      </a:r>
-                    </a:p>
-                  </a:txBody>
-                  <a:tcPr/>
-                </a:tc>
-                <a:tc>
-                  <a:txBody>
-                    <a:bodyPr/>
-                    <a:lstStyle/>
-                    <a:p>
-                      <a:r>
-                        <a:rPr sz="1100" b="0">
-                          <a:latin typeface="Arial"/>
-                        </a:rPr>
-                        <a:t>Python 3.13</a:t>
-                      </a:r>
-                    </a:p>
-                  </a:txBody>
-                  <a:tcPr/>
-                </a:tc>
-              </a:tr>
-              <a:tr h="308610">
-                <a:tc>
-                  <a:txBody>
-                    <a:bodyPr/>
-                    <a:lstStyle/>
-                    <a:p>
-                      <a:r>
-                        <a:rPr sz="1100" b="1">
-                          <a:latin typeface="Arial"/>
-                        </a:rPr>
-                        <a:t>Face detection</a:t>
-                      </a:r>
-                    </a:p>
-                  </a:txBody>
-                  <a:tcPr/>
-                </a:tc>
-                <a:tc>
-                  <a:txBody>
-                    <a:bodyPr/>
-                    <a:lstStyle/>
-                    <a:p>
-                      <a:r>
-                        <a:rPr sz="1100" b="0">
-                          <a:latin typeface="Arial"/>
-                        </a:rPr>
-                        <a:t>RetinaFace / SCRFD (det_10g)</a:t>
-                      </a:r>
-                    </a:p>
-                  </a:txBody>
-                  <a:tcPr/>
-                </a:tc>
-              </a:tr>
-              <a:tr h="308610">
-                <a:tc>
-                  <a:txBody>
-                    <a:bodyPr/>
-                    <a:lstStyle/>
-                    <a:p>
-                      <a:r>
-                        <a:rPr sz="1100" b="1">
-                          <a:latin typeface="Arial"/>
-                        </a:rPr>
-                        <a:t>Recognition</a:t>
-                      </a:r>
-                    </a:p>
-                  </a:txBody>
-                  <a:tcPr/>
-                </a:tc>
-                <a:tc>
-                  <a:txBody>
-                    <a:bodyPr/>
-                    <a:lstStyle/>
-                    <a:p>
-                      <a:r>
-                        <a:rPr sz="1100" b="0">
-                          <a:latin typeface="Arial"/>
-                        </a:rPr>
-                        <a:t>ArcFace ResNet-50 (buffalo_l) → 512-d embedding</a:t>
-                      </a:r>
-                    </a:p>
-                  </a:txBody>
-                  <a:tcPr/>
-                </a:tc>
-              </a:tr>
-              <a:tr h="308610">
-                <a:tc>
-                  <a:txBody>
-                    <a:bodyPr/>
-                    <a:lstStyle/>
-                    <a:p>
-                      <a:r>
-                        <a:rPr sz="1100" b="1">
-                          <a:latin typeface="Arial"/>
-                        </a:rPr>
-                        <a:t>Runtime</a:t>
-                      </a:r>
-                    </a:p>
-                  </a:txBody>
-                  <a:tcPr/>
-                </a:tc>
-                <a:tc>
-                  <a:txBody>
-                    <a:bodyPr/>
-                    <a:lstStyle/>
-                    <a:p>
-                      <a:r>
-                        <a:rPr sz="1100" b="0">
-                          <a:latin typeface="Arial"/>
-                        </a:rPr>
-                        <a:t>ONNX Runtime — CPU only, NO GPU</a:t>
-                      </a:r>
-                    </a:p>
-                  </a:txBody>
-                  <a:tcPr/>
-                </a:tc>
-              </a:tr>
-              <a:tr h="308610">
-                <a:tc>
-                  <a:txBody>
-                    <a:bodyPr/>
-                    <a:lstStyle/>
-                    <a:p>
-                      <a:r>
-                        <a:rPr sz="1100" b="1">
-                          <a:latin typeface="Arial"/>
-                        </a:rPr>
-                        <a:t>Classifier</a:t>
-                      </a:r>
-                    </a:p>
-                  </a:txBody>
-                  <a:tcPr/>
-                </a:tc>
-                <a:tc>
-                  <a:txBody>
-                    <a:bodyPr/>
-                    <a:lstStyle/>
-                    <a:p>
-                      <a:r>
-                        <a:rPr sz="1100" b="0">
-                          <a:latin typeface="Arial"/>
-                        </a:rPr>
-                        <a:t>Linear SVM + cosine-to-centroid (scikit-learn)</a:t>
-                      </a:r>
-                    </a:p>
-                  </a:txBody>
-                  <a:tcPr/>
-                </a:tc>
-              </a:tr>
-              <a:tr h="308610">
-                <a:tc>
-                  <a:txBody>
-                    <a:bodyPr/>
-                    <a:lstStyle/>
-                    <a:p>
-                      <a:r>
-                        <a:rPr sz="1100" b="1">
-                          <a:latin typeface="Arial"/>
-                        </a:rPr>
-                        <a:t>Backend / Frontend</a:t>
-                      </a:r>
-                    </a:p>
-                  </a:txBody>
-                  <a:tcPr/>
-                </a:tc>
-                <a:tc>
-                  <a:txBody>
-                    <a:bodyPr/>
-                    <a:lstStyle/>
-                    <a:p>
-                      <a:r>
-                        <a:rPr sz="1100" b="0">
-                          <a:latin typeface="Arial"/>
-                        </a:rPr>
-                        <a:t>Flask REST API (token auth) · React + Vite + Tailwind</a:t>
-                      </a:r>
-                    </a:p>
-                  </a:txBody>
-                  <a:tcPr/>
-                </a:tc>
-              </a:tr>
-              <a:tr h="308610">
-                <a:tc>
-                  <a:txBody>
-                    <a:bodyPr/>
-                    <a:lstStyle/>
-                    <a:p>
-                      <a:r>
-                        <a:rPr sz="1100" b="1">
-                          <a:latin typeface="Arial"/>
-                        </a:rPr>
-                        <a:t>Storage</a:t>
-                      </a:r>
-                    </a:p>
-                  </a:txBody>
-                  <a:tcPr/>
-                </a:tc>
-                <a:tc>
-                  <a:txBody>
-                    <a:bodyPr/>
-                    <a:lstStyle/>
-                    <a:p>
-                      <a:r>
-                        <a:rPr sz="1100" b="0">
-                          <a:latin typeface="Arial"/>
-                        </a:rPr>
-                        <a:t>CSV + JSON on disk — no cloud, no database server</a:t>
-                      </a:r>
-                    </a:p>
-                  </a:txBody>
-                  <a:tcPr/>
-                </a:tc>
-              </a:tr>
-            </a:tbl>
-          </a:graphicData>
-        </a:graphic>
-      </p:graphicFrame>
-      <p:sp>
-        <p:nvSpPr>
-          <p:cNvPr id="5" name="TextBox 4"/>
+              <a:rPr sz="1400" b="0" i="1">
+                <a:solidFill>
+                  <a:srgbClr val="1A1A1A"/>
+                </a:solidFill>
+                <a:latin typeface="Calibri"/>
+              </a:rPr>
+              <a:t>To detect and recognise multiple faces simultaneously in a single frame.</a:t>
+            </a:r>
+          </a:p>
+        </p:txBody>
+      </p:sp>
+      <p:sp>
+        <p:nvSpPr>
+          <p:cNvPr id="5" name="Rectangle 4"/>
+          <p:cNvSpPr/>
+          <p:nvPr/>
+        </p:nvSpPr>
+        <p:spPr>
+          <a:xfrm>
+            <a:off x="1965960" y="1536192"/>
+            <a:ext cx="384048" cy="45720"/>
+          </a:xfrm>
+          <a:prstGeom prst="rect">
+            <a:avLst/>
+          </a:prstGeom>
+          <a:solidFill>
+            <a:srgbClr val="70AD47"/>
+          </a:solidFill>
+          <a:ln>
+            <a:noFill/>
+          </a:ln>
+          <a:effectLst/>
+        </p:spPr>
+        <p:style>
+          <a:lnRef idx="1">
+            <a:schemeClr val="accent1"/>
+          </a:lnRef>
+          <a:fillRef idx="3">
+            <a:schemeClr val="accent1"/>
+          </a:fillRef>
+          <a:effectRef idx="2">
+            <a:schemeClr val="accent1"/>
+          </a:effectRef>
+          <a:fontRef idx="minor">
+            <a:schemeClr val="lt1"/>
+          </a:fontRef>
+        </p:style>
+        <p:txBody>
+          <a:bodyPr rtlCol="0" anchor="ctr"/>
+          <a:lstStyle/>
+          <a:p>
+            <a:pPr algn="ctr"/>
+          </a:p>
+        </p:txBody>
+      </p:sp>
+      <p:sp>
+        <p:nvSpPr>
+          <p:cNvPr id="6" name="Rounded Rectangle 5"/>
+          <p:cNvSpPr/>
+          <p:nvPr/>
+        </p:nvSpPr>
+        <p:spPr>
+          <a:xfrm>
+            <a:off x="2377440" y="2176272"/>
+            <a:ext cx="7863840" cy="777240"/>
+          </a:xfrm>
+          <a:prstGeom prst="roundRect">
+            <a:avLst/>
+          </a:prstGeom>
+          <a:solidFill>
+            <a:srgbClr val="FFFFFF"/>
+          </a:solidFill>
+          <a:ln w="22225">
+            <a:solidFill>
+              <a:srgbClr val="C00000"/>
+            </a:solidFill>
+          </a:ln>
+          <a:effectLst/>
+        </p:spPr>
+        <p:style>
+          <a:lnRef idx="1">
+            <a:schemeClr val="accent1"/>
+          </a:lnRef>
+          <a:fillRef idx="3">
+            <a:schemeClr val="accent1"/>
+          </a:fillRef>
+          <a:effectRef idx="2">
+            <a:schemeClr val="accent1"/>
+          </a:effectRef>
+          <a:fontRef idx="minor">
+            <a:schemeClr val="lt1"/>
+          </a:fontRef>
+        </p:style>
+        <p:txBody>
+          <a:bodyPr rtlCol="0" anchor="ctr"/>
+          <a:lstStyle/>
+          <a:p/>
+        </p:txBody>
+      </p:sp>
+      <p:sp>
+        <p:nvSpPr>
+          <p:cNvPr id="7" name="TextBox 6"/>
           <p:cNvSpPr txBox="1"/>
           <p:nvPr/>
         </p:nvSpPr>
         <p:spPr>
           <a:xfrm>
-            <a:off x="7680960" y="1234440"/>
-            <a:ext cx="4114800" cy="2743200"/>
+            <a:off x="2606040" y="2350008"/>
+            <a:ext cx="7406640" cy="548640"/>
           </a:xfrm>
           <a:prstGeom prst="rect">
             <a:avLst/>
@@ -4206,277 +4932,456 @@
           <a:noFill/>
         </p:spPr>
         <p:txBody>
-          <a:bodyPr wrap="square">
+          <a:bodyPr wrap="square" anchor="t">
             <a:spAutoFit/>
           </a:bodyPr>
           <a:lstStyle/>
           <a:p>
             <a:pPr>
               <a:spcAft>
-                <a:spcPts val="600"/>
+                <a:spcPts val="500"/>
               </a:spcAft>
             </a:pPr>
             <a:r>
-              <a:rPr sz="1150" b="1">
-                <a:solidFill>
-                  <a:srgbClr val="1F3A6E"/>
-                </a:solidFill>
-                <a:latin typeface="Arial"/>
-              </a:rPr>
-              <a:t>❖ The model is FROZEN</a:t>
-            </a:r>
-          </a:p>
+              <a:rPr sz="1400" b="0" i="1">
+                <a:solidFill>
+                  <a:srgbClr val="1A1A1A"/>
+                </a:solidFill>
+                <a:latin typeface="Calibri"/>
+              </a:rPr>
+              <a:t>To reject strangers — an open-set system that is allowed to answer "nobody".</a:t>
+            </a:r>
+          </a:p>
+        </p:txBody>
+      </p:sp>
+      <p:sp>
+        <p:nvSpPr>
+          <p:cNvPr id="8" name="Rectangle 7"/>
+          <p:cNvSpPr/>
+          <p:nvPr/>
+        </p:nvSpPr>
+        <p:spPr>
+          <a:xfrm>
+            <a:off x="1965960" y="2523744"/>
+            <a:ext cx="384048" cy="45720"/>
+          </a:xfrm>
+          <a:prstGeom prst="rect">
+            <a:avLst/>
+          </a:prstGeom>
+          <a:solidFill>
+            <a:srgbClr val="C00000"/>
+          </a:solidFill>
+          <a:ln>
+            <a:noFill/>
+          </a:ln>
+          <a:effectLst/>
+        </p:spPr>
+        <p:style>
+          <a:lnRef idx="1">
+            <a:schemeClr val="accent1"/>
+          </a:lnRef>
+          <a:fillRef idx="3">
+            <a:schemeClr val="accent1"/>
+          </a:fillRef>
+          <a:effectRef idx="2">
+            <a:schemeClr val="accent1"/>
+          </a:effectRef>
+          <a:fontRef idx="minor">
+            <a:schemeClr val="lt1"/>
+          </a:fontRef>
+        </p:style>
+        <p:txBody>
+          <a:bodyPr rtlCol="0" anchor="ctr"/>
+          <a:lstStyle/>
+          <a:p>
+            <a:pPr algn="ctr"/>
+          </a:p>
+        </p:txBody>
+      </p:sp>
+      <p:sp>
+        <p:nvSpPr>
+          <p:cNvPr id="9" name="Rounded Rectangle 8"/>
+          <p:cNvSpPr/>
+          <p:nvPr/>
+        </p:nvSpPr>
+        <p:spPr>
+          <a:xfrm>
+            <a:off x="2377440" y="3163824"/>
+            <a:ext cx="7863840" cy="777240"/>
+          </a:xfrm>
+          <a:prstGeom prst="roundRect">
+            <a:avLst/>
+          </a:prstGeom>
+          <a:solidFill>
+            <a:srgbClr val="FFFFFF"/>
+          </a:solidFill>
+          <a:ln w="22225">
+            <a:solidFill>
+              <a:srgbClr val="4472C4"/>
+            </a:solidFill>
+          </a:ln>
+          <a:effectLst/>
+        </p:spPr>
+        <p:style>
+          <a:lnRef idx="1">
+            <a:schemeClr val="accent1"/>
+          </a:lnRef>
+          <a:fillRef idx="3">
+            <a:schemeClr val="accent1"/>
+          </a:fillRef>
+          <a:effectRef idx="2">
+            <a:schemeClr val="accent1"/>
+          </a:effectRef>
+          <a:fontRef idx="minor">
+            <a:schemeClr val="lt1"/>
+          </a:fontRef>
+        </p:style>
+        <p:txBody>
+          <a:bodyPr rtlCol="0" anchor="ctr"/>
+          <a:lstStyle/>
+          <a:p/>
+        </p:txBody>
+      </p:sp>
+      <p:sp>
+        <p:nvSpPr>
+          <p:cNvPr id="10" name="TextBox 9"/>
+          <p:cNvSpPr txBox="1"/>
+          <p:nvPr/>
+        </p:nvSpPr>
+        <p:spPr>
+          <a:xfrm>
+            <a:off x="2606040" y="3337560"/>
+            <a:ext cx="7406640" cy="548640"/>
+          </a:xfrm>
+          <a:prstGeom prst="rect">
+            <a:avLst/>
+          </a:prstGeom>
+          <a:noFill/>
+        </p:spPr>
+        <p:txBody>
+          <a:bodyPr wrap="square" anchor="t">
+            <a:spAutoFit/>
+          </a:bodyPr>
+          <a:lstStyle/>
           <a:p>
             <a:pPr>
               <a:spcAft>
-                <a:spcPts val="600"/>
+                <a:spcPts val="500"/>
               </a:spcAft>
             </a:pPr>
             <a:r>
-              <a:rPr sz="1150" b="0">
+              <a:rPr sz="1400" b="0" i="1">
                 <a:solidFill>
                   <a:srgbClr val="1A1A1A"/>
                 </a:solidFill>
-                <a:latin typeface="Arial"/>
-              </a:rPr>
-              <a:t>•  Pretrained on ~600,000 identities. It never learns</a:t>
-            </a:r>
-          </a:p>
+                <a:latin typeface="Calibri"/>
+              </a:rPr>
+              <a:t>To resist presentation attacks: a photo or phone screen must NOT be marked present.</a:t>
+            </a:r>
+          </a:p>
+        </p:txBody>
+      </p:sp>
+      <p:sp>
+        <p:nvSpPr>
+          <p:cNvPr id="11" name="Rectangle 10"/>
+          <p:cNvSpPr/>
+          <p:nvPr/>
+        </p:nvSpPr>
+        <p:spPr>
+          <a:xfrm>
+            <a:off x="1965960" y="3511296"/>
+            <a:ext cx="384048" cy="45720"/>
+          </a:xfrm>
+          <a:prstGeom prst="rect">
+            <a:avLst/>
+          </a:prstGeom>
+          <a:solidFill>
+            <a:srgbClr val="4472C4"/>
+          </a:solidFill>
+          <a:ln>
+            <a:noFill/>
+          </a:ln>
+          <a:effectLst/>
+        </p:spPr>
+        <p:style>
+          <a:lnRef idx="1">
+            <a:schemeClr val="accent1"/>
+          </a:lnRef>
+          <a:fillRef idx="3">
+            <a:schemeClr val="accent1"/>
+          </a:fillRef>
+          <a:effectRef idx="2">
+            <a:schemeClr val="accent1"/>
+          </a:effectRef>
+          <a:fontRef idx="minor">
+            <a:schemeClr val="lt1"/>
+          </a:fontRef>
+        </p:style>
+        <p:txBody>
+          <a:bodyPr rtlCol="0" anchor="ctr"/>
+          <a:lstStyle/>
+          <a:p>
+            <a:pPr algn="ctr"/>
+          </a:p>
+        </p:txBody>
+      </p:sp>
+      <p:sp>
+        <p:nvSpPr>
+          <p:cNvPr id="12" name="Rounded Rectangle 11"/>
+          <p:cNvSpPr/>
+          <p:nvPr/>
+        </p:nvSpPr>
+        <p:spPr>
+          <a:xfrm>
+            <a:off x="2377440" y="4151376"/>
+            <a:ext cx="7863840" cy="777240"/>
+          </a:xfrm>
+          <a:prstGeom prst="roundRect">
+            <a:avLst/>
+          </a:prstGeom>
+          <a:solidFill>
+            <a:srgbClr val="FFFFFF"/>
+          </a:solidFill>
+          <a:ln w="22225">
+            <a:solidFill>
+              <a:srgbClr val="ED7D31"/>
+            </a:solidFill>
+          </a:ln>
+          <a:effectLst/>
+        </p:spPr>
+        <p:style>
+          <a:lnRef idx="1">
+            <a:schemeClr val="accent1"/>
+          </a:lnRef>
+          <a:fillRef idx="3">
+            <a:schemeClr val="accent1"/>
+          </a:fillRef>
+          <a:effectRef idx="2">
+            <a:schemeClr val="accent1"/>
+          </a:effectRef>
+          <a:fontRef idx="minor">
+            <a:schemeClr val="lt1"/>
+          </a:fontRef>
+        </p:style>
+        <p:txBody>
+          <a:bodyPr rtlCol="0" anchor="ctr"/>
+          <a:lstStyle/>
+          <a:p/>
+        </p:txBody>
+      </p:sp>
+      <p:sp>
+        <p:nvSpPr>
+          <p:cNvPr id="13" name="TextBox 12"/>
+          <p:cNvSpPr txBox="1"/>
+          <p:nvPr/>
+        </p:nvSpPr>
+        <p:spPr>
+          <a:xfrm>
+            <a:off x="2606040" y="4325112"/>
+            <a:ext cx="7406640" cy="548640"/>
+          </a:xfrm>
+          <a:prstGeom prst="rect">
+            <a:avLst/>
+          </a:prstGeom>
+          <a:noFill/>
+        </p:spPr>
+        <p:txBody>
+          <a:bodyPr wrap="square" anchor="t">
+            <a:spAutoFit/>
+          </a:bodyPr>
+          <a:lstStyle/>
           <a:p>
             <a:pPr>
               <a:spcAft>
-                <a:spcPts val="600"/>
+                <a:spcPts val="500"/>
               </a:spcAft>
             </a:pPr>
             <a:r>
-              <a:rPr sz="1150" b="0">
+              <a:rPr sz="1400" b="0" i="1">
                 <a:solidFill>
                   <a:srgbClr val="1A1A1A"/>
                 </a:solidFill>
-                <a:latin typeface="Arial"/>
-              </a:rPr>
-              <a:t>   "who is Soham" — it learns what makes any two</a:t>
-            </a:r>
-          </a:p>
+                <a:latin typeface="Calibri"/>
+              </a:rPr>
+              <a:t>To make the attendance commit reliable — it is written once a day and cannot be undone.</a:t>
+            </a:r>
+          </a:p>
+        </p:txBody>
+      </p:sp>
+      <p:sp>
+        <p:nvSpPr>
+          <p:cNvPr id="14" name="Rectangle 13"/>
+          <p:cNvSpPr/>
+          <p:nvPr/>
+        </p:nvSpPr>
+        <p:spPr>
+          <a:xfrm>
+            <a:off x="1965960" y="4498848"/>
+            <a:ext cx="384048" cy="45720"/>
+          </a:xfrm>
+          <a:prstGeom prst="rect">
+            <a:avLst/>
+          </a:prstGeom>
+          <a:solidFill>
+            <a:srgbClr val="ED7D31"/>
+          </a:solidFill>
+          <a:ln>
+            <a:noFill/>
+          </a:ln>
+          <a:effectLst/>
+        </p:spPr>
+        <p:style>
+          <a:lnRef idx="1">
+            <a:schemeClr val="accent1"/>
+          </a:lnRef>
+          <a:fillRef idx="3">
+            <a:schemeClr val="accent1"/>
+          </a:fillRef>
+          <a:effectRef idx="2">
+            <a:schemeClr val="accent1"/>
+          </a:effectRef>
+          <a:fontRef idx="minor">
+            <a:schemeClr val="lt1"/>
+          </a:fontRef>
+        </p:style>
+        <p:txBody>
+          <a:bodyPr rtlCol="0" anchor="ctr"/>
+          <a:lstStyle/>
+          <a:p>
+            <a:pPr algn="ctr"/>
+          </a:p>
+        </p:txBody>
+      </p:sp>
+      <p:sp>
+        <p:nvSpPr>
+          <p:cNvPr id="15" name="Rounded Rectangle 14"/>
+          <p:cNvSpPr/>
+          <p:nvPr/>
+        </p:nvSpPr>
+        <p:spPr>
+          <a:xfrm>
+            <a:off x="2377440" y="5138928"/>
+            <a:ext cx="7863840" cy="777240"/>
+          </a:xfrm>
+          <a:prstGeom prst="roundRect">
+            <a:avLst/>
+          </a:prstGeom>
+          <a:solidFill>
+            <a:srgbClr val="FFFFFF"/>
+          </a:solidFill>
+          <a:ln w="22225">
+            <a:solidFill>
+              <a:srgbClr val="8064A2"/>
+            </a:solidFill>
+          </a:ln>
+          <a:effectLst/>
+        </p:spPr>
+        <p:style>
+          <a:lnRef idx="1">
+            <a:schemeClr val="accent1"/>
+          </a:lnRef>
+          <a:fillRef idx="3">
+            <a:schemeClr val="accent1"/>
+          </a:fillRef>
+          <a:effectRef idx="2">
+            <a:schemeClr val="accent1"/>
+          </a:effectRef>
+          <a:fontRef idx="minor">
+            <a:schemeClr val="lt1"/>
+          </a:fontRef>
+        </p:style>
+        <p:txBody>
+          <a:bodyPr rtlCol="0" anchor="ctr"/>
+          <a:lstStyle/>
+          <a:p/>
+        </p:txBody>
+      </p:sp>
+      <p:sp>
+        <p:nvSpPr>
+          <p:cNvPr id="16" name="TextBox 15"/>
+          <p:cNvSpPr txBox="1"/>
+          <p:nvPr/>
+        </p:nvSpPr>
+        <p:spPr>
+          <a:xfrm>
+            <a:off x="2606040" y="5312664"/>
+            <a:ext cx="7406640" cy="548640"/>
+          </a:xfrm>
+          <a:prstGeom prst="rect">
+            <a:avLst/>
+          </a:prstGeom>
+          <a:noFill/>
+        </p:spPr>
+        <p:txBody>
+          <a:bodyPr wrap="square" anchor="t">
+            <a:spAutoFit/>
+          </a:bodyPr>
+          <a:lstStyle/>
           <a:p>
             <a:pPr>
               <a:spcAft>
-                <a:spcPts val="600"/>
+                <a:spcPts val="500"/>
               </a:spcAft>
             </a:pPr>
             <a:r>
-              <a:rPr sz="1150" b="0">
+              <a:rPr sz="1400" b="0" i="1">
                 <a:solidFill>
                   <a:srgbClr val="1A1A1A"/>
                 </a:solidFill>
-                <a:latin typeface="Arial"/>
-              </a:rPr>
-              <a:t>   faces different.</a:t>
-            </a:r>
-          </a:p>
-          <a:p>
-            <a:pPr>
-              <a:spcAft>
-                <a:spcPts val="600"/>
-              </a:spcAft>
-            </a:pPr>
-            <a:r>
-              <a:rPr sz="1150" b="0">
-                <a:solidFill>
-                  <a:srgbClr val="1A1A1A"/>
-                </a:solidFill>
-                <a:latin typeface="Arial"/>
-              </a:rPr>
-              <a:t>•  Enrolling a student = embed their photos, store the</a:t>
-            </a:r>
-          </a:p>
-          <a:p>
-            <a:pPr>
-              <a:spcAft>
-                <a:spcPts val="600"/>
-              </a:spcAft>
-            </a:pPr>
-            <a:r>
-              <a:rPr sz="1150" b="0">
-                <a:solidFill>
-                  <a:srgbClr val="1A1A1A"/>
-                </a:solidFill>
-                <a:latin typeface="Arial"/>
-              </a:rPr>
-              <a:t>   average vector (a centroid). No training. No GPU.</a:t>
-            </a:r>
-          </a:p>
-          <a:p>
-            <a:pPr>
-              <a:spcAft>
-                <a:spcPts val="600"/>
-              </a:spcAft>
-            </a:pPr>
-            <a:r>
-              <a:rPr sz="1150" b="1">
-                <a:solidFill>
-                  <a:srgbClr val="1E7A45"/>
-                </a:solidFill>
-                <a:latin typeface="Arial"/>
-              </a:rPr>
-              <a:t>•  Embeddings cached → enrolment 607 s → 1.4 s</a:t>
-            </a:r>
-          </a:p>
-          <a:p>
-            <a:pPr>
-              <a:spcAft>
-                <a:spcPts val="600"/>
-              </a:spcAft>
-            </a:pPr>
-          </a:p>
-          <a:p>
-            <a:pPr>
-              <a:spcAft>
-                <a:spcPts val="600"/>
-              </a:spcAft>
-            </a:pPr>
-            <a:r>
-              <a:rPr sz="1150" b="1">
-                <a:solidFill>
-                  <a:srgbClr val="1F3A6E"/>
-                </a:solidFill>
-                <a:latin typeface="Arial"/>
-              </a:rPr>
-              <a:t>❖ Open-set, not closed-set</a:t>
-            </a:r>
-          </a:p>
-          <a:p>
-            <a:pPr>
-              <a:spcAft>
-                <a:spcPts val="600"/>
-              </a:spcAft>
-            </a:pPr>
-            <a:r>
-              <a:rPr sz="1150" b="0">
-                <a:solidFill>
-                  <a:srgbClr val="1A1A1A"/>
-                </a:solidFill>
-                <a:latin typeface="Arial"/>
-              </a:rPr>
-              <a:t>•  Prior work:  "WHICH of my N students is this?"</a:t>
-            </a:r>
-          </a:p>
-          <a:p>
-            <a:pPr>
-              <a:spcAft>
-                <a:spcPts val="600"/>
-              </a:spcAft>
-            </a:pPr>
-            <a:r>
-              <a:rPr sz="1150" b="0">
-                <a:solidFill>
-                  <a:srgbClr val="1A1A1A"/>
-                </a:solidFill>
-                <a:latin typeface="Arial"/>
-              </a:rPr>
-              <a:t>   — a softmax MUST name someone.</a:t>
-            </a:r>
-          </a:p>
-          <a:p>
-            <a:pPr>
-              <a:spcAft>
-                <a:spcPts val="600"/>
-              </a:spcAft>
-            </a:pPr>
-            <a:r>
-              <a:rPr sz="1150" b="1">
-                <a:solidFill>
-                  <a:srgbClr val="1A1A1A"/>
-                </a:solidFill>
-                <a:latin typeface="Arial"/>
-              </a:rPr>
-              <a:t>•  Ours:  "Is this ANY of my students?"</a:t>
-            </a:r>
-          </a:p>
-          <a:p>
-            <a:pPr>
-              <a:spcAft>
-                <a:spcPts val="600"/>
-              </a:spcAft>
-            </a:pPr>
-            <a:r>
-              <a:rPr sz="1150" b="1">
-                <a:solidFill>
-                  <a:srgbClr val="1A1A1A"/>
-                </a:solidFill>
-                <a:latin typeface="Arial"/>
-              </a:rPr>
-              <a:t>   — allowed to answer "nobody".</a:t>
-            </a:r>
-          </a:p>
-        </p:txBody>
-      </p:sp>
-      <p:sp>
-        <p:nvSpPr>
-          <p:cNvPr id="6" name="TextBox 5"/>
-          <p:cNvSpPr txBox="1"/>
-          <p:nvPr/>
-        </p:nvSpPr>
-        <p:spPr>
-          <a:xfrm>
-            <a:off x="548640" y="3886200"/>
-            <a:ext cx="11064240" cy="365760"/>
+                <a:latin typeface="Calibri"/>
+              </a:rPr>
+              <a:t>To run offline on a laptop CPU: no GPU, no cloud, no student data leaving campus.</a:t>
+            </a:r>
+          </a:p>
+        </p:txBody>
+      </p:sp>
+      <p:sp>
+        <p:nvSpPr>
+          <p:cNvPr id="17" name="Rectangle 16"/>
+          <p:cNvSpPr/>
+          <p:nvPr/>
+        </p:nvSpPr>
+        <p:spPr>
+          <a:xfrm>
+            <a:off x="1965960" y="5486400"/>
+            <a:ext cx="384048" cy="45720"/>
           </a:xfrm>
           <a:prstGeom prst="rect">
             <a:avLst/>
           </a:prstGeom>
-          <a:noFill/>
-        </p:spPr>
-        <p:txBody>
-          <a:bodyPr wrap="square">
-            <a:spAutoFit/>
-          </a:bodyPr>
-          <a:lstStyle/>
-          <a:p>
-            <a:pPr>
-              <a:spcAft>
-                <a:spcPts val="600"/>
-              </a:spcAft>
-            </a:pPr>
-            <a:r>
-              <a:rPr sz="1800" b="1">
-                <a:solidFill>
-                  <a:srgbClr val="1F3A6E"/>
-                </a:solidFill>
-                <a:latin typeface="Arial"/>
-              </a:rPr>
-              <a:t>❖ Workflow</a:t>
-            </a:r>
-          </a:p>
-        </p:txBody>
-      </p:sp>
-      <p:pic>
-        <p:nvPicPr>
-          <p:cNvPr id="7" name="Picture 6" descr="workflow.png"/>
-          <p:cNvPicPr>
-            <a:picLocks noChangeAspect="1"/>
-          </p:cNvPicPr>
-          <p:nvPr/>
-        </p:nvPicPr>
-        <p:blipFill>
-          <a:blip r:embed="rId2"/>
-          <a:stretch>
-            <a:fillRect/>
-          </a:stretch>
-        </p:blipFill>
-        <p:spPr>
-          <a:xfrm>
-            <a:off x="411480" y="4297680"/>
-            <a:ext cx="11338560" cy="2306148"/>
-          </a:xfrm>
-          <a:prstGeom prst="rect">
-            <a:avLst/>
-          </a:prstGeom>
-        </p:spPr>
-      </p:pic>
-      <p:sp>
-        <p:nvSpPr>
-          <p:cNvPr id="8" name="Rectangle 7"/>
+          <a:solidFill>
+            <a:srgbClr val="8064A2"/>
+          </a:solidFill>
+          <a:ln>
+            <a:noFill/>
+          </a:ln>
+          <a:effectLst/>
+        </p:spPr>
+        <p:style>
+          <a:lnRef idx="1">
+            <a:schemeClr val="accent1"/>
+          </a:lnRef>
+          <a:fillRef idx="3">
+            <a:schemeClr val="accent1"/>
+          </a:fillRef>
+          <a:effectRef idx="2">
+            <a:schemeClr val="accent1"/>
+          </a:effectRef>
+          <a:fontRef idx="minor">
+            <a:schemeClr val="lt1"/>
+          </a:fontRef>
+        </p:style>
+        <p:txBody>
+          <a:bodyPr rtlCol="0" anchor="ctr"/>
+          <a:lstStyle/>
+          <a:p>
+            <a:pPr algn="ctr"/>
+          </a:p>
+        </p:txBody>
+      </p:sp>
+      <p:sp>
+        <p:nvSpPr>
+          <p:cNvPr id="18" name="Rectangle 17"/>
           <p:cNvSpPr/>
           <p:nvPr/>
         </p:nvSpPr>
@@ -4520,7 +5425,7 @@
       </p:sp>
       <p:sp>
         <p:nvSpPr>
-          <p:cNvPr id="9" name="TextBox 8"/>
+          <p:cNvPr id="19" name="TextBox 18"/>
           <p:cNvSpPr txBox="1"/>
           <p:nvPr/>
         </p:nvSpPr>
@@ -4546,9 +5451,9 @@
                 <a:solidFill>
                   <a:srgbClr val="FFFFFF"/>
                 </a:solidFill>
-                <a:latin typeface="Arial"/>
-              </a:rPr>
-              <a:t>3</a:t>
+                <a:latin typeface="Calibri"/>
+              </a:rPr>
+              <a:t>2</a:t>
             </a:r>
           </a:p>
         </p:txBody>
@@ -4579,8 +5484,8 @@
         </p:nvSpPr>
         <p:spPr>
           <a:xfrm>
-            <a:off x="548640" y="109728"/>
-            <a:ext cx="11064240" cy="777240"/>
+            <a:off x="457200" y="109728"/>
+            <a:ext cx="11247120" cy="822960"/>
           </a:xfrm>
           <a:prstGeom prst="rect">
             <a:avLst/>
@@ -4588,34 +5493,78 @@
           <a:noFill/>
         </p:spPr>
         <p:txBody>
-          <a:bodyPr wrap="square">
+          <a:bodyPr wrap="none">
             <a:spAutoFit/>
           </a:bodyPr>
           <a:lstStyle/>
           <a:p>
             <a:pPr algn="ctr"/>
             <a:r>
-              <a:rPr sz="2900" b="1">
-                <a:solidFill>
-                  <a:srgbClr val="000000"/>
+              <a:rPr sz="3600" b="1">
+                <a:solidFill>
+                  <a:srgbClr val="1F3864"/>
                 </a:solidFill>
                 <a:latin typeface="Times New Roman"/>
               </a:rPr>
-              <a:t>TECHNICAL APPROACH — DECISION PIPELINE</a:t>
-            </a:r>
-          </a:p>
-        </p:txBody>
-      </p:sp>
-      <p:sp>
-        <p:nvSpPr>
-          <p:cNvPr id="3" name="TextBox 2"/>
+              <a:t>PROBLEM DEFINITION</a:t>
+            </a:r>
+          </a:p>
+        </p:txBody>
+      </p:sp>
+      <p:sp>
+        <p:nvSpPr>
+          <p:cNvPr id="3" name="Rounded Rectangle 2"/>
+          <p:cNvSpPr/>
+          <p:nvPr/>
+        </p:nvSpPr>
+        <p:spPr>
+          <a:xfrm>
+            <a:off x="640080" y="1051560"/>
+            <a:ext cx="10881360" cy="868680"/>
+          </a:xfrm>
+          <a:prstGeom prst="roundRect">
+            <a:avLst/>
+          </a:prstGeom>
+          <a:solidFill>
+            <a:srgbClr val="B8CCE4"/>
+          </a:solidFill>
+          <a:ln w="15875">
+            <a:solidFill>
+              <a:srgbClr val="2E75B6"/>
+            </a:solidFill>
+          </a:ln>
+          <a:effectLst/>
+        </p:spPr>
+        <p:style>
+          <a:lnRef idx="1">
+            <a:schemeClr val="accent1"/>
+          </a:lnRef>
+          <a:fillRef idx="3">
+            <a:schemeClr val="accent1"/>
+          </a:fillRef>
+          <a:effectRef idx="2">
+            <a:schemeClr val="accent1"/>
+          </a:effectRef>
+          <a:fontRef idx="minor">
+            <a:schemeClr val="lt1"/>
+          </a:fontRef>
+        </p:style>
+        <p:txBody>
+          <a:bodyPr rtlCol="0" anchor="ctr"/>
+          <a:lstStyle/>
+          <a:p/>
+        </p:txBody>
+      </p:sp>
+      <p:sp>
+        <p:nvSpPr>
+          <p:cNvPr id="4" name="TextBox 3"/>
           <p:cNvSpPr txBox="1"/>
           <p:nvPr/>
         </p:nvSpPr>
         <p:spPr>
           <a:xfrm>
-            <a:off x="548640" y="822960"/>
-            <a:ext cx="11064240" cy="365760"/>
+            <a:off x="868680" y="1188720"/>
+            <a:ext cx="10424160" cy="731520"/>
           </a:xfrm>
           <a:prstGeom prst="rect">
             <a:avLst/>
@@ -4623,101 +5572,213 @@
           <a:noFill/>
         </p:spPr>
         <p:txBody>
-          <a:bodyPr wrap="square">
+          <a:bodyPr wrap="square" anchor="t">
             <a:spAutoFit/>
           </a:bodyPr>
           <a:lstStyle/>
           <a:p>
             <a:pPr>
               <a:spcAft>
-                <a:spcPts val="600"/>
+                <a:spcPts val="500"/>
               </a:spcAft>
             </a:pPr>
             <a:r>
-              <a:rPr sz="1800" b="1">
-                <a:solidFill>
-                  <a:srgbClr val="1F3A6E"/>
-                </a:solidFill>
-                <a:latin typeface="Arial"/>
-              </a:rPr>
-              <a:t>❖ Four gates before a face gets a name</a:t>
-            </a:r>
-          </a:p>
-        </p:txBody>
-      </p:sp>
-      <p:pic>
-        <p:nvPicPr>
-          <p:cNvPr id="4" name="Picture 3" descr="gates.png"/>
-          <p:cNvPicPr>
-            <a:picLocks noChangeAspect="1"/>
-          </p:cNvPicPr>
-          <p:nvPr/>
-        </p:nvPicPr>
-        <p:blipFill>
-          <a:blip r:embed="rId2"/>
-          <a:stretch>
-            <a:fillRect/>
-          </a:stretch>
-        </p:blipFill>
-        <p:spPr>
-          <a:xfrm>
-            <a:off x="411480" y="1234440"/>
-            <a:ext cx="11338560" cy="2402237"/>
+              <a:rPr sz="1400" b="0" i="1">
+                <a:solidFill>
+                  <a:srgbClr val="000000"/>
+                </a:solidFill>
+                <a:latin typeface="Calibri"/>
+              </a:rPr>
+              <a:t>Traditional manual attendance is slow, error-prone and vulnerable to proxy marking —</a:t>
+            </a:r>
+          </a:p>
+          <a:p>
+            <a:pPr>
+              <a:spcAft>
+                <a:spcPts val="500"/>
+              </a:spcAft>
+            </a:pPr>
+            <a:r>
+              <a:rPr sz="1400" b="0" i="1">
+                <a:solidFill>
+                  <a:srgbClr val="000000"/>
+                </a:solidFill>
+                <a:latin typeface="Calibri"/>
+              </a:rPr>
+              <a:t>a 60-student roll-call costs ~5 minutes of every lecture, about 80 teaching hours a year.</a:t>
+            </a:r>
+          </a:p>
+        </p:txBody>
+      </p:sp>
+      <p:sp>
+        <p:nvSpPr>
+          <p:cNvPr id="5" name="Rounded Rectangle 4"/>
+          <p:cNvSpPr/>
+          <p:nvPr/>
+        </p:nvSpPr>
+        <p:spPr>
+          <a:xfrm>
+            <a:off x="640080" y="2148840"/>
+            <a:ext cx="10881360" cy="1371600"/>
+          </a:xfrm>
+          <a:prstGeom prst="roundRect">
+            <a:avLst/>
+          </a:prstGeom>
+          <a:solidFill>
+            <a:srgbClr val="F8D7D2"/>
+          </a:solidFill>
+          <a:ln w="22225">
+            <a:solidFill>
+              <a:srgbClr val="C00000"/>
+            </a:solidFill>
+          </a:ln>
+          <a:effectLst/>
+        </p:spPr>
+        <p:style>
+          <a:lnRef idx="1">
+            <a:schemeClr val="accent1"/>
+          </a:lnRef>
+          <a:fillRef idx="3">
+            <a:schemeClr val="accent1"/>
+          </a:fillRef>
+          <a:effectRef idx="2">
+            <a:schemeClr val="accent1"/>
+          </a:effectRef>
+          <a:fontRef idx="minor">
+            <a:schemeClr val="lt1"/>
+          </a:fontRef>
+        </p:style>
+        <p:txBody>
+          <a:bodyPr rtlCol="0" anchor="ctr"/>
+          <a:lstStyle/>
+          <a:p/>
+        </p:txBody>
+      </p:sp>
+      <p:sp>
+        <p:nvSpPr>
+          <p:cNvPr id="6" name="TextBox 5"/>
+          <p:cNvSpPr txBox="1"/>
+          <p:nvPr/>
+        </p:nvSpPr>
+        <p:spPr>
+          <a:xfrm>
+            <a:off x="868680" y="2286000"/>
+            <a:ext cx="10424160" cy="1234440"/>
           </a:xfrm>
           <a:prstGeom prst="rect">
             <a:avLst/>
           </a:prstGeom>
-        </p:spPr>
-      </p:pic>
-      <p:sp>
-        <p:nvSpPr>
-          <p:cNvPr id="5" name="TextBox 4"/>
-          <p:cNvSpPr txBox="1"/>
-          <p:nvPr/>
-        </p:nvSpPr>
-        <p:spPr>
-          <a:xfrm>
-            <a:off x="548640" y="3520440"/>
-            <a:ext cx="11064240" cy="365760"/>
-          </a:xfrm>
-          <a:prstGeom prst="rect">
-            <a:avLst/>
-          </a:prstGeom>
           <a:noFill/>
         </p:spPr>
         <p:txBody>
-          <a:bodyPr wrap="square">
+          <a:bodyPr wrap="square" anchor="t">
             <a:spAutoFit/>
           </a:bodyPr>
           <a:lstStyle/>
           <a:p>
             <a:pPr>
               <a:spcAft>
-                <a:spcPts val="600"/>
+                <a:spcPts val="500"/>
               </a:spcAft>
             </a:pPr>
             <a:r>
-              <a:rPr sz="1500" b="1">
-                <a:solidFill>
-                  <a:srgbClr val="1F3A6E"/>
-                </a:solidFill>
-                <a:latin typeface="Arial"/>
-              </a:rPr>
-              <a:t>❖ Then: 3 frames must agree → attendance is written  (once per day, and irreversible)</a:t>
-            </a:r>
-          </a:p>
-        </p:txBody>
-      </p:sp>
-      <p:sp>
-        <p:nvSpPr>
-          <p:cNvPr id="6" name="TextBox 5"/>
+              <a:rPr sz="1300" b="1" i="0">
+                <a:solidFill>
+                  <a:srgbClr val="000000"/>
+                </a:solidFill>
+                <a:latin typeface="Calibri"/>
+              </a:rPr>
+              <a:t>But automating it with face recognition introduces a NEW problem — and this is the gap our project addresses:</a:t>
+            </a:r>
+          </a:p>
+          <a:p>
+            <a:pPr>
+              <a:spcAft>
+                <a:spcPts val="500"/>
+              </a:spcAft>
+            </a:pPr>
+            <a:r>
+              <a:rPr sz="1300" b="0" i="0">
+                <a:solidFill>
+                  <a:srgbClr val="C00000"/>
+                </a:solidFill>
+                <a:latin typeface="Calibri"/>
+              </a:rPr>
+              <a:t>Face recognition is DESIGNED to give a photo of you the same embedding as you. That is exactly what makes it a good face model.</a:t>
+            </a:r>
+          </a:p>
+          <a:p>
+            <a:pPr>
+              <a:spcAft>
+                <a:spcPts val="500"/>
+              </a:spcAft>
+            </a:pPr>
+            <a:r>
+              <a:rPr sz="1300" b="1" i="0">
+                <a:solidFill>
+                  <a:srgbClr val="C00000"/>
+                </a:solidFill>
+                <a:latin typeface="Calibri"/>
+              </a:rPr>
+              <a:t>So recognition ALONE cannot prevent proxy attendance. We measured it: a printed photo was marked present 100% of the time.</a:t>
+            </a:r>
+          </a:p>
+        </p:txBody>
+      </p:sp>
+      <p:sp>
+        <p:nvSpPr>
+          <p:cNvPr id="7" name="Rounded Rectangle 6"/>
+          <p:cNvSpPr/>
+          <p:nvPr/>
+        </p:nvSpPr>
+        <p:spPr>
+          <a:xfrm>
+            <a:off x="640080" y="3749039"/>
+            <a:ext cx="10881360" cy="2331720"/>
+          </a:xfrm>
+          <a:prstGeom prst="roundRect">
+            <a:avLst/>
+          </a:prstGeom>
+          <a:solidFill>
+            <a:srgbClr val="FBD5B5"/>
+          </a:solidFill>
+          <a:ln w="15875">
+            <a:solidFill>
+              <a:srgbClr val="ED7D31"/>
+            </a:solidFill>
+          </a:ln>
+          <a:effectLst/>
+        </p:spPr>
+        <p:style>
+          <a:lnRef idx="1">
+            <a:schemeClr val="accent1"/>
+          </a:lnRef>
+          <a:fillRef idx="3">
+            <a:schemeClr val="accent1"/>
+          </a:fillRef>
+          <a:effectRef idx="2">
+            <a:schemeClr val="accent1"/>
+          </a:effectRef>
+          <a:fontRef idx="minor">
+            <a:schemeClr val="lt1"/>
+          </a:fontRef>
+        </p:style>
+        <p:txBody>
+          <a:bodyPr rtlCol="0" anchor="ctr"/>
+          <a:lstStyle/>
+          <a:p/>
+        </p:txBody>
+      </p:sp>
+      <p:sp>
+        <p:nvSpPr>
+          <p:cNvPr id="8" name="TextBox 7"/>
           <p:cNvSpPr txBox="1"/>
           <p:nvPr/>
         </p:nvSpPr>
         <p:spPr>
           <a:xfrm>
-            <a:off x="685800" y="3977639"/>
-            <a:ext cx="6675120" cy="2194560"/>
+            <a:off x="868680" y="3886200"/>
+            <a:ext cx="10424160" cy="2148840"/>
           </a:xfrm>
           <a:prstGeom prst="rect">
             <a:avLst/>
@@ -4725,361 +5786,95 @@
           <a:noFill/>
         </p:spPr>
         <p:txBody>
-          <a:bodyPr wrap="square">
+          <a:bodyPr wrap="square" anchor="t">
             <a:spAutoFit/>
           </a:bodyPr>
           <a:lstStyle/>
           <a:p>
             <a:pPr>
               <a:spcAft>
-                <a:spcPts val="600"/>
+                <a:spcPts val="500"/>
               </a:spcAft>
             </a:pPr>
             <a:r>
-              <a:rPr sz="1250" b="1">
-                <a:solidFill>
-                  <a:srgbClr val="1F3A6E"/>
-                </a:solidFill>
-                <a:latin typeface="Arial"/>
-              </a:rPr>
-              <a:t>❖ Liveness — why not blink detection?</a:t>
+              <a:rPr sz="1400" b="0" i="0">
+                <a:solidFill>
+                  <a:srgbClr val="000000"/>
+                </a:solidFill>
+                <a:latin typeface="Calibri"/>
+              </a:rPr>
+              <a:t>Four failures a real classroom deployment must survive:</a:t>
             </a:r>
           </a:p>
           <a:p>
             <a:pPr>
               <a:spcAft>
-                <a:spcPts val="600"/>
+                <a:spcPts val="500"/>
               </a:spcAft>
             </a:pPr>
-            <a:r>
-              <a:rPr sz="1250" b="0">
-                <a:solidFill>
-                  <a:srgbClr val="1A1A1A"/>
-                </a:solidFill>
-                <a:latin typeface="Arial"/>
-              </a:rPr>
-              <a:t>•  A blink lasts 0.3 s.  We sample 1.4 frames/sec.</a:t>
-            </a:r>
           </a:p>
           <a:p>
             <a:pPr>
               <a:spcAft>
-                <a:spcPts val="600"/>
+                <a:spcPts val="500"/>
               </a:spcAft>
             </a:pPr>
             <a:r>
-              <a:rPr sz="1250" b="0">
-                <a:solidFill>
-                  <a:srgbClr val="1A1A1A"/>
-                </a:solidFill>
-                <a:latin typeface="Arial"/>
-              </a:rPr>
-              <a:t>   We measured blink detection FAILING.</a:t>
+              <a:rPr sz="1400" b="0" i="0">
+                <a:solidFill>
+                  <a:srgbClr val="000000"/>
+                </a:solidFill>
+                <a:latin typeface="Calibri"/>
+              </a:rPr>
+              <a:t>•   A photograph or phone screen held to the camera  →  marked present</a:t>
             </a:r>
           </a:p>
           <a:p>
             <a:pPr>
               <a:spcAft>
-                <a:spcPts val="600"/>
+                <a:spcPts val="500"/>
               </a:spcAft>
             </a:pPr>
             <a:r>
-              <a:rPr sz="1250" b="0">
-                <a:solidFill>
-                  <a:srgbClr val="1A1A1A"/>
-                </a:solidFill>
-                <a:latin typeface="Arial"/>
-              </a:rPr>
-              <a:t>•  Instead we measure facial motion from the 106</a:t>
+              <a:rPr sz="1400" b="0" i="0">
+                <a:solidFill>
+                  <a:srgbClr val="000000"/>
+                </a:solidFill>
+                <a:latin typeface="Calibri"/>
+              </a:rPr>
+              <a:t>•   A stranger walking past  →  a softmax classifier has no way to say "nobody"</a:t>
             </a:r>
           </a:p>
           <a:p>
             <a:pPr>
               <a:spcAft>
-                <a:spcPts val="600"/>
+                <a:spcPts val="500"/>
               </a:spcAft>
             </a:pPr>
             <a:r>
-              <a:rPr sz="1250" b="0">
-                <a:solidFill>
-                  <a:srgbClr val="1A1A1A"/>
-                </a:solidFill>
-                <a:latin typeface="Arial"/>
-              </a:rPr>
-              <a:t>   landmarks the detector already produces for free.</a:t>
+              <a:rPr sz="1400" b="0" i="0">
+                <a:solidFill>
+                  <a:srgbClr val="000000"/>
+                </a:solidFill>
+                <a:latin typeface="Calibri"/>
+              </a:rPr>
+              <a:t>•   A student at the back of the room  →  too few pixels to identify, but still named</a:t>
             </a:r>
           </a:p>
           <a:p>
             <a:pPr>
               <a:spcAft>
-                <a:spcPts val="600"/>
+                <a:spcPts val="500"/>
               </a:spcAft>
             </a:pPr>
             <a:r>
-              <a:rPr sz="1250" b="0">
-                <a:solidFill>
-                  <a:srgbClr val="1A1A1A"/>
-                </a:solidFill>
-                <a:latin typeface="Arial"/>
-              </a:rPr>
-              <a:t>•  Rotation and scale are normalised out — so shaking</a:t>
-            </a:r>
-          </a:p>
-          <a:p>
-            <a:pPr>
-              <a:spcAft>
-                <a:spcPts val="600"/>
-              </a:spcAft>
-            </a:pPr>
-            <a:r>
-              <a:rPr sz="1250" b="0">
-                <a:solidFill>
-                  <a:srgbClr val="1A1A1A"/>
-                </a:solidFill>
-                <a:latin typeface="Arial"/>
-              </a:rPr>
-              <a:t>   the photo does not help the attacker.</a:t>
-            </a:r>
-          </a:p>
-          <a:p>
-            <a:pPr>
-              <a:spcAft>
-                <a:spcPts val="600"/>
-              </a:spcAft>
-            </a:pPr>
-            <a:r>
-              <a:rPr sz="1250" b="1">
-                <a:solidFill>
-                  <a:srgbClr val="1E7A45"/>
-                </a:solidFill>
-                <a:latin typeface="Arial"/>
-              </a:rPr>
-              <a:t>•  No extra model.  No extra compute.  No GPU.</a:t>
-            </a:r>
-          </a:p>
-        </p:txBody>
-      </p:sp>
-      <p:graphicFrame>
-        <p:nvGraphicFramePr>
-          <p:cNvPr id="7" name="Table 6"/>
-          <p:cNvGraphicFramePr>
-            <a:graphicFrameLocks noGrp="1"/>
-          </p:cNvGraphicFramePr>
-          <p:nvPr/>
-        </p:nvGraphicFramePr>
-        <p:xfrm>
-          <a:off x="7589520" y="4023360"/>
-          <a:ext cx="4114800" cy="1554480"/>
-        </p:xfrm>
-        <a:graphic>
-          <a:graphicData uri="http://schemas.openxmlformats.org/drawingml/2006/table">
-            <a:tbl>
-              <a:tblPr firstRow="1" bandRow="1">
-                <a:tableStyleId>{5C22544A-7EE6-4342-B048-85BDC9FD1C3A}</a:tableStyleId>
-              </a:tblPr>
-              <a:tblGrid>
-                <a:gridCol w="2651760"/>
-                <a:gridCol w="1463040"/>
-              </a:tblGrid>
-              <a:tr h="310896">
-                <a:tc>
-                  <a:txBody>
-                    <a:bodyPr/>
-                    <a:lstStyle/>
-                    <a:p>
-                      <a:r>
-                        <a:rPr sz="1100" b="1">
-                          <a:latin typeface="Arial"/>
-                        </a:rPr>
-                        <a:t>Motion score</a:t>
-                      </a:r>
-                    </a:p>
-                  </a:txBody>
-                  <a:tcPr/>
-                </a:tc>
-                <a:tc>
-                  <a:txBody>
-                    <a:bodyPr/>
-                    <a:lstStyle/>
-                    <a:p>
-                      <a:r>
-                        <a:rPr sz="1100" b="1">
-                          <a:latin typeface="Arial"/>
-                        </a:rPr>
-                        <a:t>Value</a:t>
-                      </a:r>
-                    </a:p>
-                  </a:txBody>
-                  <a:tcPr/>
-                </a:tc>
-              </a:tr>
-              <a:tr h="310896">
-                <a:tc>
-                  <a:txBody>
-                    <a:bodyPr/>
-                    <a:lstStyle/>
-                    <a:p>
-                      <a:r>
-                        <a:rPr sz="1100" b="1">
-                          <a:latin typeface="Arial"/>
-                        </a:rPr>
-                        <a:t>Photo held up (hand-shake)</a:t>
-                      </a:r>
-                    </a:p>
-                  </a:txBody>
-                  <a:tcPr/>
-                </a:tc>
-                <a:tc>
-                  <a:txBody>
-                    <a:bodyPr/>
-                    <a:lstStyle/>
-                    <a:p>
-                      <a:r>
-                        <a:rPr sz="1100" b="0">
-                          <a:latin typeface="Arial"/>
-                        </a:rPr>
-                        <a:t>0.015</a:t>
-                      </a:r>
-                    </a:p>
-                  </a:txBody>
-                  <a:tcPr/>
-                </a:tc>
-              </a:tr>
-              <a:tr h="310896">
-                <a:tc>
-                  <a:txBody>
-                    <a:bodyPr/>
-                    <a:lstStyle/>
-                    <a:p>
-                      <a:r>
-                        <a:rPr sz="1100" b="1">
-                          <a:latin typeface="Arial"/>
-                        </a:rPr>
-                        <a:t>Arnab, live</a:t>
-                      </a:r>
-                    </a:p>
-                  </a:txBody>
-                  <a:tcPr/>
-                </a:tc>
-                <a:tc>
-                  <a:txBody>
-                    <a:bodyPr/>
-                    <a:lstStyle/>
-                    <a:p>
-                      <a:r>
-                        <a:rPr sz="1100" b="0">
-                          <a:latin typeface="Arial"/>
-                        </a:rPr>
-                        <a:t>0.066</a:t>
-                      </a:r>
-                    </a:p>
-                  </a:txBody>
-                  <a:tcPr/>
-                </a:tc>
-              </a:tr>
-              <a:tr h="310896">
-                <a:tc>
-                  <a:txBody>
-                    <a:bodyPr/>
-                    <a:lstStyle/>
-                    <a:p>
-                      <a:r>
-                        <a:rPr sz="1100" b="1">
-                          <a:latin typeface="Arial"/>
-                        </a:rPr>
-                        <a:t>Soham, live</a:t>
-                      </a:r>
-                    </a:p>
-                  </a:txBody>
-                  <a:tcPr/>
-                </a:tc>
-                <a:tc>
-                  <a:txBody>
-                    <a:bodyPr/>
-                    <a:lstStyle/>
-                    <a:p>
-                      <a:r>
-                        <a:rPr sz="1100" b="0">
-                          <a:latin typeface="Arial"/>
-                        </a:rPr>
-                        <a:t>0.135</a:t>
-                      </a:r>
-                    </a:p>
-                  </a:txBody>
-                  <a:tcPr/>
-                </a:tc>
-              </a:tr>
-              <a:tr h="310896">
-                <a:tc>
-                  <a:txBody>
-                    <a:bodyPr/>
-                    <a:lstStyle/>
-                    <a:p>
-                      <a:r>
-                        <a:rPr sz="1100" b="1">
-                          <a:latin typeface="Arial"/>
-                        </a:rPr>
-                        <a:t>Threshold</a:t>
-                      </a:r>
-                    </a:p>
-                  </a:txBody>
-                  <a:tcPr/>
-                </a:tc>
-                <a:tc>
-                  <a:txBody>
-                    <a:bodyPr/>
-                    <a:lstStyle/>
-                    <a:p>
-                      <a:r>
-                        <a:rPr sz="1100" b="0">
-                          <a:latin typeface="Arial"/>
-                        </a:rPr>
-                        <a:t>0.035</a:t>
-                      </a:r>
-                    </a:p>
-                  </a:txBody>
-                  <a:tcPr/>
-                </a:tc>
-              </a:tr>
-            </a:tbl>
-          </a:graphicData>
-        </a:graphic>
-      </p:graphicFrame>
-      <p:sp>
-        <p:nvSpPr>
-          <p:cNvPr id="8" name="TextBox 7"/>
-          <p:cNvSpPr txBox="1"/>
-          <p:nvPr/>
-        </p:nvSpPr>
-        <p:spPr>
-          <a:xfrm>
-            <a:off x="7589520" y="5669280"/>
-            <a:ext cx="4114800" cy="548640"/>
-          </a:xfrm>
-          <a:prstGeom prst="rect">
-            <a:avLst/>
-          </a:prstGeom>
-          <a:noFill/>
-        </p:spPr>
-        <p:txBody>
-          <a:bodyPr wrap="square">
-            <a:spAutoFit/>
-          </a:bodyPr>
-          <a:lstStyle/>
-          <a:p>
-            <a:pPr>
-              <a:spcAft>
-                <a:spcPts val="600"/>
-              </a:spcAft>
-            </a:pPr>
-            <a:r>
-              <a:rPr sz="1000" b="1">
-                <a:solidFill>
-                  <a:srgbClr val="C00000"/>
-                </a:solidFill>
-                <a:latin typeface="Arial"/>
-              </a:rPr>
-              <a:t>Protocol:  96 identities → 30 STUDENTS (70% enrol / 30% test)  +  66 STRANGERS (half calibrate / half measure the FAR).</a:t>
+              <a:rPr sz="1400" b="0" i="0">
+                <a:solidFill>
+                  <a:srgbClr val="000000"/>
+                </a:solidFill>
+                <a:latin typeface="Calibri"/>
+              </a:rPr>
+              <a:t>•   One misread frame  →  the wrong student marked present for the entire day</a:t>
             </a:r>
           </a:p>
         </p:txBody>
@@ -5156,9 +5951,9 @@
                 <a:solidFill>
                   <a:srgbClr val="FFFFFF"/>
                 </a:solidFill>
-                <a:latin typeface="Arial"/>
-              </a:rPr>
-              <a:t>4</a:t>
+                <a:latin typeface="Calibri"/>
+              </a:rPr>
+              <a:t>3</a:t>
             </a:r>
           </a:p>
         </p:txBody>
@@ -5189,8 +5984,87 @@
         </p:nvSpPr>
         <p:spPr>
           <a:xfrm>
-            <a:off x="548640" y="109728"/>
-            <a:ext cx="11064240" cy="777240"/>
+            <a:off x="457200" y="109728"/>
+            <a:ext cx="11247120" cy="822960"/>
+          </a:xfrm>
+          <a:prstGeom prst="rect">
+            <a:avLst/>
+          </a:prstGeom>
+          <a:noFill/>
+        </p:spPr>
+        <p:txBody>
+          <a:bodyPr wrap="none">
+            <a:spAutoFit/>
+          </a:bodyPr>
+          <a:lstStyle/>
+          <a:p>
+            <a:pPr algn="ctr"/>
+            <a:r>
+              <a:rPr sz="3600" b="1">
+                <a:solidFill>
+                  <a:srgbClr val="1F3864"/>
+                </a:solidFill>
+                <a:latin typeface="Times New Roman"/>
+              </a:rPr>
+              <a:t>LITERATURE REVIEW</a:t>
+            </a:r>
+          </a:p>
+        </p:txBody>
+      </p:sp>
+      <p:sp>
+        <p:nvSpPr>
+          <p:cNvPr id="3" name="Rounded Rectangle 2"/>
+          <p:cNvSpPr/>
+          <p:nvPr/>
+        </p:nvSpPr>
+        <p:spPr>
+          <a:xfrm>
+            <a:off x="640080" y="1051560"/>
+            <a:ext cx="10881360" cy="731520"/>
+          </a:xfrm>
+          <a:prstGeom prst="roundRect">
+            <a:avLst/>
+          </a:prstGeom>
+          <a:solidFill>
+            <a:srgbClr val="DEEAF6"/>
+          </a:solidFill>
+          <a:ln w="12700">
+            <a:solidFill>
+              <a:srgbClr val="2E75B6"/>
+            </a:solidFill>
+          </a:ln>
+          <a:effectLst/>
+        </p:spPr>
+        <p:style>
+          <a:lnRef idx="1">
+            <a:schemeClr val="accent1"/>
+          </a:lnRef>
+          <a:fillRef idx="3">
+            <a:schemeClr val="accent1"/>
+          </a:fillRef>
+          <a:effectRef idx="2">
+            <a:schemeClr val="accent1"/>
+          </a:effectRef>
+          <a:fontRef idx="minor">
+            <a:schemeClr val="lt1"/>
+          </a:fontRef>
+        </p:style>
+        <p:txBody>
+          <a:bodyPr rtlCol="0" anchor="ctr"/>
+          <a:lstStyle/>
+          <a:p/>
+        </p:txBody>
+      </p:sp>
+      <p:sp>
+        <p:nvSpPr>
+          <p:cNvPr id="4" name="TextBox 3"/>
+          <p:cNvSpPr txBox="1"/>
+          <p:nvPr/>
+        </p:nvSpPr>
+        <p:spPr>
+          <a:xfrm>
+            <a:off x="868680" y="1143000"/>
+            <a:ext cx="10424160" cy="566928"/>
           </a:xfrm>
           <a:prstGeom prst="rect">
             <a:avLst/>
@@ -5203,425 +6077,81 @@
           </a:bodyPr>
           <a:lstStyle/>
           <a:p>
-            <a:pPr algn="ctr"/>
-            <a:r>
-              <a:rPr sz="3400" b="1">
+            <a:r>
+              <a:rPr sz="1300" b="1">
                 <a:solidFill>
                   <a:srgbClr val="000000"/>
                 </a:solidFill>
-                <a:latin typeface="Times New Roman"/>
-              </a:rPr>
-              <a:t>RESULTS</a:t>
-            </a:r>
-          </a:p>
-        </p:txBody>
-      </p:sp>
-      <p:pic>
-        <p:nvPicPr>
-          <p:cNvPr id="3" name="Picture 2" descr="spoof.png"/>
-          <p:cNvPicPr>
-            <a:picLocks noChangeAspect="1"/>
-          </p:cNvPicPr>
-          <p:nvPr/>
-        </p:nvPicPr>
-        <p:blipFill>
-          <a:blip r:embed="rId2"/>
-          <a:stretch>
-            <a:fillRect/>
-          </a:stretch>
-        </p:blipFill>
-        <p:spPr>
-          <a:xfrm>
-            <a:off x="457200" y="868680"/>
-            <a:ext cx="2944707" cy="2148840"/>
-          </a:xfrm>
-          <a:prstGeom prst="rect">
-            <a:avLst/>
-          </a:prstGeom>
-        </p:spPr>
-      </p:pic>
-      <p:pic>
-        <p:nvPicPr>
-          <p:cNvPr id="4" name="Picture 3" descr="ablation.png"/>
-          <p:cNvPicPr>
-            <a:picLocks noChangeAspect="1"/>
-          </p:cNvPicPr>
-          <p:nvPr/>
-        </p:nvPicPr>
-        <p:blipFill>
-          <a:blip r:embed="rId3"/>
-          <a:stretch>
-            <a:fillRect/>
-          </a:stretch>
-        </p:blipFill>
-        <p:spPr>
-          <a:xfrm>
-            <a:off x="3977639" y="868680"/>
-            <a:ext cx="4138507" cy="2148840"/>
-          </a:xfrm>
-          <a:prstGeom prst="rect">
-            <a:avLst/>
-          </a:prstGeom>
-        </p:spPr>
-      </p:pic>
-      <p:pic>
-        <p:nvPicPr>
-          <p:cNvPr id="5" name="Picture 4" descr="degradation.png"/>
-          <p:cNvPicPr>
-            <a:picLocks noChangeAspect="1"/>
-          </p:cNvPicPr>
-          <p:nvPr/>
-        </p:nvPicPr>
-        <p:blipFill>
-          <a:blip r:embed="rId4"/>
-          <a:stretch>
-            <a:fillRect/>
-          </a:stretch>
-        </p:blipFill>
-        <p:spPr>
-          <a:xfrm>
-            <a:off x="8595360" y="868680"/>
-            <a:ext cx="3103880" cy="2148840"/>
-          </a:xfrm>
-          <a:prstGeom prst="rect">
-            <a:avLst/>
-          </a:prstGeom>
-        </p:spPr>
-      </p:pic>
-      <p:graphicFrame>
-        <p:nvGraphicFramePr>
-          <p:cNvPr id="6" name="Table 5"/>
-          <p:cNvGraphicFramePr>
-            <a:graphicFrameLocks noGrp="1"/>
-          </p:cNvGraphicFramePr>
-          <p:nvPr/>
-        </p:nvGraphicFramePr>
-        <p:xfrm>
-          <a:off x="457200" y="3246120"/>
-          <a:ext cx="6675120" cy="2377440"/>
-        </p:xfrm>
-        <a:graphic>
-          <a:graphicData uri="http://schemas.openxmlformats.org/drawingml/2006/table">
-            <a:tbl>
-              <a:tblPr firstRow="1" bandRow="1">
-                <a:tableStyleId>{5C22544A-7EE6-4342-B048-85BDC9FD1C3A}</a:tableStyleId>
-              </a:tblPr>
-              <a:tblGrid>
-                <a:gridCol w="3566160"/>
-                <a:gridCol w="1554480"/>
-                <a:gridCol w="1554480"/>
-              </a:tblGrid>
-              <a:tr h="396240">
-                <a:tc>
-                  <a:txBody>
-                    <a:bodyPr/>
-                    <a:lstStyle/>
-                    <a:p>
-                      <a:r>
-                        <a:rPr sz="1100" b="1">
-                          <a:latin typeface="Arial"/>
-                        </a:rPr>
-                        <a:t>Metric</a:t>
-                      </a:r>
-                    </a:p>
-                  </a:txBody>
-                  <a:tcPr/>
-                </a:tc>
-                <a:tc>
-                  <a:txBody>
-                    <a:bodyPr/>
-                    <a:lstStyle/>
-                    <a:p>
-                      <a:r>
-                        <a:rPr sz="1100" b="1">
-                          <a:latin typeface="Arial"/>
-                        </a:rPr>
-                        <a:t>Before</a:t>
-                      </a:r>
-                    </a:p>
-                  </a:txBody>
-                  <a:tcPr/>
-                </a:tc>
-                <a:tc>
-                  <a:txBody>
-                    <a:bodyPr/>
-                    <a:lstStyle/>
-                    <a:p>
-                      <a:r>
-                        <a:rPr sz="1100" b="1">
-                          <a:latin typeface="Arial"/>
-                        </a:rPr>
-                        <a:t>After</a:t>
-                      </a:r>
-                    </a:p>
-                  </a:txBody>
-                  <a:tcPr/>
-                </a:tc>
-              </a:tr>
-              <a:tr h="396240">
-                <a:tc>
-                  <a:txBody>
-                    <a:bodyPr/>
-                    <a:lstStyle/>
-                    <a:p>
-                      <a:r>
-                        <a:rPr sz="1100" b="1">
-                          <a:latin typeface="Arial"/>
-                        </a:rPr>
-                        <a:t>Photo marked present (attack success)</a:t>
-                      </a:r>
-                    </a:p>
-                  </a:txBody>
-                  <a:tcPr/>
-                </a:tc>
-                <a:tc>
-                  <a:txBody>
-                    <a:bodyPr/>
-                    <a:lstStyle/>
-                    <a:p>
-                      <a:r>
-                        <a:rPr sz="1100" b="0">
-                          <a:latin typeface="Arial"/>
-                        </a:rPr>
-                        <a:t>100%</a:t>
-                      </a:r>
-                    </a:p>
-                  </a:txBody>
-                  <a:tcPr/>
-                </a:tc>
-                <a:tc>
-                  <a:txBody>
-                    <a:bodyPr/>
-                    <a:lstStyle/>
-                    <a:p>
-                      <a:r>
-                        <a:rPr sz="1100" b="1">
-                          <a:solidFill>
-                            <a:srgbClr val="1E7A45"/>
-                          </a:solidFill>
-                          <a:latin typeface="Arial"/>
-                        </a:rPr>
-                        <a:t>0%</a:t>
-                      </a:r>
-                    </a:p>
-                  </a:txBody>
-                  <a:tcPr/>
-                </a:tc>
-              </a:tr>
-              <a:tr h="396240">
-                <a:tc>
-                  <a:txBody>
-                    <a:bodyPr/>
-                    <a:lstStyle/>
-                    <a:p>
-                      <a:r>
-                        <a:rPr sz="1100" b="1">
-                          <a:latin typeface="Arial"/>
-                        </a:rPr>
-                        <a:t>Strangers admitted (FAR)</a:t>
-                      </a:r>
-                    </a:p>
-                  </a:txBody>
-                  <a:tcPr/>
-                </a:tc>
-                <a:tc>
-                  <a:txBody>
-                    <a:bodyPr/>
-                    <a:lstStyle/>
-                    <a:p>
-                      <a:r>
-                        <a:rPr sz="1100" b="0">
-                          <a:latin typeface="Arial"/>
-                        </a:rPr>
-                        <a:t>0.81%</a:t>
-                      </a:r>
-                    </a:p>
-                  </a:txBody>
-                  <a:tcPr/>
-                </a:tc>
-                <a:tc>
-                  <a:txBody>
-                    <a:bodyPr/>
-                    <a:lstStyle/>
-                    <a:p>
-                      <a:r>
-                        <a:rPr sz="1100" b="1">
-                          <a:solidFill>
-                            <a:srgbClr val="1E7A45"/>
-                          </a:solidFill>
-                          <a:latin typeface="Arial"/>
-                        </a:rPr>
-                        <a:t>0.20%</a:t>
-                      </a:r>
-                    </a:p>
-                  </a:txBody>
-                  <a:tcPr/>
-                </a:tc>
-              </a:tr>
-              <a:tr h="396240">
-                <a:tc>
-                  <a:txBody>
-                    <a:bodyPr/>
-                    <a:lstStyle/>
-                    <a:p>
-                      <a:r>
-                        <a:rPr sz="1100" b="1">
-                          <a:latin typeface="Arial"/>
-                        </a:rPr>
-                        <a:t>Wrong attendance records</a:t>
-                      </a:r>
-                    </a:p>
-                  </a:txBody>
-                  <a:tcPr/>
-                </a:tc>
-                <a:tc>
-                  <a:txBody>
-                    <a:bodyPr/>
-                    <a:lstStyle/>
-                    <a:p>
-                      <a:r>
-                        <a:rPr sz="1100" b="0">
-                          <a:latin typeface="Arial"/>
-                        </a:rPr>
-                        <a:t>3.54%</a:t>
-                      </a:r>
-                    </a:p>
-                  </a:txBody>
-                  <a:tcPr/>
-                </a:tc>
-                <a:tc>
-                  <a:txBody>
-                    <a:bodyPr/>
-                    <a:lstStyle/>
-                    <a:p>
-                      <a:r>
-                        <a:rPr sz="1100" b="1">
-                          <a:solidFill>
-                            <a:srgbClr val="1E7A45"/>
-                          </a:solidFill>
-                          <a:latin typeface="Arial"/>
-                        </a:rPr>
-                        <a:t>0%</a:t>
-                      </a:r>
-                    </a:p>
-                  </a:txBody>
-                  <a:tcPr/>
-                </a:tc>
-              </a:tr>
-              <a:tr h="396240">
-                <a:tc>
-                  <a:txBody>
-                    <a:bodyPr/>
-                    <a:lstStyle/>
-                    <a:p>
-                      <a:r>
-                        <a:rPr sz="1100" b="1">
-                          <a:latin typeface="Arial"/>
-                        </a:rPr>
-                        <a:t>Time to enrol a student</a:t>
-                      </a:r>
-                    </a:p>
-                  </a:txBody>
-                  <a:tcPr/>
-                </a:tc>
-                <a:tc>
-                  <a:txBody>
-                    <a:bodyPr/>
-                    <a:lstStyle/>
-                    <a:p>
-                      <a:r>
-                        <a:rPr sz="1100" b="0">
-                          <a:latin typeface="Arial"/>
-                        </a:rPr>
-                        <a:t>607 s</a:t>
-                      </a:r>
-                    </a:p>
-                  </a:txBody>
-                  <a:tcPr/>
-                </a:tc>
-                <a:tc>
-                  <a:txBody>
-                    <a:bodyPr/>
-                    <a:lstStyle/>
-                    <a:p>
-                      <a:r>
-                        <a:rPr sz="1100" b="1">
-                          <a:solidFill>
-                            <a:srgbClr val="1E7A45"/>
-                          </a:solidFill>
-                          <a:latin typeface="Arial"/>
-                        </a:rPr>
-                        <a:t>1.4 s</a:t>
-                      </a:r>
-                    </a:p>
-                  </a:txBody>
-                  <a:tcPr/>
-                </a:tc>
-              </a:tr>
-              <a:tr h="396240">
-                <a:tc>
-                  <a:txBody>
-                    <a:bodyPr/>
-                    <a:lstStyle/>
-                    <a:p>
-                      <a:r>
-                        <a:rPr sz="1100" b="1">
-                          <a:latin typeface="Arial"/>
-                        </a:rPr>
-                        <a:t>Time to mark a student present</a:t>
-                      </a:r>
-                    </a:p>
-                  </a:txBody>
-                  <a:tcPr/>
-                </a:tc>
-                <a:tc>
-                  <a:txBody>
-                    <a:bodyPr/>
-                    <a:lstStyle/>
-                    <a:p>
-                      <a:r>
-                        <a:rPr sz="1100" b="0">
-                          <a:latin typeface="Arial"/>
-                        </a:rPr>
-                        <a:t>10.5 s</a:t>
-                      </a:r>
-                    </a:p>
-                  </a:txBody>
-                  <a:tcPr/>
-                </a:tc>
-                <a:tc>
-                  <a:txBody>
-                    <a:bodyPr/>
-                    <a:lstStyle/>
-                    <a:p>
-                      <a:r>
-                        <a:rPr sz="1100" b="1">
-                          <a:solidFill>
-                            <a:srgbClr val="1E7A45"/>
-                          </a:solidFill>
-                          <a:latin typeface="Arial"/>
-                        </a:rPr>
-                        <a:t>2.8 s</a:t>
-                      </a:r>
-                    </a:p>
-                  </a:txBody>
-                  <a:tcPr/>
-                </a:tc>
-              </a:tr>
-            </a:tbl>
-          </a:graphicData>
-        </a:graphic>
-      </p:graphicFrame>
-      <p:sp>
-        <p:nvSpPr>
-          <p:cNvPr id="7" name="TextBox 6"/>
+                <a:latin typeface="Calibri"/>
+              </a:rPr>
+              <a:t>D'Souza et al. (2019) [1] </a:t>
+            </a:r>
+            <a:r>
+              <a:rPr sz="1300">
+                <a:solidFill>
+                  <a:srgbClr val="1A1A1A"/>
+                </a:solidFill>
+                <a:latin typeface="Calibri"/>
+              </a:rPr>
+              <a:t>proposed an automated attendance system using facial recognition with histogram-based feature extraction; efficient, but sensitive to lighting and pose.</a:t>
+            </a:r>
+          </a:p>
+        </p:txBody>
+      </p:sp>
+      <p:sp>
+        <p:nvSpPr>
+          <p:cNvPr id="5" name="Rounded Rectangle 4"/>
+          <p:cNvSpPr/>
+          <p:nvPr/>
+        </p:nvSpPr>
+        <p:spPr>
+          <a:xfrm>
+            <a:off x="640080" y="1892807"/>
+            <a:ext cx="10881360" cy="731520"/>
+          </a:xfrm>
+          <a:prstGeom prst="roundRect">
+            <a:avLst/>
+          </a:prstGeom>
+          <a:solidFill>
+            <a:srgbClr val="DEEAF6"/>
+          </a:solidFill>
+          <a:ln w="12700">
+            <a:solidFill>
+              <a:srgbClr val="2E75B6"/>
+            </a:solidFill>
+          </a:ln>
+          <a:effectLst/>
+        </p:spPr>
+        <p:style>
+          <a:lnRef idx="1">
+            <a:schemeClr val="accent1"/>
+          </a:lnRef>
+          <a:fillRef idx="3">
+            <a:schemeClr val="accent1"/>
+          </a:fillRef>
+          <a:effectRef idx="2">
+            <a:schemeClr val="accent1"/>
+          </a:effectRef>
+          <a:fontRef idx="minor">
+            <a:schemeClr val="lt1"/>
+          </a:fontRef>
+        </p:style>
+        <p:txBody>
+          <a:bodyPr rtlCol="0" anchor="ctr"/>
+          <a:lstStyle/>
+          <a:p/>
+        </p:txBody>
+      </p:sp>
+      <p:sp>
+        <p:nvSpPr>
+          <p:cNvPr id="6" name="TextBox 5"/>
           <p:cNvSpPr txBox="1"/>
           <p:nvPr/>
         </p:nvSpPr>
         <p:spPr>
           <a:xfrm>
-            <a:off x="7406640" y="3246120"/>
-            <a:ext cx="4389120" cy="2926080"/>
+            <a:off x="868680" y="1984248"/>
+            <a:ext cx="10424160" cy="566928"/>
           </a:xfrm>
           <a:prstGeom prst="rect">
             <a:avLst/>
@@ -5634,168 +6164,374 @@
           </a:bodyPr>
           <a:lstStyle/>
           <a:p>
+            <a:r>
+              <a:rPr sz="1300" b="1">
+                <a:solidFill>
+                  <a:srgbClr val="000000"/>
+                </a:solidFill>
+                <a:latin typeface="Calibri"/>
+              </a:rPr>
+              <a:t>Arsenovic et al. (2017) [2] </a:t>
+            </a:r>
+            <a:r>
+              <a:rPr sz="1300">
+                <a:solidFill>
+                  <a:srgbClr val="1A1A1A"/>
+                </a:solidFill>
+                <a:latin typeface="Calibri"/>
+              </a:rPr>
+              <a:t>applied CNN-based deep learning for face recognition, achieving higher accuracy and real-time performance.</a:t>
+            </a:r>
+          </a:p>
+        </p:txBody>
+      </p:sp>
+      <p:sp>
+        <p:nvSpPr>
+          <p:cNvPr id="7" name="Rounded Rectangle 6"/>
+          <p:cNvSpPr/>
+          <p:nvPr/>
+        </p:nvSpPr>
+        <p:spPr>
+          <a:xfrm>
+            <a:off x="640080" y="2734056"/>
+            <a:ext cx="10881360" cy="731520"/>
+          </a:xfrm>
+          <a:prstGeom prst="roundRect">
+            <a:avLst/>
+          </a:prstGeom>
+          <a:solidFill>
+            <a:srgbClr val="DEEAF6"/>
+          </a:solidFill>
+          <a:ln w="12700">
+            <a:solidFill>
+              <a:srgbClr val="2E75B6"/>
+            </a:solidFill>
+          </a:ln>
+          <a:effectLst/>
+        </p:spPr>
+        <p:style>
+          <a:lnRef idx="1">
+            <a:schemeClr val="accent1"/>
+          </a:lnRef>
+          <a:fillRef idx="3">
+            <a:schemeClr val="accent1"/>
+          </a:fillRef>
+          <a:effectRef idx="2">
+            <a:schemeClr val="accent1"/>
+          </a:effectRef>
+          <a:fontRef idx="minor">
+            <a:schemeClr val="lt1"/>
+          </a:fontRef>
+        </p:style>
+        <p:txBody>
+          <a:bodyPr rtlCol="0" anchor="ctr"/>
+          <a:lstStyle/>
+          <a:p/>
+        </p:txBody>
+      </p:sp>
+      <p:sp>
+        <p:nvSpPr>
+          <p:cNvPr id="8" name="TextBox 7"/>
+          <p:cNvSpPr txBox="1"/>
+          <p:nvPr/>
+        </p:nvSpPr>
+        <p:spPr>
+          <a:xfrm>
+            <a:off x="868680" y="2825496"/>
+            <a:ext cx="10424160" cy="566928"/>
+          </a:xfrm>
+          <a:prstGeom prst="rect">
+            <a:avLst/>
+          </a:prstGeom>
+          <a:noFill/>
+        </p:spPr>
+        <p:txBody>
+          <a:bodyPr wrap="square">
+            <a:spAutoFit/>
+          </a:bodyPr>
+          <a:lstStyle/>
+          <a:p>
+            <a:r>
+              <a:rPr sz="1300" b="1">
+                <a:solidFill>
+                  <a:srgbClr val="000000"/>
+                </a:solidFill>
+                <a:latin typeface="Calibri"/>
+              </a:rPr>
+              <a:t>Kakarla et al. (2020) [3] </a:t>
+            </a:r>
+            <a:r>
+              <a:rPr sz="1300">
+                <a:solidFill>
+                  <a:srgbClr val="1A1A1A"/>
+                </a:solidFill>
+                <a:latin typeface="Calibri"/>
+              </a:rPr>
+              <a:t>proposed a CNN smart attendance system recognising multiple students under moderate pose and expression change.</a:t>
+            </a:r>
+          </a:p>
+        </p:txBody>
+      </p:sp>
+      <p:sp>
+        <p:nvSpPr>
+          <p:cNvPr id="9" name="Rounded Rectangle 8"/>
+          <p:cNvSpPr/>
+          <p:nvPr/>
+        </p:nvSpPr>
+        <p:spPr>
+          <a:xfrm>
+            <a:off x="640080" y="3575304"/>
+            <a:ext cx="10881360" cy="731520"/>
+          </a:xfrm>
+          <a:prstGeom prst="roundRect">
+            <a:avLst/>
+          </a:prstGeom>
+          <a:solidFill>
+            <a:srgbClr val="DEEAF6"/>
+          </a:solidFill>
+          <a:ln w="12700">
+            <a:solidFill>
+              <a:srgbClr val="2E75B6"/>
+            </a:solidFill>
+          </a:ln>
+          <a:effectLst/>
+        </p:spPr>
+        <p:style>
+          <a:lnRef idx="1">
+            <a:schemeClr val="accent1"/>
+          </a:lnRef>
+          <a:fillRef idx="3">
+            <a:schemeClr val="accent1"/>
+          </a:fillRef>
+          <a:effectRef idx="2">
+            <a:schemeClr val="accent1"/>
+          </a:effectRef>
+          <a:fontRef idx="minor">
+            <a:schemeClr val="lt1"/>
+          </a:fontRef>
+        </p:style>
+        <p:txBody>
+          <a:bodyPr rtlCol="0" anchor="ctr"/>
+          <a:lstStyle/>
+          <a:p/>
+        </p:txBody>
+      </p:sp>
+      <p:sp>
+        <p:nvSpPr>
+          <p:cNvPr id="10" name="TextBox 9"/>
+          <p:cNvSpPr txBox="1"/>
+          <p:nvPr/>
+        </p:nvSpPr>
+        <p:spPr>
+          <a:xfrm>
+            <a:off x="868680" y="3666744"/>
+            <a:ext cx="10424160" cy="566928"/>
+          </a:xfrm>
+          <a:prstGeom prst="rect">
+            <a:avLst/>
+          </a:prstGeom>
+          <a:noFill/>
+        </p:spPr>
+        <p:txBody>
+          <a:bodyPr wrap="square">
+            <a:spAutoFit/>
+          </a:bodyPr>
+          <a:lstStyle/>
+          <a:p>
+            <a:r>
+              <a:rPr sz="1300" b="1">
+                <a:solidFill>
+                  <a:srgbClr val="000000"/>
+                </a:solidFill>
+                <a:latin typeface="Calibri"/>
+              </a:rPr>
+              <a:t>Varadharajan et al. (2016) [4] </a:t>
+            </a:r>
+            <a:r>
+              <a:rPr sz="1300">
+                <a:solidFill>
+                  <a:srgbClr val="1A1A1A"/>
+                </a:solidFill>
+                <a:latin typeface="Calibri"/>
+              </a:rPr>
+              <a:t>developed a face-detection classroom attendance system; accuracy drops under occlusion and poor lighting.</a:t>
+            </a:r>
+          </a:p>
+        </p:txBody>
+      </p:sp>
+      <p:sp>
+        <p:nvSpPr>
+          <p:cNvPr id="11" name="Rounded Rectangle 10"/>
+          <p:cNvSpPr/>
+          <p:nvPr/>
+        </p:nvSpPr>
+        <p:spPr>
+          <a:xfrm>
+            <a:off x="640080" y="4416552"/>
+            <a:ext cx="10881360" cy="731520"/>
+          </a:xfrm>
+          <a:prstGeom prst="roundRect">
+            <a:avLst/>
+          </a:prstGeom>
+          <a:solidFill>
+            <a:srgbClr val="DEEAF6"/>
+          </a:solidFill>
+          <a:ln w="12700">
+            <a:solidFill>
+              <a:srgbClr val="2E75B6"/>
+            </a:solidFill>
+          </a:ln>
+          <a:effectLst/>
+        </p:spPr>
+        <p:style>
+          <a:lnRef idx="1">
+            <a:schemeClr val="accent1"/>
+          </a:lnRef>
+          <a:fillRef idx="3">
+            <a:schemeClr val="accent1"/>
+          </a:fillRef>
+          <a:effectRef idx="2">
+            <a:schemeClr val="accent1"/>
+          </a:effectRef>
+          <a:fontRef idx="minor">
+            <a:schemeClr val="lt1"/>
+          </a:fontRef>
+        </p:style>
+        <p:txBody>
+          <a:bodyPr rtlCol="0" anchor="ctr"/>
+          <a:lstStyle/>
+          <a:p/>
+        </p:txBody>
+      </p:sp>
+      <p:sp>
+        <p:nvSpPr>
+          <p:cNvPr id="12" name="TextBox 11"/>
+          <p:cNvSpPr txBox="1"/>
+          <p:nvPr/>
+        </p:nvSpPr>
+        <p:spPr>
+          <a:xfrm>
+            <a:off x="868680" y="4507992"/>
+            <a:ext cx="10424160" cy="566928"/>
+          </a:xfrm>
+          <a:prstGeom prst="rect">
+            <a:avLst/>
+          </a:prstGeom>
+          <a:noFill/>
+        </p:spPr>
+        <p:txBody>
+          <a:bodyPr wrap="square">
+            <a:spAutoFit/>
+          </a:bodyPr>
+          <a:lstStyle/>
+          <a:p>
+            <a:r>
+              <a:rPr sz="1300" b="1">
+                <a:solidFill>
+                  <a:srgbClr val="000000"/>
+                </a:solidFill>
+                <a:latin typeface="Calibri"/>
+              </a:rPr>
+              <a:t>Siswanto et al. (2014) [5] </a:t>
+            </a:r>
+            <a:r>
+              <a:rPr sz="1300">
+                <a:solidFill>
+                  <a:srgbClr val="1A1A1A"/>
+                </a:solidFill>
+                <a:latin typeface="Calibri"/>
+              </a:rPr>
+              <a:t>introduced face biometrics as a hygienic alternative to fingerprint attendance systems.</a:t>
+            </a:r>
+          </a:p>
+        </p:txBody>
+      </p:sp>
+      <p:sp>
+        <p:nvSpPr>
+          <p:cNvPr id="13" name="Rounded Rectangle 12"/>
+          <p:cNvSpPr/>
+          <p:nvPr/>
+        </p:nvSpPr>
+        <p:spPr>
+          <a:xfrm>
+            <a:off x="640080" y="5303520"/>
+            <a:ext cx="10881360" cy="822960"/>
+          </a:xfrm>
+          <a:prstGeom prst="roundRect">
+            <a:avLst/>
+          </a:prstGeom>
+          <a:solidFill>
+            <a:srgbClr val="F8D7D2"/>
+          </a:solidFill>
+          <a:ln w="22225">
+            <a:solidFill>
+              <a:srgbClr val="C00000"/>
+            </a:solidFill>
+          </a:ln>
+          <a:effectLst/>
+        </p:spPr>
+        <p:style>
+          <a:lnRef idx="1">
+            <a:schemeClr val="accent1"/>
+          </a:lnRef>
+          <a:fillRef idx="3">
+            <a:schemeClr val="accent1"/>
+          </a:fillRef>
+          <a:effectRef idx="2">
+            <a:schemeClr val="accent1"/>
+          </a:effectRef>
+          <a:fontRef idx="minor">
+            <a:schemeClr val="lt1"/>
+          </a:fontRef>
+        </p:style>
+        <p:txBody>
+          <a:bodyPr rtlCol="0" anchor="ctr"/>
+          <a:lstStyle/>
+          <a:p/>
+        </p:txBody>
+      </p:sp>
+      <p:sp>
+        <p:nvSpPr>
+          <p:cNvPr id="14" name="TextBox 13"/>
+          <p:cNvSpPr txBox="1"/>
+          <p:nvPr/>
+        </p:nvSpPr>
+        <p:spPr>
+          <a:xfrm>
+            <a:off x="868680" y="5440680"/>
+            <a:ext cx="10424160" cy="685800"/>
+          </a:xfrm>
+          <a:prstGeom prst="rect">
+            <a:avLst/>
+          </a:prstGeom>
+          <a:noFill/>
+        </p:spPr>
+        <p:txBody>
+          <a:bodyPr wrap="square" anchor="t">
+            <a:spAutoFit/>
+          </a:bodyPr>
+          <a:lstStyle/>
+          <a:p>
             <a:pPr>
               <a:spcAft>
-                <a:spcPts val="600"/>
+                <a:spcPts val="500"/>
               </a:spcAft>
             </a:pPr>
             <a:r>
-              <a:rPr sz="1200" b="1">
-                <a:solidFill>
-                  <a:srgbClr val="1F3A6E"/>
-                </a:solidFill>
-                <a:latin typeface="Arial"/>
-              </a:rPr>
-              <a:t>❖ Key findings</a:t>
-            </a:r>
-          </a:p>
-          <a:p>
-            <a:pPr>
-              <a:spcAft>
-                <a:spcPts val="600"/>
-              </a:spcAft>
-            </a:pPr>
-            <a:r>
-              <a:rPr sz="1200" b="0">
-                <a:solidFill>
-                  <a:srgbClr val="1A1A1A"/>
-                </a:solidFill>
-                <a:latin typeface="Arial"/>
-              </a:rPr>
-              <a:t>•  Calibrating the threshold cut strangers admitted 4×.</a:t>
-            </a:r>
-          </a:p>
-          <a:p>
-            <a:pPr>
-              <a:spcAft>
-                <a:spcPts val="600"/>
-              </a:spcAft>
-            </a:pPr>
-            <a:r>
-              <a:rPr sz="1200" b="0">
-                <a:solidFill>
-                  <a:srgbClr val="1A1A1A"/>
-                </a:solidFill>
-                <a:latin typeface="Arial"/>
-              </a:rPr>
-              <a:t>•  Temporal voting drove wrong records to zero.</a:t>
-            </a:r>
-          </a:p>
-          <a:p>
-            <a:pPr>
-              <a:spcAft>
-                <a:spcPts val="600"/>
-              </a:spcAft>
-            </a:pPr>
-            <a:r>
-              <a:rPr sz="1200" b="1">
+              <a:rPr sz="1250" b="1" i="0">
                 <a:solidFill>
                   <a:srgbClr val="C00000"/>
                 </a:solidFill>
-                <a:latin typeface="Arial"/>
-              </a:rPr>
-              <a:t>•  The top-2 margin guard did NOT help — we report it.</a:t>
-            </a:r>
-          </a:p>
-          <a:p>
-            <a:pPr>
-              <a:spcAft>
-                <a:spcPts val="600"/>
-              </a:spcAft>
-            </a:pPr>
-          </a:p>
-          <a:p>
-            <a:pPr>
-              <a:spcAft>
-                <a:spcPts val="600"/>
-              </a:spcAft>
-            </a:pPr>
-            <a:r>
-              <a:rPr sz="1200" b="1">
-                <a:solidFill>
-                  <a:srgbClr val="1F3A6E"/>
-                </a:solidFill>
-                <a:latin typeface="Arial"/>
-              </a:rPr>
-              <a:t>❖ Capacity  (laptop CPU, no GPU)</a:t>
-            </a:r>
-          </a:p>
-          <a:p>
-            <a:pPr>
-              <a:spcAft>
-                <a:spcPts val="600"/>
-              </a:spcAft>
-            </a:pPr>
-            <a:r>
-              <a:rPr sz="1200" b="0">
-                <a:solidFill>
-                  <a:srgbClr val="1A1A1A"/>
-                </a:solidFill>
-                <a:latin typeface="Arial"/>
-              </a:rPr>
-              <a:t>•  16 faces in one frame:  1.271 s</a:t>
-            </a:r>
-          </a:p>
-          <a:p>
-            <a:pPr>
-              <a:spcAft>
-                <a:spcPts val="600"/>
-              </a:spcAft>
-            </a:pPr>
-            <a:r>
-              <a:rPr sz="1200" b="0">
-                <a:solidFill>
-                  <a:srgbClr val="1A1A1A"/>
-                </a:solidFill>
-                <a:latin typeface="Arial"/>
-              </a:rPr>
-              <a:t>•  10,000 enrolled students:  +1.2 ms per match</a:t>
-            </a:r>
-          </a:p>
-          <a:p>
-            <a:pPr>
-              <a:spcAft>
-                <a:spcPts val="600"/>
-              </a:spcAft>
-            </a:pPr>
-            <a:r>
-              <a:rPr sz="1200" b="0">
-                <a:solidFill>
-                  <a:srgbClr val="1A1A1A"/>
-                </a:solidFill>
-                <a:latin typeface="Arial"/>
-              </a:rPr>
-              <a:t>•  One 1080p camera covers ~7 m — a whole classroom</a:t>
-            </a:r>
-          </a:p>
-          <a:p>
-            <a:pPr>
-              <a:spcAft>
-                <a:spcPts val="600"/>
-              </a:spcAft>
-            </a:pPr>
-          </a:p>
-          <a:p>
-            <a:pPr>
-              <a:spcAft>
-                <a:spcPts val="600"/>
-              </a:spcAft>
-            </a:pPr>
-            <a:r>
-              <a:rPr sz="1200" b="1">
-                <a:solidFill>
-                  <a:srgbClr val="C00000"/>
-                </a:solidFill>
-                <a:latin typeface="Arial"/>
-              </a:rPr>
-              <a:t>❖ Limitation:  a VIDEO replay would still pass.</a:t>
-            </a:r>
-          </a:p>
-        </p:txBody>
-      </p:sp>
-      <p:sp>
-        <p:nvSpPr>
-          <p:cNvPr id="8" name="Rectangle 7"/>
+                <a:latin typeface="Calibri"/>
+              </a:rPr>
+              <a:t>RESEARCH GAP —  every paper above reports one accuracy number on clean data. None test a presentation attack, none report a stranger-rejection rate, and none treat "recognised" and "marked present" as different decisions.</a:t>
+            </a:r>
+          </a:p>
+        </p:txBody>
+      </p:sp>
+      <p:sp>
+        <p:nvSpPr>
+          <p:cNvPr id="15" name="Rectangle 14"/>
           <p:cNvSpPr/>
           <p:nvPr/>
         </p:nvSpPr>
@@ -5839,7 +6575,7 @@
       </p:sp>
       <p:sp>
         <p:nvSpPr>
-          <p:cNvPr id="9" name="TextBox 8"/>
+          <p:cNvPr id="16" name="TextBox 15"/>
           <p:cNvSpPr txBox="1"/>
           <p:nvPr/>
         </p:nvSpPr>
@@ -5865,9 +6601,9 @@
                 <a:solidFill>
                   <a:srgbClr val="FFFFFF"/>
                 </a:solidFill>
-                <a:latin typeface="Arial"/>
-              </a:rPr>
-              <a:t>5</a:t>
+                <a:latin typeface="Calibri"/>
+              </a:rPr>
+              <a:t>4</a:t>
             </a:r>
           </a:p>
         </p:txBody>
@@ -5898,8 +6634,8 @@
         </p:nvSpPr>
         <p:spPr>
           <a:xfrm>
-            <a:off x="548640" y="109728"/>
-            <a:ext cx="11064240" cy="777240"/>
+            <a:off x="457200" y="109728"/>
+            <a:ext cx="11247120" cy="822960"/>
           </a:xfrm>
           <a:prstGeom prst="rect">
             <a:avLst/>
@@ -5907,20 +6643,20 @@
           <a:noFill/>
         </p:spPr>
         <p:txBody>
-          <a:bodyPr wrap="square">
+          <a:bodyPr wrap="none">
             <a:spAutoFit/>
           </a:bodyPr>
           <a:lstStyle/>
           <a:p>
             <a:pPr algn="ctr"/>
             <a:r>
-              <a:rPr sz="3400" b="1">
-                <a:solidFill>
-                  <a:srgbClr val="000000"/>
+              <a:rPr sz="3600" b="1">
+                <a:solidFill>
+                  <a:srgbClr val="1F3864"/>
                 </a:solidFill>
                 <a:latin typeface="Times New Roman"/>
               </a:rPr>
-              <a:t>IMPACT AND BENEFITS</a:t>
+              <a:t>PROPOSED METHODOLOGY</a:t>
             </a:r>
           </a:p>
         </p:txBody>
@@ -5933,8 +6669,8 @@
         </p:nvSpPr>
         <p:spPr>
           <a:xfrm>
-            <a:off x="548640" y="868680"/>
-            <a:ext cx="11064240" cy="365760"/>
+            <a:off x="548640" y="2834640"/>
+            <a:ext cx="2194560" cy="457200"/>
           </a:xfrm>
           <a:prstGeom prst="rect">
             <a:avLst/>
@@ -5942,38 +6678,257 @@
           <a:noFill/>
         </p:spPr>
         <p:txBody>
-          <a:bodyPr wrap="square">
+          <a:bodyPr wrap="square" anchor="t">
             <a:spAutoFit/>
           </a:bodyPr>
           <a:lstStyle/>
           <a:p>
+            <a:pPr algn="ctr">
+              <a:spcAft>
+                <a:spcPts val="500"/>
+              </a:spcAft>
+            </a:pPr>
+            <a:r>
+              <a:rPr sz="1800" b="1" i="0">
+                <a:solidFill>
+                  <a:srgbClr val="9E2B25"/>
+                </a:solidFill>
+                <a:latin typeface="Calibri"/>
+              </a:rPr>
+              <a:t>Proposed Solution</a:t>
+            </a:r>
+          </a:p>
+        </p:txBody>
+      </p:sp>
+      <p:sp>
+        <p:nvSpPr>
+          <p:cNvPr id="4" name="Right Arrow 3"/>
+          <p:cNvSpPr/>
+          <p:nvPr/>
+        </p:nvSpPr>
+        <p:spPr>
+          <a:xfrm>
+            <a:off x="640080" y="3337560"/>
+            <a:ext cx="2011680" cy="411480"/>
+          </a:xfrm>
+          <a:prstGeom prst="rightArrow">
+            <a:avLst/>
+          </a:prstGeom>
+          <a:solidFill>
+            <a:srgbClr val="D6DCE5"/>
+          </a:solidFill>
+          <a:ln>
+            <a:noFill/>
+          </a:ln>
+          <a:effectLst/>
+        </p:spPr>
+        <p:style>
+          <a:lnRef idx="1">
+            <a:schemeClr val="accent1"/>
+          </a:lnRef>
+          <a:fillRef idx="3">
+            <a:schemeClr val="accent1"/>
+          </a:fillRef>
+          <a:effectRef idx="2">
+            <a:schemeClr val="accent1"/>
+          </a:effectRef>
+          <a:fontRef idx="minor">
+            <a:schemeClr val="lt1"/>
+          </a:fontRef>
+        </p:style>
+        <p:txBody>
+          <a:bodyPr rtlCol="0" anchor="ctr"/>
+          <a:lstStyle/>
+          <a:p/>
+        </p:txBody>
+      </p:sp>
+      <p:sp>
+        <p:nvSpPr>
+          <p:cNvPr id="5" name="Chevron 4"/>
+          <p:cNvSpPr/>
+          <p:nvPr/>
+        </p:nvSpPr>
+        <p:spPr>
+          <a:xfrm>
+            <a:off x="3017520" y="1097280"/>
+            <a:ext cx="2651760" cy="1371600"/>
+          </a:xfrm>
+          <a:prstGeom prst="chevron">
+            <a:avLst/>
+          </a:prstGeom>
+          <a:solidFill>
+            <a:srgbClr val="9CB93A"/>
+          </a:solidFill>
+          <a:ln>
+            <a:noFill/>
+          </a:ln>
+          <a:effectLst/>
+        </p:spPr>
+        <p:style>
+          <a:lnRef idx="1">
+            <a:schemeClr val="accent1"/>
+          </a:lnRef>
+          <a:fillRef idx="3">
+            <a:schemeClr val="accent1"/>
+          </a:fillRef>
+          <a:effectRef idx="2">
+            <a:schemeClr val="accent1"/>
+          </a:effectRef>
+          <a:fontRef idx="minor">
+            <a:schemeClr val="lt1"/>
+          </a:fontRef>
+        </p:style>
+        <p:txBody>
+          <a:bodyPr rtlCol="0" anchor="ctr" wrap="square"/>
+          <a:lstStyle/>
+          <a:p>
+            <a:pPr algn="ctr"/>
+            <a:r>
+              <a:rPr sz="1300" b="1">
+                <a:solidFill>
+                  <a:srgbClr val="FFFFFF"/>
+                </a:solidFill>
+                <a:latin typeface="Calibri"/>
+              </a:rPr>
+              <a:t>How it Works:</a:t>
+            </a:r>
+          </a:p>
+        </p:txBody>
+      </p:sp>
+      <p:sp>
+        <p:nvSpPr>
+          <p:cNvPr id="6" name="TextBox 5"/>
+          <p:cNvSpPr txBox="1"/>
+          <p:nvPr/>
+        </p:nvSpPr>
+        <p:spPr>
+          <a:xfrm>
+            <a:off x="5897880" y="1261872"/>
+            <a:ext cx="5852160" cy="1143000"/>
+          </a:xfrm>
+          <a:prstGeom prst="rect">
+            <a:avLst/>
+          </a:prstGeom>
+          <a:noFill/>
+        </p:spPr>
+        <p:txBody>
+          <a:bodyPr wrap="square" anchor="t">
+            <a:spAutoFit/>
+          </a:bodyPr>
+          <a:lstStyle/>
+          <a:p>
             <a:pPr>
               <a:spcAft>
-                <a:spcPts val="600"/>
+                <a:spcPts val="500"/>
               </a:spcAft>
             </a:pPr>
             <a:r>
-              <a:rPr sz="1800" b="1">
-                <a:solidFill>
-                  <a:srgbClr val="1F3A6E"/>
-                </a:solidFill>
-                <a:latin typeface="Arial"/>
-              </a:rPr>
-              <a:t>❖ Potential impact on the target audience</a:t>
-            </a:r>
-          </a:p>
-        </p:txBody>
-      </p:sp>
-      <p:sp>
-        <p:nvSpPr>
-          <p:cNvPr id="4" name="TextBox 3"/>
+              <a:rPr sz="1200" b="0" i="0">
+                <a:solidFill>
+                  <a:srgbClr val="1A1A1A"/>
+                </a:solidFill>
+                <a:latin typeface="Calibri"/>
+              </a:rPr>
+              <a:t>•  Detects EVERY face in one frame (RetinaFace), embeds each into a 512-d vector (ArcFace),</a:t>
+            </a:r>
+          </a:p>
+          <a:p>
+            <a:pPr>
+              <a:spcAft>
+                <a:spcPts val="500"/>
+              </a:spcAft>
+            </a:pPr>
+            <a:r>
+              <a:rPr sz="1200" b="0" i="0">
+                <a:solidFill>
+                  <a:srgbClr val="1A1A1A"/>
+                </a:solidFill>
+                <a:latin typeface="Calibri"/>
+              </a:rPr>
+              <a:t>   and matches it against each enrolled student's centroid.</a:t>
+            </a:r>
+          </a:p>
+          <a:p>
+            <a:pPr>
+              <a:spcAft>
+                <a:spcPts val="500"/>
+              </a:spcAft>
+            </a:pPr>
+            <a:r>
+              <a:rPr sz="1200" b="0" i="0">
+                <a:solidFill>
+                  <a:srgbClr val="1A1A1A"/>
+                </a:solidFill>
+                <a:latin typeface="Calibri"/>
+              </a:rPr>
+              <a:t>•  Records name, confidence and status to a CSV file. Nothing leaves the machine.</a:t>
+            </a:r>
+          </a:p>
+        </p:txBody>
+      </p:sp>
+      <p:sp>
+        <p:nvSpPr>
+          <p:cNvPr id="7" name="Chevron 6"/>
+          <p:cNvSpPr/>
+          <p:nvPr/>
+        </p:nvSpPr>
+        <p:spPr>
+          <a:xfrm>
+            <a:off x="3017520" y="2651760"/>
+            <a:ext cx="2651760" cy="1371600"/>
+          </a:xfrm>
+          <a:prstGeom prst="chevron">
+            <a:avLst/>
+          </a:prstGeom>
+          <a:solidFill>
+            <a:srgbClr val="45A3AF"/>
+          </a:solidFill>
+          <a:ln>
+            <a:noFill/>
+          </a:ln>
+          <a:effectLst/>
+        </p:spPr>
+        <p:style>
+          <a:lnRef idx="1">
+            <a:schemeClr val="accent1"/>
+          </a:lnRef>
+          <a:fillRef idx="3">
+            <a:schemeClr val="accent1"/>
+          </a:fillRef>
+          <a:effectRef idx="2">
+            <a:schemeClr val="accent1"/>
+          </a:effectRef>
+          <a:fontRef idx="minor">
+            <a:schemeClr val="lt1"/>
+          </a:fontRef>
+        </p:style>
+        <p:txBody>
+          <a:bodyPr rtlCol="0" anchor="ctr" wrap="square"/>
+          <a:lstStyle/>
+          <a:p>
+            <a:pPr algn="ctr"/>
+            <a:r>
+              <a:rPr sz="1300" b="1">
+                <a:solidFill>
+                  <a:srgbClr val="FFFFFF"/>
+                </a:solidFill>
+                <a:latin typeface="Calibri"/>
+              </a:rPr>
+              <a:t>Problem Addressed:</a:t>
+            </a:r>
+          </a:p>
+        </p:txBody>
+      </p:sp>
+      <p:sp>
+        <p:nvSpPr>
+          <p:cNvPr id="8" name="TextBox 7"/>
           <p:cNvSpPr txBox="1"/>
           <p:nvPr/>
         </p:nvSpPr>
         <p:spPr>
           <a:xfrm>
-            <a:off x="685800" y="1280160"/>
-            <a:ext cx="10972800" cy="822960"/>
+            <a:off x="5897880" y="2816352"/>
+            <a:ext cx="5852160" cy="1143000"/>
           </a:xfrm>
           <a:prstGeom prst="rect">
             <a:avLst/>
@@ -5981,54 +6936,123 @@
           <a:noFill/>
         </p:spPr>
         <p:txBody>
-          <a:bodyPr wrap="square">
+          <a:bodyPr wrap="square" anchor="t">
             <a:spAutoFit/>
           </a:bodyPr>
           <a:lstStyle/>
           <a:p>
             <a:pPr>
               <a:spcAft>
-                <a:spcPts val="600"/>
+                <a:spcPts val="500"/>
               </a:spcAft>
             </a:pPr>
             <a:r>
-              <a:rPr sz="1300" b="0">
+              <a:rPr sz="1200" b="0" i="0">
                 <a:solidFill>
                   <a:srgbClr val="1A1A1A"/>
                 </a:solidFill>
-                <a:latin typeface="Arial"/>
-              </a:rPr>
-              <a:t>•  A 60-student roll-call costs ~5 minutes of every lecture — about 80 teaching hours a year, returned.</a:t>
+                <a:latin typeface="Calibri"/>
+              </a:rPr>
+              <a:t>•  Replaces manual attendance and eliminates the signed-register proxy.</a:t>
             </a:r>
           </a:p>
           <a:p>
             <a:pPr>
               <a:spcAft>
-                <a:spcPts val="600"/>
+                <a:spcPts val="500"/>
               </a:spcAft>
             </a:pPr>
             <a:r>
-              <a:rPr sz="1300" b="0">
+              <a:rPr sz="1200" b="0" i="0">
                 <a:solidFill>
                   <a:srgbClr val="1A1A1A"/>
                 </a:solidFill>
-                <a:latin typeface="Arial"/>
-              </a:rPr>
-              <a:t>•  Target: schools that cannot afford a GPU or a cloud subscription — and cannot legally upload their students' faces to one.</a:t>
-            </a:r>
-          </a:p>
-        </p:txBody>
-      </p:sp>
-      <p:sp>
-        <p:nvSpPr>
-          <p:cNvPr id="5" name="TextBox 4"/>
+                <a:latin typeface="Calibri"/>
+              </a:rPr>
+              <a:t>•  Rejects strangers, and blocks the photo / screen proxy that defeats ordinary</a:t>
+            </a:r>
+          </a:p>
+          <a:p>
+            <a:pPr>
+              <a:spcAft>
+                <a:spcPts val="500"/>
+              </a:spcAft>
+            </a:pPr>
+            <a:r>
+              <a:rPr sz="1200" b="0" i="0">
+                <a:solidFill>
+                  <a:srgbClr val="1A1A1A"/>
+                </a:solidFill>
+                <a:latin typeface="Calibri"/>
+              </a:rPr>
+              <a:t>   face recognition.</a:t>
+            </a:r>
+          </a:p>
+        </p:txBody>
+      </p:sp>
+      <p:sp>
+        <p:nvSpPr>
+          <p:cNvPr id="9" name="Chevron 8"/>
+          <p:cNvSpPr/>
+          <p:nvPr/>
+        </p:nvSpPr>
+        <p:spPr>
+          <a:xfrm>
+            <a:off x="3017520" y="4206240"/>
+            <a:ext cx="2651760" cy="1600200"/>
+          </a:xfrm>
+          <a:prstGeom prst="chevron">
+            <a:avLst/>
+          </a:prstGeom>
+          <a:solidFill>
+            <a:srgbClr val="7B5EA7"/>
+          </a:solidFill>
+          <a:ln>
+            <a:noFill/>
+          </a:ln>
+          <a:effectLst/>
+        </p:spPr>
+        <p:style>
+          <a:lnRef idx="1">
+            <a:schemeClr val="accent1"/>
+          </a:lnRef>
+          <a:fillRef idx="3">
+            <a:schemeClr val="accent1"/>
+          </a:fillRef>
+          <a:effectRef idx="2">
+            <a:schemeClr val="accent1"/>
+          </a:effectRef>
+          <a:fontRef idx="minor">
+            <a:schemeClr val="lt1"/>
+          </a:fontRef>
+        </p:style>
+        <p:txBody>
+          <a:bodyPr rtlCol="0" anchor="ctr" wrap="square"/>
+          <a:lstStyle/>
+          <a:p>
+            <a:pPr algn="ctr"/>
+            <a:r>
+              <a:rPr sz="1300" b="1">
+                <a:solidFill>
+                  <a:srgbClr val="FFFFFF"/>
+                </a:solidFill>
+                <a:latin typeface="Calibri"/>
+              </a:rPr>
+              <a:t>Innovation and uniqueness of the solution</a:t>
+            </a:r>
+          </a:p>
+        </p:txBody>
+      </p:sp>
+      <p:sp>
+        <p:nvSpPr>
+          <p:cNvPr id="10" name="TextBox 9"/>
           <p:cNvSpPr txBox="1"/>
           <p:nvPr/>
         </p:nvSpPr>
         <p:spPr>
           <a:xfrm>
-            <a:off x="548640" y="2148840"/>
-            <a:ext cx="11064240" cy="365760"/>
+            <a:off x="5897880" y="4370831"/>
+            <a:ext cx="5852160" cy="1371600"/>
           </a:xfrm>
           <a:prstGeom prst="rect">
             <a:avLst/>
@@ -6036,323 +7060,95 @@
           <a:noFill/>
         </p:spPr>
         <p:txBody>
-          <a:bodyPr wrap="square">
+          <a:bodyPr wrap="square" anchor="t">
             <a:spAutoFit/>
           </a:bodyPr>
           <a:lstStyle/>
           <a:p>
             <a:pPr>
               <a:spcAft>
-                <a:spcPts val="600"/>
+                <a:spcPts val="500"/>
               </a:spcAft>
             </a:pPr>
             <a:r>
-              <a:rPr sz="1800" b="1">
-                <a:solidFill>
-                  <a:srgbClr val="1F3A6E"/>
-                </a:solidFill>
-                <a:latin typeface="Arial"/>
-              </a:rPr>
-              <a:t>❖ Benefits of the solution</a:t>
-            </a:r>
-          </a:p>
-        </p:txBody>
-      </p:sp>
-      <p:sp>
-        <p:nvSpPr>
-          <p:cNvPr id="6" name="TextBox 5"/>
-          <p:cNvSpPr txBox="1"/>
-          <p:nvPr/>
-        </p:nvSpPr>
-        <p:spPr>
-          <a:xfrm>
-            <a:off x="685800" y="2560320"/>
-            <a:ext cx="7315200" cy="3383280"/>
-          </a:xfrm>
-          <a:prstGeom prst="rect">
-            <a:avLst/>
-          </a:prstGeom>
-          <a:noFill/>
-        </p:spPr>
-        <p:txBody>
-          <a:bodyPr wrap="square">
-            <a:spAutoFit/>
-          </a:bodyPr>
-          <a:lstStyle/>
+              <a:rPr sz="1200" b="0" i="0">
+                <a:solidFill>
+                  <a:srgbClr val="1A1A1A"/>
+                </a:solidFill>
+                <a:latin typeface="Calibri"/>
+              </a:rPr>
+              <a:t>•  We do NOT claim a new face model — ArcFace is pretrained and FROZEN.</a:t>
+            </a:r>
+          </a:p>
           <a:p>
             <a:pPr>
               <a:spcAft>
-                <a:spcPts val="600"/>
+                <a:spcPts val="500"/>
               </a:spcAft>
             </a:pPr>
             <a:r>
-              <a:rPr sz="1250" b="1">
-                <a:solidFill>
-                  <a:srgbClr val="1F3A6E"/>
-                </a:solidFill>
-                <a:latin typeface="Arial"/>
-              </a:rPr>
-              <a:t>SOCIAL</a:t>
+              <a:rPr sz="1200" b="0" i="0">
+                <a:solidFill>
+                  <a:srgbClr val="1A1A1A"/>
+                </a:solidFill>
+                <a:latin typeface="Calibri"/>
+              </a:rPr>
+              <a:t>•  LIVENESS that works at 1.4 frames/sec, where blink detection provably fails.</a:t>
             </a:r>
           </a:p>
           <a:p>
             <a:pPr>
               <a:spcAft>
-                <a:spcPts val="600"/>
+                <a:spcPts val="500"/>
               </a:spcAft>
             </a:pPr>
             <a:r>
-              <a:rPr sz="1250" b="0">
+              <a:rPr sz="1200" b="0" i="0">
                 <a:solidFill>
                   <a:srgbClr val="1A1A1A"/>
                 </a:solidFill>
-                <a:latin typeface="Arial"/>
-              </a:rPr>
-              <a:t>•  Contactless — no queue, no register passed around.</a:t>
+                <a:latin typeface="Calibri"/>
+              </a:rPr>
+              <a:t>•  Threshold calibrated on 2,880 impostor faces — not hand-picked.</a:t>
             </a:r>
           </a:p>
           <a:p>
             <a:pPr>
               <a:spcAft>
-                <a:spcPts val="600"/>
+                <a:spcPts val="500"/>
               </a:spcAft>
             </a:pPr>
             <a:r>
-              <a:rPr sz="1250" b="0">
+              <a:rPr sz="1200" b="0" i="0">
                 <a:solidFill>
                   <a:srgbClr val="1A1A1A"/>
                 </a:solidFill>
-                <a:latin typeface="Arial"/>
-              </a:rPr>
-              <a:t>•  Manual proxy eliminated.</a:t>
+                <a:latin typeface="Calibri"/>
+              </a:rPr>
+              <a:t>•  Attendance as an irreversible commit.  Enrolment: 607 s → 1.4 s.</a:t>
             </a:r>
           </a:p>
           <a:p>
             <a:pPr>
               <a:spcAft>
-                <a:spcPts val="600"/>
+                <a:spcPts val="500"/>
               </a:spcAft>
             </a:pPr>
             <a:r>
-              <a:rPr sz="1250" b="1">
-                <a:solidFill>
-                  <a:srgbClr val="1E7A45"/>
-                </a:solidFill>
-                <a:latin typeface="Arial"/>
-              </a:rPr>
-              <a:t>•  Photo proxy blocked:   100% → 0%.</a:t>
-            </a:r>
-          </a:p>
-          <a:p>
-            <a:pPr>
-              <a:spcAft>
-                <a:spcPts val="600"/>
-              </a:spcAft>
-            </a:pPr>
-            <a:r>
-              <a:rPr sz="1250" b="1">
-                <a:solidFill>
-                  <a:srgbClr val="C00000"/>
-                </a:solidFill>
-                <a:latin typeface="Arial"/>
-              </a:rPr>
-              <a:t>•  Video-replay proxy NOT yet blocked — stated, not hidden.</a:t>
-            </a:r>
-          </a:p>
-          <a:p>
-            <a:pPr>
-              <a:spcAft>
-                <a:spcPts val="600"/>
-              </a:spcAft>
-            </a:pPr>
-          </a:p>
-          <a:p>
-            <a:pPr>
-              <a:spcAft>
-                <a:spcPts val="600"/>
-              </a:spcAft>
-            </a:pPr>
-            <a:r>
-              <a:rPr sz="1250" b="1">
-                <a:solidFill>
-                  <a:srgbClr val="1F3A6E"/>
-                </a:solidFill>
-                <a:latin typeface="Arial"/>
-              </a:rPr>
-              <a:t>PRIVACY &amp; LEGAL</a:t>
-            </a:r>
-          </a:p>
-          <a:p>
-            <a:pPr>
-              <a:spcAft>
-                <a:spcPts val="600"/>
-              </a:spcAft>
-            </a:pPr>
-            <a:r>
-              <a:rPr sz="1250" b="0">
+              <a:rPr sz="1200" b="0" i="0">
                 <a:solidFill>
                   <a:srgbClr val="1A1A1A"/>
                 </a:solidFill>
-                <a:latin typeface="Arial"/>
-              </a:rPr>
-              <a:t>•  Runs fully offline — student faces never leave the campus.</a:t>
-            </a:r>
-          </a:p>
-          <a:p>
-            <a:pPr>
-              <a:spcAft>
-                <a:spcPts val="600"/>
-              </a:spcAft>
-            </a:pPr>
-            <a:r>
-              <a:rPr sz="1250" b="0">
-                <a:solidFill>
-                  <a:srgbClr val="1A1A1A"/>
-                </a:solidFill>
-                <a:latin typeface="Arial"/>
-              </a:rPr>
-              <a:t>•  Under India's DPDP Act 2023, biometric data is sensitive personal data.</a:t>
-            </a:r>
-          </a:p>
-          <a:p>
-            <a:pPr>
-              <a:spcAft>
-                <a:spcPts val="600"/>
-              </a:spcAft>
-            </a:pPr>
-            <a:r>
-              <a:rPr sz="1250" b="0">
-                <a:solidFill>
-                  <a:srgbClr val="1A1A1A"/>
-                </a:solidFill>
-                <a:latin typeface="Arial"/>
-              </a:rPr>
-              <a:t>   Uploading children's faces to a cloud is a liability, not a feature.</a:t>
-            </a:r>
-          </a:p>
-        </p:txBody>
-      </p:sp>
-      <p:sp>
-        <p:nvSpPr>
-          <p:cNvPr id="7" name="TextBox 6"/>
-          <p:cNvSpPr txBox="1"/>
-          <p:nvPr/>
-        </p:nvSpPr>
-        <p:spPr>
-          <a:xfrm>
-            <a:off x="8138160" y="2560320"/>
-            <a:ext cx="3657600" cy="320040"/>
-          </a:xfrm>
-          <a:prstGeom prst="rect">
-            <a:avLst/>
-          </a:prstGeom>
-          <a:noFill/>
-        </p:spPr>
-        <p:txBody>
-          <a:bodyPr wrap="square">
-            <a:spAutoFit/>
-          </a:bodyPr>
-          <a:lstStyle/>
-          <a:p>
-            <a:pPr>
-              <a:spcAft>
-                <a:spcPts val="600"/>
-              </a:spcAft>
-            </a:pPr>
-            <a:r>
-              <a:rPr sz="1250" b="1">
-                <a:solidFill>
-                  <a:srgbClr val="1F3A6E"/>
-                </a:solidFill>
-                <a:latin typeface="Arial"/>
-              </a:rPr>
-              <a:t>ECONOMIC</a:t>
-            </a:r>
-          </a:p>
-        </p:txBody>
-      </p:sp>
-      <p:pic>
-        <p:nvPicPr>
-          <p:cNvPr id="8" name="Picture 7" descr="cost.png"/>
-          <p:cNvPicPr>
-            <a:picLocks noChangeAspect="1"/>
-          </p:cNvPicPr>
-          <p:nvPr/>
-        </p:nvPicPr>
-        <p:blipFill>
-          <a:blip r:embed="rId2"/>
-          <a:stretch>
-            <a:fillRect/>
-          </a:stretch>
-        </p:blipFill>
-        <p:spPr>
-          <a:xfrm>
-            <a:off x="8138160" y="2926080"/>
-            <a:ext cx="3657600" cy="1907771"/>
-          </a:xfrm>
-          <a:prstGeom prst="rect">
-            <a:avLst/>
-          </a:prstGeom>
-        </p:spPr>
-      </p:pic>
-      <p:sp>
-        <p:nvSpPr>
-          <p:cNvPr id="9" name="TextBox 8"/>
-          <p:cNvSpPr txBox="1"/>
-          <p:nvPr/>
-        </p:nvSpPr>
-        <p:spPr>
-          <a:xfrm>
-            <a:off x="8138160" y="4937760"/>
-            <a:ext cx="3657600" cy="822960"/>
-          </a:xfrm>
-          <a:prstGeom prst="rect">
-            <a:avLst/>
-          </a:prstGeom>
-          <a:noFill/>
-        </p:spPr>
-        <p:txBody>
-          <a:bodyPr wrap="square">
-            <a:spAutoFit/>
-          </a:bodyPr>
-          <a:lstStyle/>
-          <a:p>
-            <a:pPr>
-              <a:spcAft>
-                <a:spcPts val="600"/>
-              </a:spcAft>
-            </a:pPr>
-            <a:r>
-              <a:rPr sz="1200" b="0">
-                <a:solidFill>
-                  <a:srgbClr val="1A1A1A"/>
-                </a:solidFill>
-                <a:latin typeface="Arial"/>
-              </a:rPr>
-              <a:t>•  One laptop + one webcam.  No GPU, no servers.</a:t>
-            </a:r>
-          </a:p>
-          <a:p>
-            <a:pPr>
-              <a:spcAft>
-                <a:spcPts val="600"/>
-              </a:spcAft>
-            </a:pPr>
-            <a:r>
-              <a:rPr sz="1200" b="1">
-                <a:solidFill>
-                  <a:srgbClr val="1E7A45"/>
-                </a:solidFill>
-                <a:latin typeface="Arial"/>
-              </a:rPr>
-              <a:t>•  Recurring cost = 0.</a:t>
-            </a:r>
-          </a:p>
-        </p:txBody>
-      </p:sp>
-      <p:sp>
-        <p:nvSpPr>
-          <p:cNvPr id="10" name="Rectangle 9"/>
+                <a:latin typeface="Calibri"/>
+              </a:rPr>
+              <a:t>•  We also report a guard that did NOT work (top-2 margin).</a:t>
+            </a:r>
+          </a:p>
+        </p:txBody>
+      </p:sp>
+      <p:sp>
+        <p:nvSpPr>
+          <p:cNvPr id="11" name="Rectangle 10"/>
           <p:cNvSpPr/>
           <p:nvPr/>
         </p:nvSpPr>
@@ -6396,7 +7192,7 @@
       </p:sp>
       <p:sp>
         <p:nvSpPr>
-          <p:cNvPr id="11" name="TextBox 10"/>
+          <p:cNvPr id="12" name="TextBox 11"/>
           <p:cNvSpPr txBox="1"/>
           <p:nvPr/>
         </p:nvSpPr>
@@ -6422,9 +7218,9 @@
                 <a:solidFill>
                   <a:srgbClr val="FFFFFF"/>
                 </a:solidFill>
-                <a:latin typeface="Arial"/>
-              </a:rPr>
-              <a:t>6</a:t>
+                <a:latin typeface="Calibri"/>
+              </a:rPr>
+              <a:t>5</a:t>
             </a:r>
           </a:p>
         </p:txBody>
@@ -6455,8 +7251,8 @@
         </p:nvSpPr>
         <p:spPr>
           <a:xfrm>
-            <a:off x="548640" y="109728"/>
-            <a:ext cx="11064240" cy="777240"/>
+            <a:off x="457200" y="109728"/>
+            <a:ext cx="11247120" cy="822960"/>
           </a:xfrm>
           <a:prstGeom prst="rect">
             <a:avLst/>
@@ -6464,34 +7260,78 @@
           <a:noFill/>
         </p:spPr>
         <p:txBody>
-          <a:bodyPr wrap="square">
+          <a:bodyPr wrap="none">
             <a:spAutoFit/>
           </a:bodyPr>
           <a:lstStyle/>
           <a:p>
             <a:pPr algn="ctr"/>
             <a:r>
-              <a:rPr sz="3400" b="1">
-                <a:solidFill>
-                  <a:srgbClr val="000000"/>
+              <a:rPr sz="3600" b="1">
+                <a:solidFill>
+                  <a:srgbClr val="1F3864"/>
                 </a:solidFill>
                 <a:latin typeface="Times New Roman"/>
               </a:rPr>
-              <a:t>RESEARCH AND REFERENCES</a:t>
-            </a:r>
-          </a:p>
-        </p:txBody>
-      </p:sp>
-      <p:sp>
-        <p:nvSpPr>
-          <p:cNvPr id="3" name="TextBox 2"/>
+              <a:t>EXPERIMENTAL DETAILS</a:t>
+            </a:r>
+          </a:p>
+        </p:txBody>
+      </p:sp>
+      <p:sp>
+        <p:nvSpPr>
+          <p:cNvPr id="3" name="Rounded Rectangle 2"/>
+          <p:cNvSpPr/>
+          <p:nvPr/>
+        </p:nvSpPr>
+        <p:spPr>
+          <a:xfrm>
+            <a:off x="457200" y="1005840"/>
+            <a:ext cx="6309360" cy="502920"/>
+          </a:xfrm>
+          <a:prstGeom prst="roundRect">
+            <a:avLst/>
+          </a:prstGeom>
+          <a:solidFill>
+            <a:srgbClr val="7B5EA7"/>
+          </a:solidFill>
+          <a:ln w="19050">
+            <a:solidFill>
+              <a:srgbClr val="7B5EA7"/>
+            </a:solidFill>
+          </a:ln>
+          <a:effectLst/>
+        </p:spPr>
+        <p:style>
+          <a:lnRef idx="1">
+            <a:schemeClr val="accent1"/>
+          </a:lnRef>
+          <a:fillRef idx="3">
+            <a:schemeClr val="accent1"/>
+          </a:fillRef>
+          <a:effectRef idx="2">
+            <a:schemeClr val="accent1"/>
+          </a:effectRef>
+          <a:fontRef idx="minor">
+            <a:schemeClr val="lt1"/>
+          </a:fontRef>
+        </p:style>
+        <p:txBody>
+          <a:bodyPr rtlCol="0" anchor="ctr"/>
+          <a:lstStyle/>
+          <a:p/>
+        </p:txBody>
+      </p:sp>
+      <p:sp>
+        <p:nvSpPr>
+          <p:cNvPr id="4" name="TextBox 3"/>
           <p:cNvSpPr txBox="1"/>
           <p:nvPr/>
         </p:nvSpPr>
         <p:spPr>
           <a:xfrm>
-            <a:off x="548640" y="868680"/>
-            <a:ext cx="11155680" cy="5394960"/>
+            <a:off x="640080" y="1097280"/>
+            <a:ext cx="5943600" cy="365760"/>
           </a:xfrm>
           <a:prstGeom prst="rect">
             <a:avLst/>
@@ -6499,276 +7339,1256 @@
           <a:noFill/>
         </p:spPr>
         <p:txBody>
-          <a:bodyPr wrap="square">
+          <a:bodyPr wrap="square" anchor="t">
             <a:spAutoFit/>
           </a:bodyPr>
           <a:lstStyle/>
           <a:p>
             <a:pPr>
               <a:spcAft>
-                <a:spcPts val="600"/>
+                <a:spcPts val="500"/>
               </a:spcAft>
             </a:pPr>
             <a:r>
-              <a:rPr sz="1050" b="1">
-                <a:solidFill>
-                  <a:srgbClr val="1F3A6E"/>
-                </a:solidFill>
-                <a:latin typeface="Arial"/>
-              </a:rPr>
-              <a:t>❖ Attendance systems — prior work (none of which tests a presentation attack)</a:t>
-            </a:r>
-          </a:p>
+              <a:rPr sz="1400" b="1" i="0">
+                <a:solidFill>
+                  <a:srgbClr val="FFFFFF"/>
+                </a:solidFill>
+                <a:latin typeface="Calibri"/>
+              </a:rPr>
+              <a:t>Programming Language:  Python 3.13</a:t>
+            </a:r>
+          </a:p>
+        </p:txBody>
+      </p:sp>
+      <p:sp>
+        <p:nvSpPr>
+          <p:cNvPr id="5" name="Rounded Rectangle 4"/>
+          <p:cNvSpPr/>
+          <p:nvPr/>
+        </p:nvSpPr>
+        <p:spPr>
+          <a:xfrm>
+            <a:off x="457200" y="1691640"/>
+            <a:ext cx="1828800" cy="475488"/>
+          </a:xfrm>
+          <a:prstGeom prst="roundRect">
+            <a:avLst/>
+          </a:prstGeom>
+          <a:solidFill>
+            <a:srgbClr val="DEEAF6"/>
+          </a:solidFill>
+          <a:ln w="12700">
+            <a:solidFill>
+              <a:srgbClr val="2E75B6"/>
+            </a:solidFill>
+          </a:ln>
+          <a:effectLst/>
+        </p:spPr>
+        <p:style>
+          <a:lnRef idx="1">
+            <a:schemeClr val="accent1"/>
+          </a:lnRef>
+          <a:fillRef idx="3">
+            <a:schemeClr val="accent1"/>
+          </a:fillRef>
+          <a:effectRef idx="2">
+            <a:schemeClr val="accent1"/>
+          </a:effectRef>
+          <a:fontRef idx="minor">
+            <a:schemeClr val="lt1"/>
+          </a:fontRef>
+        </p:style>
+        <p:txBody>
+          <a:bodyPr rtlCol="0" anchor="ctr"/>
+          <a:lstStyle/>
+          <a:p/>
+        </p:txBody>
+      </p:sp>
+      <p:sp>
+        <p:nvSpPr>
+          <p:cNvPr id="6" name="TextBox 5"/>
+          <p:cNvSpPr txBox="1"/>
+          <p:nvPr/>
+        </p:nvSpPr>
+        <p:spPr>
+          <a:xfrm>
+            <a:off x="548640" y="1801368"/>
+            <a:ext cx="1691640" cy="320040"/>
+          </a:xfrm>
+          <a:prstGeom prst="rect">
+            <a:avLst/>
+          </a:prstGeom>
+          <a:noFill/>
+        </p:spPr>
+        <p:txBody>
+          <a:bodyPr wrap="square" anchor="t">
+            <a:spAutoFit/>
+          </a:bodyPr>
+          <a:lstStyle/>
           <a:p>
             <a:pPr>
               <a:spcAft>
-                <a:spcPts val="600"/>
+                <a:spcPts val="500"/>
               </a:spcAft>
             </a:pPr>
             <a:r>
-              <a:rPr sz="1050" b="0">
-                <a:solidFill>
-                  <a:srgbClr val="1A1A1A"/>
-                </a:solidFill>
-                <a:latin typeface="Arial"/>
-              </a:rPr>
-              <a:t>[1]  D'Souza, J. W. S., et al. (2019). Automated Attendance Marking and Management System by Facial Recognition Using Histogram. Array, 3–4: 100014.   DOI: 10.1016/j.array.2019.100014</a:t>
-            </a:r>
-          </a:p>
+              <a:rPr sz="1200" b="1" i="0">
+                <a:solidFill>
+                  <a:srgbClr val="000000"/>
+                </a:solidFill>
+                <a:latin typeface="Calibri"/>
+              </a:rPr>
+              <a:t>Face Detection</a:t>
+            </a:r>
+          </a:p>
+        </p:txBody>
+      </p:sp>
+      <p:sp>
+        <p:nvSpPr>
+          <p:cNvPr id="7" name="Rounded Rectangle 6"/>
+          <p:cNvSpPr/>
+          <p:nvPr/>
+        </p:nvSpPr>
+        <p:spPr>
+          <a:xfrm>
+            <a:off x="2377440" y="1691640"/>
+            <a:ext cx="4389120" cy="475488"/>
+          </a:xfrm>
+          <a:prstGeom prst="roundRect">
+            <a:avLst/>
+          </a:prstGeom>
+          <a:solidFill>
+            <a:srgbClr val="FFFFFF"/>
+          </a:solidFill>
+          <a:ln w="12700">
+            <a:solidFill>
+              <a:srgbClr val="2E75B6"/>
+            </a:solidFill>
+          </a:ln>
+          <a:effectLst/>
+        </p:spPr>
+        <p:style>
+          <a:lnRef idx="1">
+            <a:schemeClr val="accent1"/>
+          </a:lnRef>
+          <a:fillRef idx="3">
+            <a:schemeClr val="accent1"/>
+          </a:fillRef>
+          <a:effectRef idx="2">
+            <a:schemeClr val="accent1"/>
+          </a:effectRef>
+          <a:fontRef idx="minor">
+            <a:schemeClr val="lt1"/>
+          </a:fontRef>
+        </p:style>
+        <p:txBody>
+          <a:bodyPr rtlCol="0" anchor="ctr"/>
+          <a:lstStyle/>
+          <a:p/>
+        </p:txBody>
+      </p:sp>
+      <p:sp>
+        <p:nvSpPr>
+          <p:cNvPr id="8" name="TextBox 7"/>
+          <p:cNvSpPr txBox="1"/>
+          <p:nvPr/>
+        </p:nvSpPr>
+        <p:spPr>
+          <a:xfrm>
+            <a:off x="2514600" y="1801368"/>
+            <a:ext cx="4206240" cy="320040"/>
+          </a:xfrm>
+          <a:prstGeom prst="rect">
+            <a:avLst/>
+          </a:prstGeom>
+          <a:noFill/>
+        </p:spPr>
+        <p:txBody>
+          <a:bodyPr wrap="square" anchor="t">
+            <a:spAutoFit/>
+          </a:bodyPr>
+          <a:lstStyle/>
           <a:p>
             <a:pPr>
               <a:spcAft>
-                <a:spcPts val="600"/>
+                <a:spcPts val="500"/>
               </a:spcAft>
             </a:pPr>
             <a:r>
-              <a:rPr sz="1050" b="0">
+              <a:rPr sz="1150" b="0" i="0">
                 <a:solidFill>
                   <a:srgbClr val="1A1A1A"/>
                 </a:solidFill>
-                <a:latin typeface="Arial"/>
-              </a:rPr>
-              <a:t>[2]  Arsenovic, M., et al. (2017). FaceTime — Deep Learning Based Face Recognition Attendance System. IEEE SISY 2017, pp. 53–58.   DOI: 10.1109/SISY.2017.8080587</a:t>
-            </a:r>
-          </a:p>
+                <a:latin typeface="Calibri"/>
+              </a:rPr>
+              <a:t>RetinaFace / SCRFD  (det_10g)</a:t>
+            </a:r>
+          </a:p>
+        </p:txBody>
+      </p:sp>
+      <p:sp>
+        <p:nvSpPr>
+          <p:cNvPr id="9" name="Rounded Rectangle 8"/>
+          <p:cNvSpPr/>
+          <p:nvPr/>
+        </p:nvSpPr>
+        <p:spPr>
+          <a:xfrm>
+            <a:off x="457200" y="2258568"/>
+            <a:ext cx="1828800" cy="475488"/>
+          </a:xfrm>
+          <a:prstGeom prst="roundRect">
+            <a:avLst/>
+          </a:prstGeom>
+          <a:solidFill>
+            <a:srgbClr val="DEEAF6"/>
+          </a:solidFill>
+          <a:ln w="12700">
+            <a:solidFill>
+              <a:srgbClr val="2E75B6"/>
+            </a:solidFill>
+          </a:ln>
+          <a:effectLst/>
+        </p:spPr>
+        <p:style>
+          <a:lnRef idx="1">
+            <a:schemeClr val="accent1"/>
+          </a:lnRef>
+          <a:fillRef idx="3">
+            <a:schemeClr val="accent1"/>
+          </a:fillRef>
+          <a:effectRef idx="2">
+            <a:schemeClr val="accent1"/>
+          </a:effectRef>
+          <a:fontRef idx="minor">
+            <a:schemeClr val="lt1"/>
+          </a:fontRef>
+        </p:style>
+        <p:txBody>
+          <a:bodyPr rtlCol="0" anchor="ctr"/>
+          <a:lstStyle/>
+          <a:p/>
+        </p:txBody>
+      </p:sp>
+      <p:sp>
+        <p:nvSpPr>
+          <p:cNvPr id="10" name="TextBox 9"/>
+          <p:cNvSpPr txBox="1"/>
+          <p:nvPr/>
+        </p:nvSpPr>
+        <p:spPr>
+          <a:xfrm>
+            <a:off x="548640" y="2368296"/>
+            <a:ext cx="1691640" cy="320040"/>
+          </a:xfrm>
+          <a:prstGeom prst="rect">
+            <a:avLst/>
+          </a:prstGeom>
+          <a:noFill/>
+        </p:spPr>
+        <p:txBody>
+          <a:bodyPr wrap="square" anchor="t">
+            <a:spAutoFit/>
+          </a:bodyPr>
+          <a:lstStyle/>
           <a:p>
             <a:pPr>
               <a:spcAft>
-                <a:spcPts val="600"/>
+                <a:spcPts val="500"/>
               </a:spcAft>
             </a:pPr>
             <a:r>
-              <a:rPr sz="1050" b="0">
-                <a:solidFill>
-                  <a:srgbClr val="1A1A1A"/>
-                </a:solidFill>
-                <a:latin typeface="Arial"/>
-              </a:rPr>
-              <a:t>[3]  Kakarla, S., et al. (2020). Smart Attendance Management System Based on Face Recognition Using CNN. IEEE-HYDCON 2020.   DOI: 10.1109/HYDCON48903.2020.9242847</a:t>
-            </a:r>
-          </a:p>
+              <a:rPr sz="1200" b="1" i="0">
+                <a:solidFill>
+                  <a:srgbClr val="000000"/>
+                </a:solidFill>
+                <a:latin typeface="Calibri"/>
+              </a:rPr>
+              <a:t>Recognition</a:t>
+            </a:r>
+          </a:p>
+        </p:txBody>
+      </p:sp>
+      <p:sp>
+        <p:nvSpPr>
+          <p:cNvPr id="11" name="Rounded Rectangle 10"/>
+          <p:cNvSpPr/>
+          <p:nvPr/>
+        </p:nvSpPr>
+        <p:spPr>
+          <a:xfrm>
+            <a:off x="2377440" y="2258568"/>
+            <a:ext cx="4389120" cy="475488"/>
+          </a:xfrm>
+          <a:prstGeom prst="roundRect">
+            <a:avLst/>
+          </a:prstGeom>
+          <a:solidFill>
+            <a:srgbClr val="FFFFFF"/>
+          </a:solidFill>
+          <a:ln w="12700">
+            <a:solidFill>
+              <a:srgbClr val="2E75B6"/>
+            </a:solidFill>
+          </a:ln>
+          <a:effectLst/>
+        </p:spPr>
+        <p:style>
+          <a:lnRef idx="1">
+            <a:schemeClr val="accent1"/>
+          </a:lnRef>
+          <a:fillRef idx="3">
+            <a:schemeClr val="accent1"/>
+          </a:fillRef>
+          <a:effectRef idx="2">
+            <a:schemeClr val="accent1"/>
+          </a:effectRef>
+          <a:fontRef idx="minor">
+            <a:schemeClr val="lt1"/>
+          </a:fontRef>
+        </p:style>
+        <p:txBody>
+          <a:bodyPr rtlCol="0" anchor="ctr"/>
+          <a:lstStyle/>
+          <a:p/>
+        </p:txBody>
+      </p:sp>
+      <p:sp>
+        <p:nvSpPr>
+          <p:cNvPr id="12" name="TextBox 11"/>
+          <p:cNvSpPr txBox="1"/>
+          <p:nvPr/>
+        </p:nvSpPr>
+        <p:spPr>
+          <a:xfrm>
+            <a:off x="2514600" y="2368296"/>
+            <a:ext cx="4206240" cy="320040"/>
+          </a:xfrm>
+          <a:prstGeom prst="rect">
+            <a:avLst/>
+          </a:prstGeom>
+          <a:noFill/>
+        </p:spPr>
+        <p:txBody>
+          <a:bodyPr wrap="square" anchor="t">
+            <a:spAutoFit/>
+          </a:bodyPr>
+          <a:lstStyle/>
           <a:p>
             <a:pPr>
               <a:spcAft>
-                <a:spcPts val="600"/>
+                <a:spcPts val="500"/>
               </a:spcAft>
             </a:pPr>
             <a:r>
-              <a:rPr sz="1050" b="0">
+              <a:rPr sz="1150" b="0" i="0">
                 <a:solidFill>
                   <a:srgbClr val="1A1A1A"/>
                 </a:solidFill>
-                <a:latin typeface="Arial"/>
-              </a:rPr>
-              <a:t>[4]  Varadharajan, E., et al. (2016). Automatic Attendance Management System Using Face Detection. IC-GET 2016, pp. 1–3.   DOI: 10.1109/GET.2016.7916753</a:t>
-            </a:r>
-          </a:p>
+                <a:latin typeface="Calibri"/>
+              </a:rPr>
+              <a:t>ArcFace ResNet-50 (buffalo_l) → 512-d embedding</a:t>
+            </a:r>
+          </a:p>
+        </p:txBody>
+      </p:sp>
+      <p:sp>
+        <p:nvSpPr>
+          <p:cNvPr id="13" name="Rounded Rectangle 12"/>
+          <p:cNvSpPr/>
+          <p:nvPr/>
+        </p:nvSpPr>
+        <p:spPr>
+          <a:xfrm>
+            <a:off x="457200" y="2825496"/>
+            <a:ext cx="1828800" cy="475488"/>
+          </a:xfrm>
+          <a:prstGeom prst="roundRect">
+            <a:avLst/>
+          </a:prstGeom>
+          <a:solidFill>
+            <a:srgbClr val="DEEAF6"/>
+          </a:solidFill>
+          <a:ln w="12700">
+            <a:solidFill>
+              <a:srgbClr val="2E75B6"/>
+            </a:solidFill>
+          </a:ln>
+          <a:effectLst/>
+        </p:spPr>
+        <p:style>
+          <a:lnRef idx="1">
+            <a:schemeClr val="accent1"/>
+          </a:lnRef>
+          <a:fillRef idx="3">
+            <a:schemeClr val="accent1"/>
+          </a:fillRef>
+          <a:effectRef idx="2">
+            <a:schemeClr val="accent1"/>
+          </a:effectRef>
+          <a:fontRef idx="minor">
+            <a:schemeClr val="lt1"/>
+          </a:fontRef>
+        </p:style>
+        <p:txBody>
+          <a:bodyPr rtlCol="0" anchor="ctr"/>
+          <a:lstStyle/>
+          <a:p/>
+        </p:txBody>
+      </p:sp>
+      <p:sp>
+        <p:nvSpPr>
+          <p:cNvPr id="14" name="TextBox 13"/>
+          <p:cNvSpPr txBox="1"/>
+          <p:nvPr/>
+        </p:nvSpPr>
+        <p:spPr>
+          <a:xfrm>
+            <a:off x="548640" y="2935224"/>
+            <a:ext cx="1691640" cy="320040"/>
+          </a:xfrm>
+          <a:prstGeom prst="rect">
+            <a:avLst/>
+          </a:prstGeom>
+          <a:noFill/>
+        </p:spPr>
+        <p:txBody>
+          <a:bodyPr wrap="square" anchor="t">
+            <a:spAutoFit/>
+          </a:bodyPr>
+          <a:lstStyle/>
           <a:p>
             <a:pPr>
               <a:spcAft>
-                <a:spcPts val="600"/>
+                <a:spcPts val="500"/>
               </a:spcAft>
             </a:pPr>
             <a:r>
-              <a:rPr sz="1050" b="0">
-                <a:solidFill>
-                  <a:srgbClr val="1A1A1A"/>
-                </a:solidFill>
-                <a:latin typeface="Arial"/>
-              </a:rPr>
-              <a:t>[5]  Siswanto, A. R. S., et al. (2014). Implementation of Face Recognition Algorithm for Biometrics Based Time Attendance System. ICISS 2014, pp. 149–154.   DOI: 10.1109/ICTSS.2014.7013165</a:t>
-            </a:r>
-          </a:p>
+              <a:rPr sz="1200" b="1" i="0">
+                <a:solidFill>
+                  <a:srgbClr val="000000"/>
+                </a:solidFill>
+                <a:latin typeface="Calibri"/>
+              </a:rPr>
+              <a:t>Runtime</a:t>
+            </a:r>
+          </a:p>
+        </p:txBody>
+      </p:sp>
+      <p:sp>
+        <p:nvSpPr>
+          <p:cNvPr id="15" name="Rounded Rectangle 14"/>
+          <p:cNvSpPr/>
+          <p:nvPr/>
+        </p:nvSpPr>
+        <p:spPr>
+          <a:xfrm>
+            <a:off x="2377440" y="2825496"/>
+            <a:ext cx="4389120" cy="475488"/>
+          </a:xfrm>
+          <a:prstGeom prst="roundRect">
+            <a:avLst/>
+          </a:prstGeom>
+          <a:solidFill>
+            <a:srgbClr val="FFFFFF"/>
+          </a:solidFill>
+          <a:ln w="12700">
+            <a:solidFill>
+              <a:srgbClr val="2E75B6"/>
+            </a:solidFill>
+          </a:ln>
+          <a:effectLst/>
+        </p:spPr>
+        <p:style>
+          <a:lnRef idx="1">
+            <a:schemeClr val="accent1"/>
+          </a:lnRef>
+          <a:fillRef idx="3">
+            <a:schemeClr val="accent1"/>
+          </a:fillRef>
+          <a:effectRef idx="2">
+            <a:schemeClr val="accent1"/>
+          </a:effectRef>
+          <a:fontRef idx="minor">
+            <a:schemeClr val="lt1"/>
+          </a:fontRef>
+        </p:style>
+        <p:txBody>
+          <a:bodyPr rtlCol="0" anchor="ctr"/>
+          <a:lstStyle/>
+          <a:p/>
+        </p:txBody>
+      </p:sp>
+      <p:sp>
+        <p:nvSpPr>
+          <p:cNvPr id="16" name="TextBox 15"/>
+          <p:cNvSpPr txBox="1"/>
+          <p:nvPr/>
+        </p:nvSpPr>
+        <p:spPr>
+          <a:xfrm>
+            <a:off x="2514600" y="2935224"/>
+            <a:ext cx="4206240" cy="320040"/>
+          </a:xfrm>
+          <a:prstGeom prst="rect">
+            <a:avLst/>
+          </a:prstGeom>
+          <a:noFill/>
+        </p:spPr>
+        <p:txBody>
+          <a:bodyPr wrap="square" anchor="t">
+            <a:spAutoFit/>
+          </a:bodyPr>
+          <a:lstStyle/>
           <a:p>
             <a:pPr>
               <a:spcAft>
-                <a:spcPts val="600"/>
+                <a:spcPts val="500"/>
               </a:spcAft>
             </a:pPr>
-          </a:p>
+            <a:r>
+              <a:rPr sz="1150" b="0" i="0">
+                <a:solidFill>
+                  <a:srgbClr val="1A1A1A"/>
+                </a:solidFill>
+                <a:latin typeface="Calibri"/>
+              </a:rPr>
+              <a:t>ONNX Runtime — CPU only, NO GPU</a:t>
+            </a:r>
+          </a:p>
+        </p:txBody>
+      </p:sp>
+      <p:sp>
+        <p:nvSpPr>
+          <p:cNvPr id="17" name="Rounded Rectangle 16"/>
+          <p:cNvSpPr/>
+          <p:nvPr/>
+        </p:nvSpPr>
+        <p:spPr>
+          <a:xfrm>
+            <a:off x="457200" y="3392424"/>
+            <a:ext cx="1828800" cy="475488"/>
+          </a:xfrm>
+          <a:prstGeom prst="roundRect">
+            <a:avLst/>
+          </a:prstGeom>
+          <a:solidFill>
+            <a:srgbClr val="DEEAF6"/>
+          </a:solidFill>
+          <a:ln w="12700">
+            <a:solidFill>
+              <a:srgbClr val="2E75B6"/>
+            </a:solidFill>
+          </a:ln>
+          <a:effectLst/>
+        </p:spPr>
+        <p:style>
+          <a:lnRef idx="1">
+            <a:schemeClr val="accent1"/>
+          </a:lnRef>
+          <a:fillRef idx="3">
+            <a:schemeClr val="accent1"/>
+          </a:fillRef>
+          <a:effectRef idx="2">
+            <a:schemeClr val="accent1"/>
+          </a:effectRef>
+          <a:fontRef idx="minor">
+            <a:schemeClr val="lt1"/>
+          </a:fontRef>
+        </p:style>
+        <p:txBody>
+          <a:bodyPr rtlCol="0" anchor="ctr"/>
+          <a:lstStyle/>
+          <a:p/>
+        </p:txBody>
+      </p:sp>
+      <p:sp>
+        <p:nvSpPr>
+          <p:cNvPr id="18" name="TextBox 17"/>
+          <p:cNvSpPr txBox="1"/>
+          <p:nvPr/>
+        </p:nvSpPr>
+        <p:spPr>
+          <a:xfrm>
+            <a:off x="548640" y="3502152"/>
+            <a:ext cx="1691640" cy="320040"/>
+          </a:xfrm>
+          <a:prstGeom prst="rect">
+            <a:avLst/>
+          </a:prstGeom>
+          <a:noFill/>
+        </p:spPr>
+        <p:txBody>
+          <a:bodyPr wrap="square" anchor="t">
+            <a:spAutoFit/>
+          </a:bodyPr>
+          <a:lstStyle/>
           <a:p>
             <a:pPr>
               <a:spcAft>
-                <a:spcPts val="600"/>
+                <a:spcPts val="500"/>
               </a:spcAft>
             </a:pPr>
             <a:r>
-              <a:rPr sz="1050" b="1">
-                <a:solidFill>
-                  <a:srgbClr val="1F3A6E"/>
-                </a:solidFill>
-                <a:latin typeface="Arial"/>
-              </a:rPr>
-              <a:t>❖ Models used — pretrained and frozen (not our contribution)</a:t>
-            </a:r>
-          </a:p>
+              <a:rPr sz="1200" b="1" i="0">
+                <a:solidFill>
+                  <a:srgbClr val="000000"/>
+                </a:solidFill>
+                <a:latin typeface="Calibri"/>
+              </a:rPr>
+              <a:t>Classifier</a:t>
+            </a:r>
+          </a:p>
+        </p:txBody>
+      </p:sp>
+      <p:sp>
+        <p:nvSpPr>
+          <p:cNvPr id="19" name="Rounded Rectangle 18"/>
+          <p:cNvSpPr/>
+          <p:nvPr/>
+        </p:nvSpPr>
+        <p:spPr>
+          <a:xfrm>
+            <a:off x="2377440" y="3392424"/>
+            <a:ext cx="4389120" cy="475488"/>
+          </a:xfrm>
+          <a:prstGeom prst="roundRect">
+            <a:avLst/>
+          </a:prstGeom>
+          <a:solidFill>
+            <a:srgbClr val="FFFFFF"/>
+          </a:solidFill>
+          <a:ln w="12700">
+            <a:solidFill>
+              <a:srgbClr val="2E75B6"/>
+            </a:solidFill>
+          </a:ln>
+          <a:effectLst/>
+        </p:spPr>
+        <p:style>
+          <a:lnRef idx="1">
+            <a:schemeClr val="accent1"/>
+          </a:lnRef>
+          <a:fillRef idx="3">
+            <a:schemeClr val="accent1"/>
+          </a:fillRef>
+          <a:effectRef idx="2">
+            <a:schemeClr val="accent1"/>
+          </a:effectRef>
+          <a:fontRef idx="minor">
+            <a:schemeClr val="lt1"/>
+          </a:fontRef>
+        </p:style>
+        <p:txBody>
+          <a:bodyPr rtlCol="0" anchor="ctr"/>
+          <a:lstStyle/>
+          <a:p/>
+        </p:txBody>
+      </p:sp>
+      <p:sp>
+        <p:nvSpPr>
+          <p:cNvPr id="20" name="TextBox 19"/>
+          <p:cNvSpPr txBox="1"/>
+          <p:nvPr/>
+        </p:nvSpPr>
+        <p:spPr>
+          <a:xfrm>
+            <a:off x="2514600" y="3502152"/>
+            <a:ext cx="4206240" cy="320040"/>
+          </a:xfrm>
+          <a:prstGeom prst="rect">
+            <a:avLst/>
+          </a:prstGeom>
+          <a:noFill/>
+        </p:spPr>
+        <p:txBody>
+          <a:bodyPr wrap="square" anchor="t">
+            <a:spAutoFit/>
+          </a:bodyPr>
+          <a:lstStyle/>
           <a:p>
             <a:pPr>
               <a:spcAft>
-                <a:spcPts val="600"/>
+                <a:spcPts val="500"/>
               </a:spcAft>
             </a:pPr>
             <a:r>
-              <a:rPr sz="1050" b="0">
+              <a:rPr sz="1150" b="0" i="0">
                 <a:solidFill>
                   <a:srgbClr val="1A1A1A"/>
                 </a:solidFill>
-                <a:latin typeface="Arial"/>
-              </a:rPr>
-              <a:t>[6]  Deng, J., Guo, J., Xue, N., Zafeiriou, S. (2019). ArcFace: Additive Angular Margin Loss for Deep Face Recognition. CVPR 2019, pp. 4690–4699.   DOI: 10.1109/CVPR.2019.00482</a:t>
-            </a:r>
-          </a:p>
+                <a:latin typeface="Calibri"/>
+              </a:rPr>
+              <a:t>Linear SVM + cosine-to-centroid  (scikit-learn)</a:t>
+            </a:r>
+          </a:p>
+        </p:txBody>
+      </p:sp>
+      <p:sp>
+        <p:nvSpPr>
+          <p:cNvPr id="21" name="Rounded Rectangle 20"/>
+          <p:cNvSpPr/>
+          <p:nvPr/>
+        </p:nvSpPr>
+        <p:spPr>
+          <a:xfrm>
+            <a:off x="457200" y="3959352"/>
+            <a:ext cx="1828800" cy="475488"/>
+          </a:xfrm>
+          <a:prstGeom prst="roundRect">
+            <a:avLst/>
+          </a:prstGeom>
+          <a:solidFill>
+            <a:srgbClr val="DEEAF6"/>
+          </a:solidFill>
+          <a:ln w="12700">
+            <a:solidFill>
+              <a:srgbClr val="2E75B6"/>
+            </a:solidFill>
+          </a:ln>
+          <a:effectLst/>
+        </p:spPr>
+        <p:style>
+          <a:lnRef idx="1">
+            <a:schemeClr val="accent1"/>
+          </a:lnRef>
+          <a:fillRef idx="3">
+            <a:schemeClr val="accent1"/>
+          </a:fillRef>
+          <a:effectRef idx="2">
+            <a:schemeClr val="accent1"/>
+          </a:effectRef>
+          <a:fontRef idx="minor">
+            <a:schemeClr val="lt1"/>
+          </a:fontRef>
+        </p:style>
+        <p:txBody>
+          <a:bodyPr rtlCol="0" anchor="ctr"/>
+          <a:lstStyle/>
+          <a:p/>
+        </p:txBody>
+      </p:sp>
+      <p:sp>
+        <p:nvSpPr>
+          <p:cNvPr id="22" name="TextBox 21"/>
+          <p:cNvSpPr txBox="1"/>
+          <p:nvPr/>
+        </p:nvSpPr>
+        <p:spPr>
+          <a:xfrm>
+            <a:off x="548640" y="4069080"/>
+            <a:ext cx="1691640" cy="320040"/>
+          </a:xfrm>
+          <a:prstGeom prst="rect">
+            <a:avLst/>
+          </a:prstGeom>
+          <a:noFill/>
+        </p:spPr>
+        <p:txBody>
+          <a:bodyPr wrap="square" anchor="t">
+            <a:spAutoFit/>
+          </a:bodyPr>
+          <a:lstStyle/>
           <a:p>
             <a:pPr>
               <a:spcAft>
-                <a:spcPts val="600"/>
+                <a:spcPts val="500"/>
               </a:spcAft>
             </a:pPr>
             <a:r>
-              <a:rPr sz="1050" b="0">
-                <a:solidFill>
-                  <a:srgbClr val="1A1A1A"/>
-                </a:solidFill>
-                <a:latin typeface="Arial"/>
-              </a:rPr>
-              <a:t>[7]  Deng, J., et al. (2020). RetinaFace: Single-Shot Multi-Level Face Localisation in the Wild. CVPR 2020.   DOI: 10.1109/CVPR42600.2020.00525</a:t>
-            </a:r>
-          </a:p>
+              <a:rPr sz="1200" b="1" i="0">
+                <a:solidFill>
+                  <a:srgbClr val="000000"/>
+                </a:solidFill>
+                <a:latin typeface="Calibri"/>
+              </a:rPr>
+              <a:t>Frontend</a:t>
+            </a:r>
+          </a:p>
+        </p:txBody>
+      </p:sp>
+      <p:sp>
+        <p:nvSpPr>
+          <p:cNvPr id="23" name="Rounded Rectangle 22"/>
+          <p:cNvSpPr/>
+          <p:nvPr/>
+        </p:nvSpPr>
+        <p:spPr>
+          <a:xfrm>
+            <a:off x="2377440" y="3959352"/>
+            <a:ext cx="4389120" cy="475488"/>
+          </a:xfrm>
+          <a:prstGeom prst="roundRect">
+            <a:avLst/>
+          </a:prstGeom>
+          <a:solidFill>
+            <a:srgbClr val="FFFFFF"/>
+          </a:solidFill>
+          <a:ln w="12700">
+            <a:solidFill>
+              <a:srgbClr val="2E75B6"/>
+            </a:solidFill>
+          </a:ln>
+          <a:effectLst/>
+        </p:spPr>
+        <p:style>
+          <a:lnRef idx="1">
+            <a:schemeClr val="accent1"/>
+          </a:lnRef>
+          <a:fillRef idx="3">
+            <a:schemeClr val="accent1"/>
+          </a:fillRef>
+          <a:effectRef idx="2">
+            <a:schemeClr val="accent1"/>
+          </a:effectRef>
+          <a:fontRef idx="minor">
+            <a:schemeClr val="lt1"/>
+          </a:fontRef>
+        </p:style>
+        <p:txBody>
+          <a:bodyPr rtlCol="0" anchor="ctr"/>
+          <a:lstStyle/>
+          <a:p/>
+        </p:txBody>
+      </p:sp>
+      <p:sp>
+        <p:nvSpPr>
+          <p:cNvPr id="24" name="TextBox 23"/>
+          <p:cNvSpPr txBox="1"/>
+          <p:nvPr/>
+        </p:nvSpPr>
+        <p:spPr>
+          <a:xfrm>
+            <a:off x="2514600" y="4069080"/>
+            <a:ext cx="4206240" cy="320040"/>
+          </a:xfrm>
+          <a:prstGeom prst="rect">
+            <a:avLst/>
+          </a:prstGeom>
+          <a:noFill/>
+        </p:spPr>
+        <p:txBody>
+          <a:bodyPr wrap="square" anchor="t">
+            <a:spAutoFit/>
+          </a:bodyPr>
+          <a:lstStyle/>
           <a:p>
             <a:pPr>
               <a:spcAft>
-                <a:spcPts val="600"/>
+                <a:spcPts val="500"/>
               </a:spcAft>
             </a:pPr>
             <a:r>
-              <a:rPr sz="1050" b="0">
+              <a:rPr sz="1150" b="0" i="0">
                 <a:solidFill>
                   <a:srgbClr val="1A1A1A"/>
                 </a:solidFill>
-                <a:latin typeface="Arial"/>
-              </a:rPr>
-              <a:t>[8]  Cao, Q., et al. (2018). VGGFace2: A Dataset for Recognising Faces across Pose and Age. IEEE FG 2018, pp. 67–74.</a:t>
-            </a:r>
-          </a:p>
+                <a:latin typeface="Calibri"/>
+              </a:rPr>
+              <a:t>React · Vite · TailwindCSS</a:t>
+            </a:r>
+          </a:p>
+        </p:txBody>
+      </p:sp>
+      <p:sp>
+        <p:nvSpPr>
+          <p:cNvPr id="25" name="Rounded Rectangle 24"/>
+          <p:cNvSpPr/>
+          <p:nvPr/>
+        </p:nvSpPr>
+        <p:spPr>
+          <a:xfrm>
+            <a:off x="457200" y="4526280"/>
+            <a:ext cx="1828800" cy="475488"/>
+          </a:xfrm>
+          <a:prstGeom prst="roundRect">
+            <a:avLst/>
+          </a:prstGeom>
+          <a:solidFill>
+            <a:srgbClr val="DEEAF6"/>
+          </a:solidFill>
+          <a:ln w="12700">
+            <a:solidFill>
+              <a:srgbClr val="2E75B6"/>
+            </a:solidFill>
+          </a:ln>
+          <a:effectLst/>
+        </p:spPr>
+        <p:style>
+          <a:lnRef idx="1">
+            <a:schemeClr val="accent1"/>
+          </a:lnRef>
+          <a:fillRef idx="3">
+            <a:schemeClr val="accent1"/>
+          </a:fillRef>
+          <a:effectRef idx="2">
+            <a:schemeClr val="accent1"/>
+          </a:effectRef>
+          <a:fontRef idx="minor">
+            <a:schemeClr val="lt1"/>
+          </a:fontRef>
+        </p:style>
+        <p:txBody>
+          <a:bodyPr rtlCol="0" anchor="ctr"/>
+          <a:lstStyle/>
+          <a:p/>
+        </p:txBody>
+      </p:sp>
+      <p:sp>
+        <p:nvSpPr>
+          <p:cNvPr id="26" name="TextBox 25"/>
+          <p:cNvSpPr txBox="1"/>
+          <p:nvPr/>
+        </p:nvSpPr>
+        <p:spPr>
+          <a:xfrm>
+            <a:off x="548640" y="4636008"/>
+            <a:ext cx="1691640" cy="320040"/>
+          </a:xfrm>
+          <a:prstGeom prst="rect">
+            <a:avLst/>
+          </a:prstGeom>
+          <a:noFill/>
+        </p:spPr>
+        <p:txBody>
+          <a:bodyPr wrap="square" anchor="t">
+            <a:spAutoFit/>
+          </a:bodyPr>
+          <a:lstStyle/>
           <a:p>
             <a:pPr>
               <a:spcAft>
-                <a:spcPts val="600"/>
+                <a:spcPts val="500"/>
               </a:spcAft>
             </a:pPr>
-          </a:p>
+            <a:r>
+              <a:rPr sz="1200" b="1" i="0">
+                <a:solidFill>
+                  <a:srgbClr val="000000"/>
+                </a:solidFill>
+                <a:latin typeface="Calibri"/>
+              </a:rPr>
+              <a:t>Backend</a:t>
+            </a:r>
+          </a:p>
+        </p:txBody>
+      </p:sp>
+      <p:sp>
+        <p:nvSpPr>
+          <p:cNvPr id="27" name="Rounded Rectangle 26"/>
+          <p:cNvSpPr/>
+          <p:nvPr/>
+        </p:nvSpPr>
+        <p:spPr>
+          <a:xfrm>
+            <a:off x="2377440" y="4526280"/>
+            <a:ext cx="4389120" cy="475488"/>
+          </a:xfrm>
+          <a:prstGeom prst="roundRect">
+            <a:avLst/>
+          </a:prstGeom>
+          <a:solidFill>
+            <a:srgbClr val="FFFFFF"/>
+          </a:solidFill>
+          <a:ln w="12700">
+            <a:solidFill>
+              <a:srgbClr val="2E75B6"/>
+            </a:solidFill>
+          </a:ln>
+          <a:effectLst/>
+        </p:spPr>
+        <p:style>
+          <a:lnRef idx="1">
+            <a:schemeClr val="accent1"/>
+          </a:lnRef>
+          <a:fillRef idx="3">
+            <a:schemeClr val="accent1"/>
+          </a:fillRef>
+          <a:effectRef idx="2">
+            <a:schemeClr val="accent1"/>
+          </a:effectRef>
+          <a:fontRef idx="minor">
+            <a:schemeClr val="lt1"/>
+          </a:fontRef>
+        </p:style>
+        <p:txBody>
+          <a:bodyPr rtlCol="0" anchor="ctr"/>
+          <a:lstStyle/>
+          <a:p/>
+        </p:txBody>
+      </p:sp>
+      <p:sp>
+        <p:nvSpPr>
+          <p:cNvPr id="28" name="TextBox 27"/>
+          <p:cNvSpPr txBox="1"/>
+          <p:nvPr/>
+        </p:nvSpPr>
+        <p:spPr>
+          <a:xfrm>
+            <a:off x="2514600" y="4636008"/>
+            <a:ext cx="4206240" cy="320040"/>
+          </a:xfrm>
+          <a:prstGeom prst="rect">
+            <a:avLst/>
+          </a:prstGeom>
+          <a:noFill/>
+        </p:spPr>
+        <p:txBody>
+          <a:bodyPr wrap="square" anchor="t">
+            <a:spAutoFit/>
+          </a:bodyPr>
+          <a:lstStyle/>
           <a:p>
             <a:pPr>
               <a:spcAft>
-                <a:spcPts val="600"/>
+                <a:spcPts val="500"/>
               </a:spcAft>
             </a:pPr>
             <a:r>
-              <a:rPr sz="1050" b="1">
-                <a:solidFill>
-                  <a:srgbClr val="C00000"/>
-                </a:solidFill>
-                <a:latin typeface="Arial"/>
-              </a:rPr>
-              <a:t>❖ Presentation attacks — the gap this project addresses</a:t>
-            </a:r>
-          </a:p>
+              <a:rPr sz="1150" b="0" i="0">
+                <a:solidFill>
+                  <a:srgbClr val="1A1A1A"/>
+                </a:solidFill>
+                <a:latin typeface="Calibri"/>
+              </a:rPr>
+              <a:t>Flask REST API  (Bearer-token auth)</a:t>
+            </a:r>
+          </a:p>
+        </p:txBody>
+      </p:sp>
+      <p:sp>
+        <p:nvSpPr>
+          <p:cNvPr id="29" name="Rounded Rectangle 28"/>
+          <p:cNvSpPr/>
+          <p:nvPr/>
+        </p:nvSpPr>
+        <p:spPr>
+          <a:xfrm>
+            <a:off x="457200" y="5093208"/>
+            <a:ext cx="1828800" cy="475488"/>
+          </a:xfrm>
+          <a:prstGeom prst="roundRect">
+            <a:avLst/>
+          </a:prstGeom>
+          <a:solidFill>
+            <a:srgbClr val="DEEAF6"/>
+          </a:solidFill>
+          <a:ln w="12700">
+            <a:solidFill>
+              <a:srgbClr val="2E75B6"/>
+            </a:solidFill>
+          </a:ln>
+          <a:effectLst/>
+        </p:spPr>
+        <p:style>
+          <a:lnRef idx="1">
+            <a:schemeClr val="accent1"/>
+          </a:lnRef>
+          <a:fillRef idx="3">
+            <a:schemeClr val="accent1"/>
+          </a:fillRef>
+          <a:effectRef idx="2">
+            <a:schemeClr val="accent1"/>
+          </a:effectRef>
+          <a:fontRef idx="minor">
+            <a:schemeClr val="lt1"/>
+          </a:fontRef>
+        </p:style>
+        <p:txBody>
+          <a:bodyPr rtlCol="0" anchor="ctr"/>
+          <a:lstStyle/>
+          <a:p/>
+        </p:txBody>
+      </p:sp>
+      <p:sp>
+        <p:nvSpPr>
+          <p:cNvPr id="30" name="TextBox 29"/>
+          <p:cNvSpPr txBox="1"/>
+          <p:nvPr/>
+        </p:nvSpPr>
+        <p:spPr>
+          <a:xfrm>
+            <a:off x="548640" y="5202936"/>
+            <a:ext cx="1691640" cy="320040"/>
+          </a:xfrm>
+          <a:prstGeom prst="rect">
+            <a:avLst/>
+          </a:prstGeom>
+          <a:noFill/>
+        </p:spPr>
+        <p:txBody>
+          <a:bodyPr wrap="square" anchor="t">
+            <a:spAutoFit/>
+          </a:bodyPr>
+          <a:lstStyle/>
           <a:p>
             <a:pPr>
               <a:spcAft>
-                <a:spcPts val="600"/>
+                <a:spcPts val="500"/>
               </a:spcAft>
             </a:pPr>
             <a:r>
-              <a:rPr sz="1050" b="0">
-                <a:solidFill>
-                  <a:srgbClr val="1A1A1A"/>
-                </a:solidFill>
-                <a:latin typeface="Arial"/>
-              </a:rPr>
-              <a:t>[9]   Pan, G., Sun, L., Wu, Z., Lao, S. (2007). Eyeblink-based Anti-Spoofing in Face Recognition from a Generic Webcamera. ICCV 2007, pp. 1–8.   DOI: 10.1109/ICCV.2007.4409068</a:t>
-            </a:r>
-          </a:p>
+              <a:rPr sz="1200" b="1" i="0">
+                <a:solidFill>
+                  <a:srgbClr val="000000"/>
+                </a:solidFill>
+                <a:latin typeface="Calibri"/>
+              </a:rPr>
+              <a:t>Storage</a:t>
+            </a:r>
+          </a:p>
+        </p:txBody>
+      </p:sp>
+      <p:sp>
+        <p:nvSpPr>
+          <p:cNvPr id="31" name="Rounded Rectangle 30"/>
+          <p:cNvSpPr/>
+          <p:nvPr/>
+        </p:nvSpPr>
+        <p:spPr>
+          <a:xfrm>
+            <a:off x="2377440" y="5093208"/>
+            <a:ext cx="4389120" cy="475488"/>
+          </a:xfrm>
+          <a:prstGeom prst="roundRect">
+            <a:avLst/>
+          </a:prstGeom>
+          <a:solidFill>
+            <a:srgbClr val="FFFFFF"/>
+          </a:solidFill>
+          <a:ln w="12700">
+            <a:solidFill>
+              <a:srgbClr val="2E75B6"/>
+            </a:solidFill>
+          </a:ln>
+          <a:effectLst/>
+        </p:spPr>
+        <p:style>
+          <a:lnRef idx="1">
+            <a:schemeClr val="accent1"/>
+          </a:lnRef>
+          <a:fillRef idx="3">
+            <a:schemeClr val="accent1"/>
+          </a:fillRef>
+          <a:effectRef idx="2">
+            <a:schemeClr val="accent1"/>
+          </a:effectRef>
+          <a:fontRef idx="minor">
+            <a:schemeClr val="lt1"/>
+          </a:fontRef>
+        </p:style>
+        <p:txBody>
+          <a:bodyPr rtlCol="0" anchor="ctr"/>
+          <a:lstStyle/>
+          <a:p/>
+        </p:txBody>
+      </p:sp>
+      <p:sp>
+        <p:nvSpPr>
+          <p:cNvPr id="32" name="TextBox 31"/>
+          <p:cNvSpPr txBox="1"/>
+          <p:nvPr/>
+        </p:nvSpPr>
+        <p:spPr>
+          <a:xfrm>
+            <a:off x="2514600" y="5202936"/>
+            <a:ext cx="4206240" cy="320040"/>
+          </a:xfrm>
+          <a:prstGeom prst="rect">
+            <a:avLst/>
+          </a:prstGeom>
+          <a:noFill/>
+        </p:spPr>
+        <p:txBody>
+          <a:bodyPr wrap="square" anchor="t">
+            <a:spAutoFit/>
+          </a:bodyPr>
+          <a:lstStyle/>
           <a:p>
             <a:pPr>
               <a:spcAft>
-                <a:spcPts val="600"/>
+                <a:spcPts val="500"/>
               </a:spcAft>
             </a:pPr>
             <a:r>
-              <a:rPr sz="1050" b="0">
+              <a:rPr sz="1150" b="0" i="0">
                 <a:solidFill>
                   <a:srgbClr val="1A1A1A"/>
                 </a:solidFill>
-                <a:latin typeface="Arial"/>
-              </a:rPr>
-              <a:t>[10] ISO/IEC 30107-3:2023 — Biometric presentation attack detection — Part 3: Testing and reporting.</a:t>
-            </a:r>
-          </a:p>
-          <a:p>
-            <a:pPr>
+                <a:latin typeface="Calibri"/>
+              </a:rPr>
+              <a:t>CSV + JSON on disk — no cloud, no database server</a:t>
+            </a:r>
+          </a:p>
+        </p:txBody>
+      </p:sp>
+      <p:pic>
+        <p:nvPicPr>
+          <p:cNvPr id="33" name="Picture 32" descr="workflow.png"/>
+          <p:cNvPicPr>
+            <a:picLocks noChangeAspect="1"/>
+          </p:cNvPicPr>
+          <p:nvPr/>
+        </p:nvPicPr>
+        <p:blipFill>
+          <a:blip r:embed="rId2"/>
+          <a:stretch>
+            <a:fillRect/>
+          </a:stretch>
+        </p:blipFill>
+        <p:spPr>
+          <a:xfrm>
+            <a:off x="7452360" y="1005840"/>
+            <a:ext cx="3886543" cy="5074920"/>
+          </a:xfrm>
+          <a:prstGeom prst="rect">
+            <a:avLst/>
+          </a:prstGeom>
+        </p:spPr>
+      </p:pic>
+      <p:sp>
+        <p:nvSpPr>
+          <p:cNvPr id="34" name="TextBox 33"/>
+          <p:cNvSpPr txBox="1"/>
+          <p:nvPr/>
+        </p:nvSpPr>
+        <p:spPr>
+          <a:xfrm>
+            <a:off x="7452360" y="6035040"/>
+            <a:ext cx="4206240" cy="320040"/>
+          </a:xfrm>
+          <a:prstGeom prst="rect">
+            <a:avLst/>
+          </a:prstGeom>
+          <a:noFill/>
+        </p:spPr>
+        <p:txBody>
+          <a:bodyPr wrap="square" anchor="t">
+            <a:spAutoFit/>
+          </a:bodyPr>
+          <a:lstStyle/>
+          <a:p>
+            <a:pPr algn="ctr">
               <a:spcAft>
-                <a:spcPts val="600"/>
+                <a:spcPts val="500"/>
               </a:spcAft>
             </a:pPr>
-          </a:p>
-          <a:p>
-            <a:pPr>
-              <a:spcAft>
-                <a:spcPts val="600"/>
-              </a:spcAft>
-            </a:pPr>
-            <a:r>
-              <a:rPr sz="1050" b="1">
-                <a:solidFill>
-                  <a:srgbClr val="1F3A6E"/>
-                </a:solidFill>
-                <a:latin typeface="Arial"/>
-              </a:rPr>
-              <a:t>❖ Source code and all measurement scripts:</a:t>
-            </a:r>
-          </a:p>
-          <a:p>
-            <a:pPr>
-              <a:spcAft>
-                <a:spcPts val="600"/>
-              </a:spcAft>
-            </a:pPr>
-            <a:r>
-              <a:rPr sz="1050" b="1">
-                <a:solidFill>
-                  <a:srgbClr val="1E7A45"/>
-                </a:solidFill>
-                <a:latin typeface="Arial"/>
-              </a:rPr>
-              <a:t>       github.com/SohamBhattacharjee2003/MutiFace-Attendance-System</a:t>
-            </a:r>
-          </a:p>
-        </p:txBody>
-      </p:sp>
-      <p:sp>
-        <p:nvSpPr>
-          <p:cNvPr id="4" name="Rectangle 3"/>
+            <a:r>
+              <a:rPr sz="1400" b="1" i="0">
+                <a:solidFill>
+                  <a:srgbClr val="2E75B6"/>
+                </a:solidFill>
+                <a:latin typeface="Calibri"/>
+              </a:rPr>
+              <a:t>WORKFLOW</a:t>
+            </a:r>
+          </a:p>
+        </p:txBody>
+      </p:sp>
+      <p:sp>
+        <p:nvSpPr>
+          <p:cNvPr id="35" name="Rectangle 34"/>
           <p:cNvSpPr/>
           <p:nvPr/>
         </p:nvSpPr>
@@ -6812,7 +8632,7 @@
       </p:sp>
       <p:sp>
         <p:nvSpPr>
-          <p:cNvPr id="5" name="TextBox 4"/>
+          <p:cNvPr id="36" name="TextBox 35"/>
           <p:cNvSpPr txBox="1"/>
           <p:nvPr/>
         </p:nvSpPr>
@@ -6838,9 +8658,1726 @@
                 <a:solidFill>
                   <a:srgbClr val="FFFFFF"/>
                 </a:solidFill>
-                <a:latin typeface="Arial"/>
+                <a:latin typeface="Calibri"/>
+              </a:rPr>
+              <a:t>6</a:t>
+            </a:r>
+          </a:p>
+        </p:txBody>
+      </p:sp>
+    </p:spTree>
+  </p:cSld>
+  <p:clrMapOvr>
+    <a:masterClrMapping/>
+  </p:clrMapOvr>
+</p:sld>
+</file>
+
+<file path=ppt/slides/slide8.xml><?xml version="1.0" encoding="utf-8"?>
+<p:sld xmlns:a="http://schemas.openxmlformats.org/drawingml/2006/main" xmlns:p="http://schemas.openxmlformats.org/presentationml/2006/main" xmlns:r="http://schemas.openxmlformats.org/officeDocument/2006/relationships">
+  <p:cSld>
+    <p:spTree>
+      <p:nvGrpSpPr>
+        <p:cNvPr id="1" name=""/>
+        <p:cNvGrpSpPr/>
+        <p:nvPr/>
+      </p:nvGrpSpPr>
+      <p:grpSpPr/>
+      <p:sp>
+        <p:nvSpPr>
+          <p:cNvPr id="2" name="TextBox 1"/>
+          <p:cNvSpPr txBox="1"/>
+          <p:nvPr/>
+        </p:nvSpPr>
+        <p:spPr>
+          <a:xfrm>
+            <a:off x="457200" y="109728"/>
+            <a:ext cx="11247120" cy="822960"/>
+          </a:xfrm>
+          <a:prstGeom prst="rect">
+            <a:avLst/>
+          </a:prstGeom>
+          <a:noFill/>
+        </p:spPr>
+        <p:txBody>
+          <a:bodyPr wrap="none">
+            <a:spAutoFit/>
+          </a:bodyPr>
+          <a:lstStyle/>
+          <a:p>
+            <a:pPr algn="ctr"/>
+            <a:r>
+              <a:rPr sz="3600" b="1">
+                <a:solidFill>
+                  <a:srgbClr val="1F3864"/>
+                </a:solidFill>
+                <a:latin typeface="Times New Roman"/>
+              </a:rPr>
+              <a:t>RESULTS AND ANALYSIS</a:t>
+            </a:r>
+          </a:p>
+        </p:txBody>
+      </p:sp>
+      <p:pic>
+        <p:nvPicPr>
+          <p:cNvPr id="3" name="Picture 2" descr="spoof.png"/>
+          <p:cNvPicPr>
+            <a:picLocks noChangeAspect="1"/>
+          </p:cNvPicPr>
+          <p:nvPr/>
+        </p:nvPicPr>
+        <p:blipFill>
+          <a:blip r:embed="rId2"/>
+          <a:stretch>
+            <a:fillRect/>
+          </a:stretch>
+        </p:blipFill>
+        <p:spPr>
+          <a:xfrm>
+            <a:off x="502920" y="914400"/>
+            <a:ext cx="3073791" cy="2103120"/>
+          </a:xfrm>
+          <a:prstGeom prst="rect">
+            <a:avLst/>
+          </a:prstGeom>
+        </p:spPr>
+      </p:pic>
+      <p:pic>
+        <p:nvPicPr>
+          <p:cNvPr id="4" name="Picture 3" descr="ablation.png"/>
+          <p:cNvPicPr>
+            <a:picLocks noChangeAspect="1"/>
+          </p:cNvPicPr>
+          <p:nvPr/>
+        </p:nvPicPr>
+        <p:blipFill>
+          <a:blip r:embed="rId3"/>
+          <a:stretch>
+            <a:fillRect/>
+          </a:stretch>
+        </p:blipFill>
+        <p:spPr>
+          <a:xfrm>
+            <a:off x="4160520" y="914400"/>
+            <a:ext cx="3716860" cy="2103120"/>
+          </a:xfrm>
+          <a:prstGeom prst="rect">
+            <a:avLst/>
+          </a:prstGeom>
+        </p:spPr>
+      </p:pic>
+      <p:pic>
+        <p:nvPicPr>
+          <p:cNvPr id="5" name="Picture 4" descr="degradation.png"/>
+          <p:cNvPicPr>
+            <a:picLocks noChangeAspect="1"/>
+          </p:cNvPicPr>
+          <p:nvPr/>
+        </p:nvPicPr>
+        <p:blipFill>
+          <a:blip r:embed="rId4"/>
+          <a:stretch>
+            <a:fillRect/>
+          </a:stretch>
+        </p:blipFill>
+        <p:spPr>
+          <a:xfrm>
+            <a:off x="8366760" y="914400"/>
+            <a:ext cx="3073791" cy="2103120"/>
+          </a:xfrm>
+          <a:prstGeom prst="rect">
+            <a:avLst/>
+          </a:prstGeom>
+        </p:spPr>
+      </p:pic>
+      <p:sp>
+        <p:nvSpPr>
+          <p:cNvPr id="6" name="Rounded Rectangle 5"/>
+          <p:cNvSpPr/>
+          <p:nvPr/>
+        </p:nvSpPr>
+        <p:spPr>
+          <a:xfrm>
+            <a:off x="457200" y="3200400"/>
+            <a:ext cx="3931920" cy="1874519"/>
+          </a:xfrm>
+          <a:prstGeom prst="roundRect">
+            <a:avLst/>
+          </a:prstGeom>
+          <a:solidFill>
+            <a:srgbClr val="FFFFFF"/>
+          </a:solidFill>
+          <a:ln w="22225">
+            <a:solidFill>
+              <a:srgbClr val="C00000"/>
+            </a:solidFill>
+          </a:ln>
+          <a:effectLst/>
+        </p:spPr>
+        <p:style>
+          <a:lnRef idx="1">
+            <a:schemeClr val="accent1"/>
+          </a:lnRef>
+          <a:fillRef idx="3">
+            <a:schemeClr val="accent1"/>
+          </a:fillRef>
+          <a:effectRef idx="2">
+            <a:schemeClr val="accent1"/>
+          </a:effectRef>
+          <a:fontRef idx="minor">
+            <a:schemeClr val="lt1"/>
+          </a:fontRef>
+        </p:style>
+        <p:txBody>
+          <a:bodyPr rtlCol="0" anchor="ctr"/>
+          <a:lstStyle/>
+          <a:p/>
+        </p:txBody>
+      </p:sp>
+      <p:sp>
+        <p:nvSpPr>
+          <p:cNvPr id="7" name="TextBox 6"/>
+          <p:cNvSpPr txBox="1"/>
+          <p:nvPr/>
+        </p:nvSpPr>
+        <p:spPr>
+          <a:xfrm>
+            <a:off x="640080" y="3291840"/>
+            <a:ext cx="3566160" cy="320040"/>
+          </a:xfrm>
+          <a:prstGeom prst="rect">
+            <a:avLst/>
+          </a:prstGeom>
+          <a:noFill/>
+        </p:spPr>
+        <p:txBody>
+          <a:bodyPr wrap="square" anchor="t">
+            <a:spAutoFit/>
+          </a:bodyPr>
+          <a:lstStyle/>
+          <a:p>
+            <a:pPr algn="ctr">
+              <a:spcAft>
+                <a:spcPts val="500"/>
+              </a:spcAft>
+            </a:pPr>
+            <a:r>
+              <a:rPr sz="1300" b="1" i="0">
+                <a:solidFill>
+                  <a:srgbClr val="C00000"/>
+                </a:solidFill>
+                <a:latin typeface="Calibri"/>
+              </a:rPr>
+              <a:t>Presentation Attack</a:t>
+            </a:r>
+          </a:p>
+        </p:txBody>
+      </p:sp>
+      <p:sp>
+        <p:nvSpPr>
+          <p:cNvPr id="8" name="TextBox 7"/>
+          <p:cNvSpPr txBox="1"/>
+          <p:nvPr/>
+        </p:nvSpPr>
+        <p:spPr>
+          <a:xfrm>
+            <a:off x="640080" y="3657600"/>
+            <a:ext cx="3566160" cy="1325880"/>
+          </a:xfrm>
+          <a:prstGeom prst="rect">
+            <a:avLst/>
+          </a:prstGeom>
+          <a:noFill/>
+        </p:spPr>
+        <p:txBody>
+          <a:bodyPr wrap="square" anchor="t">
+            <a:spAutoFit/>
+          </a:bodyPr>
+          <a:lstStyle/>
+          <a:p>
+            <a:pPr>
+              <a:spcAft>
+                <a:spcPts val="500"/>
+              </a:spcAft>
+            </a:pPr>
+            <a:r>
+              <a:rPr sz="1100" b="0" i="0">
+                <a:solidFill>
+                  <a:srgbClr val="1A1A1A"/>
+                </a:solidFill>
+                <a:latin typeface="Calibri"/>
+              </a:rPr>
+              <a:t>A printed photo was marked present 100% of the</a:t>
+            </a:r>
+          </a:p>
+          <a:p>
+            <a:pPr>
+              <a:spcAft>
+                <a:spcPts val="500"/>
+              </a:spcAft>
+            </a:pPr>
+            <a:r>
+              <a:rPr sz="1100" b="0" i="0">
+                <a:solidFill>
+                  <a:srgbClr val="1A1A1A"/>
+                </a:solidFill>
+                <a:latin typeface="Calibri"/>
+              </a:rPr>
+              <a:t>time by recognition alone.</a:t>
+            </a:r>
+          </a:p>
+          <a:p>
+            <a:pPr>
+              <a:spcAft>
+                <a:spcPts val="500"/>
+              </a:spcAft>
+            </a:pPr>
+            <a:r>
+              <a:rPr sz="1100" b="0" i="0">
+                <a:solidFill>
+                  <a:srgbClr val="1A1A1A"/>
+                </a:solidFill>
+                <a:latin typeface="Calibri"/>
+              </a:rPr>
+              <a:t>With liveness — motion measured from the</a:t>
+            </a:r>
+          </a:p>
+          <a:p>
+            <a:pPr>
+              <a:spcAft>
+                <a:spcPts val="500"/>
+              </a:spcAft>
+            </a:pPr>
+            <a:r>
+              <a:rPr sz="1100" b="0" i="0">
+                <a:solidFill>
+                  <a:srgbClr val="1A1A1A"/>
+                </a:solidFill>
+                <a:latin typeface="Calibri"/>
+              </a:rPr>
+              <a:t>detector's own landmarks — it is 0%.</a:t>
+            </a:r>
+          </a:p>
+        </p:txBody>
+      </p:sp>
+      <p:sp>
+        <p:nvSpPr>
+          <p:cNvPr id="9" name="Rounded Rectangle 8"/>
+          <p:cNvSpPr/>
+          <p:nvPr/>
+        </p:nvSpPr>
+        <p:spPr>
+          <a:xfrm>
+            <a:off x="4114800" y="3200400"/>
+            <a:ext cx="3931920" cy="1874519"/>
+          </a:xfrm>
+          <a:prstGeom prst="roundRect">
+            <a:avLst/>
+          </a:prstGeom>
+          <a:solidFill>
+            <a:srgbClr val="FFFFFF"/>
+          </a:solidFill>
+          <a:ln w="22225">
+            <a:solidFill>
+              <a:srgbClr val="70AD47"/>
+            </a:solidFill>
+          </a:ln>
+          <a:effectLst/>
+        </p:spPr>
+        <p:style>
+          <a:lnRef idx="1">
+            <a:schemeClr val="accent1"/>
+          </a:lnRef>
+          <a:fillRef idx="3">
+            <a:schemeClr val="accent1"/>
+          </a:fillRef>
+          <a:effectRef idx="2">
+            <a:schemeClr val="accent1"/>
+          </a:effectRef>
+          <a:fontRef idx="minor">
+            <a:schemeClr val="lt1"/>
+          </a:fontRef>
+        </p:style>
+        <p:txBody>
+          <a:bodyPr rtlCol="0" anchor="ctr"/>
+          <a:lstStyle/>
+          <a:p/>
+        </p:txBody>
+      </p:sp>
+      <p:sp>
+        <p:nvSpPr>
+          <p:cNvPr id="10" name="TextBox 9"/>
+          <p:cNvSpPr txBox="1"/>
+          <p:nvPr/>
+        </p:nvSpPr>
+        <p:spPr>
+          <a:xfrm>
+            <a:off x="4297680" y="3291840"/>
+            <a:ext cx="3566160" cy="320040"/>
+          </a:xfrm>
+          <a:prstGeom prst="rect">
+            <a:avLst/>
+          </a:prstGeom>
+          <a:noFill/>
+        </p:spPr>
+        <p:txBody>
+          <a:bodyPr wrap="square" anchor="t">
+            <a:spAutoFit/>
+          </a:bodyPr>
+          <a:lstStyle/>
+          <a:p>
+            <a:pPr algn="ctr">
+              <a:spcAft>
+                <a:spcPts val="500"/>
+              </a:spcAft>
+            </a:pPr>
+            <a:r>
+              <a:rPr sz="1300" b="1" i="0">
+                <a:solidFill>
+                  <a:srgbClr val="70AD47"/>
+                </a:solidFill>
+                <a:latin typeface="Calibri"/>
+              </a:rPr>
+              <a:t>Ablation of Each Guard</a:t>
+            </a:r>
+          </a:p>
+        </p:txBody>
+      </p:sp>
+      <p:sp>
+        <p:nvSpPr>
+          <p:cNvPr id="11" name="TextBox 10"/>
+          <p:cNvSpPr txBox="1"/>
+          <p:nvPr/>
+        </p:nvSpPr>
+        <p:spPr>
+          <a:xfrm>
+            <a:off x="4297680" y="3657600"/>
+            <a:ext cx="3566160" cy="1325880"/>
+          </a:xfrm>
+          <a:prstGeom prst="rect">
+            <a:avLst/>
+          </a:prstGeom>
+          <a:noFill/>
+        </p:spPr>
+        <p:txBody>
+          <a:bodyPr wrap="square" anchor="t">
+            <a:spAutoFit/>
+          </a:bodyPr>
+          <a:lstStyle/>
+          <a:p>
+            <a:pPr>
+              <a:spcAft>
+                <a:spcPts val="500"/>
+              </a:spcAft>
+            </a:pPr>
+            <a:r>
+              <a:rPr sz="1100" b="0" i="0">
+                <a:solidFill>
+                  <a:srgbClr val="1A1A1A"/>
+                </a:solidFill>
+                <a:latin typeface="Calibri"/>
+              </a:rPr>
+              <a:t>Calibrating the threshold cut strangers admitted</a:t>
+            </a:r>
+          </a:p>
+          <a:p>
+            <a:pPr>
+              <a:spcAft>
+                <a:spcPts val="500"/>
+              </a:spcAft>
+            </a:pPr>
+            <a:r>
+              <a:rPr sz="1100" b="0" i="0">
+                <a:solidFill>
+                  <a:srgbClr val="1A1A1A"/>
+                </a:solidFill>
+                <a:latin typeface="Calibri"/>
+              </a:rPr>
+              <a:t>4× (0.81% → 0.20%).</a:t>
+            </a:r>
+          </a:p>
+          <a:p>
+            <a:pPr>
+              <a:spcAft>
+                <a:spcPts val="500"/>
+              </a:spcAft>
+            </a:pPr>
+            <a:r>
+              <a:rPr sz="1100" b="0" i="0">
+                <a:solidFill>
+                  <a:srgbClr val="1A1A1A"/>
+                </a:solidFill>
+                <a:latin typeface="Calibri"/>
+              </a:rPr>
+              <a:t>Temporal voting drove wrong attendance records</a:t>
+            </a:r>
+          </a:p>
+          <a:p>
+            <a:pPr>
+              <a:spcAft>
+                <a:spcPts val="500"/>
+              </a:spcAft>
+            </a:pPr>
+            <a:r>
+              <a:rPr sz="1100" b="0" i="0">
+                <a:solidFill>
+                  <a:srgbClr val="1A1A1A"/>
+                </a:solidFill>
+                <a:latin typeface="Calibri"/>
+              </a:rPr>
+              <a:t>to zero (3.54% → 0%).</a:t>
+            </a:r>
+          </a:p>
+        </p:txBody>
+      </p:sp>
+      <p:sp>
+        <p:nvSpPr>
+          <p:cNvPr id="12" name="Rounded Rectangle 11"/>
+          <p:cNvSpPr/>
+          <p:nvPr/>
+        </p:nvSpPr>
+        <p:spPr>
+          <a:xfrm>
+            <a:off x="7772400" y="3200400"/>
+            <a:ext cx="3931920" cy="1874519"/>
+          </a:xfrm>
+          <a:prstGeom prst="roundRect">
+            <a:avLst/>
+          </a:prstGeom>
+          <a:solidFill>
+            <a:srgbClr val="FFFFFF"/>
+          </a:solidFill>
+          <a:ln w="22225">
+            <a:solidFill>
+              <a:srgbClr val="8064A2"/>
+            </a:solidFill>
+          </a:ln>
+          <a:effectLst/>
+        </p:spPr>
+        <p:style>
+          <a:lnRef idx="1">
+            <a:schemeClr val="accent1"/>
+          </a:lnRef>
+          <a:fillRef idx="3">
+            <a:schemeClr val="accent1"/>
+          </a:fillRef>
+          <a:effectRef idx="2">
+            <a:schemeClr val="accent1"/>
+          </a:effectRef>
+          <a:fontRef idx="minor">
+            <a:schemeClr val="lt1"/>
+          </a:fontRef>
+        </p:style>
+        <p:txBody>
+          <a:bodyPr rtlCol="0" anchor="ctr"/>
+          <a:lstStyle/>
+          <a:p/>
+        </p:txBody>
+      </p:sp>
+      <p:sp>
+        <p:nvSpPr>
+          <p:cNvPr id="13" name="TextBox 12"/>
+          <p:cNvSpPr txBox="1"/>
+          <p:nvPr/>
+        </p:nvSpPr>
+        <p:spPr>
+          <a:xfrm>
+            <a:off x="7955279" y="3291840"/>
+            <a:ext cx="3566160" cy="320040"/>
+          </a:xfrm>
+          <a:prstGeom prst="rect">
+            <a:avLst/>
+          </a:prstGeom>
+          <a:noFill/>
+        </p:spPr>
+        <p:txBody>
+          <a:bodyPr wrap="square" anchor="t">
+            <a:spAutoFit/>
+          </a:bodyPr>
+          <a:lstStyle/>
+          <a:p>
+            <a:pPr algn="ctr">
+              <a:spcAft>
+                <a:spcPts val="500"/>
+              </a:spcAft>
+            </a:pPr>
+            <a:r>
+              <a:rPr sz="1300" b="1" i="0">
+                <a:solidFill>
+                  <a:srgbClr val="8064A2"/>
+                </a:solidFill>
+                <a:latin typeface="Calibri"/>
+              </a:rPr>
+              <a:t>Operating Envelope</a:t>
+            </a:r>
+          </a:p>
+        </p:txBody>
+      </p:sp>
+      <p:sp>
+        <p:nvSpPr>
+          <p:cNvPr id="14" name="TextBox 13"/>
+          <p:cNvSpPr txBox="1"/>
+          <p:nvPr/>
+        </p:nvSpPr>
+        <p:spPr>
+          <a:xfrm>
+            <a:off x="7955279" y="3657600"/>
+            <a:ext cx="3566160" cy="1325880"/>
+          </a:xfrm>
+          <a:prstGeom prst="rect">
+            <a:avLst/>
+          </a:prstGeom>
+          <a:noFill/>
+        </p:spPr>
+        <p:txBody>
+          <a:bodyPr wrap="square" anchor="t">
+            <a:spAutoFit/>
+          </a:bodyPr>
+          <a:lstStyle/>
+          <a:p>
+            <a:pPr>
+              <a:spcAft>
+                <a:spcPts val="500"/>
+              </a:spcAft>
+            </a:pPr>
+            <a:r>
+              <a:rPr sz="1100" b="0" i="0">
+                <a:solidFill>
+                  <a:srgbClr val="1A1A1A"/>
+                </a:solidFill>
+                <a:latin typeface="Calibri"/>
+              </a:rPr>
+              <a:t>Accuracy collapses below 24 px and is fully</a:t>
+            </a:r>
+          </a:p>
+          <a:p>
+            <a:pPr>
+              <a:spcAft>
+                <a:spcPts val="500"/>
+              </a:spcAft>
+            </a:pPr>
+            <a:r>
+              <a:rPr sz="1100" b="0" i="0">
+                <a:solidFill>
+                  <a:srgbClr val="1A1A1A"/>
+                </a:solidFill>
+                <a:latin typeface="Calibri"/>
+              </a:rPr>
+              <a:t>recovered by 40 px — so faces under 40 px are</a:t>
+            </a:r>
+          </a:p>
+          <a:p>
+            <a:pPr>
+              <a:spcAft>
+                <a:spcPts val="500"/>
+              </a:spcAft>
+            </a:pPr>
+            <a:r>
+              <a:rPr sz="1100" b="0" i="0">
+                <a:solidFill>
+                  <a:srgbClr val="1A1A1A"/>
+                </a:solidFill>
+                <a:latin typeface="Calibri"/>
+              </a:rPr>
+              <a:t>refused, not guessed at.</a:t>
+            </a:r>
+          </a:p>
+          <a:p>
+            <a:pPr>
+              <a:spcAft>
+                <a:spcPts val="500"/>
+              </a:spcAft>
+            </a:pPr>
+            <a:r>
+              <a:rPr sz="1100" b="0" i="0">
+                <a:solidFill>
+                  <a:srgbClr val="1A1A1A"/>
+                </a:solidFill>
+                <a:latin typeface="Calibri"/>
+              </a:rPr>
+              <a:t>One 1080p camera therefore covers about 7 m.</a:t>
+            </a:r>
+          </a:p>
+        </p:txBody>
+      </p:sp>
+      <p:sp>
+        <p:nvSpPr>
+          <p:cNvPr id="15" name="Rounded Rectangle 14"/>
+          <p:cNvSpPr/>
+          <p:nvPr/>
+        </p:nvSpPr>
+        <p:spPr>
+          <a:xfrm>
+            <a:off x="457200" y="5257800"/>
+            <a:ext cx="11247120" cy="822960"/>
+          </a:xfrm>
+          <a:prstGeom prst="roundRect">
+            <a:avLst/>
+          </a:prstGeom>
+          <a:solidFill>
+            <a:srgbClr val="F8D7D2"/>
+          </a:solidFill>
+          <a:ln w="19050">
+            <a:solidFill>
+              <a:srgbClr val="C00000"/>
+            </a:solidFill>
+          </a:ln>
+          <a:effectLst/>
+        </p:spPr>
+        <p:style>
+          <a:lnRef idx="1">
+            <a:schemeClr val="accent1"/>
+          </a:lnRef>
+          <a:fillRef idx="3">
+            <a:schemeClr val="accent1"/>
+          </a:fillRef>
+          <a:effectRef idx="2">
+            <a:schemeClr val="accent1"/>
+          </a:effectRef>
+          <a:fontRef idx="minor">
+            <a:schemeClr val="lt1"/>
+          </a:fontRef>
+        </p:style>
+        <p:txBody>
+          <a:bodyPr rtlCol="0" anchor="ctr"/>
+          <a:lstStyle/>
+          <a:p/>
+        </p:txBody>
+      </p:sp>
+      <p:sp>
+        <p:nvSpPr>
+          <p:cNvPr id="16" name="TextBox 15"/>
+          <p:cNvSpPr txBox="1"/>
+          <p:nvPr/>
+        </p:nvSpPr>
+        <p:spPr>
+          <a:xfrm>
+            <a:off x="685800" y="5394960"/>
+            <a:ext cx="10881360" cy="685800"/>
+          </a:xfrm>
+          <a:prstGeom prst="rect">
+            <a:avLst/>
+          </a:prstGeom>
+          <a:noFill/>
+        </p:spPr>
+        <p:txBody>
+          <a:bodyPr wrap="square" anchor="t">
+            <a:spAutoFit/>
+          </a:bodyPr>
+          <a:lstStyle/>
+          <a:p>
+            <a:pPr>
+              <a:spcAft>
+                <a:spcPts val="500"/>
+              </a:spcAft>
+            </a:pPr>
+            <a:r>
+              <a:rPr sz="1200" b="1" i="0">
+                <a:solidFill>
+                  <a:srgbClr val="C00000"/>
+                </a:solidFill>
+                <a:latin typeface="Calibri"/>
+              </a:rPr>
+              <a:t>Honest limitation —  a VIDEO replay of a real person would still pass, because a recorded face genuinely moves. We raise the attack cost from "print a photo" to "record and replay a video": a real gain, not a complete defence.</a:t>
+            </a:r>
+          </a:p>
+        </p:txBody>
+      </p:sp>
+      <p:sp>
+        <p:nvSpPr>
+          <p:cNvPr id="17" name="Rectangle 16"/>
+          <p:cNvSpPr/>
+          <p:nvPr/>
+        </p:nvSpPr>
+        <p:spPr>
+          <a:xfrm>
+            <a:off x="0" y="6355080"/>
+            <a:ext cx="12191695" cy="502920"/>
+          </a:xfrm>
+          <a:prstGeom prst="rect">
+            <a:avLst/>
+          </a:prstGeom>
+          <a:solidFill>
+            <a:srgbClr val="1076BC"/>
+          </a:solidFill>
+          <a:ln>
+            <a:noFill/>
+          </a:ln>
+          <a:effectLst/>
+        </p:spPr>
+        <p:style>
+          <a:lnRef idx="1">
+            <a:schemeClr val="accent1"/>
+          </a:lnRef>
+          <a:fillRef idx="3">
+            <a:schemeClr val="accent1"/>
+          </a:fillRef>
+          <a:effectRef idx="2">
+            <a:schemeClr val="accent1"/>
+          </a:effectRef>
+          <a:fontRef idx="minor">
+            <a:schemeClr val="lt1"/>
+          </a:fontRef>
+        </p:style>
+        <p:txBody>
+          <a:bodyPr rtlCol="0" anchor="ctr"/>
+          <a:lstStyle/>
+          <a:p>
+            <a:pPr algn="ctr"/>
+          </a:p>
+        </p:txBody>
+      </p:sp>
+      <p:sp>
+        <p:nvSpPr>
+          <p:cNvPr id="18" name="TextBox 17"/>
+          <p:cNvSpPr txBox="1"/>
+          <p:nvPr/>
+        </p:nvSpPr>
+        <p:spPr>
+          <a:xfrm>
+            <a:off x="11247120" y="6419088"/>
+            <a:ext cx="777240" cy="365760"/>
+          </a:xfrm>
+          <a:prstGeom prst="rect">
+            <a:avLst/>
+          </a:prstGeom>
+          <a:noFill/>
+        </p:spPr>
+        <p:txBody>
+          <a:bodyPr wrap="none">
+            <a:spAutoFit/>
+          </a:bodyPr>
+          <a:lstStyle/>
+          <a:p>
+            <a:pPr algn="r"/>
+            <a:r>
+              <a:rPr sz="1200" b="1">
+                <a:solidFill>
+                  <a:srgbClr val="FFFFFF"/>
+                </a:solidFill>
+                <a:latin typeface="Calibri"/>
               </a:rPr>
               <a:t>7</a:t>
+            </a:r>
+          </a:p>
+        </p:txBody>
+      </p:sp>
+    </p:spTree>
+  </p:cSld>
+  <p:clrMapOvr>
+    <a:masterClrMapping/>
+  </p:clrMapOvr>
+</p:sld>
+</file>
+
+<file path=ppt/slides/slide9.xml><?xml version="1.0" encoding="utf-8"?>
+<p:sld xmlns:a="http://schemas.openxmlformats.org/drawingml/2006/main" xmlns:p="http://schemas.openxmlformats.org/presentationml/2006/main" xmlns:r="http://schemas.openxmlformats.org/officeDocument/2006/relationships">
+  <p:cSld>
+    <p:spTree>
+      <p:nvGrpSpPr>
+        <p:cNvPr id="1" name=""/>
+        <p:cNvGrpSpPr/>
+        <p:nvPr/>
+      </p:nvGrpSpPr>
+      <p:grpSpPr/>
+      <p:sp>
+        <p:nvSpPr>
+          <p:cNvPr id="2" name="TextBox 1"/>
+          <p:cNvSpPr txBox="1"/>
+          <p:nvPr/>
+        </p:nvSpPr>
+        <p:spPr>
+          <a:xfrm>
+            <a:off x="457200" y="109728"/>
+            <a:ext cx="11247120" cy="822960"/>
+          </a:xfrm>
+          <a:prstGeom prst="rect">
+            <a:avLst/>
+          </a:prstGeom>
+          <a:noFill/>
+        </p:spPr>
+        <p:txBody>
+          <a:bodyPr wrap="none">
+            <a:spAutoFit/>
+          </a:bodyPr>
+          <a:lstStyle/>
+          <a:p>
+            <a:pPr algn="ctr"/>
+            <a:r>
+              <a:rPr sz="3600" b="1">
+                <a:solidFill>
+                  <a:srgbClr val="1F3864"/>
+                </a:solidFill>
+                <a:latin typeface="Times New Roman"/>
+              </a:rPr>
+              <a:t>CONCLUSION</a:t>
+            </a:r>
+          </a:p>
+        </p:txBody>
+      </p:sp>
+      <p:sp>
+        <p:nvSpPr>
+          <p:cNvPr id="3" name="Rounded Rectangle 2"/>
+          <p:cNvSpPr/>
+          <p:nvPr/>
+        </p:nvSpPr>
+        <p:spPr>
+          <a:xfrm>
+            <a:off x="502920" y="1097280"/>
+            <a:ext cx="3017520" cy="1783080"/>
+          </a:xfrm>
+          <a:prstGeom prst="roundRect">
+            <a:avLst/>
+          </a:prstGeom>
+          <a:solidFill>
+            <a:srgbClr val="FFFFFF"/>
+          </a:solidFill>
+          <a:ln w="19050">
+            <a:solidFill>
+              <a:srgbClr val="4472C4"/>
+            </a:solidFill>
+          </a:ln>
+          <a:effectLst/>
+        </p:spPr>
+        <p:style>
+          <a:lnRef idx="1">
+            <a:schemeClr val="accent1"/>
+          </a:lnRef>
+          <a:fillRef idx="3">
+            <a:schemeClr val="accent1"/>
+          </a:fillRef>
+          <a:effectRef idx="2">
+            <a:schemeClr val="accent1"/>
+          </a:effectRef>
+          <a:fontRef idx="minor">
+            <a:schemeClr val="lt1"/>
+          </a:fontRef>
+        </p:style>
+        <p:txBody>
+          <a:bodyPr rtlCol="0" anchor="ctr"/>
+          <a:lstStyle/>
+          <a:p/>
+        </p:txBody>
+      </p:sp>
+      <p:sp>
+        <p:nvSpPr>
+          <p:cNvPr id="4" name="TextBox 3"/>
+          <p:cNvSpPr txBox="1"/>
+          <p:nvPr/>
+        </p:nvSpPr>
+        <p:spPr>
+          <a:xfrm>
+            <a:off x="685800" y="1234440"/>
+            <a:ext cx="2651760" cy="1600200"/>
+          </a:xfrm>
+          <a:prstGeom prst="rect">
+            <a:avLst/>
+          </a:prstGeom>
+          <a:noFill/>
+        </p:spPr>
+        <p:txBody>
+          <a:bodyPr wrap="square" anchor="t">
+            <a:spAutoFit/>
+          </a:bodyPr>
+          <a:lstStyle/>
+          <a:p>
+            <a:pPr>
+              <a:spcAft>
+                <a:spcPts val="500"/>
+              </a:spcAft>
+            </a:pPr>
+            <a:r>
+              <a:rPr sz="1250" b="1" i="0">
+                <a:solidFill>
+                  <a:srgbClr val="1F3864"/>
+                </a:solidFill>
+                <a:latin typeface="Calibri"/>
+              </a:rPr>
+              <a:t>A pretrained face model is NOT an attendance system.</a:t>
+            </a:r>
+          </a:p>
+          <a:p>
+            <a:pPr>
+              <a:spcAft>
+                <a:spcPts val="500"/>
+              </a:spcAft>
+            </a:pPr>
+          </a:p>
+          <a:p>
+            <a:pPr>
+              <a:spcAft>
+                <a:spcPts val="500"/>
+              </a:spcAft>
+            </a:pPr>
+            <a:r>
+              <a:rPr sz="1250" b="0" i="0">
+                <a:solidFill>
+                  <a:srgbClr val="1A1A1A"/>
+                </a:solidFill>
+                <a:latin typeface="Calibri"/>
+              </a:rPr>
+              <a:t>It fails in three measurable ways — and each one is fixable in the decision layer, not the model.</a:t>
+            </a:r>
+          </a:p>
+        </p:txBody>
+      </p:sp>
+      <p:sp>
+        <p:nvSpPr>
+          <p:cNvPr id="5" name="Rounded Rectangle 4"/>
+          <p:cNvSpPr/>
+          <p:nvPr/>
+        </p:nvSpPr>
+        <p:spPr>
+          <a:xfrm>
+            <a:off x="502920" y="3154680"/>
+            <a:ext cx="3017520" cy="2194560"/>
+          </a:xfrm>
+          <a:prstGeom prst="roundRect">
+            <a:avLst/>
+          </a:prstGeom>
+          <a:solidFill>
+            <a:srgbClr val="FFFFFF"/>
+          </a:solidFill>
+          <a:ln w="19050">
+            <a:solidFill>
+              <a:srgbClr val="8064A2"/>
+            </a:solidFill>
+          </a:ln>
+          <a:effectLst/>
+        </p:spPr>
+        <p:style>
+          <a:lnRef idx="1">
+            <a:schemeClr val="accent1"/>
+          </a:lnRef>
+          <a:fillRef idx="3">
+            <a:schemeClr val="accent1"/>
+          </a:fillRef>
+          <a:effectRef idx="2">
+            <a:schemeClr val="accent1"/>
+          </a:effectRef>
+          <a:fontRef idx="minor">
+            <a:schemeClr val="lt1"/>
+          </a:fontRef>
+        </p:style>
+        <p:txBody>
+          <a:bodyPr rtlCol="0" anchor="ctr"/>
+          <a:lstStyle/>
+          <a:p/>
+        </p:txBody>
+      </p:sp>
+      <p:sp>
+        <p:nvSpPr>
+          <p:cNvPr id="6" name="TextBox 5"/>
+          <p:cNvSpPr txBox="1"/>
+          <p:nvPr/>
+        </p:nvSpPr>
+        <p:spPr>
+          <a:xfrm>
+            <a:off x="685800" y="3291840"/>
+            <a:ext cx="2651760" cy="2011680"/>
+          </a:xfrm>
+          <a:prstGeom prst="rect">
+            <a:avLst/>
+          </a:prstGeom>
+          <a:noFill/>
+        </p:spPr>
+        <p:txBody>
+          <a:bodyPr wrap="square" anchor="t">
+            <a:spAutoFit/>
+          </a:bodyPr>
+          <a:lstStyle/>
+          <a:p>
+            <a:pPr>
+              <a:spcAft>
+                <a:spcPts val="500"/>
+              </a:spcAft>
+            </a:pPr>
+            <a:r>
+              <a:rPr sz="1150" b="1" i="0">
+                <a:solidFill>
+                  <a:srgbClr val="C00000"/>
+                </a:solidFill>
+                <a:latin typeface="Calibri"/>
+              </a:rPr>
+              <a:t>Limitations</a:t>
+            </a:r>
+          </a:p>
+          <a:p>
+            <a:pPr>
+              <a:spcAft>
+                <a:spcPts val="500"/>
+              </a:spcAft>
+            </a:pPr>
+          </a:p>
+          <a:p>
+            <a:pPr>
+              <a:spcAft>
+                <a:spcPts val="500"/>
+              </a:spcAft>
+            </a:pPr>
+            <a:r>
+              <a:rPr sz="1150" b="0" i="0">
+                <a:solidFill>
+                  <a:srgbClr val="1A1A1A"/>
+                </a:solidFill>
+                <a:latin typeface="Calibri"/>
+              </a:rPr>
+              <a:t>•  A video replay would still pass.</a:t>
+            </a:r>
+          </a:p>
+          <a:p>
+            <a:pPr>
+              <a:spcAft>
+                <a:spcPts val="500"/>
+              </a:spcAft>
+            </a:pPr>
+            <a:r>
+              <a:rPr sz="1150" b="0" i="0">
+                <a:solidFill>
+                  <a:srgbClr val="1A1A1A"/>
+                </a:solidFill>
+                <a:latin typeface="Calibri"/>
+              </a:rPr>
+              <a:t>•  The look-alike guard is unproven.</a:t>
+            </a:r>
+          </a:p>
+          <a:p>
+            <a:pPr>
+              <a:spcAft>
+                <a:spcPts val="500"/>
+              </a:spcAft>
+            </a:pPr>
+            <a:r>
+              <a:rPr sz="1150" b="0" i="0">
+                <a:solidFill>
+                  <a:srgbClr val="1A1A1A"/>
+                </a:solidFill>
+                <a:latin typeface="Calibri"/>
+              </a:rPr>
+              <a:t>•  Only 2 real users enrolled — all numbers come from the 30-identity cohort.</a:t>
+            </a:r>
+          </a:p>
+        </p:txBody>
+      </p:sp>
+      <p:sp>
+        <p:nvSpPr>
+          <p:cNvPr id="7" name="Chevron 6"/>
+          <p:cNvSpPr/>
+          <p:nvPr/>
+        </p:nvSpPr>
+        <p:spPr>
+          <a:xfrm>
+            <a:off x="3794760" y="1097280"/>
+            <a:ext cx="1371600" cy="1234440"/>
+          </a:xfrm>
+          <a:prstGeom prst="chevron">
+            <a:avLst/>
+          </a:prstGeom>
+          <a:solidFill>
+            <a:srgbClr val="C0504D"/>
+          </a:solidFill>
+          <a:ln>
+            <a:noFill/>
+          </a:ln>
+          <a:effectLst/>
+        </p:spPr>
+        <p:style>
+          <a:lnRef idx="1">
+            <a:schemeClr val="accent1"/>
+          </a:lnRef>
+          <a:fillRef idx="3">
+            <a:schemeClr val="accent1"/>
+          </a:fillRef>
+          <a:effectRef idx="2">
+            <a:schemeClr val="accent1"/>
+          </a:effectRef>
+          <a:fontRef idx="minor">
+            <a:schemeClr val="lt1"/>
+          </a:fontRef>
+        </p:style>
+        <p:txBody>
+          <a:bodyPr rtlCol="0" anchor="ctr" wrap="square"/>
+          <a:lstStyle/>
+          <a:p>
+            <a:pPr algn="ctr"/>
+            <a:r>
+              <a:rPr sz="1300" b="1">
+                <a:solidFill>
+                  <a:srgbClr val="FFFFFF"/>
+                </a:solidFill>
+                <a:latin typeface="Calibri"/>
+              </a:rPr>
+              <a:t>Automation</a:t>
+            </a:r>
+          </a:p>
+        </p:txBody>
+      </p:sp>
+      <p:sp>
+        <p:nvSpPr>
+          <p:cNvPr id="8" name="Rounded Rectangle 7"/>
+          <p:cNvSpPr/>
+          <p:nvPr/>
+        </p:nvSpPr>
+        <p:spPr>
+          <a:xfrm>
+            <a:off x="5394960" y="1188720"/>
+            <a:ext cx="6309360" cy="1051560"/>
+          </a:xfrm>
+          <a:prstGeom prst="roundRect">
+            <a:avLst/>
+          </a:prstGeom>
+          <a:solidFill>
+            <a:srgbClr val="FFFFFF"/>
+          </a:solidFill>
+          <a:ln w="15875">
+            <a:solidFill>
+              <a:srgbClr val="C0504D"/>
+            </a:solidFill>
+          </a:ln>
+          <a:effectLst/>
+        </p:spPr>
+        <p:style>
+          <a:lnRef idx="1">
+            <a:schemeClr val="accent1"/>
+          </a:lnRef>
+          <a:fillRef idx="3">
+            <a:schemeClr val="accent1"/>
+          </a:fillRef>
+          <a:effectRef idx="2">
+            <a:schemeClr val="accent1"/>
+          </a:effectRef>
+          <a:fontRef idx="minor">
+            <a:schemeClr val="lt1"/>
+          </a:fontRef>
+        </p:style>
+        <p:txBody>
+          <a:bodyPr rtlCol="0" anchor="ctr"/>
+          <a:lstStyle/>
+          <a:p/>
+        </p:txBody>
+      </p:sp>
+      <p:sp>
+        <p:nvSpPr>
+          <p:cNvPr id="9" name="TextBox 8"/>
+          <p:cNvSpPr txBox="1"/>
+          <p:nvPr/>
+        </p:nvSpPr>
+        <p:spPr>
+          <a:xfrm>
+            <a:off x="5532120" y="1298448"/>
+            <a:ext cx="6035040" cy="914400"/>
+          </a:xfrm>
+          <a:prstGeom prst="rect">
+            <a:avLst/>
+          </a:prstGeom>
+          <a:noFill/>
+        </p:spPr>
+        <p:txBody>
+          <a:bodyPr wrap="square" anchor="t">
+            <a:spAutoFit/>
+          </a:bodyPr>
+          <a:lstStyle/>
+          <a:p>
+            <a:pPr>
+              <a:spcAft>
+                <a:spcPts val="500"/>
+              </a:spcAft>
+            </a:pPr>
+            <a:r>
+              <a:rPr sz="1150" b="0" i="0">
+                <a:solidFill>
+                  <a:srgbClr val="1A1A1A"/>
+                </a:solidFill>
+                <a:latin typeface="Calibri"/>
+              </a:rPr>
+              <a:t>Detects and identifies every face in one frame.  Enrolling a new student takes 1.4 s (was 607 s) — no retraining, no GPU.</a:t>
+            </a:r>
+          </a:p>
+        </p:txBody>
+      </p:sp>
+      <p:sp>
+        <p:nvSpPr>
+          <p:cNvPr id="10" name="Chevron 9"/>
+          <p:cNvSpPr/>
+          <p:nvPr/>
+        </p:nvSpPr>
+        <p:spPr>
+          <a:xfrm>
+            <a:off x="3794760" y="2423160"/>
+            <a:ext cx="1371600" cy="1234440"/>
+          </a:xfrm>
+          <a:prstGeom prst="chevron">
+            <a:avLst/>
+          </a:prstGeom>
+          <a:solidFill>
+            <a:srgbClr val="9BBB59"/>
+          </a:solidFill>
+          <a:ln>
+            <a:noFill/>
+          </a:ln>
+          <a:effectLst/>
+        </p:spPr>
+        <p:style>
+          <a:lnRef idx="1">
+            <a:schemeClr val="accent1"/>
+          </a:lnRef>
+          <a:fillRef idx="3">
+            <a:schemeClr val="accent1"/>
+          </a:fillRef>
+          <a:effectRef idx="2">
+            <a:schemeClr val="accent1"/>
+          </a:effectRef>
+          <a:fontRef idx="minor">
+            <a:schemeClr val="lt1"/>
+          </a:fontRef>
+        </p:style>
+        <p:txBody>
+          <a:bodyPr rtlCol="0" anchor="ctr" wrap="square"/>
+          <a:lstStyle/>
+          <a:p>
+            <a:pPr algn="ctr"/>
+            <a:r>
+              <a:rPr sz="1300" b="1">
+                <a:solidFill>
+                  <a:srgbClr val="FFFFFF"/>
+                </a:solidFill>
+                <a:latin typeface="Calibri"/>
+              </a:rPr>
+              <a:t>Integrity</a:t>
+            </a:r>
+          </a:p>
+        </p:txBody>
+      </p:sp>
+      <p:sp>
+        <p:nvSpPr>
+          <p:cNvPr id="11" name="Rounded Rectangle 10"/>
+          <p:cNvSpPr/>
+          <p:nvPr/>
+        </p:nvSpPr>
+        <p:spPr>
+          <a:xfrm>
+            <a:off x="5394960" y="2514600"/>
+            <a:ext cx="6309360" cy="1051560"/>
+          </a:xfrm>
+          <a:prstGeom prst="roundRect">
+            <a:avLst/>
+          </a:prstGeom>
+          <a:solidFill>
+            <a:srgbClr val="FFFFFF"/>
+          </a:solidFill>
+          <a:ln w="15875">
+            <a:solidFill>
+              <a:srgbClr val="9BBB59"/>
+            </a:solidFill>
+          </a:ln>
+          <a:effectLst/>
+        </p:spPr>
+        <p:style>
+          <a:lnRef idx="1">
+            <a:schemeClr val="accent1"/>
+          </a:lnRef>
+          <a:fillRef idx="3">
+            <a:schemeClr val="accent1"/>
+          </a:fillRef>
+          <a:effectRef idx="2">
+            <a:schemeClr val="accent1"/>
+          </a:effectRef>
+          <a:fontRef idx="minor">
+            <a:schemeClr val="lt1"/>
+          </a:fontRef>
+        </p:style>
+        <p:txBody>
+          <a:bodyPr rtlCol="0" anchor="ctr"/>
+          <a:lstStyle/>
+          <a:p/>
+        </p:txBody>
+      </p:sp>
+      <p:sp>
+        <p:nvSpPr>
+          <p:cNvPr id="12" name="TextBox 11"/>
+          <p:cNvSpPr txBox="1"/>
+          <p:nvPr/>
+        </p:nvSpPr>
+        <p:spPr>
+          <a:xfrm>
+            <a:off x="5532120" y="2624328"/>
+            <a:ext cx="6035040" cy="914400"/>
+          </a:xfrm>
+          <a:prstGeom prst="rect">
+            <a:avLst/>
+          </a:prstGeom>
+          <a:noFill/>
+        </p:spPr>
+        <p:txBody>
+          <a:bodyPr wrap="square" anchor="t">
+            <a:spAutoFit/>
+          </a:bodyPr>
+          <a:lstStyle/>
+          <a:p>
+            <a:pPr>
+              <a:spcAft>
+                <a:spcPts val="500"/>
+              </a:spcAft>
+            </a:pPr>
+            <a:r>
+              <a:rPr sz="1150" b="0" i="0">
+                <a:solidFill>
+                  <a:srgbClr val="1A1A1A"/>
+                </a:solidFill>
+                <a:latin typeface="Calibri"/>
+              </a:rPr>
+              <a:t>Manual proxy eliminated.  Photo / screen proxy BLOCKED by liveness: attack success 100% → 0%.  Strangers admitted: 0.20%.</a:t>
+            </a:r>
+          </a:p>
+        </p:txBody>
+      </p:sp>
+      <p:sp>
+        <p:nvSpPr>
+          <p:cNvPr id="13" name="Chevron 12"/>
+          <p:cNvSpPr/>
+          <p:nvPr/>
+        </p:nvSpPr>
+        <p:spPr>
+          <a:xfrm>
+            <a:off x="3794760" y="3749039"/>
+            <a:ext cx="1371600" cy="1234440"/>
+          </a:xfrm>
+          <a:prstGeom prst="chevron">
+            <a:avLst/>
+          </a:prstGeom>
+          <a:solidFill>
+            <a:srgbClr val="8064A2"/>
+          </a:solidFill>
+          <a:ln>
+            <a:noFill/>
+          </a:ln>
+          <a:effectLst/>
+        </p:spPr>
+        <p:style>
+          <a:lnRef idx="1">
+            <a:schemeClr val="accent1"/>
+          </a:lnRef>
+          <a:fillRef idx="3">
+            <a:schemeClr val="accent1"/>
+          </a:fillRef>
+          <a:effectRef idx="2">
+            <a:schemeClr val="accent1"/>
+          </a:effectRef>
+          <a:fontRef idx="minor">
+            <a:schemeClr val="lt1"/>
+          </a:fontRef>
+        </p:style>
+        <p:txBody>
+          <a:bodyPr rtlCol="0" anchor="ctr" wrap="square"/>
+          <a:lstStyle/>
+          <a:p>
+            <a:pPr algn="ctr"/>
+            <a:r>
+              <a:rPr sz="1300" b="1">
+                <a:solidFill>
+                  <a:srgbClr val="FFFFFF"/>
+                </a:solidFill>
+                <a:latin typeface="Calibri"/>
+              </a:rPr>
+              <a:t>Precision</a:t>
+            </a:r>
+          </a:p>
+        </p:txBody>
+      </p:sp>
+      <p:sp>
+        <p:nvSpPr>
+          <p:cNvPr id="14" name="Rounded Rectangle 13"/>
+          <p:cNvSpPr/>
+          <p:nvPr/>
+        </p:nvSpPr>
+        <p:spPr>
+          <a:xfrm>
+            <a:off x="5394960" y="3840479"/>
+            <a:ext cx="6309360" cy="1051560"/>
+          </a:xfrm>
+          <a:prstGeom prst="roundRect">
+            <a:avLst/>
+          </a:prstGeom>
+          <a:solidFill>
+            <a:srgbClr val="FFFFFF"/>
+          </a:solidFill>
+          <a:ln w="15875">
+            <a:solidFill>
+              <a:srgbClr val="8064A2"/>
+            </a:solidFill>
+          </a:ln>
+          <a:effectLst/>
+        </p:spPr>
+        <p:style>
+          <a:lnRef idx="1">
+            <a:schemeClr val="accent1"/>
+          </a:lnRef>
+          <a:fillRef idx="3">
+            <a:schemeClr val="accent1"/>
+          </a:fillRef>
+          <a:effectRef idx="2">
+            <a:schemeClr val="accent1"/>
+          </a:effectRef>
+          <a:fontRef idx="minor">
+            <a:schemeClr val="lt1"/>
+          </a:fontRef>
+        </p:style>
+        <p:txBody>
+          <a:bodyPr rtlCol="0" anchor="ctr"/>
+          <a:lstStyle/>
+          <a:p/>
+        </p:txBody>
+      </p:sp>
+      <p:sp>
+        <p:nvSpPr>
+          <p:cNvPr id="15" name="TextBox 14"/>
+          <p:cNvSpPr txBox="1"/>
+          <p:nvPr/>
+        </p:nvSpPr>
+        <p:spPr>
+          <a:xfrm>
+            <a:off x="5532120" y="3950207"/>
+            <a:ext cx="6035040" cy="914400"/>
+          </a:xfrm>
+          <a:prstGeom prst="rect">
+            <a:avLst/>
+          </a:prstGeom>
+          <a:noFill/>
+        </p:spPr>
+        <p:txBody>
+          <a:bodyPr wrap="square" anchor="t">
+            <a:spAutoFit/>
+          </a:bodyPr>
+          <a:lstStyle/>
+          <a:p>
+            <a:pPr>
+              <a:spcAft>
+                <a:spcPts val="500"/>
+              </a:spcAft>
+            </a:pPr>
+            <a:r>
+              <a:rPr sz="1150" b="0" i="0">
+                <a:solidFill>
+                  <a:srgbClr val="1A1A1A"/>
+                </a:solidFill>
+                <a:latin typeface="Calibri"/>
+              </a:rPr>
+              <a:t>Open-set rejection with a threshold calibrated on 2,880 impostor faces.  Faces under 40 px are refused, not guessed.  Wrong attendance records: 0%.</a:t>
+            </a:r>
+          </a:p>
+        </p:txBody>
+      </p:sp>
+      <p:sp>
+        <p:nvSpPr>
+          <p:cNvPr id="16" name="Chevron 15"/>
+          <p:cNvSpPr/>
+          <p:nvPr/>
+        </p:nvSpPr>
+        <p:spPr>
+          <a:xfrm>
+            <a:off x="3794760" y="5074920"/>
+            <a:ext cx="1371600" cy="1234440"/>
+          </a:xfrm>
+          <a:prstGeom prst="chevron">
+            <a:avLst/>
+          </a:prstGeom>
+          <a:solidFill>
+            <a:srgbClr val="4BACC6"/>
+          </a:solidFill>
+          <a:ln>
+            <a:noFill/>
+          </a:ln>
+          <a:effectLst/>
+        </p:spPr>
+        <p:style>
+          <a:lnRef idx="1">
+            <a:schemeClr val="accent1"/>
+          </a:lnRef>
+          <a:fillRef idx="3">
+            <a:schemeClr val="accent1"/>
+          </a:fillRef>
+          <a:effectRef idx="2">
+            <a:schemeClr val="accent1"/>
+          </a:effectRef>
+          <a:fontRef idx="minor">
+            <a:schemeClr val="lt1"/>
+          </a:fontRef>
+        </p:style>
+        <p:txBody>
+          <a:bodyPr rtlCol="0" anchor="ctr" wrap="square"/>
+          <a:lstStyle/>
+          <a:p>
+            <a:pPr algn="ctr"/>
+            <a:r>
+              <a:rPr sz="1300" b="1">
+                <a:solidFill>
+                  <a:srgbClr val="FFFFFF"/>
+                </a:solidFill>
+                <a:latin typeface="Calibri"/>
+              </a:rPr>
+              <a:t>Efficiency</a:t>
+            </a:r>
+          </a:p>
+        </p:txBody>
+      </p:sp>
+      <p:sp>
+        <p:nvSpPr>
+          <p:cNvPr id="17" name="Rounded Rectangle 16"/>
+          <p:cNvSpPr/>
+          <p:nvPr/>
+        </p:nvSpPr>
+        <p:spPr>
+          <a:xfrm>
+            <a:off x="5394960" y="5166359"/>
+            <a:ext cx="6309360" cy="1051560"/>
+          </a:xfrm>
+          <a:prstGeom prst="roundRect">
+            <a:avLst/>
+          </a:prstGeom>
+          <a:solidFill>
+            <a:srgbClr val="FFFFFF"/>
+          </a:solidFill>
+          <a:ln w="15875">
+            <a:solidFill>
+              <a:srgbClr val="4BACC6"/>
+            </a:solidFill>
+          </a:ln>
+          <a:effectLst/>
+        </p:spPr>
+        <p:style>
+          <a:lnRef idx="1">
+            <a:schemeClr val="accent1"/>
+          </a:lnRef>
+          <a:fillRef idx="3">
+            <a:schemeClr val="accent1"/>
+          </a:fillRef>
+          <a:effectRef idx="2">
+            <a:schemeClr val="accent1"/>
+          </a:effectRef>
+          <a:fontRef idx="minor">
+            <a:schemeClr val="lt1"/>
+          </a:fontRef>
+        </p:style>
+        <p:txBody>
+          <a:bodyPr rtlCol="0" anchor="ctr"/>
+          <a:lstStyle/>
+          <a:p/>
+        </p:txBody>
+      </p:sp>
+      <p:sp>
+        <p:nvSpPr>
+          <p:cNvPr id="18" name="TextBox 17"/>
+          <p:cNvSpPr txBox="1"/>
+          <p:nvPr/>
+        </p:nvSpPr>
+        <p:spPr>
+          <a:xfrm>
+            <a:off x="5532120" y="5276088"/>
+            <a:ext cx="6035040" cy="914400"/>
+          </a:xfrm>
+          <a:prstGeom prst="rect">
+            <a:avLst/>
+          </a:prstGeom>
+          <a:noFill/>
+        </p:spPr>
+        <p:txBody>
+          <a:bodyPr wrap="square" anchor="t">
+            <a:spAutoFit/>
+          </a:bodyPr>
+          <a:lstStyle/>
+          <a:p>
+            <a:pPr>
+              <a:spcAft>
+                <a:spcPts val="500"/>
+              </a:spcAft>
+            </a:pPr>
+            <a:r>
+              <a:rPr sz="1150" b="0" i="0">
+                <a:solidFill>
+                  <a:srgbClr val="1A1A1A"/>
+                </a:solidFill>
+                <a:latin typeface="Calibri"/>
+              </a:rPr>
+              <a:t>16 faces in one frame in 1.3 s on a laptop CPU.  Fully offline — no cloud, no GPU, no recurring cost.</a:t>
+            </a:r>
+          </a:p>
+        </p:txBody>
+      </p:sp>
+      <p:sp>
+        <p:nvSpPr>
+          <p:cNvPr id="19" name="Rectangle 18"/>
+          <p:cNvSpPr/>
+          <p:nvPr/>
+        </p:nvSpPr>
+        <p:spPr>
+          <a:xfrm>
+            <a:off x="0" y="6355080"/>
+            <a:ext cx="12191695" cy="502920"/>
+          </a:xfrm>
+          <a:prstGeom prst="rect">
+            <a:avLst/>
+          </a:prstGeom>
+          <a:solidFill>
+            <a:srgbClr val="1076BC"/>
+          </a:solidFill>
+          <a:ln>
+            <a:noFill/>
+          </a:ln>
+          <a:effectLst/>
+        </p:spPr>
+        <p:style>
+          <a:lnRef idx="1">
+            <a:schemeClr val="accent1"/>
+          </a:lnRef>
+          <a:fillRef idx="3">
+            <a:schemeClr val="accent1"/>
+          </a:fillRef>
+          <a:effectRef idx="2">
+            <a:schemeClr val="accent1"/>
+          </a:effectRef>
+          <a:fontRef idx="minor">
+            <a:schemeClr val="lt1"/>
+          </a:fontRef>
+        </p:style>
+        <p:txBody>
+          <a:bodyPr rtlCol="0" anchor="ctr"/>
+          <a:lstStyle/>
+          <a:p>
+            <a:pPr algn="ctr"/>
+          </a:p>
+        </p:txBody>
+      </p:sp>
+      <p:sp>
+        <p:nvSpPr>
+          <p:cNvPr id="20" name="TextBox 19"/>
+          <p:cNvSpPr txBox="1"/>
+          <p:nvPr/>
+        </p:nvSpPr>
+        <p:spPr>
+          <a:xfrm>
+            <a:off x="11247120" y="6419088"/>
+            <a:ext cx="777240" cy="365760"/>
+          </a:xfrm>
+          <a:prstGeom prst="rect">
+            <a:avLst/>
+          </a:prstGeom>
+          <a:noFill/>
+        </p:spPr>
+        <p:txBody>
+          <a:bodyPr wrap="none">
+            <a:spAutoFit/>
+          </a:bodyPr>
+          <a:lstStyle/>
+          <a:p>
+            <a:pPr algn="r"/>
+            <a:r>
+              <a:rPr sz="1200" b="1">
+                <a:solidFill>
+                  <a:srgbClr val="FFFFFF"/>
+                </a:solidFill>
+                <a:latin typeface="Calibri"/>
+              </a:rPr>
+              <a:t>8</a:t>
             </a:r>
           </a:p>
         </p:txBody>

--- a/Server/results/PresenceAI_Presentation.pptx
+++ b/Server/results/PresenceAI_Presentation.pptx
@@ -7937,7 +7937,7 @@
                 </a:solidFill>
                 <a:latin typeface="Calibri"/>
               </a:rPr>
-              <a:t>Classifier</a:t>
+              <a:t>Matching</a:t>
             </a:r>
           </a:p>
         </p:txBody>
@@ -8020,7 +8020,7 @@
                 </a:solidFill>
                 <a:latin typeface="Calibri"/>
               </a:rPr>
-              <a:t>Linear SVM + cosine-to-centroid  (scikit-learn)</a:t>
+              <a:t>Nearest-centroid, cosine similarity  (no classifier)</a:t>
             </a:r>
           </a:p>
         </p:txBody>
